--- a/workshop-7-final_project/docs/assestment/presentation/Laser Gimbal with Camera Tracking on ESP32-S3.pptx
+++ b/workshop-7-final_project/docs/assestment/presentation/Laser Gimbal with Camera Tracking on ESP32-S3.pptx
@@ -4406,7 +4406,7 @@
                 <a:cs typeface="Nunito Sans"/>
                 <a:sym typeface="Nunito Sans"/>
               </a:rPr>
-              <a:t>Лазерний гімбал</a:t>
+              <a:t>ПК-керований лазерний гімбал</a:t>
             </a:r>
             <a:endParaRPr b="0" i="0" sz="3600" u="none" cap="none" strike="noStrike">
               <a:solidFill>
@@ -5343,8 +5343,8 @@
         </p:nvSpPr>
         <p:spPr>
           <a:xfrm>
-            <a:off x="812800" y="1330920"/>
-            <a:ext cx="10883392" cy="332680"/>
+            <a:off x="812800" y="1280120"/>
+            <a:ext cx="10883392" cy="360660"/>
           </a:xfrm>
           <a:prstGeom prst="rect">
             <a:avLst/>
@@ -5378,7 +5378,7 @@
               <a:buNone/>
             </a:pPr>
             <a:r>
-              <a:rPr b="1" i="0" lang="en-US" sz="2200" u="none" cap="none" strike="noStrike">
+              <a:rPr b="1" i="0" lang="en-US" sz="2400" u="none" cap="none" strike="noStrike">
                 <a:solidFill>
                   <a:srgbClr val="232323"/>
                 </a:solidFill>
@@ -5410,8 +5410,8 @@
           <p:nvPr/>
         </p:nvGraphicFramePr>
         <p:xfrm>
-          <a:off x="812800" y="1816001"/>
-          <a:ext cx="10566400" cy="4168641"/>
+          <a:off x="812800" y="1727081"/>
+          <a:ext cx="10566400" cy="4268120"/>
         </p:xfrm>
         <a:graphic>
           <a:graphicData uri="http://schemas.openxmlformats.org/drawingml/2006/table">
@@ -5420,18 +5420,19 @@
                 <a:tableStyleId>{5940675A-B579-460E-94D1-54222C63F5DA}</a:tableStyleId>
               </a:tblPr>
               <a:tblGrid>
-                <a:gridCol w="3600000"/>
-                <a:gridCol w="5300000"/>
-                <a:gridCol w="1666400"/>
+                <a:gridCol w="3200000"/>
+                <a:gridCol w="3400000"/>
+                <a:gridCol w="2400000"/>
+                <a:gridCol w="1566400"/>
               </a:tblGrid>
-              <a:tr h="298641">
+              <a:tr h="260000">
                 <a:tc>
                   <a:txBody>
                     <a:bodyPr wrap="square"/>
                     <a:lstStyle/>
                     <a:p>
                       <a:r>
-                        <a:rPr sz="1100" b="1">
+                        <a:rPr sz="1050" b="1">
                           <a:solidFill>
                             <a:srgbClr val="232323"/>
                           </a:solidFill>
@@ -5442,302 +5443,23 @@
                     </a:p>
                   </a:txBody>
                   <a:tcPr marL="127000" marR="91440" marT="45720" marB="45720" anchor="ctr">
+                    <a:lnL w="12700" cap="flat" cmpd="sng" algn="ctr">
+                      <a:noFill/>
+                    </a:lnL>
+                    <a:lnR w="12700" cap="flat" cmpd="sng" algn="ctr">
+                      <a:noFill/>
+                    </a:lnR>
+                    <a:lnT w="12700" cap="flat" cmpd="sng" algn="ctr">
+                      <a:noFill/>
+                    </a:lnT>
+                    <a:lnB w="6350" cap="flat" cmpd="sng" algn="ctr">
+                      <a:solidFill>
+                        <a:srgbClr val="D9D9D9"/>
+                      </a:solidFill>
+                      <a:prstDash val="solid"/>
+                    </a:lnB>
                     <a:solidFill>
                       <a:srgbClr val="C5D6E9"/>
-                    </a:solidFill>
-                  </a:tcPr>
-                </a:tc>
-                <a:tc>
-                  <a:txBody>
-                    <a:bodyPr wrap="square"/>
-                    <a:lstStyle/>
-                    <a:p>
-                      <a:r>
-                        <a:rPr sz="1100" b="1">
-                          <a:solidFill>
-                            <a:srgbClr val="232323"/>
-                          </a:solidFill>
-                          <a:latin typeface="Nunito Sans"/>
-                        </a:rPr>
-                        <a:t>Що ми зробили</a:t>
-                      </a:r>
-                    </a:p>
-                  </a:txBody>
-                  <a:tcPr marL="0" marR="91440" marT="45720" marB="45720" anchor="ctr">
-                    <a:solidFill>
-                      <a:srgbClr val="C5D6E9"/>
-                    </a:solidFill>
-                  </a:tcPr>
-                </a:tc>
-                <a:tc>
-                  <a:txBody>
-                    <a:bodyPr wrap="square"/>
-                    <a:lstStyle/>
-                    <a:p>
-                      <a:r>
-                        <a:rPr sz="1100" b="1">
-                          <a:solidFill>
-                            <a:srgbClr val="232323"/>
-                          </a:solidFill>
-                          <a:latin typeface="Nunito Sans"/>
-                        </a:rPr>
-                        <a:t>Статус</a:t>
-                      </a:r>
-                    </a:p>
-                  </a:txBody>
-                  <a:tcPr marL="0" marR="91440" marT="45720" marB="45720" anchor="ctr">
-                    <a:solidFill>
-                      <a:srgbClr val="C5D6E9"/>
-                    </a:solidFill>
-                  </a:tcPr>
-                </a:tc>
-              </a:tr>
-              <a:tr h="430000">
-                <a:tc>
-                  <a:txBody>
-                    <a:bodyPr wrap="square"/>
-                    <a:lstStyle/>
-                    <a:p>
-                      <a:r>
-                        <a:rPr sz="1100" b="1">
-                          <a:solidFill>
-                            <a:srgbClr val="232323"/>
-                          </a:solidFill>
-                          <a:latin typeface="Nunito Sans"/>
-                        </a:rPr>
-                        <a:t>Логи й дані ділили UART0; рядок з «F» міг випадково спричинити постріл</a:t>
-                      </a:r>
-                    </a:p>
-                  </a:txBody>
-                  <a:tcPr marL="127000" marR="91440" marT="45720" marB="45720" anchor="ctr">
-                    <a:solidFill>
-                      <a:srgbClr val="FFFFFF"/>
-                    </a:solidFill>
-                  </a:tcPr>
-                </a:tc>
-                <a:tc>
-                  <a:txBody>
-                    <a:bodyPr wrap="square"/>
-                    <a:lstStyle/>
-                    <a:p>
-                      <a:r>
-                        <a:rPr sz="1100" b="0">
-                          <a:solidFill>
-                            <a:srgbClr val="414C58"/>
-                          </a:solidFill>
-                          <a:latin typeface="Nunito Sans"/>
-                        </a:rPr>
-                        <a:t>Дані перенесено на UART1; UART0 - лише консоль, команда пострілу захищена.</a:t>
-                      </a:r>
-                    </a:p>
-                  </a:txBody>
-                  <a:tcPr marL="0" marR="91440" marT="45720" marB="45720" anchor="ctr">
-                    <a:solidFill>
-                      <a:srgbClr val="FFFFFF"/>
-                    </a:solidFill>
-                  </a:tcPr>
-                </a:tc>
-                <a:tc>
-                  <a:txBody>
-                    <a:bodyPr wrap="square"/>
-                    <a:lstStyle/>
-                    <a:p>
-                      <a:r>
-                        <a:rPr sz="1050" b="0">
-                          <a:solidFill>
-                            <a:srgbClr val="414C58"/>
-                          </a:solidFill>
-                          <a:latin typeface="Nunito Sans"/>
-                        </a:rPr>
-                        <a:t>Виправлено</a:t>
-                      </a:r>
-                    </a:p>
-                  </a:txBody>
-                  <a:tcPr marL="0" marR="91440" marT="45720" marB="45720" anchor="ctr">
-                    <a:solidFill>
-                      <a:srgbClr val="FFFFFF"/>
-                    </a:solidFill>
-                  </a:tcPr>
-                </a:tc>
-              </a:tr>
-              <a:tr h="430000">
-                <a:tc>
-                  <a:txBody>
-                    <a:bodyPr wrap="square"/>
-                    <a:lstStyle/>
-                    <a:p>
-                      <a:r>
-                        <a:rPr sz="1100" b="1">
-                          <a:solidFill>
-                            <a:srgbClr val="232323"/>
-                          </a:solidFill>
-                          <a:latin typeface="Nunito Sans"/>
-                        </a:rPr>
-                        <a:t>Реле лазера вмикалося при подачі живлення (пін у стані float)</a:t>
-                      </a:r>
-                    </a:p>
-                  </a:txBody>
-                  <a:tcPr marL="127000" marR="91440" marT="45720" marB="45720" anchor="ctr">
-                    <a:solidFill>
-                      <a:srgbClr val="ECE7E2"/>
-                    </a:solidFill>
-                  </a:tcPr>
-                </a:tc>
-                <a:tc>
-                  <a:txBody>
-                    <a:bodyPr wrap="square"/>
-                    <a:lstStyle/>
-                    <a:p>
-                      <a:r>
-                        <a:rPr sz="1100" b="0">
-                          <a:solidFill>
-                            <a:srgbClr val="414C58"/>
-                          </a:solidFill>
-                          <a:latin typeface="Nunito Sans"/>
-                        </a:rPr>
-                        <a:t>Рівень встановлено на виводі, додано pull-up.</a:t>
-                      </a:r>
-                    </a:p>
-                  </a:txBody>
-                  <a:tcPr marL="0" marR="91440" marT="45720" marB="45720" anchor="ctr">
-                    <a:solidFill>
-                      <a:srgbClr val="ECE7E2"/>
-                    </a:solidFill>
-                  </a:tcPr>
-                </a:tc>
-                <a:tc>
-                  <a:txBody>
-                    <a:bodyPr wrap="square"/>
-                    <a:lstStyle/>
-                    <a:p>
-                      <a:r>
-                        <a:rPr sz="1050" b="0">
-                          <a:solidFill>
-                            <a:srgbClr val="414C58"/>
-                          </a:solidFill>
-                          <a:latin typeface="Nunito Sans"/>
-                        </a:rPr>
-                        <a:t>Виправлено</a:t>
-                      </a:r>
-                    </a:p>
-                  </a:txBody>
-                  <a:tcPr marL="0" marR="91440" marT="45720" marB="45720" anchor="ctr">
-                    <a:solidFill>
-                      <a:srgbClr val="ECE7E2"/>
-                    </a:solidFill>
-                  </a:tcPr>
-                </a:tc>
-              </a:tr>
-              <a:tr h="430000">
-                <a:tc>
-                  <a:txBody>
-                    <a:bodyPr wrap="square"/>
-                    <a:lstStyle/>
-                    <a:p>
-                      <a:r>
-                        <a:rPr sz="1100" b="1">
-                          <a:solidFill>
-                            <a:srgbClr val="232323"/>
-                          </a:solidFill>
-                          <a:latin typeface="Nunito Sans"/>
-                        </a:rPr>
-                        <a:t>Запис на SD-картку може зависнути на 100-250 мс</a:t>
-                      </a:r>
-                    </a:p>
-                  </a:txBody>
-                  <a:tcPr marL="127000" marR="91440" marT="45720" marB="45720" anchor="ctr">
-                    <a:solidFill>
-                      <a:srgbClr val="FFFFFF"/>
-                    </a:solidFill>
-                  </a:tcPr>
-                </a:tc>
-                <a:tc>
-                  <a:txBody>
-                    <a:bodyPr wrap="square"/>
-                    <a:lstStyle/>
-                    <a:p>
-                      <a:r>
-                        <a:rPr sz="1100" b="0">
-                          <a:solidFill>
-                            <a:srgbClr val="414C58"/>
-                          </a:solidFill>
-                          <a:latin typeface="Nunito Sans"/>
-                        </a:rPr>
-                        <a:t>Окрема задача logger з низьким пріоритетом; черга відкидає найстаріший запис.</a:t>
-                      </a:r>
-                    </a:p>
-                  </a:txBody>
-                  <a:tcPr marL="0" marR="91440" marT="45720" marB="45720" anchor="ctr">
-                    <a:solidFill>
-                      <a:srgbClr val="FFFFFF"/>
-                    </a:solidFill>
-                  </a:tcPr>
-                </a:tc>
-                <a:tc>
-                  <a:txBody>
-                    <a:bodyPr wrap="square"/>
-                    <a:lstStyle/>
-                    <a:p>
-                      <a:r>
-                        <a:rPr sz="1050" b="0">
-                          <a:solidFill>
-                            <a:srgbClr val="414C58"/>
-                          </a:solidFill>
-                          <a:latin typeface="Nunito Sans"/>
-                        </a:rPr>
-                        <a:t>Виправлено</a:t>
-                      </a:r>
-                    </a:p>
-                  </a:txBody>
-                  <a:tcPr marL="0" marR="91440" marT="45720" marB="45720" anchor="ctr">
-                    <a:solidFill>
-                      <a:srgbClr val="FFFFFF"/>
-                    </a:solidFill>
-                  </a:tcPr>
-                </a:tc>
-              </a:tr>
-              <a:tr h="430000">
-                <a:tc>
-                  <a:txBody>
-                    <a:bodyPr wrap="square"/>
-                    <a:lstStyle/>
-                    <a:p>
-                      <a:r>
-                        <a:rPr sz="1100" b="1">
-                          <a:solidFill>
-                            <a:srgbClr val="232323"/>
-                          </a:solidFill>
-                          <a:latin typeface="Nunito Sans"/>
-                        </a:rPr>
-                        <a:t>Затримка камери обмежує підсилення PID</a:t>
-                      </a:r>
-                    </a:p>
-                  </a:txBody>
-                  <a:tcPr marL="127000" marR="91440" marT="45720" marB="45720" anchor="ctr">
-                    <a:solidFill>
-                      <a:srgbClr val="ECE7E2"/>
-                    </a:solidFill>
-                  </a:tcPr>
-                </a:tc>
-                <a:tc>
-                  <a:txBody>
-                    <a:bodyPr wrap="square"/>
-                    <a:lstStyle/>
-                    <a:p>
-                      <a:r>
-                        <a:rPr sz="1100" b="1">
-                          <a:solidFill>
-                            <a:srgbClr val="232323"/>
-                          </a:solidFill>
-                          <a:latin typeface="Nunito Sans"/>
-                        </a:rPr>
-                        <a:t>TODO: причина й фікс.</a:t>
-                      </a:r>
-                    </a:p>
-                  </a:txBody>
-                  <a:tcPr marL="0" marR="91440" marT="45720" marB="45720" anchor="ctr">
-                    <a:solidFill>
-                      <a:srgbClr val="ECE7E2"/>
                     </a:solidFill>
                   </a:tcPr>
                 </a:tc>
@@ -5753,195 +5475,28 @@
                           </a:solidFill>
                           <a:latin typeface="Nunito Sans"/>
                         </a:rPr>
-                        <a:t>Відкрито</a:t>
+                        <a:t>Причини</a:t>
                       </a:r>
                     </a:p>
                   </a:txBody>
                   <a:tcPr marL="0" marR="91440" marT="45720" marB="45720" anchor="ctr">
+                    <a:lnL w="12700" cap="flat" cmpd="sng" algn="ctr">
+                      <a:noFill/>
+                    </a:lnL>
+                    <a:lnR w="12700" cap="flat" cmpd="sng" algn="ctr">
+                      <a:noFill/>
+                    </a:lnR>
+                    <a:lnT w="12700" cap="flat" cmpd="sng" algn="ctr">
+                      <a:noFill/>
+                    </a:lnT>
+                    <a:lnB w="6350" cap="flat" cmpd="sng" algn="ctr">
+                      <a:solidFill>
+                        <a:srgbClr val="D9D9D9"/>
+                      </a:solidFill>
+                      <a:prstDash val="solid"/>
+                    </a:lnB>
                     <a:solidFill>
-                      <a:srgbClr val="ECE7E2"/>
-                    </a:solidFill>
-                  </a:tcPr>
-                </a:tc>
-              </a:tr>
-              <a:tr h="430000">
-                <a:tc>
-                  <a:txBody>
-                    <a:bodyPr wrap="square"/>
-                    <a:lstStyle/>
-                    <a:p>
-                      <a:r>
-                        <a:rPr sz="1100" b="1">
-                          <a:solidFill>
-                            <a:srgbClr val="232323"/>
-                          </a:solidFill>
-                          <a:latin typeface="Nunito Sans"/>
-                        </a:rPr>
-                        <a:t>Мертва зона й люфт сервоприводів</a:t>
-                      </a:r>
-                    </a:p>
-                  </a:txBody>
-                  <a:tcPr marL="127000" marR="91440" marT="45720" marB="45720" anchor="ctr">
-                    <a:solidFill>
-                      <a:srgbClr val="FFFFFF"/>
-                    </a:solidFill>
-                  </a:tcPr>
-                </a:tc>
-                <a:tc>
-                  <a:txBody>
-                    <a:bodyPr wrap="square"/>
-                    <a:lstStyle/>
-                    <a:p>
-                      <a:r>
-                        <a:rPr sz="1100" b="0">
-                          <a:solidFill>
-                            <a:srgbClr val="414C58"/>
-                          </a:solidFill>
-                          <a:latin typeface="Nunito Sans"/>
-                        </a:rPr>
-                        <a:t>Компенсує зворотний зв'язок з камери.</a:t>
-                      </a:r>
-                    </a:p>
-                  </a:txBody>
-                  <a:tcPr marL="0" marR="91440" marT="45720" marB="45720" anchor="ctr">
-                    <a:solidFill>
-                      <a:srgbClr val="FFFFFF"/>
-                    </a:solidFill>
-                  </a:tcPr>
-                </a:tc>
-                <a:tc>
-                  <a:txBody>
-                    <a:bodyPr wrap="square"/>
-                    <a:lstStyle/>
-                    <a:p>
-                      <a:r>
-                        <a:rPr sz="1050" b="0">
-                          <a:solidFill>
-                            <a:srgbClr val="414C58"/>
-                          </a:solidFill>
-                          <a:latin typeface="Nunito Sans"/>
-                        </a:rPr>
-                        <a:t>Виправлено</a:t>
-                      </a:r>
-                    </a:p>
-                  </a:txBody>
-                  <a:tcPr marL="0" marR="91440" marT="45720" marB="45720" anchor="ctr">
-                    <a:solidFill>
-                      <a:srgbClr val="FFFFFF"/>
-                    </a:solidFill>
-                  </a:tcPr>
-                </a:tc>
-              </a:tr>
-              <a:tr h="430000">
-                <a:tc>
-                  <a:txBody>
-                    <a:bodyPr wrap="square"/>
-                    <a:lstStyle/>
-                    <a:p>
-                      <a:r>
-                        <a:rPr sz="1100" b="1">
-                          <a:solidFill>
-                            <a:srgbClr val="232323"/>
-                          </a:solidFill>
-                          <a:latin typeface="Nunito Sans"/>
-                        </a:rPr>
-                        <a:t>Зависання каналу зв'язку через однопотоковий UI-застосунок</a:t>
-                      </a:r>
-                    </a:p>
-                  </a:txBody>
-                  <a:tcPr marL="127000" marR="91440" marT="45720" marB="45720" anchor="ctr">
-                    <a:solidFill>
-                      <a:srgbClr val="ECE7E2"/>
-                    </a:solidFill>
-                  </a:tcPr>
-                </a:tc>
-                <a:tc>
-                  <a:txBody>
-                    <a:bodyPr wrap="square"/>
-                    <a:lstStyle/>
-                    <a:p>
-                      <a:r>
-                        <a:rPr sz="1100" b="0">
-                          <a:solidFill>
-                            <a:srgbClr val="414C58"/>
-                          </a:solidFill>
-                          <a:latin typeface="Nunito Sans"/>
-                        </a:rPr>
-                        <a:t>Обмін даними з ESP перенесено у фоновий потік.</a:t>
-                      </a:r>
-                    </a:p>
-                  </a:txBody>
-                  <a:tcPr marL="0" marR="91440" marT="45720" marB="45720" anchor="ctr">
-                    <a:solidFill>
-                      <a:srgbClr val="ECE7E2"/>
-                    </a:solidFill>
-                  </a:tcPr>
-                </a:tc>
-                <a:tc>
-                  <a:txBody>
-                    <a:bodyPr wrap="square"/>
-                    <a:lstStyle/>
-                    <a:p>
-                      <a:r>
-                        <a:rPr sz="1050" b="0">
-                          <a:solidFill>
-                            <a:srgbClr val="414C58"/>
-                          </a:solidFill>
-                          <a:latin typeface="Nunito Sans"/>
-                        </a:rPr>
-                        <a:t>Виправлено</a:t>
-                      </a:r>
-                    </a:p>
-                  </a:txBody>
-                  <a:tcPr marL="0" marR="91440" marT="45720" marB="45720" anchor="ctr">
-                    <a:solidFill>
-                      <a:srgbClr val="ECE7E2"/>
-                    </a:solidFill>
-                  </a:tcPr>
-                </a:tc>
-              </a:tr>
-              <a:tr h="430000">
-                <a:tc>
-                  <a:txBody>
-                    <a:bodyPr wrap="square"/>
-                    <a:lstStyle/>
-                    <a:p>
-                      <a:r>
-                        <a:rPr sz="1100" b="1">
-                          <a:solidFill>
-                            <a:srgbClr val="232323"/>
-                          </a:solidFill>
-                          <a:latin typeface="Nunito Sans"/>
-                        </a:rPr>
-                        <a:t>Нелінійна залежність між позиціями на стіні та кутами серво</a:t>
-                      </a:r>
-                    </a:p>
-                  </a:txBody>
-                  <a:tcPr marL="127000" marR="91440" marT="45720" marB="45720" anchor="ctr">
-                    <a:solidFill>
-                      <a:srgbClr val="FFFFFF"/>
-                    </a:solidFill>
-                  </a:tcPr>
-                </a:tc>
-                <a:tc>
-                  <a:txBody>
-                    <a:bodyPr wrap="square"/>
-                    <a:lstStyle/>
-                    <a:p>
-                      <a:r>
-                        <a:rPr sz="1100" b="1">
-                          <a:solidFill>
-                            <a:srgbClr val="232323"/>
-                          </a:solidFill>
-                          <a:latin typeface="Nunito Sans"/>
-                        </a:rPr>
-                        <a:t>TODO: причина й фікс.</a:t>
-                      </a:r>
-                    </a:p>
-                  </a:txBody>
-                  <a:tcPr marL="0" marR="91440" marT="45720" marB="45720" anchor="ctr">
-                    <a:solidFill>
-                      <a:srgbClr val="FFFFFF"/>
+                      <a:srgbClr val="C5D6E9"/>
                     </a:solidFill>
                   </a:tcPr>
                 </a:tc>
@@ -5957,59 +5512,28 @@
                           </a:solidFill>
                           <a:latin typeface="Nunito Sans"/>
                         </a:rPr>
-                        <a:t>Відкрито</a:t>
+                        <a:t>Що ми зробили</a:t>
                       </a:r>
                     </a:p>
                   </a:txBody>
                   <a:tcPr marL="0" marR="91440" marT="45720" marB="45720" anchor="ctr">
+                    <a:lnL w="12700" cap="flat" cmpd="sng" algn="ctr">
+                      <a:noFill/>
+                    </a:lnL>
+                    <a:lnR w="12700" cap="flat" cmpd="sng" algn="ctr">
+                      <a:noFill/>
+                    </a:lnR>
+                    <a:lnT w="12700" cap="flat" cmpd="sng" algn="ctr">
+                      <a:noFill/>
+                    </a:lnT>
+                    <a:lnB w="6350" cap="flat" cmpd="sng" algn="ctr">
+                      <a:solidFill>
+                        <a:srgbClr val="D9D9D9"/>
+                      </a:solidFill>
+                      <a:prstDash val="solid"/>
+                    </a:lnB>
                     <a:solidFill>
-                      <a:srgbClr val="FFFFFF"/>
-                    </a:solidFill>
-                  </a:tcPr>
-                </a:tc>
-              </a:tr>
-              <a:tr h="430000">
-                <a:tc>
-                  <a:txBody>
-                    <a:bodyPr wrap="square"/>
-                    <a:lstStyle/>
-                    <a:p>
-                      <a:r>
-                        <a:rPr sz="1100" b="1">
-                          <a:solidFill>
-                            <a:srgbClr val="232323"/>
-                          </a:solidFill>
-                          <a:latin typeface="Nunito Sans"/>
-                        </a:rPr>
-                        <a:t>Лазер виходить за межі зони видимості камери</a:t>
-                      </a:r>
-                    </a:p>
-                  </a:txBody>
-                  <a:tcPr marL="127000" marR="91440" marT="45720" marB="45720" anchor="ctr">
-                    <a:solidFill>
-                      <a:srgbClr val="ECE7E2"/>
-                    </a:solidFill>
-                  </a:tcPr>
-                </a:tc>
-                <a:tc>
-                  <a:txBody>
-                    <a:bodyPr wrap="square"/>
-                    <a:lstStyle/>
-                    <a:p>
-                      <a:r>
-                        <a:rPr sz="1100" b="0">
-                          <a:solidFill>
-                            <a:srgbClr val="414C58"/>
-                          </a:solidFill>
-                          <a:latin typeface="Nunito Sans"/>
-                        </a:rPr>
-                        <a:t>recenter.py: якщо точку не видно протягом --recenter-ms (типово 1500 мс), гімбал рухається P-кроками до центру зони; стоп при повторному виявленні.</a:t>
-                      </a:r>
-                    </a:p>
-                  </a:txBody>
-                  <a:tcPr marL="0" marR="91440" marT="45720" marB="45720" anchor="ctr">
-                    <a:solidFill>
-                      <a:srgbClr val="ECE7E2"/>
+                      <a:srgbClr val="C5D6E9"/>
                     </a:solidFill>
                   </a:tcPr>
                 </a:tc>
@@ -6025,35 +5549,65 @@
                           </a:solidFill>
                           <a:latin typeface="Nunito Sans"/>
                         </a:rPr>
-                        <a:t>Частково</a:t>
+                        <a:t>Статус</a:t>
                       </a:r>
                     </a:p>
                   </a:txBody>
                   <a:tcPr marL="0" marR="91440" marT="45720" marB="45720" anchor="ctr">
+                    <a:lnL w="12700" cap="flat" cmpd="sng" algn="ctr">
+                      <a:noFill/>
+                    </a:lnL>
+                    <a:lnR w="12700" cap="flat" cmpd="sng" algn="ctr">
+                      <a:noFill/>
+                    </a:lnR>
+                    <a:lnT w="12700" cap="flat" cmpd="sng" algn="ctr">
+                      <a:noFill/>
+                    </a:lnT>
+                    <a:lnB w="6350" cap="flat" cmpd="sng" algn="ctr">
+                      <a:solidFill>
+                        <a:srgbClr val="D9D9D9"/>
+                      </a:solidFill>
+                      <a:prstDash val="solid"/>
+                    </a:lnB>
                     <a:solidFill>
-                      <a:srgbClr val="ECE7E2"/>
+                      <a:srgbClr val="C5D6E9"/>
                     </a:solidFill>
                   </a:tcPr>
                 </a:tc>
               </a:tr>
-              <a:tr h="430000">
+              <a:tr h="525780">
                 <a:tc>
                   <a:txBody>
                     <a:bodyPr wrap="square"/>
                     <a:lstStyle/>
                     <a:p>
                       <a:r>
-                        <a:rPr sz="1100" b="1">
+                        <a:rPr sz="950" b="1">
                           <a:solidFill>
                             <a:srgbClr val="232323"/>
                           </a:solidFill>
                           <a:latin typeface="Nunito Sans"/>
                         </a:rPr>
-                        <a:t>Автофокус камери знижує стабільність детекції</a:t>
+                        <a:t>Логи й дані ділили UART0; рядок з «F» міг випадково спричинити постріл</a:t>
                       </a:r>
                     </a:p>
                   </a:txBody>
                   <a:tcPr marL="127000" marR="91440" marT="45720" marB="45720" anchor="ctr">
+                    <a:lnL w="12700" cap="flat" cmpd="sng" algn="ctr">
+                      <a:noFill/>
+                    </a:lnL>
+                    <a:lnR w="12700" cap="flat" cmpd="sng" algn="ctr">
+                      <a:noFill/>
+                    </a:lnR>
+                    <a:lnT w="12700" cap="flat" cmpd="sng" algn="ctr">
+                      <a:noFill/>
+                    </a:lnT>
+                    <a:lnB w="6350" cap="flat" cmpd="sng" algn="ctr">
+                      <a:solidFill>
+                        <a:srgbClr val="D9D9D9"/>
+                      </a:solidFill>
+                      <a:prstDash val="solid"/>
+                    </a:lnB>
                     <a:solidFill>
                       <a:srgbClr val="FFFFFF"/>
                     </a:solidFill>
@@ -6065,17 +5619,32 @@
                     <a:lstStyle/>
                     <a:p>
                       <a:r>
-                        <a:rPr sz="1100" b="0">
+                        <a:rPr sz="950" b="0">
                           <a:solidFill>
                             <a:srgbClr val="414C58"/>
                           </a:solidFill>
                           <a:latin typeface="Nunito Sans"/>
                         </a:rPr>
-                        <a:t>Автофокус вимкнено, фіксована позиція лінзи (--focus=130); live-підбір у speed.py.</a:t>
+                        <a:t>Спільний UART0 для логів і команд керування, без ізоляції небезпечної команди</a:t>
                       </a:r>
                     </a:p>
                   </a:txBody>
                   <a:tcPr marL="0" marR="91440" marT="45720" marB="45720" anchor="ctr">
+                    <a:lnL w="12700" cap="flat" cmpd="sng" algn="ctr">
+                      <a:noFill/>
+                    </a:lnL>
+                    <a:lnR w="12700" cap="flat" cmpd="sng" algn="ctr">
+                      <a:noFill/>
+                    </a:lnR>
+                    <a:lnT w="12700" cap="flat" cmpd="sng" algn="ctr">
+                      <a:noFill/>
+                    </a:lnT>
+                    <a:lnB w="6350" cap="flat" cmpd="sng" algn="ctr">
+                      <a:solidFill>
+                        <a:srgbClr val="D9D9D9"/>
+                      </a:solidFill>
+                      <a:prstDash val="solid"/>
+                    </a:lnB>
                     <a:solidFill>
                       <a:srgbClr val="FFFFFF"/>
                     </a:solidFill>
@@ -6087,7 +5656,1094 @@
                     <a:lstStyle/>
                     <a:p>
                       <a:r>
-                        <a:rPr sz="1050" b="1">
+                        <a:rPr sz="950" b="0">
+                          <a:solidFill>
+                            <a:srgbClr val="414C58"/>
+                          </a:solidFill>
+                          <a:latin typeface="Nunito Sans"/>
+                        </a:rPr>
+                        <a:t>Дані перенесено на UART1; UART0 - лише консоль, команда пострілу захищена.</a:t>
+                      </a:r>
+                    </a:p>
+                  </a:txBody>
+                  <a:tcPr marL="0" marR="91440" marT="45720" marB="45720" anchor="ctr">
+                    <a:lnL w="12700" cap="flat" cmpd="sng" algn="ctr">
+                      <a:noFill/>
+                    </a:lnL>
+                    <a:lnR w="12700" cap="flat" cmpd="sng" algn="ctr">
+                      <a:noFill/>
+                    </a:lnR>
+                    <a:lnT w="12700" cap="flat" cmpd="sng" algn="ctr">
+                      <a:noFill/>
+                    </a:lnT>
+                    <a:lnB w="6350" cap="flat" cmpd="sng" algn="ctr">
+                      <a:solidFill>
+                        <a:srgbClr val="D9D9D9"/>
+                      </a:solidFill>
+                      <a:prstDash val="solid"/>
+                    </a:lnB>
+                    <a:solidFill>
+                      <a:srgbClr val="FFFFFF"/>
+                    </a:solidFill>
+                  </a:tcPr>
+                </a:tc>
+                <a:tc>
+                  <a:txBody>
+                    <a:bodyPr wrap="square"/>
+                    <a:lstStyle/>
+                    <a:p>
+                      <a:r>
+                        <a:rPr sz="1000" b="0">
+                          <a:solidFill>
+                            <a:srgbClr val="414C58"/>
+                          </a:solidFill>
+                          <a:latin typeface="Nunito Sans"/>
+                        </a:rPr>
+                        <a:t>Виправлено</a:t>
+                      </a:r>
+                    </a:p>
+                  </a:txBody>
+                  <a:tcPr marL="0" marR="91440" marT="45720" marB="45720" anchor="ctr">
+                    <a:lnL w="12700" cap="flat" cmpd="sng" algn="ctr">
+                      <a:noFill/>
+                    </a:lnL>
+                    <a:lnR w="12700" cap="flat" cmpd="sng" algn="ctr">
+                      <a:noFill/>
+                    </a:lnR>
+                    <a:lnT w="12700" cap="flat" cmpd="sng" algn="ctr">
+                      <a:noFill/>
+                    </a:lnT>
+                    <a:lnB w="6350" cap="flat" cmpd="sng" algn="ctr">
+                      <a:solidFill>
+                        <a:srgbClr val="D9D9D9"/>
+                      </a:solidFill>
+                      <a:prstDash val="solid"/>
+                    </a:lnB>
+                    <a:solidFill>
+                      <a:srgbClr val="FFFFFF"/>
+                    </a:solidFill>
+                  </a:tcPr>
+                </a:tc>
+              </a:tr>
+              <a:tr h="381000">
+                <a:tc>
+                  <a:txBody>
+                    <a:bodyPr wrap="square"/>
+                    <a:lstStyle/>
+                    <a:p>
+                      <a:r>
+                        <a:rPr sz="950" b="1">
+                          <a:solidFill>
+                            <a:srgbClr val="232323"/>
+                          </a:solidFill>
+                          <a:latin typeface="Nunito Sans"/>
+                        </a:rPr>
+                        <a:t>Реле лазера вмикалося при подачі живлення (пін у стані float)</a:t>
+                      </a:r>
+                    </a:p>
+                  </a:txBody>
+                  <a:tcPr marL="127000" marR="91440" marT="45720" marB="45720" anchor="ctr">
+                    <a:lnL w="12700" cap="flat" cmpd="sng" algn="ctr">
+                      <a:noFill/>
+                    </a:lnL>
+                    <a:lnR w="12700" cap="flat" cmpd="sng" algn="ctr">
+                      <a:noFill/>
+                    </a:lnR>
+                    <a:lnT w="12700" cap="flat" cmpd="sng" algn="ctr">
+                      <a:noFill/>
+                    </a:lnT>
+                    <a:lnB w="6350" cap="flat" cmpd="sng" algn="ctr">
+                      <a:solidFill>
+                        <a:srgbClr val="D9D9D9"/>
+                      </a:solidFill>
+                      <a:prstDash val="solid"/>
+                    </a:lnB>
+                    <a:solidFill>
+                      <a:srgbClr val="ECE7E2"/>
+                    </a:solidFill>
+                  </a:tcPr>
+                </a:tc>
+                <a:tc>
+                  <a:txBody>
+                    <a:bodyPr wrap="square"/>
+                    <a:lstStyle/>
+                    <a:p>
+                      <a:r>
+                        <a:rPr sz="950" b="0">
+                          <a:solidFill>
+                            <a:srgbClr val="414C58"/>
+                          </a:solidFill>
+                          <a:latin typeface="Nunito Sans"/>
+                        </a:rPr>
+                        <a:t>GPIO реле floats до Relay::init() · вихід вмикається раніше рівня</a:t>
+                      </a:r>
+                    </a:p>
+                  </a:txBody>
+                  <a:tcPr marL="0" marR="91440" marT="45720" marB="45720" anchor="ctr">
+                    <a:lnL w="12700" cap="flat" cmpd="sng" algn="ctr">
+                      <a:noFill/>
+                    </a:lnL>
+                    <a:lnR w="12700" cap="flat" cmpd="sng" algn="ctr">
+                      <a:noFill/>
+                    </a:lnR>
+                    <a:lnT w="12700" cap="flat" cmpd="sng" algn="ctr">
+                      <a:noFill/>
+                    </a:lnT>
+                    <a:lnB w="6350" cap="flat" cmpd="sng" algn="ctr">
+                      <a:solidFill>
+                        <a:srgbClr val="D9D9D9"/>
+                      </a:solidFill>
+                      <a:prstDash val="solid"/>
+                    </a:lnB>
+                    <a:solidFill>
+                      <a:srgbClr val="ECE7E2"/>
+                    </a:solidFill>
+                  </a:tcPr>
+                </a:tc>
+                <a:tc>
+                  <a:txBody>
+                    <a:bodyPr wrap="square"/>
+                    <a:lstStyle/>
+                    <a:p>
+                      <a:r>
+                        <a:rPr sz="950" b="0">
+                          <a:solidFill>
+                            <a:srgbClr val="414C58"/>
+                          </a:solidFill>
+                          <a:latin typeface="Nunito Sans"/>
+                        </a:rPr>
+                        <a:t>Рівень встановлено на виводі, додано pull-up.</a:t>
+                      </a:r>
+                    </a:p>
+                  </a:txBody>
+                  <a:tcPr marL="0" marR="91440" marT="45720" marB="45720" anchor="ctr">
+                    <a:lnL w="12700" cap="flat" cmpd="sng" algn="ctr">
+                      <a:noFill/>
+                    </a:lnL>
+                    <a:lnR w="12700" cap="flat" cmpd="sng" algn="ctr">
+                      <a:noFill/>
+                    </a:lnR>
+                    <a:lnT w="12700" cap="flat" cmpd="sng" algn="ctr">
+                      <a:noFill/>
+                    </a:lnT>
+                    <a:lnB w="6350" cap="flat" cmpd="sng" algn="ctr">
+                      <a:solidFill>
+                        <a:srgbClr val="D9D9D9"/>
+                      </a:solidFill>
+                      <a:prstDash val="solid"/>
+                    </a:lnB>
+                    <a:solidFill>
+                      <a:srgbClr val="ECE7E2"/>
+                    </a:solidFill>
+                  </a:tcPr>
+                </a:tc>
+                <a:tc>
+                  <a:txBody>
+                    <a:bodyPr wrap="square"/>
+                    <a:lstStyle/>
+                    <a:p>
+                      <a:r>
+                        <a:rPr sz="1000" b="0">
+                          <a:solidFill>
+                            <a:srgbClr val="414C58"/>
+                          </a:solidFill>
+                          <a:latin typeface="Nunito Sans"/>
+                        </a:rPr>
+                        <a:t>Виправлено</a:t>
+                      </a:r>
+                    </a:p>
+                  </a:txBody>
+                  <a:tcPr marL="0" marR="91440" marT="45720" marB="45720" anchor="ctr">
+                    <a:lnL w="12700" cap="flat" cmpd="sng" algn="ctr">
+                      <a:noFill/>
+                    </a:lnL>
+                    <a:lnR w="12700" cap="flat" cmpd="sng" algn="ctr">
+                      <a:noFill/>
+                    </a:lnR>
+                    <a:lnT w="12700" cap="flat" cmpd="sng" algn="ctr">
+                      <a:noFill/>
+                    </a:lnT>
+                    <a:lnB w="6350" cap="flat" cmpd="sng" algn="ctr">
+                      <a:solidFill>
+                        <a:srgbClr val="D9D9D9"/>
+                      </a:solidFill>
+                      <a:prstDash val="solid"/>
+                    </a:lnB>
+                    <a:solidFill>
+                      <a:srgbClr val="ECE7E2"/>
+                    </a:solidFill>
+                  </a:tcPr>
+                </a:tc>
+              </a:tr>
+              <a:tr h="525780">
+                <a:tc>
+                  <a:txBody>
+                    <a:bodyPr wrap="square"/>
+                    <a:lstStyle/>
+                    <a:p>
+                      <a:r>
+                        <a:rPr sz="950" b="1">
+                          <a:solidFill>
+                            <a:srgbClr val="232323"/>
+                          </a:solidFill>
+                          <a:latin typeface="Nunito Sans"/>
+                        </a:rPr>
+                        <a:t>Запис на SD-картку може зависнути на 100-250 мс</a:t>
+                      </a:r>
+                    </a:p>
+                  </a:txBody>
+                  <a:tcPr marL="127000" marR="91440" marT="45720" marB="45720" anchor="ctr">
+                    <a:lnL w="12700" cap="flat" cmpd="sng" algn="ctr">
+                      <a:noFill/>
+                    </a:lnL>
+                    <a:lnR w="12700" cap="flat" cmpd="sng" algn="ctr">
+                      <a:noFill/>
+                    </a:lnR>
+                    <a:lnT w="12700" cap="flat" cmpd="sng" algn="ctr">
+                      <a:noFill/>
+                    </a:lnT>
+                    <a:lnB w="6350" cap="flat" cmpd="sng" algn="ctr">
+                      <a:solidFill>
+                        <a:srgbClr val="D9D9D9"/>
+                      </a:solidFill>
+                      <a:prstDash val="solid"/>
+                    </a:lnB>
+                    <a:solidFill>
+                      <a:srgbClr val="FFFFFF"/>
+                    </a:solidFill>
+                  </a:tcPr>
+                </a:tc>
+                <a:tc>
+                  <a:txBody>
+                    <a:bodyPr wrap="square"/>
+                    <a:lstStyle/>
+                    <a:p>
+                      <a:r>
+                        <a:rPr sz="950" b="0">
+                          <a:solidFill>
+                            <a:srgbClr val="414C58"/>
+                          </a:solidFill>
+                          <a:latin typeface="Nunito Sans"/>
+                        </a:rPr>
+                        <a:t>Внутрішнє wear-levelling картки під час запису блоку</a:t>
+                      </a:r>
+                    </a:p>
+                  </a:txBody>
+                  <a:tcPr marL="0" marR="91440" marT="45720" marB="45720" anchor="ctr">
+                    <a:lnL w="12700" cap="flat" cmpd="sng" algn="ctr">
+                      <a:noFill/>
+                    </a:lnL>
+                    <a:lnR w="12700" cap="flat" cmpd="sng" algn="ctr">
+                      <a:noFill/>
+                    </a:lnR>
+                    <a:lnT w="12700" cap="flat" cmpd="sng" algn="ctr">
+                      <a:noFill/>
+                    </a:lnT>
+                    <a:lnB w="6350" cap="flat" cmpd="sng" algn="ctr">
+                      <a:solidFill>
+                        <a:srgbClr val="D9D9D9"/>
+                      </a:solidFill>
+                      <a:prstDash val="solid"/>
+                    </a:lnB>
+                    <a:solidFill>
+                      <a:srgbClr val="FFFFFF"/>
+                    </a:solidFill>
+                  </a:tcPr>
+                </a:tc>
+                <a:tc>
+                  <a:txBody>
+                    <a:bodyPr wrap="square"/>
+                    <a:lstStyle/>
+                    <a:p>
+                      <a:r>
+                        <a:rPr sz="950" b="0">
+                          <a:solidFill>
+                            <a:srgbClr val="414C58"/>
+                          </a:solidFill>
+                          <a:latin typeface="Nunito Sans"/>
+                        </a:rPr>
+                        <a:t>Окрема задача logger з низьким пріоритетом; черга відкидає найстаріший запис.</a:t>
+                      </a:r>
+                    </a:p>
+                  </a:txBody>
+                  <a:tcPr marL="0" marR="91440" marT="45720" marB="45720" anchor="ctr">
+                    <a:lnL w="12700" cap="flat" cmpd="sng" algn="ctr">
+                      <a:noFill/>
+                    </a:lnL>
+                    <a:lnR w="12700" cap="flat" cmpd="sng" algn="ctr">
+                      <a:noFill/>
+                    </a:lnR>
+                    <a:lnT w="12700" cap="flat" cmpd="sng" algn="ctr">
+                      <a:noFill/>
+                    </a:lnT>
+                    <a:lnB w="6350" cap="flat" cmpd="sng" algn="ctr">
+                      <a:solidFill>
+                        <a:srgbClr val="D9D9D9"/>
+                      </a:solidFill>
+                      <a:prstDash val="solid"/>
+                    </a:lnB>
+                    <a:solidFill>
+                      <a:srgbClr val="FFFFFF"/>
+                    </a:solidFill>
+                  </a:tcPr>
+                </a:tc>
+                <a:tc>
+                  <a:txBody>
+                    <a:bodyPr wrap="square"/>
+                    <a:lstStyle/>
+                    <a:p>
+                      <a:r>
+                        <a:rPr sz="1000" b="0">
+                          <a:solidFill>
+                            <a:srgbClr val="414C58"/>
+                          </a:solidFill>
+                          <a:latin typeface="Nunito Sans"/>
+                        </a:rPr>
+                        <a:t>Виправлено</a:t>
+                      </a:r>
+                    </a:p>
+                  </a:txBody>
+                  <a:tcPr marL="0" marR="91440" marT="45720" marB="45720" anchor="ctr">
+                    <a:lnL w="12700" cap="flat" cmpd="sng" algn="ctr">
+                      <a:noFill/>
+                    </a:lnL>
+                    <a:lnR w="12700" cap="flat" cmpd="sng" algn="ctr">
+                      <a:noFill/>
+                    </a:lnR>
+                    <a:lnT w="12700" cap="flat" cmpd="sng" algn="ctr">
+                      <a:noFill/>
+                    </a:lnT>
+                    <a:lnB w="6350" cap="flat" cmpd="sng" algn="ctr">
+                      <a:solidFill>
+                        <a:srgbClr val="D9D9D9"/>
+                      </a:solidFill>
+                      <a:prstDash val="solid"/>
+                    </a:lnB>
+                    <a:solidFill>
+                      <a:srgbClr val="FFFFFF"/>
+                    </a:solidFill>
+                  </a:tcPr>
+                </a:tc>
+              </a:tr>
+              <a:tr h="381000">
+                <a:tc>
+                  <a:txBody>
+                    <a:bodyPr wrap="square"/>
+                    <a:lstStyle/>
+                    <a:p>
+                      <a:r>
+                        <a:rPr sz="950" b="1">
+                          <a:solidFill>
+                            <a:srgbClr val="232323"/>
+                          </a:solidFill>
+                          <a:latin typeface="Nunito Sans"/>
+                        </a:rPr>
+                        <a:t>Затримка камери обмежує підсилення PID</a:t>
+                      </a:r>
+                    </a:p>
+                  </a:txBody>
+                  <a:tcPr marL="127000" marR="91440" marT="45720" marB="45720" anchor="ctr">
+                    <a:lnL w="12700" cap="flat" cmpd="sng" algn="ctr">
+                      <a:noFill/>
+                    </a:lnL>
+                    <a:lnR w="12700" cap="flat" cmpd="sng" algn="ctr">
+                      <a:noFill/>
+                    </a:lnR>
+                    <a:lnT w="12700" cap="flat" cmpd="sng" algn="ctr">
+                      <a:noFill/>
+                    </a:lnT>
+                    <a:lnB w="6350" cap="flat" cmpd="sng" algn="ctr">
+                      <a:solidFill>
+                        <a:srgbClr val="D9D9D9"/>
+                      </a:solidFill>
+                      <a:prstDash val="solid"/>
+                    </a:lnB>
+                    <a:solidFill>
+                      <a:srgbClr val="ECE7E2"/>
+                    </a:solidFill>
+                  </a:tcPr>
+                </a:tc>
+                <a:tc>
+                  <a:txBody>
+                    <a:bodyPr wrap="square"/>
+                    <a:lstStyle/>
+                    <a:p>
+                      <a:r>
+                        <a:rPr sz="950" b="0">
+                          <a:solidFill>
+                            <a:srgbClr val="414C58"/>
+                          </a:solidFill>
+                          <a:latin typeface="Nunito Sans"/>
+                        </a:rPr>
+                        <a:t>Затримка камери й обробки кадру вносить мертвий час, що обмежує підсилення PID</a:t>
+                      </a:r>
+                    </a:p>
+                  </a:txBody>
+                  <a:tcPr marL="0" marR="91440" marT="45720" marB="45720" anchor="ctr">
+                    <a:lnL w="12700" cap="flat" cmpd="sng" algn="ctr">
+                      <a:noFill/>
+                    </a:lnL>
+                    <a:lnR w="12700" cap="flat" cmpd="sng" algn="ctr">
+                      <a:noFill/>
+                    </a:lnR>
+                    <a:lnT w="12700" cap="flat" cmpd="sng" algn="ctr">
+                      <a:noFill/>
+                    </a:lnT>
+                    <a:lnB w="6350" cap="flat" cmpd="sng" algn="ctr">
+                      <a:solidFill>
+                        <a:srgbClr val="D9D9D9"/>
+                      </a:solidFill>
+                      <a:prstDash val="solid"/>
+                    </a:lnB>
+                    <a:solidFill>
+                      <a:srgbClr val="ECE7E2"/>
+                    </a:solidFill>
+                  </a:tcPr>
+                </a:tc>
+                <a:tc>
+                  <a:txBody>
+                    <a:bodyPr wrap="square"/>
+                    <a:lstStyle/>
+                    <a:p>
+                      <a:r>
+                        <a:rPr sz="950" b="1">
+                          <a:solidFill>
+                            <a:srgbClr val="232323"/>
+                          </a:solidFill>
+                          <a:latin typeface="Nunito Sans"/>
+                        </a:rPr>
+                        <a:t>TODO: причина й фікс.</a:t>
+                      </a:r>
+                    </a:p>
+                  </a:txBody>
+                  <a:tcPr marL="0" marR="91440" marT="45720" marB="45720" anchor="ctr">
+                    <a:lnL w="12700" cap="flat" cmpd="sng" algn="ctr">
+                      <a:noFill/>
+                    </a:lnL>
+                    <a:lnR w="12700" cap="flat" cmpd="sng" algn="ctr">
+                      <a:noFill/>
+                    </a:lnR>
+                    <a:lnT w="12700" cap="flat" cmpd="sng" algn="ctr">
+                      <a:noFill/>
+                    </a:lnT>
+                    <a:lnB w="6350" cap="flat" cmpd="sng" algn="ctr">
+                      <a:solidFill>
+                        <a:srgbClr val="D9D9D9"/>
+                      </a:solidFill>
+                      <a:prstDash val="solid"/>
+                    </a:lnB>
+                    <a:solidFill>
+                      <a:srgbClr val="ECE7E2"/>
+                    </a:solidFill>
+                  </a:tcPr>
+                </a:tc>
+                <a:tc>
+                  <a:txBody>
+                    <a:bodyPr wrap="square"/>
+                    <a:lstStyle/>
+                    <a:p>
+                      <a:r>
+                        <a:rPr sz="1000" b="1">
+                          <a:solidFill>
+                            <a:srgbClr val="232323"/>
+                          </a:solidFill>
+                          <a:latin typeface="Nunito Sans"/>
+                        </a:rPr>
+                        <a:t>Відкрито</a:t>
+                      </a:r>
+                    </a:p>
+                  </a:txBody>
+                  <a:tcPr marL="0" marR="91440" marT="45720" marB="45720" anchor="ctr">
+                    <a:lnL w="12700" cap="flat" cmpd="sng" algn="ctr">
+                      <a:noFill/>
+                    </a:lnL>
+                    <a:lnR w="12700" cap="flat" cmpd="sng" algn="ctr">
+                      <a:noFill/>
+                    </a:lnR>
+                    <a:lnT w="12700" cap="flat" cmpd="sng" algn="ctr">
+                      <a:noFill/>
+                    </a:lnT>
+                    <a:lnB w="6350" cap="flat" cmpd="sng" algn="ctr">
+                      <a:solidFill>
+                        <a:srgbClr val="D9D9D9"/>
+                      </a:solidFill>
+                      <a:prstDash val="solid"/>
+                    </a:lnB>
+                    <a:solidFill>
+                      <a:srgbClr val="ECE7E2"/>
+                    </a:solidFill>
+                  </a:tcPr>
+                </a:tc>
+              </a:tr>
+              <a:tr h="381000">
+                <a:tc>
+                  <a:txBody>
+                    <a:bodyPr wrap="square"/>
+                    <a:lstStyle/>
+                    <a:p>
+                      <a:r>
+                        <a:rPr sz="950" b="1">
+                          <a:solidFill>
+                            <a:srgbClr val="232323"/>
+                          </a:solidFill>
+                          <a:latin typeface="Nunito Sans"/>
+                        </a:rPr>
+                        <a:t>Мертва зона й люфт сервоприводів</a:t>
+                      </a:r>
+                    </a:p>
+                  </a:txBody>
+                  <a:tcPr marL="127000" marR="91440" marT="45720" marB="45720" anchor="ctr">
+                    <a:lnL w="12700" cap="flat" cmpd="sng" algn="ctr">
+                      <a:noFill/>
+                    </a:lnL>
+                    <a:lnR w="12700" cap="flat" cmpd="sng" algn="ctr">
+                      <a:noFill/>
+                    </a:lnR>
+                    <a:lnT w="12700" cap="flat" cmpd="sng" algn="ctr">
+                      <a:noFill/>
+                    </a:lnT>
+                    <a:lnB w="6350" cap="flat" cmpd="sng" algn="ctr">
+                      <a:solidFill>
+                        <a:srgbClr val="D9D9D9"/>
+                      </a:solidFill>
+                      <a:prstDash val="solid"/>
+                    </a:lnB>
+                    <a:solidFill>
+                      <a:srgbClr val="FFFFFF"/>
+                    </a:solidFill>
+                  </a:tcPr>
+                </a:tc>
+                <a:tc>
+                  <a:txBody>
+                    <a:bodyPr wrap="square"/>
+                    <a:lstStyle/>
+                    <a:p>
+                      <a:r>
+                        <a:rPr sz="950" b="0">
+                          <a:solidFill>
+                            <a:srgbClr val="414C58"/>
+                          </a:solidFill>
+                          <a:latin typeface="Nunito Sans"/>
+                        </a:rPr>
+                        <a:t>Механічний люфт і нечутливість хобі-сервоприводів біля нейтралі</a:t>
+                      </a:r>
+                    </a:p>
+                  </a:txBody>
+                  <a:tcPr marL="0" marR="91440" marT="45720" marB="45720" anchor="ctr">
+                    <a:lnL w="12700" cap="flat" cmpd="sng" algn="ctr">
+                      <a:noFill/>
+                    </a:lnL>
+                    <a:lnR w="12700" cap="flat" cmpd="sng" algn="ctr">
+                      <a:noFill/>
+                    </a:lnR>
+                    <a:lnT w="12700" cap="flat" cmpd="sng" algn="ctr">
+                      <a:noFill/>
+                    </a:lnT>
+                    <a:lnB w="6350" cap="flat" cmpd="sng" algn="ctr">
+                      <a:solidFill>
+                        <a:srgbClr val="D9D9D9"/>
+                      </a:solidFill>
+                      <a:prstDash val="solid"/>
+                    </a:lnB>
+                    <a:solidFill>
+                      <a:srgbClr val="FFFFFF"/>
+                    </a:solidFill>
+                  </a:tcPr>
+                </a:tc>
+                <a:tc>
+                  <a:txBody>
+                    <a:bodyPr wrap="square"/>
+                    <a:lstStyle/>
+                    <a:p>
+                      <a:r>
+                        <a:rPr sz="950" b="0">
+                          <a:solidFill>
+                            <a:srgbClr val="414C58"/>
+                          </a:solidFill>
+                          <a:latin typeface="Nunito Sans"/>
+                        </a:rPr>
+                        <a:t>Компенсує зворотний зв'язок з камери.</a:t>
+                      </a:r>
+                    </a:p>
+                  </a:txBody>
+                  <a:tcPr marL="0" marR="91440" marT="45720" marB="45720" anchor="ctr">
+                    <a:lnL w="12700" cap="flat" cmpd="sng" algn="ctr">
+                      <a:noFill/>
+                    </a:lnL>
+                    <a:lnR w="12700" cap="flat" cmpd="sng" algn="ctr">
+                      <a:noFill/>
+                    </a:lnR>
+                    <a:lnT w="12700" cap="flat" cmpd="sng" algn="ctr">
+                      <a:noFill/>
+                    </a:lnT>
+                    <a:lnB w="6350" cap="flat" cmpd="sng" algn="ctr">
+                      <a:solidFill>
+                        <a:srgbClr val="D9D9D9"/>
+                      </a:solidFill>
+                      <a:prstDash val="solid"/>
+                    </a:lnB>
+                    <a:solidFill>
+                      <a:srgbClr val="FFFFFF"/>
+                    </a:solidFill>
+                  </a:tcPr>
+                </a:tc>
+                <a:tc>
+                  <a:txBody>
+                    <a:bodyPr wrap="square"/>
+                    <a:lstStyle/>
+                    <a:p>
+                      <a:r>
+                        <a:rPr sz="1000" b="0">
+                          <a:solidFill>
+                            <a:srgbClr val="414C58"/>
+                          </a:solidFill>
+                          <a:latin typeface="Nunito Sans"/>
+                        </a:rPr>
+                        <a:t>Виправлено</a:t>
+                      </a:r>
+                    </a:p>
+                  </a:txBody>
+                  <a:tcPr marL="0" marR="91440" marT="45720" marB="45720" anchor="ctr">
+                    <a:lnL w="12700" cap="flat" cmpd="sng" algn="ctr">
+                      <a:noFill/>
+                    </a:lnL>
+                    <a:lnR w="12700" cap="flat" cmpd="sng" algn="ctr">
+                      <a:noFill/>
+                    </a:lnR>
+                    <a:lnT w="12700" cap="flat" cmpd="sng" algn="ctr">
+                      <a:noFill/>
+                    </a:lnT>
+                    <a:lnB w="6350" cap="flat" cmpd="sng" algn="ctr">
+                      <a:solidFill>
+                        <a:srgbClr val="D9D9D9"/>
+                      </a:solidFill>
+                      <a:prstDash val="solid"/>
+                    </a:lnB>
+                    <a:solidFill>
+                      <a:srgbClr val="FFFFFF"/>
+                    </a:solidFill>
+                  </a:tcPr>
+                </a:tc>
+              </a:tr>
+              <a:tr h="381000">
+                <a:tc>
+                  <a:txBody>
+                    <a:bodyPr wrap="square"/>
+                    <a:lstStyle/>
+                    <a:p>
+                      <a:r>
+                        <a:rPr sz="950" b="1">
+                          <a:solidFill>
+                            <a:srgbClr val="232323"/>
+                          </a:solidFill>
+                          <a:latin typeface="Nunito Sans"/>
+                        </a:rPr>
+                        <a:t>Зависання каналу зв'язку через однопотоковий UI-застосунок</a:t>
+                      </a:r>
+                    </a:p>
+                  </a:txBody>
+                  <a:tcPr marL="127000" marR="91440" marT="45720" marB="45720" anchor="ctr">
+                    <a:lnL w="12700" cap="flat" cmpd="sng" algn="ctr">
+                      <a:noFill/>
+                    </a:lnL>
+                    <a:lnR w="12700" cap="flat" cmpd="sng" algn="ctr">
+                      <a:noFill/>
+                    </a:lnR>
+                    <a:lnT w="12700" cap="flat" cmpd="sng" algn="ctr">
+                      <a:noFill/>
+                    </a:lnT>
+                    <a:lnB w="6350" cap="flat" cmpd="sng" algn="ctr">
+                      <a:solidFill>
+                        <a:srgbClr val="D9D9D9"/>
+                      </a:solidFill>
+                      <a:prstDash val="solid"/>
+                    </a:lnB>
+                    <a:solidFill>
+                      <a:srgbClr val="ECE7E2"/>
+                    </a:solidFill>
+                  </a:tcPr>
+                </a:tc>
+                <a:tc>
+                  <a:txBody>
+                    <a:bodyPr wrap="square"/>
+                    <a:lstStyle/>
+                    <a:p>
+                      <a:r>
+                        <a:rPr sz="950" b="0">
+                          <a:solidFill>
+                            <a:srgbClr val="414C58"/>
+                          </a:solidFill>
+                          <a:latin typeface="Nunito Sans"/>
+                        </a:rPr>
+                        <a:t>UI і серійний обмін в одному потоці; ресайз вікна блокував порт</a:t>
+                      </a:r>
+                    </a:p>
+                  </a:txBody>
+                  <a:tcPr marL="0" marR="91440" marT="45720" marB="45720" anchor="ctr">
+                    <a:lnL w="12700" cap="flat" cmpd="sng" algn="ctr">
+                      <a:noFill/>
+                    </a:lnL>
+                    <a:lnR w="12700" cap="flat" cmpd="sng" algn="ctr">
+                      <a:noFill/>
+                    </a:lnR>
+                    <a:lnT w="12700" cap="flat" cmpd="sng" algn="ctr">
+                      <a:noFill/>
+                    </a:lnT>
+                    <a:lnB w="6350" cap="flat" cmpd="sng" algn="ctr">
+                      <a:solidFill>
+                        <a:srgbClr val="D9D9D9"/>
+                      </a:solidFill>
+                      <a:prstDash val="solid"/>
+                    </a:lnB>
+                    <a:solidFill>
+                      <a:srgbClr val="ECE7E2"/>
+                    </a:solidFill>
+                  </a:tcPr>
+                </a:tc>
+                <a:tc>
+                  <a:txBody>
+                    <a:bodyPr wrap="square"/>
+                    <a:lstStyle/>
+                    <a:p>
+                      <a:r>
+                        <a:rPr sz="950" b="0">
+                          <a:solidFill>
+                            <a:srgbClr val="414C58"/>
+                          </a:solidFill>
+                          <a:latin typeface="Nunito Sans"/>
+                        </a:rPr>
+                        <a:t>Обмін даними з ESP перенесено у фоновий потік.</a:t>
+                      </a:r>
+                    </a:p>
+                  </a:txBody>
+                  <a:tcPr marL="0" marR="91440" marT="45720" marB="45720" anchor="ctr">
+                    <a:lnL w="12700" cap="flat" cmpd="sng" algn="ctr">
+                      <a:noFill/>
+                    </a:lnL>
+                    <a:lnR w="12700" cap="flat" cmpd="sng" algn="ctr">
+                      <a:noFill/>
+                    </a:lnR>
+                    <a:lnT w="12700" cap="flat" cmpd="sng" algn="ctr">
+                      <a:noFill/>
+                    </a:lnT>
+                    <a:lnB w="6350" cap="flat" cmpd="sng" algn="ctr">
+                      <a:solidFill>
+                        <a:srgbClr val="D9D9D9"/>
+                      </a:solidFill>
+                      <a:prstDash val="solid"/>
+                    </a:lnB>
+                    <a:solidFill>
+                      <a:srgbClr val="ECE7E2"/>
+                    </a:solidFill>
+                  </a:tcPr>
+                </a:tc>
+                <a:tc>
+                  <a:txBody>
+                    <a:bodyPr wrap="square"/>
+                    <a:lstStyle/>
+                    <a:p>
+                      <a:r>
+                        <a:rPr sz="1000" b="0">
+                          <a:solidFill>
+                            <a:srgbClr val="414C58"/>
+                          </a:solidFill>
+                          <a:latin typeface="Nunito Sans"/>
+                        </a:rPr>
+                        <a:t>Виправлено</a:t>
+                      </a:r>
+                    </a:p>
+                  </a:txBody>
+                  <a:tcPr marL="0" marR="91440" marT="45720" marB="45720" anchor="ctr">
+                    <a:lnL w="12700" cap="flat" cmpd="sng" algn="ctr">
+                      <a:noFill/>
+                    </a:lnL>
+                    <a:lnR w="12700" cap="flat" cmpd="sng" algn="ctr">
+                      <a:noFill/>
+                    </a:lnR>
+                    <a:lnT w="12700" cap="flat" cmpd="sng" algn="ctr">
+                      <a:noFill/>
+                    </a:lnT>
+                    <a:lnB w="6350" cap="flat" cmpd="sng" algn="ctr">
+                      <a:solidFill>
+                        <a:srgbClr val="D9D9D9"/>
+                      </a:solidFill>
+                      <a:prstDash val="solid"/>
+                    </a:lnB>
+                    <a:solidFill>
+                      <a:srgbClr val="ECE7E2"/>
+                    </a:solidFill>
+                  </a:tcPr>
+                </a:tc>
+              </a:tr>
+              <a:tr h="381000">
+                <a:tc>
+                  <a:txBody>
+                    <a:bodyPr wrap="square"/>
+                    <a:lstStyle/>
+                    <a:p>
+                      <a:r>
+                        <a:rPr sz="950" b="1">
+                          <a:solidFill>
+                            <a:srgbClr val="232323"/>
+                          </a:solidFill>
+                          <a:latin typeface="Nunito Sans"/>
+                        </a:rPr>
+                        <a:t>Нелінійна залежність між позиціями на стіні та кутами серво</a:t>
+                      </a:r>
+                    </a:p>
+                  </a:txBody>
+                  <a:tcPr marL="127000" marR="91440" marT="45720" marB="45720" anchor="ctr">
+                    <a:lnL w="12700" cap="flat" cmpd="sng" algn="ctr">
+                      <a:noFill/>
+                    </a:lnL>
+                    <a:lnR w="12700" cap="flat" cmpd="sng" algn="ctr">
+                      <a:noFill/>
+                    </a:lnR>
+                    <a:lnT w="12700" cap="flat" cmpd="sng" algn="ctr">
+                      <a:noFill/>
+                    </a:lnT>
+                    <a:lnB w="6350" cap="flat" cmpd="sng" algn="ctr">
+                      <a:solidFill>
+                        <a:srgbClr val="D9D9D9"/>
+                      </a:solidFill>
+                      <a:prstDash val="solid"/>
+                    </a:lnB>
+                    <a:solidFill>
+                      <a:srgbClr val="FFFFFF"/>
+                    </a:solidFill>
+                  </a:tcPr>
+                </a:tc>
+                <a:tc>
+                  <a:txBody>
+                    <a:bodyPr wrap="square"/>
+                    <a:lstStyle/>
+                    <a:p>
+                      <a:r>
+                        <a:rPr sz="950" b="0">
+                          <a:solidFill>
+                            <a:srgbClr val="414C58"/>
+                          </a:solidFill>
+                          <a:latin typeface="Nunito Sans"/>
+                        </a:rPr>
+                        <a:t>Проєкція стіни на кут гімбала нелінійна (перспектива, геометрія кардана)</a:t>
+                      </a:r>
+                    </a:p>
+                  </a:txBody>
+                  <a:tcPr marL="0" marR="91440" marT="45720" marB="45720" anchor="ctr">
+                    <a:lnL w="12700" cap="flat" cmpd="sng" algn="ctr">
+                      <a:noFill/>
+                    </a:lnL>
+                    <a:lnR w="12700" cap="flat" cmpd="sng" algn="ctr">
+                      <a:noFill/>
+                    </a:lnR>
+                    <a:lnT w="12700" cap="flat" cmpd="sng" algn="ctr">
+                      <a:noFill/>
+                    </a:lnT>
+                    <a:lnB w="6350" cap="flat" cmpd="sng" algn="ctr">
+                      <a:solidFill>
+                        <a:srgbClr val="D9D9D9"/>
+                      </a:solidFill>
+                      <a:prstDash val="solid"/>
+                    </a:lnB>
+                    <a:solidFill>
+                      <a:srgbClr val="FFFFFF"/>
+                    </a:solidFill>
+                  </a:tcPr>
+                </a:tc>
+                <a:tc>
+                  <a:txBody>
+                    <a:bodyPr wrap="square"/>
+                    <a:lstStyle/>
+                    <a:p>
+                      <a:r>
+                        <a:rPr sz="950" b="1">
+                          <a:solidFill>
+                            <a:srgbClr val="232323"/>
+                          </a:solidFill>
+                          <a:latin typeface="Nunito Sans"/>
+                        </a:rPr>
+                        <a:t>TODO: причина й фікс.</a:t>
+                      </a:r>
+                    </a:p>
+                  </a:txBody>
+                  <a:tcPr marL="0" marR="91440" marT="45720" marB="45720" anchor="ctr">
+                    <a:lnL w="12700" cap="flat" cmpd="sng" algn="ctr">
+                      <a:noFill/>
+                    </a:lnL>
+                    <a:lnR w="12700" cap="flat" cmpd="sng" algn="ctr">
+                      <a:noFill/>
+                    </a:lnR>
+                    <a:lnT w="12700" cap="flat" cmpd="sng" algn="ctr">
+                      <a:noFill/>
+                    </a:lnT>
+                    <a:lnB w="6350" cap="flat" cmpd="sng" algn="ctr">
+                      <a:solidFill>
+                        <a:srgbClr val="D9D9D9"/>
+                      </a:solidFill>
+                      <a:prstDash val="solid"/>
+                    </a:lnB>
+                    <a:solidFill>
+                      <a:srgbClr val="FFFFFF"/>
+                    </a:solidFill>
+                  </a:tcPr>
+                </a:tc>
+                <a:tc>
+                  <a:txBody>
+                    <a:bodyPr wrap="square"/>
+                    <a:lstStyle/>
+                    <a:p>
+                      <a:r>
+                        <a:rPr sz="1000" b="1">
+                          <a:solidFill>
+                            <a:srgbClr val="232323"/>
+                          </a:solidFill>
+                          <a:latin typeface="Nunito Sans"/>
+                        </a:rPr>
+                        <a:t>Відкрито</a:t>
+                      </a:r>
+                    </a:p>
+                  </a:txBody>
+                  <a:tcPr marL="0" marR="91440" marT="45720" marB="45720" anchor="ctr">
+                    <a:lnL w="12700" cap="flat" cmpd="sng" algn="ctr">
+                      <a:noFill/>
+                    </a:lnL>
+                    <a:lnR w="12700" cap="flat" cmpd="sng" algn="ctr">
+                      <a:noFill/>
+                    </a:lnR>
+                    <a:lnT w="12700" cap="flat" cmpd="sng" algn="ctr">
+                      <a:noFill/>
+                    </a:lnT>
+                    <a:lnB w="6350" cap="flat" cmpd="sng" algn="ctr">
+                      <a:solidFill>
+                        <a:srgbClr val="D9D9D9"/>
+                      </a:solidFill>
+                      <a:prstDash val="solid"/>
+                    </a:lnB>
+                    <a:solidFill>
+                      <a:srgbClr val="FFFFFF"/>
+                    </a:solidFill>
+                  </a:tcPr>
+                </a:tc>
+              </a:tr>
+              <a:tr h="525780">
+                <a:tc>
+                  <a:txBody>
+                    <a:bodyPr wrap="square"/>
+                    <a:lstStyle/>
+                    <a:p>
+                      <a:r>
+                        <a:rPr sz="950" b="1">
+                          <a:solidFill>
+                            <a:srgbClr val="232323"/>
+                          </a:solidFill>
+                          <a:latin typeface="Nunito Sans"/>
+                        </a:rPr>
+                        <a:t>Лазер виходить за межі зони видимості камери</a:t>
+                      </a:r>
+                    </a:p>
+                  </a:txBody>
+                  <a:tcPr marL="127000" marR="91440" marT="45720" marB="45720" anchor="ctr">
+                    <a:lnL w="12700" cap="flat" cmpd="sng" algn="ctr">
+                      <a:noFill/>
+                    </a:lnL>
+                    <a:lnR w="12700" cap="flat" cmpd="sng" algn="ctr">
+                      <a:noFill/>
+                    </a:lnR>
+                    <a:lnT w="12700" cap="flat" cmpd="sng" algn="ctr">
+                      <a:noFill/>
+                    </a:lnT>
+                    <a:lnB w="6350" cap="flat" cmpd="sng" algn="ctr">
+                      <a:solidFill>
+                        <a:srgbClr val="D9D9D9"/>
+                      </a:solidFill>
+                      <a:prstDash val="solid"/>
+                    </a:lnB>
+                    <a:solidFill>
+                      <a:srgbClr val="ECE7E2"/>
+                    </a:solidFill>
+                  </a:tcPr>
+                </a:tc>
+                <a:tc>
+                  <a:txBody>
+                    <a:bodyPr wrap="square"/>
+                    <a:lstStyle/>
+                    <a:p>
+                      <a:r>
+                        <a:rPr sz="950" b="0">
+                          <a:solidFill>
+                            <a:srgbClr val="414C58"/>
+                          </a:solidFill>
+                          <a:latin typeface="Nunito Sans"/>
+                        </a:rPr>
+                        <a:t>Різкий рух цілі або похибка керування виносить точку за межі поля зору камери</a:t>
+                      </a:r>
+                    </a:p>
+                  </a:txBody>
+                  <a:tcPr marL="0" marR="91440" marT="45720" marB="45720" anchor="ctr">
+                    <a:lnL w="12700" cap="flat" cmpd="sng" algn="ctr">
+                      <a:noFill/>
+                    </a:lnL>
+                    <a:lnR w="12700" cap="flat" cmpd="sng" algn="ctr">
+                      <a:noFill/>
+                    </a:lnR>
+                    <a:lnT w="12700" cap="flat" cmpd="sng" algn="ctr">
+                      <a:noFill/>
+                    </a:lnT>
+                    <a:lnB w="6350" cap="flat" cmpd="sng" algn="ctr">
+                      <a:solidFill>
+                        <a:srgbClr val="D9D9D9"/>
+                      </a:solidFill>
+                      <a:prstDash val="solid"/>
+                    </a:lnB>
+                    <a:solidFill>
+                      <a:srgbClr val="ECE7E2"/>
+                    </a:solidFill>
+                  </a:tcPr>
+                </a:tc>
+                <a:tc>
+                  <a:txBody>
+                    <a:bodyPr wrap="square"/>
+                    <a:lstStyle/>
+                    <a:p>
+                      <a:r>
+                        <a:rPr sz="950" b="0">
+                          <a:solidFill>
+                            <a:srgbClr val="414C58"/>
+                          </a:solidFill>
+                          <a:latin typeface="Nunito Sans"/>
+                        </a:rPr>
+                        <a:t>recenter.py: гімбал рухається P-кроками до центру, якщо точку не видно &gt;1500 мс.</a:t>
+                      </a:r>
+                    </a:p>
+                  </a:txBody>
+                  <a:tcPr marL="0" marR="91440" marT="45720" marB="45720" anchor="ctr">
+                    <a:lnL w="12700" cap="flat" cmpd="sng" algn="ctr">
+                      <a:noFill/>
+                    </a:lnL>
+                    <a:lnR w="12700" cap="flat" cmpd="sng" algn="ctr">
+                      <a:noFill/>
+                    </a:lnR>
+                    <a:lnT w="12700" cap="flat" cmpd="sng" algn="ctr">
+                      <a:noFill/>
+                    </a:lnT>
+                    <a:lnB w="6350" cap="flat" cmpd="sng" algn="ctr">
+                      <a:solidFill>
+                        <a:srgbClr val="D9D9D9"/>
+                      </a:solidFill>
+                      <a:prstDash val="solid"/>
+                    </a:lnB>
+                    <a:solidFill>
+                      <a:srgbClr val="ECE7E2"/>
+                    </a:solidFill>
+                  </a:tcPr>
+                </a:tc>
+                <a:tc>
+                  <a:txBody>
+                    <a:bodyPr wrap="square"/>
+                    <a:lstStyle/>
+                    <a:p>
+                      <a:r>
+                        <a:rPr sz="1000" b="1">
                           <a:solidFill>
                             <a:srgbClr val="232323"/>
                           </a:solidFill>
@@ -6098,6 +6754,171 @@
                     </a:p>
                   </a:txBody>
                   <a:tcPr marL="0" marR="91440" marT="45720" marB="45720" anchor="ctr">
+                    <a:lnL w="12700" cap="flat" cmpd="sng" algn="ctr">
+                      <a:noFill/>
+                    </a:lnL>
+                    <a:lnR w="12700" cap="flat" cmpd="sng" algn="ctr">
+                      <a:noFill/>
+                    </a:lnR>
+                    <a:lnT w="12700" cap="flat" cmpd="sng" algn="ctr">
+                      <a:noFill/>
+                    </a:lnT>
+                    <a:lnB w="6350" cap="flat" cmpd="sng" algn="ctr">
+                      <a:solidFill>
+                        <a:srgbClr val="D9D9D9"/>
+                      </a:solidFill>
+                      <a:prstDash val="solid"/>
+                    </a:lnB>
+                    <a:solidFill>
+                      <a:srgbClr val="ECE7E2"/>
+                    </a:solidFill>
+                  </a:tcPr>
+                </a:tc>
+              </a:tr>
+              <a:tr h="525780">
+                <a:tc>
+                  <a:txBody>
+                    <a:bodyPr wrap="square"/>
+                    <a:lstStyle/>
+                    <a:p>
+                      <a:r>
+                        <a:rPr sz="950" b="1">
+                          <a:solidFill>
+                            <a:srgbClr val="232323"/>
+                          </a:solidFill>
+                          <a:latin typeface="Nunito Sans"/>
+                        </a:rPr>
+                        <a:t>Автофокус камери знижує стабільність детекції</a:t>
+                      </a:r>
+                    </a:p>
+                  </a:txBody>
+                  <a:tcPr marL="127000" marR="91440" marT="45720" marB="45720" anchor="ctr">
+                    <a:lnL w="12700" cap="flat" cmpd="sng" algn="ctr">
+                      <a:noFill/>
+                    </a:lnL>
+                    <a:lnR w="12700" cap="flat" cmpd="sng" algn="ctr">
+                      <a:noFill/>
+                    </a:lnR>
+                    <a:lnT w="12700" cap="flat" cmpd="sng" algn="ctr">
+                      <a:noFill/>
+                    </a:lnT>
+                    <a:lnB w="6350" cap="flat" cmpd="sng" algn="ctr">
+                      <a:solidFill>
+                        <a:srgbClr val="D9D9D9"/>
+                      </a:solidFill>
+                      <a:prstDash val="solid"/>
+                    </a:lnB>
+                    <a:solidFill>
+                      <a:srgbClr val="FFFFFF"/>
+                    </a:solidFill>
+                  </a:tcPr>
+                </a:tc>
+                <a:tc>
+                  <a:txBody>
+                    <a:bodyPr wrap="square"/>
+                    <a:lstStyle/>
+                    <a:p>
+                      <a:r>
+                        <a:rPr sz="950" b="0">
+                          <a:solidFill>
+                            <a:srgbClr val="414C58"/>
+                          </a:solidFill>
+                          <a:latin typeface="Nunito Sans"/>
+                        </a:rPr>
+                        <a:t>Автофокус міняє різкість/розмір точки — пороги OpenCV втрачають сигнал</a:t>
+                      </a:r>
+                    </a:p>
+                  </a:txBody>
+                  <a:tcPr marL="0" marR="91440" marT="45720" marB="45720" anchor="ctr">
+                    <a:lnL w="12700" cap="flat" cmpd="sng" algn="ctr">
+                      <a:noFill/>
+                    </a:lnL>
+                    <a:lnR w="12700" cap="flat" cmpd="sng" algn="ctr">
+                      <a:noFill/>
+                    </a:lnR>
+                    <a:lnT w="12700" cap="flat" cmpd="sng" algn="ctr">
+                      <a:noFill/>
+                    </a:lnT>
+                    <a:lnB w="6350" cap="flat" cmpd="sng" algn="ctr">
+                      <a:solidFill>
+                        <a:srgbClr val="D9D9D9"/>
+                      </a:solidFill>
+                      <a:prstDash val="solid"/>
+                    </a:lnB>
+                    <a:solidFill>
+                      <a:srgbClr val="FFFFFF"/>
+                    </a:solidFill>
+                  </a:tcPr>
+                </a:tc>
+                <a:tc>
+                  <a:txBody>
+                    <a:bodyPr wrap="square"/>
+                    <a:lstStyle/>
+                    <a:p>
+                      <a:r>
+                        <a:rPr sz="950" b="0">
+                          <a:solidFill>
+                            <a:srgbClr val="414C58"/>
+                          </a:solidFill>
+                          <a:latin typeface="Nunito Sans"/>
+                        </a:rPr>
+                        <a:t>Автофокус вимкнено, фіксована позиція лінзи (--focus=130); live-підбір у speed.py.</a:t>
+                      </a:r>
+                    </a:p>
+                  </a:txBody>
+                  <a:tcPr marL="0" marR="91440" marT="45720" marB="45720" anchor="ctr">
+                    <a:lnL w="12700" cap="flat" cmpd="sng" algn="ctr">
+                      <a:noFill/>
+                    </a:lnL>
+                    <a:lnR w="12700" cap="flat" cmpd="sng" algn="ctr">
+                      <a:noFill/>
+                    </a:lnR>
+                    <a:lnT w="12700" cap="flat" cmpd="sng" algn="ctr">
+                      <a:noFill/>
+                    </a:lnT>
+                    <a:lnB w="6350" cap="flat" cmpd="sng" algn="ctr">
+                      <a:solidFill>
+                        <a:srgbClr val="D9D9D9"/>
+                      </a:solidFill>
+                      <a:prstDash val="solid"/>
+                    </a:lnB>
+                    <a:solidFill>
+                      <a:srgbClr val="FFFFFF"/>
+                    </a:solidFill>
+                  </a:tcPr>
+                </a:tc>
+                <a:tc>
+                  <a:txBody>
+                    <a:bodyPr wrap="square"/>
+                    <a:lstStyle/>
+                    <a:p>
+                      <a:r>
+                        <a:rPr sz="1000" b="1">
+                          <a:solidFill>
+                            <a:srgbClr val="232323"/>
+                          </a:solidFill>
+                          <a:latin typeface="Nunito Sans"/>
+                        </a:rPr>
+                        <a:t>Частково</a:t>
+                      </a:r>
+                    </a:p>
+                  </a:txBody>
+                  <a:tcPr marL="0" marR="91440" marT="45720" marB="45720" anchor="ctr">
+                    <a:lnL w="12700" cap="flat" cmpd="sng" algn="ctr">
+                      <a:noFill/>
+                    </a:lnL>
+                    <a:lnR w="12700" cap="flat" cmpd="sng" algn="ctr">
+                      <a:noFill/>
+                    </a:lnR>
+                    <a:lnT w="12700" cap="flat" cmpd="sng" algn="ctr">
+                      <a:noFill/>
+                    </a:lnT>
+                    <a:lnB w="6350" cap="flat" cmpd="sng" algn="ctr">
+                      <a:solidFill>
+                        <a:srgbClr val="D9D9D9"/>
+                      </a:solidFill>
+                      <a:prstDash val="solid"/>
+                    </a:lnB>
                     <a:solidFill>
                       <a:srgbClr val="FFFFFF"/>
                     </a:solidFill>
@@ -6108,6 +6929,99 @@
           </a:graphicData>
         </a:graphic>
       </p:graphicFrame>
+      <p:sp>
+        <p:nvSpPr>
+          <p:cNvPr id="204" name="TextBox 203"/>
+          <p:cNvSpPr txBox="1"/>
+          <p:nvPr/>
+        </p:nvSpPr>
+        <p:spPr>
+          <a:xfrm>
+            <a:off x="812800" y="6250000"/>
+            <a:ext cx="10566400" cy="220000"/>
+          </a:xfrm>
+          <a:prstGeom prst="rect">
+            <a:avLst/>
+          </a:prstGeom>
+          <a:noFill/>
+        </p:spPr>
+        <p:txBody>
+          <a:bodyPr wrap="none" lIns="0" rIns="0" tIns="0" bIns="0" anchor="ctr">
+            <a:spAutoFit/>
+          </a:bodyPr>
+          <a:lstStyle/>
+          <a:p>
+            <a:pPr algn="l"/>
+            <a:r>
+              <a:rPr sz="800" i="1" u="sng">
+                <a:solidFill>
+                  <a:srgbClr val="2A5C8F"/>
+                </a:solidFill>
+                <a:latin typeface="Nunito Sans"/>
+                <a:hlinkClick r:id="rId3"/>
+              </a:rPr>
+              <a:t>firmware/aim/src/parts/Laser.hpp</a:t>
+            </a:r>
+            <a:r>
+              <a:rPr sz="800" i="1">
+                <a:solidFill>
+                  <a:srgbClr val="6B6F76"/>
+                </a:solidFill>
+                <a:latin typeface="Nunito Sans"/>
+              </a:rPr>
+              <a:t> · </a:t>
+            </a:r>
+            <a:r>
+              <a:rPr sz="800" i="1" u="sng">
+                <a:solidFill>
+                  <a:srgbClr val="2A5C8F"/>
+                </a:solidFill>
+                <a:latin typeface="Nunito Sans"/>
+                <a:hlinkClick r:id="rId4"/>
+              </a:rPr>
+              <a:t>firmware/aim/src/tasks/Logger.hpp</a:t>
+            </a:r>
+            <a:r>
+              <a:rPr sz="800" i="1">
+                <a:solidFill>
+                  <a:srgbClr val="6B6F76"/>
+                </a:solidFill>
+                <a:latin typeface="Nunito Sans"/>
+              </a:rPr>
+              <a:t> · </a:t>
+            </a:r>
+            <a:r>
+              <a:rPr sz="800" i="1" u="sng">
+                <a:solidFill>
+                  <a:srgbClr val="2A5C8F"/>
+                </a:solidFill>
+                <a:latin typeface="Nunito Sans"/>
+                <a:hlinkClick r:id="rId5"/>
+              </a:rPr>
+              <a:t>eye/camera/app_window.py</a:t>
+            </a:r>
+            <a:r>
+              <a:rPr sz="800" i="1">
+                <a:solidFill>
+                  <a:srgbClr val="6B6F76"/>
+                </a:solidFill>
+                <a:latin typeface="Nunito Sans"/>
+              </a:rPr>
+              <a:t> · </a:t>
+            </a:r>
+            <a:r>
+              <a:rPr sz="800" i="1" u="sng">
+                <a:solidFill>
+                  <a:srgbClr val="2A5C8F"/>
+                </a:solidFill>
+                <a:latin typeface="Nunito Sans"/>
+                <a:hlinkClick r:id="rId6"/>
+              </a:rPr>
+              <a:t>eye/camera/recenter.py</a:t>
+            </a:r>
+          </a:p>
+        </p:txBody>
+      </p:sp>
     </p:spTree>
   </p:cSld>
   <p:clrMapOvr>
@@ -6357,6 +7271,21 @@
                     </a:p>
                   </a:txBody>
                   <a:tcPr marL="127000" marR="91440" marT="0" marB="0" anchor="ctr">
+                    <a:lnL w="12700" cap="flat" cmpd="sng" algn="ctr">
+                      <a:noFill/>
+                    </a:lnL>
+                    <a:lnR w="12700" cap="flat" cmpd="sng" algn="ctr">
+                      <a:noFill/>
+                    </a:lnR>
+                    <a:lnT w="12700" cap="flat" cmpd="sng" algn="ctr">
+                      <a:noFill/>
+                    </a:lnT>
+                    <a:lnB w="6350" cap="flat" cmpd="sng" algn="ctr">
+                      <a:solidFill>
+                        <a:srgbClr val="D9D9D9"/>
+                      </a:solidFill>
+                      <a:prstDash val="solid"/>
+                    </a:lnB>
                     <a:solidFill>
                       <a:srgbClr val="C5D6E9"/>
                     </a:solidFill>
@@ -6379,6 +7308,21 @@
                     </a:p>
                   </a:txBody>
                   <a:tcPr marL="0" marR="91440" marT="0" marB="0" anchor="ctr">
+                    <a:lnL w="12700" cap="flat" cmpd="sng" algn="ctr">
+                      <a:noFill/>
+                    </a:lnL>
+                    <a:lnR w="12700" cap="flat" cmpd="sng" algn="ctr">
+                      <a:noFill/>
+                    </a:lnR>
+                    <a:lnT w="12700" cap="flat" cmpd="sng" algn="ctr">
+                      <a:noFill/>
+                    </a:lnT>
+                    <a:lnB w="6350" cap="flat" cmpd="sng" algn="ctr">
+                      <a:solidFill>
+                        <a:srgbClr val="D9D9D9"/>
+                      </a:solidFill>
+                      <a:prstDash val="solid"/>
+                    </a:lnB>
                     <a:solidFill>
                       <a:srgbClr val="C5D6E9"/>
                     </a:solidFill>
@@ -6403,6 +7347,21 @@
                     </a:p>
                   </a:txBody>
                   <a:tcPr marL="127000" marR="91440" marT="0" marB="0" anchor="ctr">
+                    <a:lnL w="12700" cap="flat" cmpd="sng" algn="ctr">
+                      <a:noFill/>
+                    </a:lnL>
+                    <a:lnR w="12700" cap="flat" cmpd="sng" algn="ctr">
+                      <a:noFill/>
+                    </a:lnR>
+                    <a:lnT w="12700" cap="flat" cmpd="sng" algn="ctr">
+                      <a:noFill/>
+                    </a:lnT>
+                    <a:lnB w="6350" cap="flat" cmpd="sng" algn="ctr">
+                      <a:solidFill>
+                        <a:srgbClr val="D9D9D9"/>
+                      </a:solidFill>
+                      <a:prstDash val="solid"/>
+                    </a:lnB>
                     <a:solidFill>
                       <a:srgbClr val="FFFFFF"/>
                     </a:solidFill>
@@ -6434,6 +7393,21 @@
                     </a:p>
                   </a:txBody>
                   <a:tcPr marL="0" marR="91440" marT="0" marB="0" anchor="ctr">
+                    <a:lnL w="12700" cap="flat" cmpd="sng" algn="ctr">
+                      <a:noFill/>
+                    </a:lnL>
+                    <a:lnR w="12700" cap="flat" cmpd="sng" algn="ctr">
+                      <a:noFill/>
+                    </a:lnR>
+                    <a:lnT w="12700" cap="flat" cmpd="sng" algn="ctr">
+                      <a:noFill/>
+                    </a:lnT>
+                    <a:lnB w="6350" cap="flat" cmpd="sng" algn="ctr">
+                      <a:solidFill>
+                        <a:srgbClr val="D9D9D9"/>
+                      </a:solidFill>
+                      <a:prstDash val="solid"/>
+                    </a:lnB>
                     <a:solidFill>
                       <a:srgbClr val="FFFFFF"/>
                     </a:solidFill>
@@ -6458,6 +7432,21 @@
                     </a:p>
                   </a:txBody>
                   <a:tcPr marL="127000" marR="91440" marT="0" marB="0" anchor="ctr">
+                    <a:lnL w="12700" cap="flat" cmpd="sng" algn="ctr">
+                      <a:noFill/>
+                    </a:lnL>
+                    <a:lnR w="12700" cap="flat" cmpd="sng" algn="ctr">
+                      <a:noFill/>
+                    </a:lnR>
+                    <a:lnT w="12700" cap="flat" cmpd="sng" algn="ctr">
+                      <a:noFill/>
+                    </a:lnT>
+                    <a:lnB w="6350" cap="flat" cmpd="sng" algn="ctr">
+                      <a:solidFill>
+                        <a:srgbClr val="D9D9D9"/>
+                      </a:solidFill>
+                      <a:prstDash val="solid"/>
+                    </a:lnB>
                     <a:solidFill>
                       <a:srgbClr val="ECE7E2"/>
                     </a:solidFill>
@@ -6480,6 +7469,21 @@
                     </a:p>
                   </a:txBody>
                   <a:tcPr marL="0" marR="91440" marT="0" marB="0" anchor="ctr">
+                    <a:lnL w="12700" cap="flat" cmpd="sng" algn="ctr">
+                      <a:noFill/>
+                    </a:lnL>
+                    <a:lnR w="12700" cap="flat" cmpd="sng" algn="ctr">
+                      <a:noFill/>
+                    </a:lnR>
+                    <a:lnT w="12700" cap="flat" cmpd="sng" algn="ctr">
+                      <a:noFill/>
+                    </a:lnT>
+                    <a:lnB w="6350" cap="flat" cmpd="sng" algn="ctr">
+                      <a:solidFill>
+                        <a:srgbClr val="D9D9D9"/>
+                      </a:solidFill>
+                      <a:prstDash val="solid"/>
+                    </a:lnB>
                     <a:solidFill>
                       <a:srgbClr val="ECE7E2"/>
                     </a:solidFill>
@@ -6504,6 +7508,21 @@
                     </a:p>
                   </a:txBody>
                   <a:tcPr marL="127000" marR="91440" marT="0" marB="0" anchor="ctr">
+                    <a:lnL w="12700" cap="flat" cmpd="sng" algn="ctr">
+                      <a:noFill/>
+                    </a:lnL>
+                    <a:lnR w="12700" cap="flat" cmpd="sng" algn="ctr">
+                      <a:noFill/>
+                    </a:lnR>
+                    <a:lnT w="12700" cap="flat" cmpd="sng" algn="ctr">
+                      <a:noFill/>
+                    </a:lnT>
+                    <a:lnB w="6350" cap="flat" cmpd="sng" algn="ctr">
+                      <a:solidFill>
+                        <a:srgbClr val="D9D9D9"/>
+                      </a:solidFill>
+                      <a:prstDash val="solid"/>
+                    </a:lnB>
                     <a:solidFill>
                       <a:srgbClr val="FFFFFF"/>
                     </a:solidFill>
@@ -6526,6 +7545,21 @@
                     </a:p>
                   </a:txBody>
                   <a:tcPr marL="0" marR="91440" marT="0" marB="0" anchor="ctr">
+                    <a:lnL w="12700" cap="flat" cmpd="sng" algn="ctr">
+                      <a:noFill/>
+                    </a:lnL>
+                    <a:lnR w="12700" cap="flat" cmpd="sng" algn="ctr">
+                      <a:noFill/>
+                    </a:lnR>
+                    <a:lnT w="12700" cap="flat" cmpd="sng" algn="ctr">
+                      <a:noFill/>
+                    </a:lnT>
+                    <a:lnB w="6350" cap="flat" cmpd="sng" algn="ctr">
+                      <a:solidFill>
+                        <a:srgbClr val="D9D9D9"/>
+                      </a:solidFill>
+                      <a:prstDash val="solid"/>
+                    </a:lnB>
                     <a:solidFill>
                       <a:srgbClr val="FFFFFF"/>
                     </a:solidFill>
@@ -6550,6 +7584,21 @@
                     </a:p>
                   </a:txBody>
                   <a:tcPr marL="127000" marR="91440" marT="0" marB="0" anchor="ctr">
+                    <a:lnL w="12700" cap="flat" cmpd="sng" algn="ctr">
+                      <a:noFill/>
+                    </a:lnL>
+                    <a:lnR w="12700" cap="flat" cmpd="sng" algn="ctr">
+                      <a:noFill/>
+                    </a:lnR>
+                    <a:lnT w="12700" cap="flat" cmpd="sng" algn="ctr">
+                      <a:noFill/>
+                    </a:lnT>
+                    <a:lnB w="6350" cap="flat" cmpd="sng" algn="ctr">
+                      <a:solidFill>
+                        <a:srgbClr val="D9D9D9"/>
+                      </a:solidFill>
+                      <a:prstDash val="solid"/>
+                    </a:lnB>
                     <a:solidFill>
                       <a:srgbClr val="ECE7E2"/>
                     </a:solidFill>
@@ -6572,6 +7621,21 @@
                     </a:p>
                   </a:txBody>
                   <a:tcPr marL="0" marR="91440" marT="0" marB="0" anchor="ctr">
+                    <a:lnL w="12700" cap="flat" cmpd="sng" algn="ctr">
+                      <a:noFill/>
+                    </a:lnL>
+                    <a:lnR w="12700" cap="flat" cmpd="sng" algn="ctr">
+                      <a:noFill/>
+                    </a:lnR>
+                    <a:lnT w="12700" cap="flat" cmpd="sng" algn="ctr">
+                      <a:noFill/>
+                    </a:lnT>
+                    <a:lnB w="6350" cap="flat" cmpd="sng" algn="ctr">
+                      <a:solidFill>
+                        <a:srgbClr val="D9D9D9"/>
+                      </a:solidFill>
+                      <a:prstDash val="solid"/>
+                    </a:lnB>
                     <a:solidFill>
                       <a:srgbClr val="ECE7E2"/>
                     </a:solidFill>
@@ -6596,6 +7660,21 @@
                     </a:p>
                   </a:txBody>
                   <a:tcPr marL="127000" marR="91440" marT="0" marB="0" anchor="ctr">
+                    <a:lnL w="12700" cap="flat" cmpd="sng" algn="ctr">
+                      <a:noFill/>
+                    </a:lnL>
+                    <a:lnR w="12700" cap="flat" cmpd="sng" algn="ctr">
+                      <a:noFill/>
+                    </a:lnR>
+                    <a:lnT w="12700" cap="flat" cmpd="sng" algn="ctr">
+                      <a:noFill/>
+                    </a:lnT>
+                    <a:lnB w="6350" cap="flat" cmpd="sng" algn="ctr">
+                      <a:solidFill>
+                        <a:srgbClr val="D9D9D9"/>
+                      </a:solidFill>
+                      <a:prstDash val="solid"/>
+                    </a:lnB>
                     <a:solidFill>
                       <a:srgbClr val="FFFFFF"/>
                     </a:solidFill>
@@ -6618,6 +7697,21 @@
                     </a:p>
                   </a:txBody>
                   <a:tcPr marL="0" marR="91440" marT="0" marB="0" anchor="ctr">
+                    <a:lnL w="12700" cap="flat" cmpd="sng" algn="ctr">
+                      <a:noFill/>
+                    </a:lnL>
+                    <a:lnR w="12700" cap="flat" cmpd="sng" algn="ctr">
+                      <a:noFill/>
+                    </a:lnR>
+                    <a:lnT w="12700" cap="flat" cmpd="sng" algn="ctr">
+                      <a:noFill/>
+                    </a:lnT>
+                    <a:lnB w="6350" cap="flat" cmpd="sng" algn="ctr">
+                      <a:solidFill>
+                        <a:srgbClr val="D9D9D9"/>
+                      </a:solidFill>
+                      <a:prstDash val="solid"/>
+                    </a:lnB>
                     <a:solidFill>
                       <a:srgbClr val="FFFFFF"/>
                     </a:solidFill>
@@ -6628,6 +7722,80 @@
           </a:graphicData>
         </a:graphic>
       </p:graphicFrame>
+      <p:sp>
+        <p:nvSpPr>
+          <p:cNvPr id="214" name="TextBox 213"/>
+          <p:cNvSpPr txBox="1"/>
+          <p:nvPr/>
+        </p:nvSpPr>
+        <p:spPr>
+          <a:xfrm>
+            <a:off x="812800" y="6250000"/>
+            <a:ext cx="10566400" cy="220000"/>
+          </a:xfrm>
+          <a:prstGeom prst="rect">
+            <a:avLst/>
+          </a:prstGeom>
+          <a:noFill/>
+        </p:spPr>
+        <p:txBody>
+          <a:bodyPr wrap="none" lIns="0" rIns="0" tIns="0" bIns="0" anchor="ctr">
+            <a:spAutoFit/>
+          </a:bodyPr>
+          <a:lstStyle/>
+          <a:p>
+            <a:pPr algn="l"/>
+            <a:r>
+              <a:rPr sz="800" i="1" u="sng">
+                <a:solidFill>
+                  <a:srgbClr val="2A5C8F"/>
+                </a:solidFill>
+                <a:latin typeface="Nunito Sans"/>
+                <a:hlinkClick r:id="rId3"/>
+              </a:rPr>
+              <a:t>firmware/aim/src/parts/Laser.hpp</a:t>
+            </a:r>
+            <a:r>
+              <a:rPr sz="800" i="1">
+                <a:solidFill>
+                  <a:srgbClr val="6B6F76"/>
+                </a:solidFill>
+                <a:latin typeface="Nunito Sans"/>
+              </a:rPr>
+              <a:t> · </a:t>
+            </a:r>
+            <a:r>
+              <a:rPr sz="800" i="1" u="sng">
+                <a:solidFill>
+                  <a:srgbClr val="2A5C8F"/>
+                </a:solidFill>
+                <a:latin typeface="Nunito Sans"/>
+                <a:hlinkClick r:id="rId4"/>
+              </a:rPr>
+              <a:t>firmware/aim/src/StateMachine.hpp</a:t>
+            </a:r>
+            <a:r>
+              <a:rPr sz="800" i="1">
+                <a:solidFill>
+                  <a:srgbClr val="6B6F76"/>
+                </a:solidFill>
+                <a:latin typeface="Nunito Sans"/>
+              </a:rPr>
+              <a:t> · </a:t>
+            </a:r>
+            <a:r>
+              <a:rPr sz="800" i="1" u="sng">
+                <a:solidFill>
+                  <a:srgbClr val="2A5C8F"/>
+                </a:solidFill>
+                <a:latin typeface="Nunito Sans"/>
+                <a:hlinkClick r:id="rId5"/>
+              </a:rPr>
+              <a:t>eye/camera/tracker.py</a:t>
+            </a:r>
+          </a:p>
+        </p:txBody>
+      </p:sp>
     </p:spTree>
   </p:cSld>
   <p:clrMapOvr>
@@ -6779,7 +7947,7 @@
         </p:nvSpPr>
         <p:spPr>
           <a:xfrm>
-            <a:off x="812800" y="1305520"/>
+            <a:off x="812800" y="1280120"/>
             <a:ext cx="10883392" cy="360660"/>
           </a:xfrm>
           <a:prstGeom prst="rect">
@@ -6845,7 +8013,7 @@
         </p:nvSpPr>
         <p:spPr>
           <a:xfrm>
-            <a:off x="7958634" y="1793180"/>
+            <a:off x="812800" y="1793180"/>
             <a:ext cx="3420566" cy="1016000"/>
           </a:xfrm>
           <a:prstGeom prst="roundRect">
@@ -6890,7 +8058,7 @@
         </p:nvSpPr>
         <p:spPr>
           <a:xfrm>
-            <a:off x="8136434" y="1970980"/>
+            <a:off x="990600" y="1970980"/>
             <a:ext cx="635198" cy="297160"/>
           </a:xfrm>
           <a:prstGeom prst="roundRect">
@@ -6935,7 +8103,7 @@
         </p:nvSpPr>
         <p:spPr>
           <a:xfrm>
-            <a:off x="8250734" y="2021780"/>
+            <a:off x="1104900" y="2021780"/>
             <a:ext cx="457398" cy="220960"/>
           </a:xfrm>
           <a:prstGeom prst="rect">
@@ -7001,7 +8169,7 @@
         </p:nvSpPr>
         <p:spPr>
           <a:xfrm>
-            <a:off x="8136434" y="2331641"/>
+            <a:off x="990600" y="2331641"/>
             <a:ext cx="3156915" cy="203200"/>
           </a:xfrm>
           <a:prstGeom prst="rect">
@@ -8166,6 +9334,61 @@
               <a:cs typeface="Calibri"/>
               <a:sym typeface="Calibri"/>
             </a:endParaRPr>
+          </a:p>
+        </p:txBody>
+      </p:sp>
+      <p:sp>
+        <p:nvSpPr>
+          <p:cNvPr id="267" name="TextBox 266"/>
+          <p:cNvSpPr txBox="1"/>
+          <p:nvPr/>
+        </p:nvSpPr>
+        <p:spPr>
+          <a:xfrm>
+            <a:off x="812800" y="6250000"/>
+            <a:ext cx="10566400" cy="220000"/>
+          </a:xfrm>
+          <a:prstGeom prst="rect">
+            <a:avLst/>
+          </a:prstGeom>
+          <a:noFill/>
+        </p:spPr>
+        <p:txBody>
+          <a:bodyPr wrap="none" lIns="0" rIns="0" tIns="0" bIns="0" anchor="ctr">
+            <a:spAutoFit/>
+          </a:bodyPr>
+          <a:lstStyle/>
+          <a:p>
+            <a:pPr algn="l"/>
+            <a:r>
+              <a:rPr sz="800" i="1" u="sng">
+                <a:solidFill>
+                  <a:srgbClr val="2A5C8F"/>
+                </a:solidFill>
+                <a:latin typeface="Nunito Sans"/>
+                <a:hlinkClick r:id="rId3"/>
+              </a:rPr>
+              <a:t>docs/assestment/verification/README.md</a:t>
+            </a:r>
+            <a:r>
+              <a:rPr sz="800" i="1">
+                <a:solidFill>
+                  <a:srgbClr val="6B6F76"/>
+                </a:solidFill>
+                <a:latin typeface="Nunito Sans"/>
+              </a:rPr>
+              <a:t> · </a:t>
+            </a:r>
+            <a:r>
+              <a:rPr sz="800" i="1" u="sng">
+                <a:solidFill>
+                  <a:srgbClr val="2A5C8F"/>
+                </a:solidFill>
+                <a:latin typeface="Nunito Sans"/>
+                <a:hlinkClick r:id="rId4"/>
+              </a:rPr>
+              <a:t>eye/camera/error_graph.py</a:t>
+            </a:r>
           </a:p>
         </p:txBody>
       </p:sp>
@@ -8320,8 +9543,8 @@
         </p:nvSpPr>
         <p:spPr>
           <a:xfrm>
-            <a:off x="812800" y="1407120"/>
-            <a:ext cx="10883392" cy="388541"/>
+            <a:off x="812800" y="1280120"/>
+            <a:ext cx="10883392" cy="360660"/>
           </a:xfrm>
           <a:prstGeom prst="rect">
             <a:avLst/>
@@ -8355,7 +9578,7 @@
               <a:buNone/>
             </a:pPr>
             <a:r>
-              <a:rPr b="1" i="0" lang="en-US" sz="2600" u="none" cap="none" strike="noStrike">
+              <a:rPr b="1" i="0" lang="en-US" sz="2400" u="none" cap="none" strike="noStrike">
                 <a:solidFill>
                   <a:srgbClr val="232323"/>
                 </a:solidFill>
@@ -8380,14 +9603,14 @@
       </p:sp>
       <p:sp>
         <p:nvSpPr>
-          <p:cNvPr id="276" name="Google Shape;276;p14"/>
+          <p:cNvPr id="281" name="Google Shape;281;p14"/>
           <p:cNvSpPr/>
           <p:nvPr/>
         </p:nvSpPr>
         <p:spPr>
           <a:xfrm>
             <a:off x="812800" y="2024246"/>
-            <a:ext cx="3386700" cy="2431800"/>
+            <a:ext cx="5083200" cy="2431800"/>
           </a:xfrm>
           <a:prstGeom prst="roundRect">
             <a:avLst>
@@ -8425,7 +9648,7 @@
       </p:sp>
       <p:sp>
         <p:nvSpPr>
-          <p:cNvPr id="277" name="Google Shape;277;p14"/>
+          <p:cNvPr id="282" name="Google Shape;282;p14"/>
           <p:cNvSpPr/>
           <p:nvPr/>
         </p:nvSpPr>
@@ -8470,7 +9693,7 @@
       </p:sp>
       <p:sp>
         <p:nvSpPr>
-          <p:cNvPr id="278" name="Google Shape;278;p14"/>
+          <p:cNvPr id="283" name="Google Shape;283;p14"/>
           <p:cNvSpPr/>
           <p:nvPr/>
         </p:nvSpPr>
@@ -8536,302 +9759,14 @@
       </p:sp>
       <p:sp>
         <p:nvSpPr>
-          <p:cNvPr id="279" name="Google Shape;279;p14"/>
+          <p:cNvPr id="284" name="Google Shape;284;p14"/>
           <p:cNvSpPr/>
           <p:nvPr/>
         </p:nvSpPr>
         <p:spPr>
           <a:xfrm>
             <a:off x="1041400" y="2773561"/>
-            <a:ext cx="3017317" cy="292100"/>
-          </a:xfrm>
-          <a:prstGeom prst="rect">
-            <a:avLst/>
-          </a:prstGeom>
-          <a:noFill/>
-          <a:ln>
-            <a:noFill/>
-          </a:ln>
-        </p:spPr>
-        <p:txBody>
-          <a:bodyPr anchorCtr="0" anchor="t" bIns="0" lIns="0" spcFirstLastPara="1" rIns="0" wrap="square" tIns="0">
-            <a:normAutofit/>
-          </a:bodyPr>
-          <a:lstStyle/>
-          <a:p>
-            <a:pPr indent="0" lvl="0" marL="0" marR="0" rtl="0" algn="l">
-              <a:lnSpc>
-                <a:spcPct val="140000"/>
-              </a:lnSpc>
-              <a:spcBef>
-                <a:spcPts val="0"/>
-              </a:spcBef>
-              <a:spcAft>
-                <a:spcPts val="0"/>
-              </a:spcAft>
-              <a:buClr>
-                <a:srgbClr val="232323"/>
-              </a:buClr>
-              <a:buSzPts val="1500"/>
-              <a:buFont typeface="Nunito Sans"/>
-              <a:buNone/>
-            </a:pPr>
-            <a:r>
-              <a:rPr b="1" i="0" lang="en-US" sz="1500" u="none" cap="none" strike="noStrike">
-                <a:solidFill>
-                  <a:srgbClr val="232323"/>
-                </a:solidFill>
-                <a:latin typeface="Nunito Sans"/>
-                <a:ea typeface="Nunito Sans"/>
-                <a:cs typeface="Nunito Sans"/>
-                <a:sym typeface="Nunito Sans"/>
-              </a:rPr>
-              <a:t>Зараз</a:t>
-            </a:r>
-            <a:endParaRPr b="0" i="0" sz="1500" u="none" cap="none" strike="noStrike">
-              <a:solidFill>
-                <a:schemeClr val="dk1"/>
-              </a:solidFill>
-              <a:latin typeface="Calibri"/>
-              <a:ea typeface="Calibri"/>
-              <a:cs typeface="Calibri"/>
-              <a:sym typeface="Calibri"/>
-            </a:endParaRPr>
-          </a:p>
-        </p:txBody>
-      </p:sp>
-      <p:sp>
-        <p:nvSpPr>
-          <p:cNvPr id="280" name="Google Shape;280;p14"/>
-          <p:cNvSpPr/>
-          <p:nvPr/>
-        </p:nvSpPr>
-        <p:spPr>
-          <a:xfrm>
-            <a:off x="1041400" y="3154561"/>
-            <a:ext cx="3017317" cy="452041"/>
-          </a:xfrm>
-          <a:prstGeom prst="rect">
-            <a:avLst/>
-          </a:prstGeom>
-          <a:noFill/>
-          <a:ln>
-            <a:noFill/>
-          </a:ln>
-        </p:spPr>
-        <p:txBody>
-          <a:bodyPr anchorCtr="0" anchor="t" bIns="0" lIns="0" spcFirstLastPara="1" rIns="0" wrap="square" tIns="0">
-            <a:normAutofit/>
-          </a:bodyPr>
-          <a:lstStyle/>
-          <a:p>
-            <a:pPr indent="0" lvl="0" marL="0" marR="0" rtl="0" algn="l">
-              <a:lnSpc>
-                <a:spcPct val="140000"/>
-              </a:lnSpc>
-              <a:spcBef>
-                <a:spcPts val="0"/>
-              </a:spcBef>
-              <a:spcAft>
-                <a:spcPts val="0"/>
-              </a:spcAft>
-              <a:buClr>
-                <a:srgbClr val="414C58"/>
-              </a:buClr>
-              <a:buSzPts val="1200"/>
-              <a:buFont typeface="Nunito Sans"/>
-              <a:buNone/>
-            </a:pPr>
-            <a:r>
-              <a:rPr b="0" i="0" lang="en-US" sz="1200" u="none" cap="none" strike="noStrike">
-                <a:solidFill>
-                  <a:srgbClr val="414C58"/>
-                </a:solidFill>
-                <a:latin typeface="Nunito Sans"/>
-                <a:ea typeface="Nunito Sans"/>
-                <a:cs typeface="Nunito Sans"/>
-                <a:sym typeface="Nunito Sans"/>
-              </a:rPr>
-              <a:t>Замкнутий контур через один канал UART, лог на SD, OLED, E-stop</a:t>
-            </a:r>
-            <a:endParaRPr b="0" i="0" sz="1200" u="none" cap="none" strike="noStrike">
-              <a:solidFill>
-                <a:schemeClr val="dk1"/>
-              </a:solidFill>
-              <a:latin typeface="Calibri"/>
-              <a:ea typeface="Calibri"/>
-              <a:cs typeface="Calibri"/>
-              <a:sym typeface="Calibri"/>
-            </a:endParaRPr>
-          </a:p>
-        </p:txBody>
-      </p:sp>
-      <p:sp>
-        <p:nvSpPr>
-          <p:cNvPr id="281" name="Google Shape;281;p14"/>
-          <p:cNvSpPr/>
-          <p:nvPr/>
-        </p:nvSpPr>
-        <p:spPr>
-          <a:xfrm>
-            <a:off x="4402750" y="2024246"/>
-            <a:ext cx="3386700" cy="2431800"/>
-          </a:xfrm>
-          <a:prstGeom prst="roundRect">
-            <a:avLst>
-              <a:gd fmla="val 7113" name="adj"/>
-            </a:avLst>
-          </a:prstGeom>
-          <a:solidFill>
-            <a:srgbClr val="ECE7E2"/>
-          </a:solidFill>
-          <a:ln>
-            <a:noFill/>
-          </a:ln>
-        </p:spPr>
-        <p:txBody>
-          <a:bodyPr anchorCtr="0" anchor="ctr" bIns="91425" lIns="91425" spcFirstLastPara="1" rIns="91425" wrap="square" tIns="91425">
-            <a:noAutofit/>
-          </a:bodyPr>
-          <a:lstStyle/>
-          <a:p>
-            <a:pPr indent="0" lvl="0" marL="0" rtl="0" algn="l">
-              <a:spcBef>
-                <a:spcPts val="0"/>
-              </a:spcBef>
-              <a:spcAft>
-                <a:spcPts val="0"/>
-              </a:spcAft>
-              <a:buNone/>
-            </a:pPr>
-            <a:r>
-              <a:t/>
-            </a:r>
-            <a:endParaRPr/>
-          </a:p>
-        </p:txBody>
-      </p:sp>
-      <p:sp>
-        <p:nvSpPr>
-          <p:cNvPr id="282" name="Google Shape;282;p14"/>
-          <p:cNvSpPr/>
-          <p:nvPr/>
-        </p:nvSpPr>
-        <p:spPr>
-          <a:xfrm>
-            <a:off x="4631234" y="2252861"/>
-            <a:ext cx="406400" cy="406400"/>
-          </a:xfrm>
-          <a:prstGeom prst="roundRect">
-            <a:avLst>
-              <a:gd fmla="val 50000" name="adj"/>
-            </a:avLst>
-          </a:prstGeom>
-          <a:solidFill>
-            <a:srgbClr val="C5D6E9"/>
-          </a:solidFill>
-          <a:ln>
-            <a:noFill/>
-          </a:ln>
-        </p:spPr>
-        <p:txBody>
-          <a:bodyPr anchorCtr="0" anchor="ctr" bIns="91425" lIns="91425" spcFirstLastPara="1" rIns="91425" wrap="square" tIns="91425">
-            <a:noAutofit/>
-          </a:bodyPr>
-          <a:lstStyle/>
-          <a:p>
-            <a:pPr indent="0" lvl="0" marL="0" rtl="0" algn="l">
-              <a:spcBef>
-                <a:spcPts val="0"/>
-              </a:spcBef>
-              <a:spcAft>
-                <a:spcPts val="0"/>
-              </a:spcAft>
-              <a:buNone/>
-            </a:pPr>
-            <a:r>
-              <a:t/>
-            </a:r>
-            <a:endParaRPr/>
-          </a:p>
-        </p:txBody>
-      </p:sp>
-      <p:sp>
-        <p:nvSpPr>
-          <p:cNvPr id="283" name="Google Shape;283;p14"/>
-          <p:cNvSpPr/>
-          <p:nvPr/>
-        </p:nvSpPr>
-        <p:spPr>
-          <a:xfrm>
-            <a:off x="4777284" y="2322711"/>
-            <a:ext cx="165100" cy="292100"/>
-          </a:xfrm>
-          <a:prstGeom prst="rect">
-            <a:avLst/>
-          </a:prstGeom>
-          <a:noFill/>
-          <a:ln>
-            <a:noFill/>
-          </a:ln>
-        </p:spPr>
-        <p:txBody>
-          <a:bodyPr anchorCtr="0" anchor="t" bIns="0" lIns="0" spcFirstLastPara="1" rIns="0" wrap="square" tIns="0">
-            <a:normAutofit/>
-          </a:bodyPr>
-          <a:lstStyle/>
-          <a:p>
-            <a:pPr indent="0" lvl="0" marL="0" marR="0" rtl="0" algn="l">
-              <a:lnSpc>
-                <a:spcPct val="140000"/>
-              </a:lnSpc>
-              <a:spcBef>
-                <a:spcPts val="0"/>
-              </a:spcBef>
-              <a:spcAft>
-                <a:spcPts val="0"/>
-              </a:spcAft>
-              <a:buClr>
-                <a:srgbClr val="232323"/>
-              </a:buClr>
-              <a:buSzPts val="1500"/>
-              <a:buFont typeface="Nunito Sans"/>
-              <a:buNone/>
-            </a:pPr>
-            <a:r>
-              <a:rPr b="1" i="0" lang="en-US" sz="1500" u="none" cap="none" strike="noStrike">
-                <a:solidFill>
-                  <a:srgbClr val="232323"/>
-                </a:solidFill>
-                <a:latin typeface="Nunito Sans"/>
-                <a:ea typeface="Nunito Sans"/>
-                <a:cs typeface="Nunito Sans"/>
-                <a:sym typeface="Nunito Sans"/>
-              </a:rPr>
-              <a:t>2</a:t>
-            </a:r>
-            <a:endParaRPr b="0" i="0" sz="1500" u="none" cap="none" strike="noStrike">
-              <a:solidFill>
-                <a:schemeClr val="dk1"/>
-              </a:solidFill>
-              <a:latin typeface="Calibri"/>
-              <a:ea typeface="Calibri"/>
-              <a:cs typeface="Calibri"/>
-              <a:sym typeface="Calibri"/>
-            </a:endParaRPr>
-          </a:p>
-        </p:txBody>
-      </p:sp>
-      <p:sp>
-        <p:nvSpPr>
-          <p:cNvPr id="284" name="Google Shape;284;p14"/>
-          <p:cNvSpPr/>
-          <p:nvPr/>
-        </p:nvSpPr>
-        <p:spPr>
-          <a:xfrm>
-            <a:off x="4631234" y="2773561"/>
-            <a:ext cx="3017419" cy="292100"/>
+            <a:ext cx="4626000" cy="292100"/>
           </a:xfrm>
           <a:prstGeom prst="rect">
             <a:avLst/>
@@ -8896,8 +9831,8 @@
         </p:nvSpPr>
         <p:spPr>
           <a:xfrm>
-            <a:off x="7992575" y="2024246"/>
-            <a:ext cx="3386700" cy="2431800"/>
+            <a:off x="6296000" y="2024246"/>
+            <a:ext cx="5083200" cy="2431800"/>
           </a:xfrm>
           <a:prstGeom prst="roundRect">
             <a:avLst>
@@ -8941,7 +9876,7 @@
         </p:nvSpPr>
         <p:spPr>
           <a:xfrm>
-            <a:off x="8221166" y="2252861"/>
+            <a:off x="6524600" y="2252861"/>
             <a:ext cx="406400" cy="406400"/>
           </a:xfrm>
           <a:prstGeom prst="roundRect">
@@ -8986,7 +9921,7 @@
         </p:nvSpPr>
         <p:spPr>
           <a:xfrm>
-            <a:off x="8367216" y="2322711"/>
+            <a:off x="6670650" y="2322711"/>
             <a:ext cx="165100" cy="292100"/>
           </a:xfrm>
           <a:prstGeom prst="rect">
@@ -9030,7 +9965,7 @@
                 <a:cs typeface="Nunito Sans"/>
                 <a:sym typeface="Nunito Sans"/>
               </a:rPr>
-              <a:t>3</a:t>
+              <a:t>2</a:t>
             </a:r>
             <a:endParaRPr b="0" i="0" sz="1500" u="none" cap="none" strike="noStrike">
               <a:solidFill>
@@ -9052,8 +9987,8 @@
         </p:nvSpPr>
         <p:spPr>
           <a:xfrm>
-            <a:off x="8221166" y="2773561"/>
-            <a:ext cx="3017317" cy="292100"/>
+            <a:off x="6524600" y="2773561"/>
+            <a:ext cx="4626000" cy="292100"/>
           </a:xfrm>
           <a:prstGeom prst="rect">
             <a:avLst/>
@@ -9113,127 +10048,13 @@
       <p:sp>
         <p:nvSpPr>
           <p:cNvPr id="289" name="Google Shape;289;p14"/>
-          <p:cNvSpPr/>
-          <p:nvPr/>
-        </p:nvSpPr>
-        <p:spPr>
-          <a:xfrm>
-            <a:off x="8221166" y="3154561"/>
-            <a:ext cx="3017317" cy="452041"/>
-          </a:xfrm>
-          <a:prstGeom prst="rect">
-            <a:avLst/>
-          </a:prstGeom>
-          <a:noFill/>
-          <a:ln>
-            <a:noFill/>
-          </a:ln>
-        </p:spPr>
-        <p:txBody>
-          <a:bodyPr anchorCtr="0" anchor="t" bIns="0" lIns="0" spcFirstLastPara="1" rIns="0" wrap="square" tIns="0">
-            <a:normAutofit/>
-          </a:bodyPr>
-          <a:lstStyle/>
-          <a:p>
-            <a:pPr indent="0" lvl="0" marL="0" marR="0" rtl="0" algn="l">
-              <a:lnSpc>
-                <a:spcPct val="140000"/>
-              </a:lnSpc>
-              <a:spcBef>
-                <a:spcPts val="0"/>
-              </a:spcBef>
-              <a:spcAft>
-                <a:spcPts val="0"/>
-              </a:spcAft>
-              <a:buClr>
-                <a:srgbClr val="414C58"/>
-              </a:buClr>
-              <a:buSzPts val="1200"/>
-              <a:buFont typeface="Nunito Sans"/>
-              <a:buNone/>
-            </a:pPr>
-            <a:r>
-              <a:rPr b="0" i="0" lang="en-US" sz="1200" u="none" cap="none" strike="noStrike">
-                <a:solidFill>
-                  <a:srgbClr val="414C58"/>
-                </a:solidFill>
-                <a:latin typeface="Nunito Sans"/>
-                <a:ea typeface="Nunito Sans"/>
-                <a:cs typeface="Nunito Sans"/>
-                <a:sym typeface="Nunito Sans"/>
-              </a:rPr>
-              <a:t>Бездротовий пульт (</a:t>
-            </a:r>
-            <a:r>
-              <a:rPr b="1" i="0" lang="en-US" sz="1200" u="none" cap="none" strike="noStrike">
-                <a:solidFill>
-                  <a:srgbClr val="414C58"/>
-                </a:solidFill>
-                <a:latin typeface="Nunito Sans"/>
-                <a:ea typeface="Nunito Sans"/>
-                <a:cs typeface="Nunito Sans"/>
-                <a:sym typeface="Nunito Sans"/>
-              </a:rPr>
-              <a:t>pilot</a:t>
-            </a:r>
-            <a:r>
-              <a:rPr b="0" i="0" lang="en-US" sz="1200" u="none" cap="none" strike="noStrike">
-                <a:solidFill>
-                  <a:srgbClr val="414C58"/>
-                </a:solidFill>
-                <a:latin typeface="Nunito Sans"/>
-                <a:ea typeface="Nunito Sans"/>
-                <a:cs typeface="Nunito Sans"/>
-                <a:sym typeface="Nunito Sans"/>
-              </a:rPr>
-              <a:t>, ESP32-C3), MQTT, вузол зберігання (</a:t>
-            </a:r>
-            <a:r>
-              <a:rPr b="1" i="0" lang="en-US" sz="1200" u="none" cap="none" strike="noStrike">
-                <a:solidFill>
-                  <a:srgbClr val="414C58"/>
-                </a:solidFill>
-                <a:latin typeface="Nunito Sans"/>
-                <a:ea typeface="Nunito Sans"/>
-                <a:cs typeface="Nunito Sans"/>
-                <a:sym typeface="Nunito Sans"/>
-              </a:rPr>
-              <a:t>vault</a:t>
-            </a:r>
-            <a:r>
-              <a:rPr b="0" i="0" lang="en-US" sz="1200" u="none" cap="none" strike="noStrike">
-                <a:solidFill>
-                  <a:srgbClr val="414C58"/>
-                </a:solidFill>
-                <a:latin typeface="Nunito Sans"/>
-                <a:ea typeface="Nunito Sans"/>
-                <a:cs typeface="Nunito Sans"/>
-                <a:sym typeface="Nunito Sans"/>
-              </a:rPr>
-              <a:t>, STM32)</a:t>
-            </a:r>
-            <a:endParaRPr b="0" i="0" sz="1200" u="none" cap="none" strike="noStrike">
-              <a:solidFill>
-                <a:schemeClr val="dk1"/>
-              </a:solidFill>
-              <a:latin typeface="Calibri"/>
-              <a:ea typeface="Calibri"/>
-              <a:cs typeface="Calibri"/>
-              <a:sym typeface="Calibri"/>
-            </a:endParaRPr>
-          </a:p>
-        </p:txBody>
-      </p:sp>
-      <p:sp>
-        <p:nvSpPr>
-          <p:cNvPr id="290" name="Google Shape;290;p14"/>
           <p:cNvSpPr txBox="1"/>
           <p:nvPr/>
         </p:nvSpPr>
         <p:spPr>
           <a:xfrm>
-            <a:off x="4675900" y="3116450"/>
-            <a:ext cx="3017400" cy="831300"/>
+            <a:off x="6524600" y="3154561"/>
+            <a:ext cx="4626000" cy="1200000"/>
           </a:xfrm>
           <a:prstGeom prst="rect">
             <a:avLst/>
@@ -9257,11 +10078,25 @@
                 <a:spcPts val="0"/>
               </a:spcAft>
               <a:buSzPts val="1400"/>
-              <a:buChar char="-"/>
+              <a:buChar char="→"/>
             </a:pPr>
             <a:r>
-              <a:rPr lang="en-US"/>
-              <a:t>Покращити монтаж проводки</a:t>
+              <a:rPr lang="en-US" sz="1200" b="1">
+                <a:solidFill>
+                  <a:srgbClr val="414C58"/>
+                </a:solidFill>
+                <a:latin typeface="Nunito Sans"/>
+              </a:rPr>
+              <a:t>YOLO</a:t>
+            </a:r>
+            <a:r>
+              <a:rPr lang="en-US" sz="1200" b="0">
+                <a:solidFill>
+                  <a:srgbClr val="414C58"/>
+                </a:solidFill>
+                <a:latin typeface="Nunito Sans"/>
+              </a:rPr>
+              <a:t>-детекція просто на камері</a:t>
             </a:r>
             <a:endParaRPr/>
           </a:p>
@@ -9274,11 +10109,25 @@
                 <a:spcPts val="0"/>
               </a:spcAft>
               <a:buSzPts val="1400"/>
-              <a:buChar char="-"/>
+              <a:buChar char="→"/>
             </a:pPr>
             <a:r>
-              <a:rPr lang="en-US"/>
-              <a:t>Єдине джерело живлення</a:t>
+              <a:rPr lang="en-US" sz="1200" b="1">
+                <a:solidFill>
+                  <a:srgbClr val="414C58"/>
+                </a:solidFill>
+                <a:latin typeface="Nunito Sans"/>
+              </a:rPr>
+              <a:t>NRF24L01+</a:t>
+            </a:r>
+            <a:r>
+              <a:rPr lang="en-US" sz="1200" b="0">
+                <a:solidFill>
+                  <a:srgbClr val="414C58"/>
+                </a:solidFill>
+                <a:latin typeface="Nunito Sans"/>
+              </a:rPr>
+              <a:t> як альтернативний канал</a:t>
             </a:r>
             <a:endParaRPr/>
           </a:p>
@@ -9291,13 +10140,190 @@
                 <a:spcPts val="0"/>
               </a:spcAft>
               <a:buSzPts val="1400"/>
-              <a:buChar char="-"/>
+              <a:buChar char="→"/>
             </a:pPr>
             <a:r>
-              <a:rPr lang="en-US"/>
-              <a:t>TBD</a:t>
+              <a:rPr lang="en-US" sz="1200" b="0">
+                <a:solidFill>
+                  <a:srgbClr val="414C58"/>
+                </a:solidFill>
+                <a:latin typeface="Nunito Sans"/>
+              </a:rPr>
+              <a:t>Feed-forward за швидкістю цілі</a:t>
             </a:r>
             <a:endParaRPr/>
+          </a:p>
+          <a:p>
+            <a:pPr indent="-317500" lvl="0" marL="457200" rtl="0" algn="l">
+              <a:spcBef>
+                <a:spcPts val="0"/>
+              </a:spcBef>
+              <a:spcAft>
+                <a:spcPts val="0"/>
+              </a:spcAft>
+              <a:buSzPts val="1400"/>
+              <a:buChar char="→"/>
+            </a:pPr>
+            <a:r>
+              <a:rPr lang="en-US" sz="1200" b="0">
+                <a:solidFill>
+                  <a:srgbClr val="414C58"/>
+                </a:solidFill>
+                <a:latin typeface="Nunito Sans"/>
+              </a:rPr>
+              <a:t>OLED-меню на пульті PILOT</a:t>
+            </a:r>
+            <a:endParaRPr/>
+          </a:p>
+        </p:txBody>
+      </p:sp>
+      <p:sp>
+        <p:nvSpPr>
+          <p:cNvPr id="290" name="Google Shape;290;p14"/>
+          <p:cNvSpPr txBox="1"/>
+          <p:nvPr/>
+        </p:nvSpPr>
+        <p:spPr>
+          <a:xfrm>
+            <a:off x="1041400" y="3154561"/>
+            <a:ext cx="4626000" cy="1200000"/>
+          </a:xfrm>
+          <a:prstGeom prst="rect">
+            <a:avLst/>
+          </a:prstGeom>
+          <a:noFill/>
+          <a:ln>
+            <a:noFill/>
+          </a:ln>
+        </p:spPr>
+        <p:txBody>
+          <a:bodyPr anchorCtr="0" anchor="t" bIns="91425" lIns="91425" spcFirstLastPara="1" rIns="91425" wrap="square" tIns="91425">
+            <a:spAutoFit/>
+          </a:bodyPr>
+          <a:lstStyle/>
+          <a:p>
+            <a:pPr indent="-317500" lvl="0" marL="457200" rtl="0" algn="l">
+              <a:spcBef>
+                <a:spcPts val="0"/>
+              </a:spcBef>
+              <a:spcAft>
+                <a:spcPts val="0"/>
+              </a:spcAft>
+              <a:buSzPts val="1400"/>
+              <a:buChar char="→"/>
+            </a:pPr>
+            <a:r>
+              <a:rPr lang="en-US" sz="1200" b="0">
+                <a:solidFill>
+                  <a:srgbClr val="414C58"/>
+                </a:solidFill>
+                <a:latin typeface="Nunito Sans"/>
+              </a:rPr>
+              <a:t>PILOT (ESP32-C3): джойстик, дистанційний E-stop</a:t>
+            </a:r>
+            <a:endParaRPr/>
+          </a:p>
+          <a:p>
+            <a:pPr indent="-317500" lvl="0" marL="457200" rtl="0" algn="l">
+              <a:spcBef>
+                <a:spcPts val="0"/>
+              </a:spcBef>
+              <a:spcAft>
+                <a:spcPts val="0"/>
+              </a:spcAft>
+              <a:buSzPts val="1400"/>
+              <a:buChar char="→"/>
+            </a:pPr>
+            <a:r>
+              <a:rPr lang="en-US" sz="1200" b="0">
+                <a:solidFill>
+                  <a:srgbClr val="414C58"/>
+                </a:solidFill>
+                <a:latin typeface="Nunito Sans"/>
+              </a:rPr>
+              <a:t>MQTT конфіг-план і WiFi-телеметрія</a:t>
+            </a:r>
+            <a:endParaRPr/>
+          </a:p>
+          <a:p>
+            <a:pPr indent="-317500" lvl="0" marL="457200" rtl="0" algn="l">
+              <a:spcBef>
+                <a:spcPts val="0"/>
+              </a:spcBef>
+              <a:spcAft>
+                <a:spcPts val="0"/>
+              </a:spcAft>
+              <a:buSzPts val="1400"/>
+              <a:buChar char="→"/>
+            </a:pPr>
+            <a:r>
+              <a:rPr lang="en-US" sz="1200" b="0">
+                <a:solidFill>
+                  <a:srgbClr val="414C58"/>
+                </a:solidFill>
+                <a:latin typeface="Nunito Sans"/>
+              </a:rPr>
+              <a:t>VAULT (STM32): окремий вузол зберігання</a:t>
+            </a:r>
+            <a:endParaRPr/>
+          </a:p>
+          <a:p>
+            <a:pPr indent="-317500" lvl="0" marL="457200" rtl="0" algn="l">
+              <a:spcBef>
+                <a:spcPts val="0"/>
+              </a:spcBef>
+              <a:spcAft>
+                <a:spcPts val="0"/>
+              </a:spcAft>
+              <a:buSzPts val="1400"/>
+              <a:buChar char="→"/>
+            </a:pPr>
+            <a:r>
+              <a:rPr lang="en-US" sz="1200" b="0">
+                <a:solidFill>
+                  <a:srgbClr val="414C58"/>
+                </a:solidFill>
+                <a:latin typeface="Nunito Sans"/>
+              </a:rPr>
+              <a:t>Лазер на MOSFET з ШІМ-яскравістю</a:t>
+            </a:r>
+            <a:endParaRPr/>
+          </a:p>
+        </p:txBody>
+      </p:sp>
+      <p:sp>
+        <p:nvSpPr>
+          <p:cNvPr id="291" name="TextBox 290"/>
+          <p:cNvSpPr txBox="1"/>
+          <p:nvPr/>
+        </p:nvSpPr>
+        <p:spPr>
+          <a:xfrm>
+            <a:off x="812800" y="6250000"/>
+            <a:ext cx="10566400" cy="220000"/>
+          </a:xfrm>
+          <a:prstGeom prst="rect">
+            <a:avLst/>
+          </a:prstGeom>
+          <a:noFill/>
+        </p:spPr>
+        <p:txBody>
+          <a:bodyPr wrap="none" lIns="0" rIns="0" tIns="0" bIns="0" anchor="ctr">
+            <a:spAutoFit/>
+          </a:bodyPr>
+          <a:lstStyle/>
+          <a:p>
+            <a:pPr algn="l"/>
+            <a:r>
+              <a:rPr sz="800" i="1" u="sng">
+                <a:solidFill>
+                  <a:srgbClr val="2A5C8F"/>
+                </a:solidFill>
+                <a:latin typeface="Nunito Sans"/>
+                <a:hlinkClick r:id="rId3"/>
+              </a:rPr>
+              <a:t>README.md</a:t>
+            </a:r>
           </a:p>
         </p:txBody>
       </p:sp>
@@ -9452,8 +10478,8 @@
         </p:nvSpPr>
         <p:spPr>
           <a:xfrm>
-            <a:off x="812800" y="1356320"/>
-            <a:ext cx="10883392" cy="444500"/>
+            <a:off x="812800" y="1280120"/>
+            <a:ext cx="10883392" cy="360660"/>
           </a:xfrm>
           <a:prstGeom prst="rect">
             <a:avLst/>
@@ -9487,7 +10513,7 @@
               <a:buNone/>
             </a:pPr>
             <a:r>
-              <a:rPr b="1" i="0" lang="en-US" sz="3000" u="none" cap="none" strike="noStrike">
+              <a:rPr b="1" i="0" lang="en-US" sz="2400" u="none" cap="none" strike="noStrike">
                 <a:solidFill>
                   <a:srgbClr val="232323"/>
                 </a:solidFill>
@@ -9523,9 +10549,9 @@
         <a:graphic>
           <a:graphicData uri="http://schemas.openxmlformats.org/drawingml/2006/table">
             <a:tbl>
-              <a:tblPr>
+              <a:tblPr firstRow="0" bandRow="0">
                 <a:noFill/>
-                <a:tableStyleId>{9E538C2C-0403-4DD1-BF6D-4BBF76AF478C}</a:tableStyleId>
+                <a:tableStyleId>{5940675A-B579-460E-94D1-54222C63F5DA}</a:tableStyleId>
               </a:tblPr>
               <a:tblGrid>
                 <a:gridCol w="2324600"/>
@@ -9555,7 +10581,7 @@
                         <a:buNone/>
                       </a:pPr>
                       <a:r>
-                        <a:rPr b="1" lang="en-US" sz="1400" u="none" cap="none" strike="noStrike">
+                        <a:rPr b="1" lang="en-US" sz="1100" u="none" cap="none" strike="noStrike">
                           <a:solidFill>
                             <a:srgbClr val="232323"/>
                           </a:solidFill>
@@ -9566,7 +10592,7 @@
                         </a:rPr>
                         <a:t>Параметр</a:t>
                       </a:r>
-                      <a:endParaRPr sz="1400" u="none" cap="none" strike="noStrike">
+                      <a:endParaRPr sz="1100" u="none" cap="none" strike="noStrike">
                         <a:latin typeface="Nunito Sans"/>
                         <a:ea typeface="Nunito Sans"/>
                         <a:cs typeface="Nunito Sans"/>
@@ -9575,41 +10601,20 @@
                     </a:p>
                   </a:txBody>
                   <a:tcPr marT="62225" marB="62225" marR="62225" marL="62225">
-                    <a:lnL cap="flat" cmpd="sng" w="12700">
+                    <a:lnL w="12700" cap="flat" cmpd="sng" algn="ctr">
+                      <a:noFill/>
+                    </a:lnL>
+                    <a:lnR w="12700" cap="flat" cmpd="sng" algn="ctr">
+                      <a:noFill/>
+                    </a:lnR>
+                    <a:lnT w="12700" cap="flat" cmpd="sng" algn="ctr">
+                      <a:noFill/>
+                    </a:lnT>
+                    <a:lnB w="6350" cap="flat" cmpd="sng" algn="ctr">
                       <a:solidFill>
-                        <a:srgbClr val="C8C8C7"/>
+                        <a:srgbClr val="D9D9D9"/>
                       </a:solidFill>
                       <a:prstDash val="solid"/>
-                      <a:round/>
-                      <a:headEnd len="sm" w="sm" type="none"/>
-                      <a:tailEnd len="sm" w="sm" type="none"/>
-                    </a:lnL>
-                    <a:lnR cap="flat" cmpd="sng" w="12700">
-                      <a:solidFill>
-                        <a:srgbClr val="C8C8C7"/>
-                      </a:solidFill>
-                      <a:prstDash val="solid"/>
-                      <a:round/>
-                      <a:headEnd len="sm" w="sm" type="none"/>
-                      <a:tailEnd len="sm" w="sm" type="none"/>
-                    </a:lnR>
-                    <a:lnT cap="flat" cmpd="sng" w="12700">
-                      <a:solidFill>
-                        <a:srgbClr val="C8C8C7"/>
-                      </a:solidFill>
-                      <a:prstDash val="solid"/>
-                      <a:round/>
-                      <a:headEnd len="sm" w="sm" type="none"/>
-                      <a:tailEnd len="sm" w="sm" type="none"/>
-                    </a:lnT>
-                    <a:lnB cap="flat" cmpd="sng" w="12700">
-                      <a:solidFill>
-                        <a:srgbClr val="C8C8C7"/>
-                      </a:solidFill>
-                      <a:prstDash val="solid"/>
-                      <a:round/>
-                      <a:headEnd len="sm" w="sm" type="none"/>
-                      <a:tailEnd len="sm" w="sm" type="none"/>
                     </a:lnB>
                     <a:solidFill>
                       <a:srgbClr val="C5D6E9"/>
@@ -9639,7 +10644,7 @@
                         <a:buNone/>
                       </a:pPr>
                       <a:r>
-                        <a:rPr b="1" lang="en-US" sz="1400" u="none" cap="none" strike="noStrike">
+                        <a:rPr b="1" lang="en-US" sz="1100" u="none" cap="none" strike="noStrike">
                           <a:solidFill>
                             <a:srgbClr val="232323"/>
                           </a:solidFill>
@@ -9650,7 +10655,7 @@
                         </a:rPr>
                         <a:t>Значення</a:t>
                       </a:r>
-                      <a:endParaRPr sz="1400" u="none" cap="none" strike="noStrike">
+                      <a:endParaRPr sz="1100" u="none" cap="none" strike="noStrike">
                         <a:latin typeface="Nunito Sans"/>
                         <a:ea typeface="Nunito Sans"/>
                         <a:cs typeface="Nunito Sans"/>
@@ -9659,41 +10664,20 @@
                     </a:p>
                   </a:txBody>
                   <a:tcPr marT="62225" marB="62225" marR="62225" marL="62225">
-                    <a:lnL cap="flat" cmpd="sng" w="12700">
+                    <a:lnL w="12700" cap="flat" cmpd="sng" algn="ctr">
+                      <a:noFill/>
+                    </a:lnL>
+                    <a:lnR w="12700" cap="flat" cmpd="sng" algn="ctr">
+                      <a:noFill/>
+                    </a:lnR>
+                    <a:lnT w="12700" cap="flat" cmpd="sng" algn="ctr">
+                      <a:noFill/>
+                    </a:lnT>
+                    <a:lnB w="6350" cap="flat" cmpd="sng" algn="ctr">
                       <a:solidFill>
-                        <a:srgbClr val="C8C8C7"/>
+                        <a:srgbClr val="D9D9D9"/>
                       </a:solidFill>
                       <a:prstDash val="solid"/>
-                      <a:round/>
-                      <a:headEnd len="sm" w="sm" type="none"/>
-                      <a:tailEnd len="sm" w="sm" type="none"/>
-                    </a:lnL>
-                    <a:lnR cap="flat" cmpd="sng" w="12700">
-                      <a:solidFill>
-                        <a:srgbClr val="C8C8C7"/>
-                      </a:solidFill>
-                      <a:prstDash val="solid"/>
-                      <a:round/>
-                      <a:headEnd len="sm" w="sm" type="none"/>
-                      <a:tailEnd len="sm" w="sm" type="none"/>
-                    </a:lnR>
-                    <a:lnT cap="flat" cmpd="sng" w="12700">
-                      <a:solidFill>
-                        <a:srgbClr val="C8C8C7"/>
-                      </a:solidFill>
-                      <a:prstDash val="solid"/>
-                      <a:round/>
-                      <a:headEnd len="sm" w="sm" type="none"/>
-                      <a:tailEnd len="sm" w="sm" type="none"/>
-                    </a:lnT>
-                    <a:lnB cap="flat" cmpd="sng" w="12700">
-                      <a:solidFill>
-                        <a:srgbClr val="C8C8C7"/>
-                      </a:solidFill>
-                      <a:prstDash val="solid"/>
-                      <a:round/>
-                      <a:headEnd len="sm" w="sm" type="none"/>
-                      <a:tailEnd len="sm" w="sm" type="none"/>
                     </a:lnB>
                     <a:solidFill>
                       <a:srgbClr val="C5D6E9"/>
@@ -9725,7 +10709,7 @@
                         <a:buNone/>
                       </a:pPr>
                       <a:r>
-                        <a:rPr lang="en-US" sz="1400" u="none" cap="none" strike="noStrike">
+                        <a:rPr lang="en-US" sz="1100" u="none" cap="none" strike="noStrike">
                           <a:solidFill>
                             <a:srgbClr val="232323"/>
                           </a:solidFill>
@@ -9736,7 +10720,7 @@
                         </a:rPr>
                         <a:t>Завдання</a:t>
                       </a:r>
-                      <a:endParaRPr sz="1400" u="none" cap="none" strike="noStrike">
+                      <a:endParaRPr sz="1100" u="none" cap="none" strike="noStrike">
                         <a:latin typeface="Nunito Sans"/>
                         <a:ea typeface="Nunito Sans"/>
                         <a:cs typeface="Nunito Sans"/>
@@ -9745,41 +10729,20 @@
                     </a:p>
                   </a:txBody>
                   <a:tcPr marT="62225" marB="62225" marR="62225" marL="62225">
-                    <a:lnL cap="flat" cmpd="sng" w="12700">
+                    <a:lnL w="12700" cap="flat" cmpd="sng" algn="ctr">
+                      <a:noFill/>
+                    </a:lnL>
+                    <a:lnR w="12700" cap="flat" cmpd="sng" algn="ctr">
+                      <a:noFill/>
+                    </a:lnR>
+                    <a:lnT w="12700" cap="flat" cmpd="sng" algn="ctr">
+                      <a:noFill/>
+                    </a:lnT>
+                    <a:lnB w="6350" cap="flat" cmpd="sng" algn="ctr">
                       <a:solidFill>
-                        <a:srgbClr val="C8C8C7"/>
+                        <a:srgbClr val="D9D9D9"/>
                       </a:solidFill>
                       <a:prstDash val="solid"/>
-                      <a:round/>
-                      <a:headEnd len="sm" w="sm" type="none"/>
-                      <a:tailEnd len="sm" w="sm" type="none"/>
-                    </a:lnL>
-                    <a:lnR cap="flat" cmpd="sng" w="12700">
-                      <a:solidFill>
-                        <a:srgbClr val="C8C8C7"/>
-                      </a:solidFill>
-                      <a:prstDash val="solid"/>
-                      <a:round/>
-                      <a:headEnd len="sm" w="sm" type="none"/>
-                      <a:tailEnd len="sm" w="sm" type="none"/>
-                    </a:lnR>
-                    <a:lnT cap="flat" cmpd="sng" w="12700">
-                      <a:solidFill>
-                        <a:srgbClr val="C8C8C7"/>
-                      </a:solidFill>
-                      <a:prstDash val="solid"/>
-                      <a:round/>
-                      <a:headEnd len="sm" w="sm" type="none"/>
-                      <a:tailEnd len="sm" w="sm" type="none"/>
-                    </a:lnT>
-                    <a:lnB cap="flat" cmpd="sng" w="12700">
-                      <a:solidFill>
-                        <a:srgbClr val="C8C8C7"/>
-                      </a:solidFill>
-                      <a:prstDash val="solid"/>
-                      <a:round/>
-                      <a:headEnd len="sm" w="sm" type="none"/>
-                      <a:tailEnd len="sm" w="sm" type="none"/>
                     </a:lnB>
                     <a:solidFill>
                       <a:srgbClr val="FFFFFF"/>
@@ -9809,7 +10772,7 @@
                         <a:buNone/>
                       </a:pPr>
                       <a:r>
-                        <a:rPr lang="en-US" sz="1400" u="none" cap="none" strike="noStrike">
+                        <a:rPr lang="en-US" sz="1100" u="none" cap="none" strike="noStrike">
                           <a:solidFill>
                             <a:srgbClr val="232323"/>
                           </a:solidFill>
@@ -9820,7 +10783,7 @@
                         </a:rPr>
                         <a:t>Навести лазерну точку на ціль, використовуючи камеру як зворотний зв'язок</a:t>
                       </a:r>
-                      <a:endParaRPr sz="1400" u="none" cap="none" strike="noStrike">
+                      <a:endParaRPr sz="1100" u="none" cap="none" strike="noStrike">
                         <a:latin typeface="Nunito Sans"/>
                         <a:ea typeface="Nunito Sans"/>
                         <a:cs typeface="Nunito Sans"/>
@@ -9829,41 +10792,20 @@
                     </a:p>
                   </a:txBody>
                   <a:tcPr marT="62225" marB="62225" marR="62225" marL="62225">
-                    <a:lnL cap="flat" cmpd="sng" w="12700">
+                    <a:lnL w="12700" cap="flat" cmpd="sng" algn="ctr">
+                      <a:noFill/>
+                    </a:lnL>
+                    <a:lnR w="12700" cap="flat" cmpd="sng" algn="ctr">
+                      <a:noFill/>
+                    </a:lnR>
+                    <a:lnT w="12700" cap="flat" cmpd="sng" algn="ctr">
+                      <a:noFill/>
+                    </a:lnT>
+                    <a:lnB w="6350" cap="flat" cmpd="sng" algn="ctr">
                       <a:solidFill>
-                        <a:srgbClr val="C8C8C7"/>
+                        <a:srgbClr val="D9D9D9"/>
                       </a:solidFill>
                       <a:prstDash val="solid"/>
-                      <a:round/>
-                      <a:headEnd len="sm" w="sm" type="none"/>
-                      <a:tailEnd len="sm" w="sm" type="none"/>
-                    </a:lnL>
-                    <a:lnR cap="flat" cmpd="sng" w="12700">
-                      <a:solidFill>
-                        <a:srgbClr val="C8C8C7"/>
-                      </a:solidFill>
-                      <a:prstDash val="solid"/>
-                      <a:round/>
-                      <a:headEnd len="sm" w="sm" type="none"/>
-                      <a:tailEnd len="sm" w="sm" type="none"/>
-                    </a:lnR>
-                    <a:lnT cap="flat" cmpd="sng" w="12700">
-                      <a:solidFill>
-                        <a:srgbClr val="C8C8C7"/>
-                      </a:solidFill>
-                      <a:prstDash val="solid"/>
-                      <a:round/>
-                      <a:headEnd len="sm" w="sm" type="none"/>
-                      <a:tailEnd len="sm" w="sm" type="none"/>
-                    </a:lnT>
-                    <a:lnB cap="flat" cmpd="sng" w="12700">
-                      <a:solidFill>
-                        <a:srgbClr val="C8C8C7"/>
-                      </a:solidFill>
-                      <a:prstDash val="solid"/>
-                      <a:round/>
-                      <a:headEnd len="sm" w="sm" type="none"/>
-                      <a:tailEnd len="sm" w="sm" type="none"/>
                     </a:lnB>
                     <a:solidFill>
                       <a:srgbClr val="FFFFFF"/>
@@ -9895,7 +10837,7 @@
                         <a:buNone/>
                       </a:pPr>
                       <a:r>
-                        <a:rPr lang="en-US" sz="1400" u="none" cap="none" strike="noStrike">
+                        <a:rPr lang="en-US" sz="1100" u="none" cap="none" strike="noStrike">
                           <a:solidFill>
                             <a:srgbClr val="232323"/>
                           </a:solidFill>
@@ -9906,7 +10848,7 @@
                         </a:rPr>
                         <a:t>Затримка</a:t>
                       </a:r>
-                      <a:endParaRPr sz="1400" u="none" cap="none" strike="noStrike">
+                      <a:endParaRPr sz="1100" u="none" cap="none" strike="noStrike">
                         <a:latin typeface="Nunito Sans"/>
                         <a:ea typeface="Nunito Sans"/>
                         <a:cs typeface="Nunito Sans"/>
@@ -9915,41 +10857,20 @@
                     </a:p>
                   </a:txBody>
                   <a:tcPr marT="62225" marB="62225" marR="62225" marL="62225">
-                    <a:lnL cap="flat" cmpd="sng" w="12700">
+                    <a:lnL w="12700" cap="flat" cmpd="sng" algn="ctr">
+                      <a:noFill/>
+                    </a:lnL>
+                    <a:lnR w="12700" cap="flat" cmpd="sng" algn="ctr">
+                      <a:noFill/>
+                    </a:lnR>
+                    <a:lnT w="12700" cap="flat" cmpd="sng" algn="ctr">
+                      <a:noFill/>
+                    </a:lnT>
+                    <a:lnB w="6350" cap="flat" cmpd="sng" algn="ctr">
                       <a:solidFill>
-                        <a:srgbClr val="C8C8C7"/>
+                        <a:srgbClr val="D9D9D9"/>
                       </a:solidFill>
                       <a:prstDash val="solid"/>
-                      <a:round/>
-                      <a:headEnd len="sm" w="sm" type="none"/>
-                      <a:tailEnd len="sm" w="sm" type="none"/>
-                    </a:lnL>
-                    <a:lnR cap="flat" cmpd="sng" w="12700">
-                      <a:solidFill>
-                        <a:srgbClr val="C8C8C7"/>
-                      </a:solidFill>
-                      <a:prstDash val="solid"/>
-                      <a:round/>
-                      <a:headEnd len="sm" w="sm" type="none"/>
-                      <a:tailEnd len="sm" w="sm" type="none"/>
-                    </a:lnR>
-                    <a:lnT cap="flat" cmpd="sng" w="12700">
-                      <a:solidFill>
-                        <a:srgbClr val="C8C8C7"/>
-                      </a:solidFill>
-                      <a:prstDash val="solid"/>
-                      <a:round/>
-                      <a:headEnd len="sm" w="sm" type="none"/>
-                      <a:tailEnd len="sm" w="sm" type="none"/>
-                    </a:lnT>
-                    <a:lnB cap="flat" cmpd="sng" w="12700">
-                      <a:solidFill>
-                        <a:srgbClr val="C8C8C7"/>
-                      </a:solidFill>
-                      <a:prstDash val="solid"/>
-                      <a:round/>
-                      <a:headEnd len="sm" w="sm" type="none"/>
-                      <a:tailEnd len="sm" w="sm" type="none"/>
                     </a:lnB>
                     <a:solidFill>
                       <a:srgbClr val="ECE7E2"/>
@@ -9979,7 +10900,7 @@
                         <a:buNone/>
                       </a:pPr>
                       <a:r>
-                        <a:rPr lang="en-US" sz="1400" u="none" cap="none" strike="noStrike">
+                        <a:rPr lang="en-US" sz="1100" u="none" cap="none" strike="noStrike">
                           <a:solidFill>
                             <a:srgbClr val="232323"/>
                           </a:solidFill>
@@ -9990,7 +10911,7 @@
                         </a:rPr>
                         <a:t>Камера → розпізнавання → канал зв'язку займають 50–250 мс. Це обмежує підсилення</a:t>
                       </a:r>
-                      <a:endParaRPr sz="1400" u="none" cap="none" strike="noStrike">
+                      <a:endParaRPr sz="1100" u="none" cap="none" strike="noStrike">
                         <a:latin typeface="Nunito Sans"/>
                         <a:ea typeface="Nunito Sans"/>
                         <a:cs typeface="Nunito Sans"/>
@@ -9999,41 +10920,20 @@
                     </a:p>
                   </a:txBody>
                   <a:tcPr marT="62225" marB="62225" marR="62225" marL="62225">
-                    <a:lnL cap="flat" cmpd="sng" w="12700">
+                    <a:lnL w="12700" cap="flat" cmpd="sng" algn="ctr">
+                      <a:noFill/>
+                    </a:lnL>
+                    <a:lnR w="12700" cap="flat" cmpd="sng" algn="ctr">
+                      <a:noFill/>
+                    </a:lnR>
+                    <a:lnT w="12700" cap="flat" cmpd="sng" algn="ctr">
+                      <a:noFill/>
+                    </a:lnT>
+                    <a:lnB w="6350" cap="flat" cmpd="sng" algn="ctr">
                       <a:solidFill>
-                        <a:srgbClr val="C8C8C7"/>
+                        <a:srgbClr val="D9D9D9"/>
                       </a:solidFill>
                       <a:prstDash val="solid"/>
-                      <a:round/>
-                      <a:headEnd len="sm" w="sm" type="none"/>
-                      <a:tailEnd len="sm" w="sm" type="none"/>
-                    </a:lnL>
-                    <a:lnR cap="flat" cmpd="sng" w="12700">
-                      <a:solidFill>
-                        <a:srgbClr val="C8C8C7"/>
-                      </a:solidFill>
-                      <a:prstDash val="solid"/>
-                      <a:round/>
-                      <a:headEnd len="sm" w="sm" type="none"/>
-                      <a:tailEnd len="sm" w="sm" type="none"/>
-                    </a:lnR>
-                    <a:lnT cap="flat" cmpd="sng" w="12700">
-                      <a:solidFill>
-                        <a:srgbClr val="C8C8C7"/>
-                      </a:solidFill>
-                      <a:prstDash val="solid"/>
-                      <a:round/>
-                      <a:headEnd len="sm" w="sm" type="none"/>
-                      <a:tailEnd len="sm" w="sm" type="none"/>
-                    </a:lnT>
-                    <a:lnB cap="flat" cmpd="sng" w="12700">
-                      <a:solidFill>
-                        <a:srgbClr val="C8C8C7"/>
-                      </a:solidFill>
-                      <a:prstDash val="solid"/>
-                      <a:round/>
-                      <a:headEnd len="sm" w="sm" type="none"/>
-                      <a:tailEnd len="sm" w="sm" type="none"/>
                     </a:lnB>
                     <a:solidFill>
                       <a:srgbClr val="ECE7E2"/>
@@ -10065,7 +10965,7 @@
                         <a:buNone/>
                       </a:pPr>
                       <a:r>
-                        <a:rPr lang="en-US" sz="1400" u="none" cap="none" strike="noStrike">
+                        <a:rPr lang="en-US" sz="1100" u="none" cap="none" strike="noStrike">
                           <a:solidFill>
                             <a:srgbClr val="232323"/>
                           </a:solidFill>
@@ -10076,7 +10976,7 @@
                         </a:rPr>
                         <a:t>Сервоприводи</a:t>
                       </a:r>
-                      <a:endParaRPr sz="1400" u="none" cap="none" strike="noStrike">
+                      <a:endParaRPr sz="1100" u="none" cap="none" strike="noStrike">
                         <a:latin typeface="Nunito Sans"/>
                         <a:ea typeface="Nunito Sans"/>
                         <a:cs typeface="Nunito Sans"/>
@@ -10085,41 +10985,20 @@
                     </a:p>
                   </a:txBody>
                   <a:tcPr marT="62225" marB="62225" marR="62225" marL="62225">
-                    <a:lnL cap="flat" cmpd="sng" w="12700">
+                    <a:lnL w="12700" cap="flat" cmpd="sng" algn="ctr">
+                      <a:noFill/>
+                    </a:lnL>
+                    <a:lnR w="12700" cap="flat" cmpd="sng" algn="ctr">
+                      <a:noFill/>
+                    </a:lnR>
+                    <a:lnT w="12700" cap="flat" cmpd="sng" algn="ctr">
+                      <a:noFill/>
+                    </a:lnT>
+                    <a:lnB w="6350" cap="flat" cmpd="sng" algn="ctr">
                       <a:solidFill>
-                        <a:srgbClr val="C8C8C7"/>
+                        <a:srgbClr val="D9D9D9"/>
                       </a:solidFill>
                       <a:prstDash val="solid"/>
-                      <a:round/>
-                      <a:headEnd len="sm" w="sm" type="none"/>
-                      <a:tailEnd len="sm" w="sm" type="none"/>
-                    </a:lnL>
-                    <a:lnR cap="flat" cmpd="sng" w="12700">
-                      <a:solidFill>
-                        <a:srgbClr val="C8C8C7"/>
-                      </a:solidFill>
-                      <a:prstDash val="solid"/>
-                      <a:round/>
-                      <a:headEnd len="sm" w="sm" type="none"/>
-                      <a:tailEnd len="sm" w="sm" type="none"/>
-                    </a:lnR>
-                    <a:lnT cap="flat" cmpd="sng" w="12700">
-                      <a:solidFill>
-                        <a:srgbClr val="C8C8C7"/>
-                      </a:solidFill>
-                      <a:prstDash val="solid"/>
-                      <a:round/>
-                      <a:headEnd len="sm" w="sm" type="none"/>
-                      <a:tailEnd len="sm" w="sm" type="none"/>
-                    </a:lnT>
-                    <a:lnB cap="flat" cmpd="sng" w="12700">
-                      <a:solidFill>
-                        <a:srgbClr val="C8C8C7"/>
-                      </a:solidFill>
-                      <a:prstDash val="solid"/>
-                      <a:round/>
-                      <a:headEnd len="sm" w="sm" type="none"/>
-                      <a:tailEnd len="sm" w="sm" type="none"/>
                     </a:lnB>
                     <a:solidFill>
                       <a:srgbClr val="FFFFFF"/>
@@ -10149,7 +11028,7 @@
                         <a:buNone/>
                       </a:pPr>
                       <a:r>
-                        <a:rPr lang="en-US" sz="1400" u="none" cap="none" strike="noStrike">
+                        <a:rPr lang="en-US" sz="1100" u="none" cap="none" strike="noStrike">
                           <a:solidFill>
                             <a:srgbClr val="232323"/>
                           </a:solidFill>
@@ -10160,7 +11039,7 @@
                         </a:rPr>
                         <a:t>Мертва зона, люфт, провисання під вагою</a:t>
                       </a:r>
-                      <a:endParaRPr sz="1400" u="none" cap="none" strike="noStrike">
+                      <a:endParaRPr sz="1100" u="none" cap="none" strike="noStrike">
                         <a:latin typeface="Nunito Sans"/>
                         <a:ea typeface="Nunito Sans"/>
                         <a:cs typeface="Nunito Sans"/>
@@ -10169,41 +11048,20 @@
                     </a:p>
                   </a:txBody>
                   <a:tcPr marT="62225" marB="62225" marR="62225" marL="62225">
-                    <a:lnL cap="flat" cmpd="sng" w="12700">
+                    <a:lnL w="12700" cap="flat" cmpd="sng" algn="ctr">
+                      <a:noFill/>
+                    </a:lnL>
+                    <a:lnR w="12700" cap="flat" cmpd="sng" algn="ctr">
+                      <a:noFill/>
+                    </a:lnR>
+                    <a:lnT w="12700" cap="flat" cmpd="sng" algn="ctr">
+                      <a:noFill/>
+                    </a:lnT>
+                    <a:lnB w="6350" cap="flat" cmpd="sng" algn="ctr">
                       <a:solidFill>
-                        <a:srgbClr val="C8C8C7"/>
+                        <a:srgbClr val="D9D9D9"/>
                       </a:solidFill>
                       <a:prstDash val="solid"/>
-                      <a:round/>
-                      <a:headEnd len="sm" w="sm" type="none"/>
-                      <a:tailEnd len="sm" w="sm" type="none"/>
-                    </a:lnL>
-                    <a:lnR cap="flat" cmpd="sng" w="12700">
-                      <a:solidFill>
-                        <a:srgbClr val="C8C8C7"/>
-                      </a:solidFill>
-                      <a:prstDash val="solid"/>
-                      <a:round/>
-                      <a:headEnd len="sm" w="sm" type="none"/>
-                      <a:tailEnd len="sm" w="sm" type="none"/>
-                    </a:lnR>
-                    <a:lnT cap="flat" cmpd="sng" w="12700">
-                      <a:solidFill>
-                        <a:srgbClr val="C8C8C7"/>
-                      </a:solidFill>
-                      <a:prstDash val="solid"/>
-                      <a:round/>
-                      <a:headEnd len="sm" w="sm" type="none"/>
-                      <a:tailEnd len="sm" w="sm" type="none"/>
-                    </a:lnT>
-                    <a:lnB cap="flat" cmpd="sng" w="12700">
-                      <a:solidFill>
-                        <a:srgbClr val="C8C8C7"/>
-                      </a:solidFill>
-                      <a:prstDash val="solid"/>
-                      <a:round/>
-                      <a:headEnd len="sm" w="sm" type="none"/>
-                      <a:tailEnd len="sm" w="sm" type="none"/>
                     </a:lnB>
                     <a:solidFill>
                       <a:srgbClr val="FFFFFF"/>
@@ -10235,7 +11093,7 @@
                         <a:buNone/>
                       </a:pPr>
                       <a:r>
-                        <a:rPr lang="en-US" sz="1400" u="none" cap="none" strike="noStrike">
+                        <a:rPr lang="en-US" sz="1100" u="none" cap="none" strike="noStrike">
                           <a:solidFill>
                             <a:srgbClr val="232323"/>
                           </a:solidFill>
@@ -10246,7 +11104,7 @@
                         </a:rPr>
                         <a:t>Безпека</a:t>
                       </a:r>
-                      <a:endParaRPr sz="1400" u="none" cap="none" strike="noStrike">
+                      <a:endParaRPr sz="1100" u="none" cap="none" strike="noStrike">
                         <a:latin typeface="Nunito Sans"/>
                         <a:ea typeface="Nunito Sans"/>
                         <a:cs typeface="Nunito Sans"/>
@@ -10255,41 +11113,20 @@
                     </a:p>
                   </a:txBody>
                   <a:tcPr marT="62225" marB="62225" marR="62225" marL="62225">
-                    <a:lnL cap="flat" cmpd="sng" w="12700">
+                    <a:lnL w="12700" cap="flat" cmpd="sng" algn="ctr">
+                      <a:noFill/>
+                    </a:lnL>
+                    <a:lnR w="12700" cap="flat" cmpd="sng" algn="ctr">
+                      <a:noFill/>
+                    </a:lnR>
+                    <a:lnT w="12700" cap="flat" cmpd="sng" algn="ctr">
+                      <a:noFill/>
+                    </a:lnT>
+                    <a:lnB w="6350" cap="flat" cmpd="sng" algn="ctr">
                       <a:solidFill>
-                        <a:srgbClr val="C8C8C7"/>
+                        <a:srgbClr val="D9D9D9"/>
                       </a:solidFill>
                       <a:prstDash val="solid"/>
-                      <a:round/>
-                      <a:headEnd len="sm" w="sm" type="none"/>
-                      <a:tailEnd len="sm" w="sm" type="none"/>
-                    </a:lnL>
-                    <a:lnR cap="flat" cmpd="sng" w="12700">
-                      <a:solidFill>
-                        <a:srgbClr val="C8C8C7"/>
-                      </a:solidFill>
-                      <a:prstDash val="solid"/>
-                      <a:round/>
-                      <a:headEnd len="sm" w="sm" type="none"/>
-                      <a:tailEnd len="sm" w="sm" type="none"/>
-                    </a:lnR>
-                    <a:lnT cap="flat" cmpd="sng" w="12700">
-                      <a:solidFill>
-                        <a:srgbClr val="C8C8C7"/>
-                      </a:solidFill>
-                      <a:prstDash val="solid"/>
-                      <a:round/>
-                      <a:headEnd len="sm" w="sm" type="none"/>
-                      <a:tailEnd len="sm" w="sm" type="none"/>
-                    </a:lnT>
-                    <a:lnB cap="flat" cmpd="sng" w="12700">
-                      <a:solidFill>
-                        <a:srgbClr val="C8C8C7"/>
-                      </a:solidFill>
-                      <a:prstDash val="solid"/>
-                      <a:round/>
-                      <a:headEnd len="sm" w="sm" type="none"/>
-                      <a:tailEnd len="sm" w="sm" type="none"/>
                     </a:lnB>
                     <a:solidFill>
                       <a:srgbClr val="ECE7E2"/>
@@ -10319,7 +11156,7 @@
                         <a:buNone/>
                       </a:pPr>
                       <a:r>
-                        <a:rPr lang="en-US" sz="1400" u="none" cap="none" strike="noStrike">
+                        <a:rPr lang="en-US" sz="1100" u="none" cap="none" strike="noStrike">
                           <a:solidFill>
                             <a:srgbClr val="232323"/>
                           </a:solidFill>
@@ -10330,7 +11167,7 @@
                         </a:rPr>
                         <a:t>Лазер не повинен вмикатися помилково</a:t>
                       </a:r>
-                      <a:endParaRPr sz="1400" u="none" cap="none" strike="noStrike">
+                      <a:endParaRPr sz="1100" u="none" cap="none" strike="noStrike">
                         <a:latin typeface="Nunito Sans"/>
                         <a:ea typeface="Nunito Sans"/>
                         <a:cs typeface="Nunito Sans"/>
@@ -10339,41 +11176,20 @@
                     </a:p>
                   </a:txBody>
                   <a:tcPr marT="62225" marB="62225" marR="62225" marL="62225">
-                    <a:lnL cap="flat" cmpd="sng" w="12700">
+                    <a:lnL w="12700" cap="flat" cmpd="sng" algn="ctr">
+                      <a:noFill/>
+                    </a:lnL>
+                    <a:lnR w="12700" cap="flat" cmpd="sng" algn="ctr">
+                      <a:noFill/>
+                    </a:lnR>
+                    <a:lnT w="12700" cap="flat" cmpd="sng" algn="ctr">
+                      <a:noFill/>
+                    </a:lnT>
+                    <a:lnB w="6350" cap="flat" cmpd="sng" algn="ctr">
                       <a:solidFill>
-                        <a:srgbClr val="C8C8C7"/>
+                        <a:srgbClr val="D9D9D9"/>
                       </a:solidFill>
                       <a:prstDash val="solid"/>
-                      <a:round/>
-                      <a:headEnd len="sm" w="sm" type="none"/>
-                      <a:tailEnd len="sm" w="sm" type="none"/>
-                    </a:lnL>
-                    <a:lnR cap="flat" cmpd="sng" w="12700">
-                      <a:solidFill>
-                        <a:srgbClr val="C8C8C7"/>
-                      </a:solidFill>
-                      <a:prstDash val="solid"/>
-                      <a:round/>
-                      <a:headEnd len="sm" w="sm" type="none"/>
-                      <a:tailEnd len="sm" w="sm" type="none"/>
-                    </a:lnR>
-                    <a:lnT cap="flat" cmpd="sng" w="12700">
-                      <a:solidFill>
-                        <a:srgbClr val="C8C8C7"/>
-                      </a:solidFill>
-                      <a:prstDash val="solid"/>
-                      <a:round/>
-                      <a:headEnd len="sm" w="sm" type="none"/>
-                      <a:tailEnd len="sm" w="sm" type="none"/>
-                    </a:lnT>
-                    <a:lnB cap="flat" cmpd="sng" w="12700">
-                      <a:solidFill>
-                        <a:srgbClr val="C8C8C7"/>
-                      </a:solidFill>
-                      <a:prstDash val="solid"/>
-                      <a:round/>
-                      <a:headEnd len="sm" w="sm" type="none"/>
-                      <a:tailEnd len="sm" w="sm" type="none"/>
                     </a:lnB>
                     <a:solidFill>
                       <a:srgbClr val="ECE7E2"/>
@@ -10405,7 +11221,7 @@
                         <a:buNone/>
                       </a:pPr>
                       <a:r>
-                        <a:rPr lang="en-US" sz="1400" u="none" cap="none" strike="noStrike">
+                        <a:rPr lang="en-US" sz="1100" u="none" cap="none" strike="noStrike">
                           <a:solidFill>
                             <a:srgbClr val="232323"/>
                           </a:solidFill>
@@ -10416,7 +11232,7 @@
                         </a:rPr>
                         <a:t>Обсяг</a:t>
                       </a:r>
-                      <a:endParaRPr sz="1400" u="none" cap="none" strike="noStrike">
+                      <a:endParaRPr sz="1100" u="none" cap="none" strike="noStrike">
                         <a:latin typeface="Nunito Sans"/>
                         <a:ea typeface="Nunito Sans"/>
                         <a:cs typeface="Nunito Sans"/>
@@ -10425,41 +11241,20 @@
                     </a:p>
                   </a:txBody>
                   <a:tcPr marT="62225" marB="62225" marR="62225" marL="62225">
-                    <a:lnL cap="flat" cmpd="sng" w="12700">
+                    <a:lnL w="12700" cap="flat" cmpd="sng" algn="ctr">
+                      <a:noFill/>
+                    </a:lnL>
+                    <a:lnR w="12700" cap="flat" cmpd="sng" algn="ctr">
+                      <a:noFill/>
+                    </a:lnR>
+                    <a:lnT w="12700" cap="flat" cmpd="sng" algn="ctr">
+                      <a:noFill/>
+                    </a:lnT>
+                    <a:lnB w="6350" cap="flat" cmpd="sng" algn="ctr">
                       <a:solidFill>
-                        <a:srgbClr val="C8C8C7"/>
+                        <a:srgbClr val="D9D9D9"/>
                       </a:solidFill>
                       <a:prstDash val="solid"/>
-                      <a:round/>
-                      <a:headEnd len="sm" w="sm" type="none"/>
-                      <a:tailEnd len="sm" w="sm" type="none"/>
-                    </a:lnL>
-                    <a:lnR cap="flat" cmpd="sng" w="12700">
-                      <a:solidFill>
-                        <a:srgbClr val="C8C8C7"/>
-                      </a:solidFill>
-                      <a:prstDash val="solid"/>
-                      <a:round/>
-                      <a:headEnd len="sm" w="sm" type="none"/>
-                      <a:tailEnd len="sm" w="sm" type="none"/>
-                    </a:lnR>
-                    <a:lnT cap="flat" cmpd="sng" w="12700">
-                      <a:solidFill>
-                        <a:srgbClr val="C8C8C7"/>
-                      </a:solidFill>
-                      <a:prstDash val="solid"/>
-                      <a:round/>
-                      <a:headEnd len="sm" w="sm" type="none"/>
-                      <a:tailEnd len="sm" w="sm" type="none"/>
-                    </a:lnT>
-                    <a:lnB cap="flat" cmpd="sng" w="12700">
-                      <a:solidFill>
-                        <a:srgbClr val="C8C8C7"/>
-                      </a:solidFill>
-                      <a:prstDash val="solid"/>
-                      <a:round/>
-                      <a:headEnd len="sm" w="sm" type="none"/>
-                      <a:tailEnd len="sm" w="sm" type="none"/>
                     </a:lnB>
                     <a:solidFill>
                       <a:srgbClr val="FFFFFF"/>
@@ -10489,7 +11284,7 @@
                         <a:buNone/>
                       </a:pPr>
                       <a:r>
-                        <a:rPr lang="en-US" sz="1400" u="none" cap="none" strike="noStrike">
+                        <a:rPr lang="en-US" sz="1100" u="none" cap="none" strike="noStrike">
                           <a:solidFill>
                             <a:srgbClr val="232323"/>
                           </a:solidFill>
@@ -10501,7 +11296,7 @@
                         <a:t>Навчальний проєкт: один канал UART, розпізнавання виконує ПК, </a:t>
                       </a:r>
                       <a:r>
-                        <a:rPr lang="en-US">
+                        <a:rPr lang="en-US" sz="1100">
                           <a:solidFill>
                             <a:srgbClr val="232323"/>
                           </a:solidFill>
@@ -10512,7 +11307,7 @@
                         </a:rPr>
                         <a:t>лог пишеться на SD-картку</a:t>
                       </a:r>
-                      <a:endParaRPr sz="1400" u="none" cap="none" strike="noStrike">
+                      <a:endParaRPr sz="1100" u="none" cap="none" strike="noStrike">
                         <a:latin typeface="Nunito Sans"/>
                         <a:ea typeface="Nunito Sans"/>
                         <a:cs typeface="Nunito Sans"/>
@@ -10521,41 +11316,20 @@
                     </a:p>
                   </a:txBody>
                   <a:tcPr marT="62225" marB="62225" marR="62225" marL="62225">
-                    <a:lnL cap="flat" cmpd="sng" w="12700">
+                    <a:lnL w="12700" cap="flat" cmpd="sng" algn="ctr">
+                      <a:noFill/>
+                    </a:lnL>
+                    <a:lnR w="12700" cap="flat" cmpd="sng" algn="ctr">
+                      <a:noFill/>
+                    </a:lnR>
+                    <a:lnT w="12700" cap="flat" cmpd="sng" algn="ctr">
+                      <a:noFill/>
+                    </a:lnT>
+                    <a:lnB w="6350" cap="flat" cmpd="sng" algn="ctr">
                       <a:solidFill>
-                        <a:srgbClr val="C8C8C7"/>
+                        <a:srgbClr val="D9D9D9"/>
                       </a:solidFill>
                       <a:prstDash val="solid"/>
-                      <a:round/>
-                      <a:headEnd len="sm" w="sm" type="none"/>
-                      <a:tailEnd len="sm" w="sm" type="none"/>
-                    </a:lnL>
-                    <a:lnR cap="flat" cmpd="sng" w="12700">
-                      <a:solidFill>
-                        <a:srgbClr val="C8C8C7"/>
-                      </a:solidFill>
-                      <a:prstDash val="solid"/>
-                      <a:round/>
-                      <a:headEnd len="sm" w="sm" type="none"/>
-                      <a:tailEnd len="sm" w="sm" type="none"/>
-                    </a:lnR>
-                    <a:lnT cap="flat" cmpd="sng" w="12700">
-                      <a:solidFill>
-                        <a:srgbClr val="C8C8C7"/>
-                      </a:solidFill>
-                      <a:prstDash val="solid"/>
-                      <a:round/>
-                      <a:headEnd len="sm" w="sm" type="none"/>
-                      <a:tailEnd len="sm" w="sm" type="none"/>
-                    </a:lnT>
-                    <a:lnB cap="flat" cmpd="sng" w="12700">
-                      <a:solidFill>
-                        <a:srgbClr val="C8C8C7"/>
-                      </a:solidFill>
-                      <a:prstDash val="solid"/>
-                      <a:round/>
-                      <a:headEnd len="sm" w="sm" type="none"/>
-                      <a:tailEnd len="sm" w="sm" type="none"/>
                     </a:lnB>
                     <a:solidFill>
                       <a:srgbClr val="FFFFFF"/>
@@ -10567,6 +11341,42 @@
           </a:graphicData>
         </a:graphic>
       </p:graphicFrame>
+      <p:sp>
+        <p:nvSpPr>
+          <p:cNvPr id="48" name="TextBox 47"/>
+          <p:cNvSpPr txBox="1"/>
+          <p:nvPr/>
+        </p:nvSpPr>
+        <p:spPr>
+          <a:xfrm>
+            <a:off x="812800" y="6250000"/>
+            <a:ext cx="10566400" cy="220000"/>
+          </a:xfrm>
+          <a:prstGeom prst="rect">
+            <a:avLst/>
+          </a:prstGeom>
+          <a:noFill/>
+        </p:spPr>
+        <p:txBody>
+          <a:bodyPr wrap="none" lIns="0" rIns="0" tIns="0" bIns="0" anchor="ctr">
+            <a:spAutoFit/>
+          </a:bodyPr>
+          <a:lstStyle/>
+          <a:p>
+            <a:pPr algn="l"/>
+            <a:r>
+              <a:rPr sz="800" i="1" u="sng">
+                <a:solidFill>
+                  <a:srgbClr val="2A5C8F"/>
+                </a:solidFill>
+                <a:latin typeface="Nunito Sans"/>
+                <a:hlinkClick r:id="rId3"/>
+              </a:rPr>
+              <a:t>README.md#about-the-project</a:t>
+            </a:r>
+          </a:p>
+        </p:txBody>
+      </p:sp>
     </p:spTree>
   </p:cSld>
   <p:clrMapOvr>
@@ -10719,7 +11529,7 @@
         <p:spPr>
           <a:xfrm>
             <a:off x="812800" y="1280120"/>
-            <a:ext cx="10883392" cy="416520"/>
+            <a:ext cx="10883392" cy="360660"/>
           </a:xfrm>
           <a:prstGeom prst="rect">
             <a:avLst/>
@@ -10753,7 +11563,7 @@
               <a:buNone/>
             </a:pPr>
             <a:r>
-              <a:rPr b="1" i="0" lang="en-US" sz="2800" u="none" cap="none" strike="noStrike">
+              <a:rPr b="1" i="0" lang="en-US" sz="2400" u="none" cap="none" strike="noStrike">
                 <a:solidFill>
                   <a:srgbClr val="232323"/>
                 </a:solidFill>
@@ -10800,6 +11610,42 @@
           </a:prstGeom>
         </p:spPr>
       </p:pic>
+      <p:sp>
+        <p:nvSpPr>
+          <p:cNvPr id="58" name="TextBox 57"/>
+          <p:cNvSpPr txBox="1"/>
+          <p:nvPr/>
+        </p:nvSpPr>
+        <p:spPr>
+          <a:xfrm>
+            <a:off x="812800" y="6250000"/>
+            <a:ext cx="10566400" cy="220000"/>
+          </a:xfrm>
+          <a:prstGeom prst="rect">
+            <a:avLst/>
+          </a:prstGeom>
+          <a:noFill/>
+        </p:spPr>
+        <p:txBody>
+          <a:bodyPr wrap="none" lIns="0" rIns="0" tIns="0" bIns="0" anchor="ctr">
+            <a:spAutoFit/>
+          </a:bodyPr>
+          <a:lstStyle/>
+          <a:p>
+            <a:pPr algn="l"/>
+            <a:r>
+              <a:rPr sz="800" i="1" u="sng">
+                <a:solidFill>
+                  <a:srgbClr val="2A5C8F"/>
+                </a:solidFill>
+                <a:latin typeface="Nunito Sans"/>
+                <a:hlinkClick r:id="rId7"/>
+              </a:rPr>
+              <a:t>docs/architecture.md</a:t>
+            </a:r>
+          </a:p>
+        </p:txBody>
+      </p:sp>
     </p:spTree>
   </p:cSld>
   <p:clrMapOvr>
@@ -10951,8 +11797,8 @@
         </p:nvSpPr>
         <p:spPr>
           <a:xfrm>
-            <a:off x="812800" y="1305520"/>
-            <a:ext cx="10883392" cy="388541"/>
+            <a:off x="812800" y="1280120"/>
+            <a:ext cx="10883392" cy="360660"/>
           </a:xfrm>
           <a:prstGeom prst="rect">
             <a:avLst/>
@@ -10986,7 +11832,7 @@
               <a:buNone/>
             </a:pPr>
             <a:r>
-              <a:rPr b="1" i="0" lang="en-US" sz="2600" u="none" cap="none" strike="noStrike">
+              <a:rPr b="1" i="0" lang="en-US" sz="2400" u="none" cap="none" strike="noStrike">
                 <a:solidFill>
                   <a:srgbClr val="232323"/>
                 </a:solidFill>
@@ -11818,7 +12664,7 @@
         </p:nvSpPr>
         <p:spPr>
           <a:xfrm>
-            <a:off x="812800" y="2799401"/>
+            <a:off x="812800" y="2966067"/>
             <a:ext cx="5181600" cy="1100000"/>
           </a:xfrm>
           <a:prstGeom prst="roundRect">
@@ -11863,7 +12709,7 @@
         </p:nvSpPr>
         <p:spPr>
           <a:xfrm>
-            <a:off x="990600" y="2977201"/>
+            <a:off x="990600" y="3143867"/>
             <a:ext cx="4970780" cy="274241"/>
           </a:xfrm>
           <a:prstGeom prst="rect">
@@ -11929,7 +12775,7 @@
         </p:nvSpPr>
         <p:spPr>
           <a:xfrm>
-            <a:off x="990600" y="3302242"/>
+            <a:off x="990600" y="3468908"/>
             <a:ext cx="4970780" cy="550000"/>
           </a:xfrm>
           <a:prstGeom prst="rect">
@@ -12035,7 +12881,7 @@
         </p:nvSpPr>
         <p:spPr>
           <a:xfrm>
-            <a:off x="6197600" y="2799401"/>
+            <a:off x="6197600" y="2966067"/>
             <a:ext cx="5181600" cy="1100000"/>
           </a:xfrm>
           <a:prstGeom prst="roundRect">
@@ -12080,7 +12926,7 @@
         </p:nvSpPr>
         <p:spPr>
           <a:xfrm>
-            <a:off x="6375400" y="2977201"/>
+            <a:off x="6375400" y="3143867"/>
             <a:ext cx="4970780" cy="274241"/>
           </a:xfrm>
           <a:prstGeom prst="rect">
@@ -12146,7 +12992,7 @@
         </p:nvSpPr>
         <p:spPr>
           <a:xfrm>
-            <a:off x="6375400" y="3302242"/>
+            <a:off x="6375400" y="3468908"/>
             <a:ext cx="4970780" cy="550000"/>
           </a:xfrm>
           <a:prstGeom prst="rect">
@@ -12252,7 +13098,7 @@
         </p:nvSpPr>
         <p:spPr>
           <a:xfrm>
-            <a:off x="812800" y="4435821"/>
+            <a:off x="812800" y="4769153"/>
             <a:ext cx="10883392" cy="256480"/>
           </a:xfrm>
           <a:prstGeom prst="rect">
@@ -12296,7 +13142,7 @@
                 <a:cs typeface="Nunito Sans"/>
                 <a:sym typeface="Nunito Sans"/>
               </a:rPr>
-              <a:t>Наш випадок: камера рухається і шумить безперервно — саме для цього зроблена швидкісна форма.</a:t>
+              <a:t>Наш випадок: камера і ціль обидві рухаються, кадр завжди шумний — саме для цього зроблена швидкісна форма.</a:t>
             </a:r>
             <a:endParaRPr b="0" i="0" sz="1300" u="none" cap="none" strike="noStrike">
               <a:solidFill>
@@ -12318,7 +13164,7 @@
         </p:nvSpPr>
         <p:spPr>
           <a:xfrm>
-            <a:off x="812800" y="4752301"/>
+            <a:off x="812800" y="5085633"/>
             <a:ext cx="10883392" cy="256480"/>
           </a:xfrm>
           <a:prstGeom prst="rect">
@@ -12378,178 +13224,56 @@
       </p:sp>
       <p:sp>
         <p:nvSpPr>
-          <p:cNvPr id="93" name="Google Shape;93;p5"/>
-          <p:cNvSpPr/>
+          <p:cNvPr id="93" name="TextBox 92"/>
+          <p:cNvSpPr txBox="1"/>
           <p:nvPr/>
         </p:nvSpPr>
         <p:spPr>
           <a:xfrm>
-            <a:off x="812800" y="5545201"/>
-            <a:ext cx="10883392" cy="500000"/>
-          </a:xfrm>
-          <a:prstGeom prst="roundRect">
-            <a:avLst>
-              <a:gd fmla="val 21741" name="adj"/>
-            </a:avLst>
-          </a:prstGeom>
-          <a:solidFill>
-            <a:srgbClr val="FCF2B5"/>
-          </a:solidFill>
-          <a:ln>
-            <a:noFill/>
-          </a:ln>
-        </p:spPr>
-        <p:txBody>
-          <a:bodyPr anchorCtr="0" anchor="ctr" bIns="91425" lIns="91425" spcFirstLastPara="1" rIns="91425" wrap="square" tIns="91425">
-            <a:noAutofit/>
-          </a:bodyPr>
-          <a:lstStyle/>
-          <a:p>
-            <a:pPr indent="0" lvl="0" marL="0" rtl="0" algn="l">
-              <a:spcBef>
-                <a:spcPts val="0"/>
-              </a:spcBef>
-              <a:spcAft>
-                <a:spcPts val="0"/>
-              </a:spcAft>
-              <a:buNone/>
-            </a:pPr>
-            <a:r>
-              <a:t/>
-            </a:r>
-            <a:endParaRPr/>
-          </a:p>
-        </p:txBody>
-      </p:sp>
-      <p:sp>
-        <p:nvSpPr>
-          <p:cNvPr id="94" name="Google Shape;94;p5"/>
-          <p:cNvSpPr/>
-          <p:nvPr/>
-        </p:nvSpPr>
-        <p:spPr>
-          <a:xfrm>
-            <a:off x="990600" y="5675841"/>
-            <a:ext cx="494308" cy="238720"/>
+            <a:off x="812800" y="6250000"/>
+            <a:ext cx="10566400" cy="220000"/>
           </a:xfrm>
           <a:prstGeom prst="rect">
             <a:avLst/>
           </a:prstGeom>
           <a:noFill/>
-          <a:ln>
-            <a:noFill/>
-          </a:ln>
         </p:spPr>
         <p:txBody>
-          <a:bodyPr anchorCtr="0" anchor="t" bIns="0" lIns="0" spcFirstLastPara="1" rIns="0" wrap="square" tIns="0">
-            <a:normAutofit/>
+          <a:bodyPr wrap="none" lIns="0" rIns="0" tIns="0" bIns="0" anchor="ctr">
+            <a:spAutoFit/>
           </a:bodyPr>
           <a:lstStyle/>
           <a:p>
-            <a:pPr indent="0" lvl="0" marL="0" marR="0" rtl="0" algn="l">
-              <a:lnSpc>
-                <a:spcPct val="140000"/>
-              </a:lnSpc>
-              <a:spcBef>
-                <a:spcPts val="0"/>
-              </a:spcBef>
-              <a:spcAft>
-                <a:spcPts val="0"/>
-              </a:spcAft>
-              <a:buClr>
-                <a:srgbClr val="232323"/>
-              </a:buClr>
-              <a:buSzPts val="1200"/>
-              <a:buFont typeface="Nunito Sans"/>
-              <a:buNone/>
-            </a:pPr>
+            <a:pPr algn="l"/>
             <a:r>
-              <a:rPr b="1" i="0" lang="en-US" sz="1200" u="none" cap="none" strike="noStrike">
+              <a:rPr sz="800" i="1" u="sng">
                 <a:solidFill>
-                  <a:srgbClr val="232323"/>
+                  <a:srgbClr val="2A5C8F"/>
                 </a:solidFill>
                 <a:latin typeface="Nunito Sans"/>
-                <a:ea typeface="Nunito Sans"/>
-                <a:cs typeface="Nunito Sans"/>
-                <a:sym typeface="Nunito Sans"/>
+                <a:hlinkClick r:id="rId4"/>
               </a:rPr>
-              <a:t>TODO</a:t>
+              <a:t>docs/servo-control-strategies.md</a:t>
             </a:r>
-            <a:endParaRPr b="0" i="0" sz="1200" u="none" cap="none" strike="noStrike">
-              <a:solidFill>
-                <a:schemeClr val="dk1"/>
-              </a:solidFill>
-              <a:latin typeface="Calibri"/>
-              <a:ea typeface="Calibri"/>
-              <a:cs typeface="Calibri"/>
-              <a:sym typeface="Calibri"/>
-            </a:endParaRPr>
-          </a:p>
-        </p:txBody>
-      </p:sp>
-      <p:sp>
-        <p:nvSpPr>
-          <p:cNvPr id="95" name="Google Shape;95;p5"/>
-          <p:cNvSpPr/>
-          <p:nvPr/>
-        </p:nvSpPr>
-        <p:spPr>
-          <a:xfrm>
-            <a:off x="1535708" y="5675841"/>
-            <a:ext cx="2909705" cy="238720"/>
-          </a:xfrm>
-          <a:prstGeom prst="rect">
-            <a:avLst/>
-          </a:prstGeom>
-          <a:noFill/>
-          <a:ln>
-            <a:noFill/>
-          </a:ln>
-        </p:spPr>
-        <p:txBody>
-          <a:bodyPr anchorCtr="0" anchor="t" bIns="0" lIns="0" spcFirstLastPara="1" rIns="0" wrap="square" tIns="0">
-            <a:normAutofit/>
-          </a:bodyPr>
-          <a:lstStyle/>
-          <a:p>
-            <a:pPr indent="0" lvl="0" marL="0" marR="0" rtl="0" algn="l">
-              <a:lnSpc>
-                <a:spcPct val="140000"/>
-              </a:lnSpc>
-              <a:spcBef>
-                <a:spcPts val="0"/>
-              </a:spcBef>
-              <a:spcAft>
-                <a:spcPts val="0"/>
-              </a:spcAft>
-              <a:buClr>
-                <a:srgbClr val="232323"/>
-              </a:buClr>
-              <a:buSzPts val="1200"/>
-              <a:buFont typeface="Nunito Sans"/>
-              <a:buNone/>
-            </a:pPr>
             <a:r>
-              <a:rPr b="0" i="0" lang="en-US" sz="1200" u="none" cap="none" strike="noStrike">
+              <a:rPr sz="800" i="1">
                 <a:solidFill>
-                  <a:srgbClr val="232323"/>
+                  <a:srgbClr val="6B6F76"/>
                 </a:solidFill>
                 <a:latin typeface="Nunito Sans"/>
-                <a:ea typeface="Nunito Sans"/>
-                <a:cs typeface="Nunito Sans"/>
-                <a:sym typeface="Nunito Sans"/>
               </a:rPr>
-              <a:t>Графік — похибка від часу, для різних коефіцієнтів підсилення</a:t>
+              <a:t> · </a:t>
             </a:r>
-            <a:endParaRPr b="0" i="0" sz="1200" u="none" cap="none" strike="noStrike">
-              <a:solidFill>
-                <a:schemeClr val="dk1"/>
-              </a:solidFill>
-              <a:latin typeface="Calibri"/>
-              <a:ea typeface="Calibri"/>
-              <a:cs typeface="Calibri"/>
-              <a:sym typeface="Calibri"/>
-            </a:endParaRPr>
+            <a:r>
+              <a:rPr sz="800" i="1" u="sng">
+                <a:solidFill>
+                  <a:srgbClr val="2A5C8F"/>
+                </a:solidFill>
+                <a:latin typeface="Nunito Sans"/>
+                <a:hlinkClick r:id="rId5"/>
+              </a:rPr>
+              <a:t>docs/protocol.md</a:t>
+            </a:r>
           </a:p>
         </p:txBody>
       </p:sp>
@@ -12704,7 +13428,7 @@
         </p:nvSpPr>
         <p:spPr>
           <a:xfrm>
-            <a:off x="812800" y="1254720"/>
+            <a:off x="812800" y="1280120"/>
             <a:ext cx="10883392" cy="360660"/>
           </a:xfrm>
           <a:prstGeom prst="rect">
@@ -12921,6 +13645,61 @@
           </a:prstGeom>
         </p:spPr>
       </p:pic>
+      <p:sp>
+        <p:nvSpPr>
+          <p:cNvPr id="108" name="TextBox 107"/>
+          <p:cNvSpPr txBox="1"/>
+          <p:nvPr/>
+        </p:nvSpPr>
+        <p:spPr>
+          <a:xfrm>
+            <a:off x="812800" y="6250000"/>
+            <a:ext cx="10566400" cy="220000"/>
+          </a:xfrm>
+          <a:prstGeom prst="rect">
+            <a:avLst/>
+          </a:prstGeom>
+          <a:noFill/>
+        </p:spPr>
+        <p:txBody>
+          <a:bodyPr wrap="none" lIns="0" rIns="0" tIns="0" bIns="0" anchor="ctr">
+            <a:spAutoFit/>
+          </a:bodyPr>
+          <a:lstStyle/>
+          <a:p>
+            <a:pPr algn="l"/>
+            <a:r>
+              <a:rPr sz="800" i="1" u="sng">
+                <a:solidFill>
+                  <a:srgbClr val="2A5C8F"/>
+                </a:solidFill>
+                <a:latin typeface="Nunito Sans"/>
+                <a:hlinkClick r:id="rId4"/>
+              </a:rPr>
+              <a:t>docs/diagrams/freertos-tasks.md</a:t>
+            </a:r>
+            <a:r>
+              <a:rPr sz="800" i="1">
+                <a:solidFill>
+                  <a:srgbClr val="6B6F76"/>
+                </a:solidFill>
+                <a:latin typeface="Nunito Sans"/>
+              </a:rPr>
+              <a:t> · </a:t>
+            </a:r>
+            <a:r>
+              <a:rPr sz="800" i="1" u="sng">
+                <a:solidFill>
+                  <a:srgbClr val="2A5C8F"/>
+                </a:solidFill>
+                <a:latin typeface="Nunito Sans"/>
+                <a:hlinkClick r:id="rId5"/>
+              </a:rPr>
+              <a:t>firmware/aim/src/tasks/</a:t>
+            </a:r>
+          </a:p>
+        </p:txBody>
+      </p:sp>
     </p:spTree>
   </p:cSld>
   <p:clrMapOvr>
@@ -13138,7 +13917,7 @@
         </p:nvSpPr>
         <p:spPr>
           <a:xfrm>
-            <a:off x="812800" y="5450000"/>
+            <a:off x="812800" y="5350000"/>
             <a:ext cx="10883392" cy="200000"/>
           </a:xfrm>
           <a:prstGeom prst="rect">
@@ -13252,7 +14031,7 @@
         </p:nvSpPr>
         <p:spPr>
           <a:xfrm>
-            <a:off x="812800" y="5660000"/>
+            <a:off x="812800" y="5560000"/>
             <a:ext cx="10883392" cy="200000"/>
           </a:xfrm>
           <a:prstGeom prst="rect">
@@ -13330,7 +14109,7 @@
         </p:nvSpPr>
         <p:spPr>
           <a:xfrm>
-            <a:off x="812800" y="5870000"/>
+            <a:off x="812800" y="5770000"/>
             <a:ext cx="10883392" cy="200000"/>
           </a:xfrm>
           <a:prstGeom prst="rect">
@@ -13420,7 +14199,7 @@
         </p:nvSpPr>
         <p:spPr>
           <a:xfrm>
-            <a:off x="812800" y="6080000"/>
+            <a:off x="812800" y="5980000"/>
             <a:ext cx="10883392" cy="200000"/>
           </a:xfrm>
           <a:prstGeom prst="rect">
@@ -13519,13 +14298,68 @@
         <p:spPr>
           <a:xfrm>
             <a:off x="812800" y="1840000"/>
-            <a:ext cx="10566400" cy="3356900"/>
+            <a:ext cx="10566400" cy="3062878"/>
           </a:xfrm>
           <a:prstGeom prst="rect">
             <a:avLst/>
           </a:prstGeom>
         </p:spPr>
       </p:pic>
+      <p:sp>
+        <p:nvSpPr>
+          <p:cNvPr id="122" name="TextBox 121"/>
+          <p:cNvSpPr txBox="1"/>
+          <p:nvPr/>
+        </p:nvSpPr>
+        <p:spPr>
+          <a:xfrm>
+            <a:off x="812800" y="6250000"/>
+            <a:ext cx="10566400" cy="220000"/>
+          </a:xfrm>
+          <a:prstGeom prst="rect">
+            <a:avLst/>
+          </a:prstGeom>
+          <a:noFill/>
+        </p:spPr>
+        <p:txBody>
+          <a:bodyPr wrap="none" lIns="0" rIns="0" tIns="0" bIns="0" anchor="ctr">
+            <a:spAutoFit/>
+          </a:bodyPr>
+          <a:lstStyle/>
+          <a:p>
+            <a:pPr algn="l"/>
+            <a:r>
+              <a:rPr sz="800" i="1" u="sng">
+                <a:solidFill>
+                  <a:srgbClr val="2A5C8F"/>
+                </a:solidFill>
+                <a:latin typeface="Nunito Sans"/>
+                <a:hlinkClick r:id="rId4"/>
+              </a:rPr>
+              <a:t>docs/diagrams/aim-states.md</a:t>
+            </a:r>
+            <a:r>
+              <a:rPr sz="800" i="1">
+                <a:solidFill>
+                  <a:srgbClr val="6B6F76"/>
+                </a:solidFill>
+                <a:latin typeface="Nunito Sans"/>
+              </a:rPr>
+              <a:t> · </a:t>
+            </a:r>
+            <a:r>
+              <a:rPr sz="800" i="1" u="sng">
+                <a:solidFill>
+                  <a:srgbClr val="2A5C8F"/>
+                </a:solidFill>
+                <a:latin typeface="Nunito Sans"/>
+                <a:hlinkClick r:id="rId5"/>
+              </a:rPr>
+              <a:t>firmware/aim/src/StateMachine.hpp</a:t>
+            </a:r>
+          </a:p>
+        </p:txBody>
+      </p:sp>
     </p:spTree>
   </p:cSld>
   <p:clrMapOvr>
@@ -13677,7 +14511,7 @@
         </p:nvSpPr>
         <p:spPr>
           <a:xfrm>
-            <a:off x="812800" y="1254720"/>
+            <a:off x="812800" y="1280120"/>
             <a:ext cx="10883392" cy="360660"/>
           </a:xfrm>
           <a:prstGeom prst="rect">
@@ -13776,6 +14610,21 @@
                     </a:p>
                   </a:txBody>
                   <a:tcPr marL="127000" marR="91440" marT="0" marB="0" anchor="ctr">
+                    <a:lnL w="12700" cap="flat" cmpd="sng" algn="ctr">
+                      <a:noFill/>
+                    </a:lnL>
+                    <a:lnR w="12700" cap="flat" cmpd="sng" algn="ctr">
+                      <a:noFill/>
+                    </a:lnR>
+                    <a:lnT w="12700" cap="flat" cmpd="sng" algn="ctr">
+                      <a:noFill/>
+                    </a:lnT>
+                    <a:lnB w="6350" cap="flat" cmpd="sng" algn="ctr">
+                      <a:solidFill>
+                        <a:srgbClr val="D9D9D9"/>
+                      </a:solidFill>
+                      <a:prstDash val="solid"/>
+                    </a:lnB>
                     <a:solidFill>
                       <a:srgbClr val="C5D6E9"/>
                     </a:solidFill>
@@ -13798,6 +14647,21 @@
                     </a:p>
                   </a:txBody>
                   <a:tcPr marL="0" marR="91440" marT="0" marB="0" anchor="ctr">
+                    <a:lnL w="12700" cap="flat" cmpd="sng" algn="ctr">
+                      <a:noFill/>
+                    </a:lnL>
+                    <a:lnR w="12700" cap="flat" cmpd="sng" algn="ctr">
+                      <a:noFill/>
+                    </a:lnR>
+                    <a:lnT w="12700" cap="flat" cmpd="sng" algn="ctr">
+                      <a:noFill/>
+                    </a:lnT>
+                    <a:lnB w="6350" cap="flat" cmpd="sng" algn="ctr">
+                      <a:solidFill>
+                        <a:srgbClr val="D9D9D9"/>
+                      </a:solidFill>
+                      <a:prstDash val="solid"/>
+                    </a:lnB>
                     <a:solidFill>
                       <a:srgbClr val="C5D6E9"/>
                     </a:solidFill>
@@ -13820,6 +14684,21 @@
                     </a:p>
                   </a:txBody>
                   <a:tcPr marL="0" marR="91440" marT="0" marB="0" anchor="ctr">
+                    <a:lnL w="12700" cap="flat" cmpd="sng" algn="ctr">
+                      <a:noFill/>
+                    </a:lnL>
+                    <a:lnR w="12700" cap="flat" cmpd="sng" algn="ctr">
+                      <a:noFill/>
+                    </a:lnR>
+                    <a:lnT w="12700" cap="flat" cmpd="sng" algn="ctr">
+                      <a:noFill/>
+                    </a:lnT>
+                    <a:lnB w="6350" cap="flat" cmpd="sng" algn="ctr">
+                      <a:solidFill>
+                        <a:srgbClr val="D9D9D9"/>
+                      </a:solidFill>
+                      <a:prstDash val="solid"/>
+                    </a:lnB>
                     <a:solidFill>
                       <a:srgbClr val="C5D6E9"/>
                     </a:solidFill>
@@ -13844,6 +14723,21 @@
                     </a:p>
                   </a:txBody>
                   <a:tcPr marL="127000" marR="91440" marT="0" marB="0" anchor="ctr">
+                    <a:lnL w="12700" cap="flat" cmpd="sng" algn="ctr">
+                      <a:noFill/>
+                    </a:lnL>
+                    <a:lnR w="12700" cap="flat" cmpd="sng" algn="ctr">
+                      <a:noFill/>
+                    </a:lnR>
+                    <a:lnT w="12700" cap="flat" cmpd="sng" algn="ctr">
+                      <a:noFill/>
+                    </a:lnT>
+                    <a:lnB w="6350" cap="flat" cmpd="sng" algn="ctr">
+                      <a:solidFill>
+                        <a:srgbClr val="D9D9D9"/>
+                      </a:solidFill>
+                      <a:prstDash val="solid"/>
+                    </a:lnB>
                     <a:solidFill>
                       <a:srgbClr val="FFFFFF"/>
                     </a:solidFill>
@@ -13911,6 +14805,21 @@
                     </a:p>
                   </a:txBody>
                   <a:tcPr marL="0" marR="91440" marT="0" marB="0" anchor="ctr">
+                    <a:lnL w="12700" cap="flat" cmpd="sng" algn="ctr">
+                      <a:noFill/>
+                    </a:lnL>
+                    <a:lnR w="12700" cap="flat" cmpd="sng" algn="ctr">
+                      <a:noFill/>
+                    </a:lnR>
+                    <a:lnT w="12700" cap="flat" cmpd="sng" algn="ctr">
+                      <a:noFill/>
+                    </a:lnT>
+                    <a:lnB w="6350" cap="flat" cmpd="sng" algn="ctr">
+                      <a:solidFill>
+                        <a:srgbClr val="D9D9D9"/>
+                      </a:solidFill>
+                      <a:prstDash val="solid"/>
+                    </a:lnB>
                     <a:solidFill>
                       <a:srgbClr val="FFFFFF"/>
                     </a:solidFill>
@@ -13933,6 +14842,21 @@
                     </a:p>
                   </a:txBody>
                   <a:tcPr marL="0" marR="91440" marT="0" marB="0" anchor="ctr">
+                    <a:lnL w="12700" cap="flat" cmpd="sng" algn="ctr">
+                      <a:noFill/>
+                    </a:lnL>
+                    <a:lnR w="12700" cap="flat" cmpd="sng" algn="ctr">
+                      <a:noFill/>
+                    </a:lnR>
+                    <a:lnT w="12700" cap="flat" cmpd="sng" algn="ctr">
+                      <a:noFill/>
+                    </a:lnT>
+                    <a:lnB w="6350" cap="flat" cmpd="sng" algn="ctr">
+                      <a:solidFill>
+                        <a:srgbClr val="D9D9D9"/>
+                      </a:solidFill>
+                      <a:prstDash val="solid"/>
+                    </a:lnB>
                     <a:solidFill>
                       <a:srgbClr val="FFFFFF"/>
                     </a:solidFill>
@@ -13957,6 +14881,21 @@
                     </a:p>
                   </a:txBody>
                   <a:tcPr marL="127000" marR="91440" marT="0" marB="0" anchor="ctr">
+                    <a:lnL w="12700" cap="flat" cmpd="sng" algn="ctr">
+                      <a:noFill/>
+                    </a:lnL>
+                    <a:lnR w="12700" cap="flat" cmpd="sng" algn="ctr">
+                      <a:noFill/>
+                    </a:lnR>
+                    <a:lnT w="12700" cap="flat" cmpd="sng" algn="ctr">
+                      <a:noFill/>
+                    </a:lnT>
+                    <a:lnB w="6350" cap="flat" cmpd="sng" algn="ctr">
+                      <a:solidFill>
+                        <a:srgbClr val="D9D9D9"/>
+                      </a:solidFill>
+                      <a:prstDash val="solid"/>
+                    </a:lnB>
                     <a:solidFill>
                       <a:srgbClr val="ECE7E2"/>
                     </a:solidFill>
@@ -13997,6 +14936,21 @@
                     </a:p>
                   </a:txBody>
                   <a:tcPr marL="0" marR="91440" marT="0" marB="0" anchor="ctr">
+                    <a:lnL w="12700" cap="flat" cmpd="sng" algn="ctr">
+                      <a:noFill/>
+                    </a:lnL>
+                    <a:lnR w="12700" cap="flat" cmpd="sng" algn="ctr">
+                      <a:noFill/>
+                    </a:lnR>
+                    <a:lnT w="12700" cap="flat" cmpd="sng" algn="ctr">
+                      <a:noFill/>
+                    </a:lnT>
+                    <a:lnB w="6350" cap="flat" cmpd="sng" algn="ctr">
+                      <a:solidFill>
+                        <a:srgbClr val="D9D9D9"/>
+                      </a:solidFill>
+                      <a:prstDash val="solid"/>
+                    </a:lnB>
                     <a:solidFill>
                       <a:srgbClr val="ECE7E2"/>
                     </a:solidFill>
@@ -14019,6 +14973,21 @@
                     </a:p>
                   </a:txBody>
                   <a:tcPr marL="0" marR="91440" marT="0" marB="0" anchor="ctr">
+                    <a:lnL w="12700" cap="flat" cmpd="sng" algn="ctr">
+                      <a:noFill/>
+                    </a:lnL>
+                    <a:lnR w="12700" cap="flat" cmpd="sng" algn="ctr">
+                      <a:noFill/>
+                    </a:lnR>
+                    <a:lnT w="12700" cap="flat" cmpd="sng" algn="ctr">
+                      <a:noFill/>
+                    </a:lnT>
+                    <a:lnB w="6350" cap="flat" cmpd="sng" algn="ctr">
+                      <a:solidFill>
+                        <a:srgbClr val="D9D9D9"/>
+                      </a:solidFill>
+                      <a:prstDash val="solid"/>
+                    </a:lnB>
                     <a:solidFill>
                       <a:srgbClr val="ECE7E2"/>
                     </a:solidFill>
@@ -14043,6 +15012,21 @@
                     </a:p>
                   </a:txBody>
                   <a:tcPr marL="127000" marR="91440" marT="0" marB="0" anchor="ctr">
+                    <a:lnL w="12700" cap="flat" cmpd="sng" algn="ctr">
+                      <a:noFill/>
+                    </a:lnL>
+                    <a:lnR w="12700" cap="flat" cmpd="sng" algn="ctr">
+                      <a:noFill/>
+                    </a:lnR>
+                    <a:lnT w="12700" cap="flat" cmpd="sng" algn="ctr">
+                      <a:noFill/>
+                    </a:lnT>
+                    <a:lnB w="6350" cap="flat" cmpd="sng" algn="ctr">
+                      <a:solidFill>
+                        <a:srgbClr val="D9D9D9"/>
+                      </a:solidFill>
+                      <a:prstDash val="solid"/>
+                    </a:lnB>
                     <a:solidFill>
                       <a:srgbClr val="FFFFFF"/>
                     </a:solidFill>
@@ -14065,6 +15049,21 @@
                     </a:p>
                   </a:txBody>
                   <a:tcPr marL="0" marR="91440" marT="0" marB="0" anchor="ctr">
+                    <a:lnL w="12700" cap="flat" cmpd="sng" algn="ctr">
+                      <a:noFill/>
+                    </a:lnL>
+                    <a:lnR w="12700" cap="flat" cmpd="sng" algn="ctr">
+                      <a:noFill/>
+                    </a:lnR>
+                    <a:lnT w="12700" cap="flat" cmpd="sng" algn="ctr">
+                      <a:noFill/>
+                    </a:lnT>
+                    <a:lnB w="6350" cap="flat" cmpd="sng" algn="ctr">
+                      <a:solidFill>
+                        <a:srgbClr val="D9D9D9"/>
+                      </a:solidFill>
+                      <a:prstDash val="solid"/>
+                    </a:lnB>
                     <a:solidFill>
                       <a:srgbClr val="FFFFFF"/>
                     </a:solidFill>
@@ -14087,6 +15086,21 @@
                     </a:p>
                   </a:txBody>
                   <a:tcPr marL="0" marR="91440" marT="0" marB="0" anchor="ctr">
+                    <a:lnL w="12700" cap="flat" cmpd="sng" algn="ctr">
+                      <a:noFill/>
+                    </a:lnL>
+                    <a:lnR w="12700" cap="flat" cmpd="sng" algn="ctr">
+                      <a:noFill/>
+                    </a:lnR>
+                    <a:lnT w="12700" cap="flat" cmpd="sng" algn="ctr">
+                      <a:noFill/>
+                    </a:lnT>
+                    <a:lnB w="6350" cap="flat" cmpd="sng" algn="ctr">
+                      <a:solidFill>
+                        <a:srgbClr val="D9D9D9"/>
+                      </a:solidFill>
+                      <a:prstDash val="solid"/>
+                    </a:lnB>
                     <a:solidFill>
                       <a:srgbClr val="FFFFFF"/>
                     </a:solidFill>
@@ -14111,6 +15125,21 @@
                     </a:p>
                   </a:txBody>
                   <a:tcPr marL="127000" marR="91440" marT="0" marB="0" anchor="ctr">
+                    <a:lnL w="12700" cap="flat" cmpd="sng" algn="ctr">
+                      <a:noFill/>
+                    </a:lnL>
+                    <a:lnR w="12700" cap="flat" cmpd="sng" algn="ctr">
+                      <a:noFill/>
+                    </a:lnR>
+                    <a:lnT w="12700" cap="flat" cmpd="sng" algn="ctr">
+                      <a:noFill/>
+                    </a:lnT>
+                    <a:lnB w="6350" cap="flat" cmpd="sng" algn="ctr">
+                      <a:solidFill>
+                        <a:srgbClr val="D9D9D9"/>
+                      </a:solidFill>
+                      <a:prstDash val="solid"/>
+                    </a:lnB>
                     <a:solidFill>
                       <a:srgbClr val="ECE7E2"/>
                     </a:solidFill>
@@ -14151,6 +15180,21 @@
                     </a:p>
                   </a:txBody>
                   <a:tcPr marL="0" marR="91440" marT="0" marB="0" anchor="ctr">
+                    <a:lnL w="12700" cap="flat" cmpd="sng" algn="ctr">
+                      <a:noFill/>
+                    </a:lnL>
+                    <a:lnR w="12700" cap="flat" cmpd="sng" algn="ctr">
+                      <a:noFill/>
+                    </a:lnR>
+                    <a:lnT w="12700" cap="flat" cmpd="sng" algn="ctr">
+                      <a:noFill/>
+                    </a:lnT>
+                    <a:lnB w="6350" cap="flat" cmpd="sng" algn="ctr">
+                      <a:solidFill>
+                        <a:srgbClr val="D9D9D9"/>
+                      </a:solidFill>
+                      <a:prstDash val="solid"/>
+                    </a:lnB>
                     <a:solidFill>
                       <a:srgbClr val="ECE7E2"/>
                     </a:solidFill>
@@ -14173,6 +15217,21 @@
                     </a:p>
                   </a:txBody>
                   <a:tcPr marL="0" marR="91440" marT="0" marB="0" anchor="ctr">
+                    <a:lnL w="12700" cap="flat" cmpd="sng" algn="ctr">
+                      <a:noFill/>
+                    </a:lnL>
+                    <a:lnR w="12700" cap="flat" cmpd="sng" algn="ctr">
+                      <a:noFill/>
+                    </a:lnR>
+                    <a:lnT w="12700" cap="flat" cmpd="sng" algn="ctr">
+                      <a:noFill/>
+                    </a:lnT>
+                    <a:lnB w="6350" cap="flat" cmpd="sng" algn="ctr">
+                      <a:solidFill>
+                        <a:srgbClr val="D9D9D9"/>
+                      </a:solidFill>
+                      <a:prstDash val="solid"/>
+                    </a:lnB>
                     <a:solidFill>
                       <a:srgbClr val="ECE7E2"/>
                     </a:solidFill>
@@ -14197,6 +15256,21 @@
                     </a:p>
                   </a:txBody>
                   <a:tcPr marL="127000" marR="91440" marT="0" marB="0" anchor="ctr">
+                    <a:lnL w="12700" cap="flat" cmpd="sng" algn="ctr">
+                      <a:noFill/>
+                    </a:lnL>
+                    <a:lnR w="12700" cap="flat" cmpd="sng" algn="ctr">
+                      <a:noFill/>
+                    </a:lnR>
+                    <a:lnT w="12700" cap="flat" cmpd="sng" algn="ctr">
+                      <a:noFill/>
+                    </a:lnT>
+                    <a:lnB w="6350" cap="flat" cmpd="sng" algn="ctr">
+                      <a:solidFill>
+                        <a:srgbClr val="D9D9D9"/>
+                      </a:solidFill>
+                      <a:prstDash val="solid"/>
+                    </a:lnB>
                     <a:solidFill>
                       <a:srgbClr val="FFFFFF"/>
                     </a:solidFill>
@@ -14219,6 +15293,21 @@
                     </a:p>
                   </a:txBody>
                   <a:tcPr marL="0" marR="91440" marT="0" marB="0" anchor="ctr">
+                    <a:lnL w="12700" cap="flat" cmpd="sng" algn="ctr">
+                      <a:noFill/>
+                    </a:lnL>
+                    <a:lnR w="12700" cap="flat" cmpd="sng" algn="ctr">
+                      <a:noFill/>
+                    </a:lnR>
+                    <a:lnT w="12700" cap="flat" cmpd="sng" algn="ctr">
+                      <a:noFill/>
+                    </a:lnT>
+                    <a:lnB w="6350" cap="flat" cmpd="sng" algn="ctr">
+                      <a:solidFill>
+                        <a:srgbClr val="D9D9D9"/>
+                      </a:solidFill>
+                      <a:prstDash val="solid"/>
+                    </a:lnB>
                     <a:solidFill>
                       <a:srgbClr val="FFFFFF"/>
                     </a:solidFill>
@@ -14241,6 +15330,21 @@
                     </a:p>
                   </a:txBody>
                   <a:tcPr marL="0" marR="91440" marT="0" marB="0" anchor="ctr">
+                    <a:lnL w="12700" cap="flat" cmpd="sng" algn="ctr">
+                      <a:noFill/>
+                    </a:lnL>
+                    <a:lnR w="12700" cap="flat" cmpd="sng" algn="ctr">
+                      <a:noFill/>
+                    </a:lnR>
+                    <a:lnT w="12700" cap="flat" cmpd="sng" algn="ctr">
+                      <a:noFill/>
+                    </a:lnT>
+                    <a:lnB w="6350" cap="flat" cmpd="sng" algn="ctr">
+                      <a:solidFill>
+                        <a:srgbClr val="D9D9D9"/>
+                      </a:solidFill>
+                      <a:prstDash val="solid"/>
+                    </a:lnB>
                     <a:solidFill>
                       <a:srgbClr val="FFFFFF"/>
                     </a:solidFill>
@@ -14265,6 +15369,21 @@
                     </a:p>
                   </a:txBody>
                   <a:tcPr marL="127000" marR="91440" marT="0" marB="0" anchor="ctr">
+                    <a:lnL w="12700" cap="flat" cmpd="sng" algn="ctr">
+                      <a:noFill/>
+                    </a:lnL>
+                    <a:lnR w="12700" cap="flat" cmpd="sng" algn="ctr">
+                      <a:noFill/>
+                    </a:lnR>
+                    <a:lnT w="12700" cap="flat" cmpd="sng" algn="ctr">
+                      <a:noFill/>
+                    </a:lnT>
+                    <a:lnB w="6350" cap="flat" cmpd="sng" algn="ctr">
+                      <a:solidFill>
+                        <a:srgbClr val="D9D9D9"/>
+                      </a:solidFill>
+                      <a:prstDash val="solid"/>
+                    </a:lnB>
                     <a:solidFill>
                       <a:srgbClr val="ECE7E2"/>
                     </a:solidFill>
@@ -14296,6 +15415,21 @@
                     </a:p>
                   </a:txBody>
                   <a:tcPr marL="0" marR="91440" marT="0" marB="0" anchor="ctr">
+                    <a:lnL w="12700" cap="flat" cmpd="sng" algn="ctr">
+                      <a:noFill/>
+                    </a:lnL>
+                    <a:lnR w="12700" cap="flat" cmpd="sng" algn="ctr">
+                      <a:noFill/>
+                    </a:lnR>
+                    <a:lnT w="12700" cap="flat" cmpd="sng" algn="ctr">
+                      <a:noFill/>
+                    </a:lnT>
+                    <a:lnB w="6350" cap="flat" cmpd="sng" algn="ctr">
+                      <a:solidFill>
+                        <a:srgbClr val="D9D9D9"/>
+                      </a:solidFill>
+                      <a:prstDash val="solid"/>
+                    </a:lnB>
                     <a:solidFill>
                       <a:srgbClr val="ECE7E2"/>
                     </a:solidFill>
@@ -14318,6 +15452,21 @@
                     </a:p>
                   </a:txBody>
                   <a:tcPr marL="0" marR="91440" marT="0" marB="0" anchor="ctr">
+                    <a:lnL w="12700" cap="flat" cmpd="sng" algn="ctr">
+                      <a:noFill/>
+                    </a:lnL>
+                    <a:lnR w="12700" cap="flat" cmpd="sng" algn="ctr">
+                      <a:noFill/>
+                    </a:lnR>
+                    <a:lnT w="12700" cap="flat" cmpd="sng" algn="ctr">
+                      <a:noFill/>
+                    </a:lnT>
+                    <a:lnB w="6350" cap="flat" cmpd="sng" algn="ctr">
+                      <a:solidFill>
+                        <a:srgbClr val="D9D9D9"/>
+                      </a:solidFill>
+                      <a:prstDash val="solid"/>
+                    </a:lnB>
                     <a:solidFill>
                       <a:srgbClr val="ECE7E2"/>
                     </a:solidFill>
@@ -14328,6 +15477,61 @@
           </a:graphicData>
         </a:graphic>
       </p:graphicFrame>
+      <p:sp>
+        <p:nvSpPr>
+          <p:cNvPr id="132" name="TextBox 131"/>
+          <p:cNvSpPr txBox="1"/>
+          <p:nvPr/>
+        </p:nvSpPr>
+        <p:spPr>
+          <a:xfrm>
+            <a:off x="812800" y="6250000"/>
+            <a:ext cx="10566400" cy="220000"/>
+          </a:xfrm>
+          <a:prstGeom prst="rect">
+            <a:avLst/>
+          </a:prstGeom>
+          <a:noFill/>
+        </p:spPr>
+        <p:txBody>
+          <a:bodyPr wrap="none" lIns="0" rIns="0" tIns="0" bIns="0" anchor="ctr">
+            <a:spAutoFit/>
+          </a:bodyPr>
+          <a:lstStyle/>
+          <a:p>
+            <a:pPr algn="l"/>
+            <a:r>
+              <a:rPr sz="800" i="1" u="sng">
+                <a:solidFill>
+                  <a:srgbClr val="2A5C8F"/>
+                </a:solidFill>
+                <a:latin typeface="Nunito Sans"/>
+                <a:hlinkClick r:id="rId3"/>
+              </a:rPr>
+              <a:t>docs/coding.md</a:t>
+            </a:r>
+            <a:r>
+              <a:rPr sz="800" i="1">
+                <a:solidFill>
+                  <a:srgbClr val="6B6F76"/>
+                </a:solidFill>
+                <a:latin typeface="Nunito Sans"/>
+              </a:rPr>
+              <a:t> · </a:t>
+            </a:r>
+            <a:r>
+              <a:rPr sz="800" i="1" u="sng">
+                <a:solidFill>
+                  <a:srgbClr val="2A5C8F"/>
+                </a:solidFill>
+                <a:latin typeface="Nunito Sans"/>
+                <a:hlinkClick r:id="rId4"/>
+              </a:rPr>
+              <a:t>docs/interfaces.md</a:t>
+            </a:r>
+          </a:p>
+        </p:txBody>
+      </p:sp>
     </p:spTree>
   </p:cSld>
   <p:clrMapOvr>
@@ -14479,8 +15683,8 @@
         </p:nvSpPr>
         <p:spPr>
           <a:xfrm>
-            <a:off x="812800" y="1305520"/>
-            <a:ext cx="10883392" cy="388541"/>
+            <a:off x="812800" y="1280120"/>
+            <a:ext cx="10883392" cy="360660"/>
           </a:xfrm>
           <a:prstGeom prst="rect">
             <a:avLst/>
@@ -14514,7 +15718,7 @@
               <a:buNone/>
             </a:pPr>
             <a:r>
-              <a:rPr b="1" i="0" lang="en-US" sz="2600" u="none" cap="none" strike="noStrike">
+              <a:rPr b="1" i="0" lang="en-US" sz="2400" u="none" cap="none" strike="noStrike">
                 <a:solidFill>
                   <a:srgbClr val="232323"/>
                 </a:solidFill>
@@ -14645,6 +15849,21 @@
                     </a:p>
                   </a:txBody>
                   <a:tcPr marL="127000" marR="91440" marT="41910" marB="41910" anchor="ctr">
+                    <a:lnL w="12700" cap="flat" cmpd="sng" algn="ctr">
+                      <a:noFill/>
+                    </a:lnL>
+                    <a:lnR w="12700" cap="flat" cmpd="sng" algn="ctr">
+                      <a:noFill/>
+                    </a:lnR>
+                    <a:lnT w="12700" cap="flat" cmpd="sng" algn="ctr">
+                      <a:noFill/>
+                    </a:lnT>
+                    <a:lnB w="6350" cap="flat" cmpd="sng" algn="ctr">
+                      <a:solidFill>
+                        <a:srgbClr val="D9D9D9"/>
+                      </a:solidFill>
+                      <a:prstDash val="solid"/>
+                    </a:lnB>
                     <a:solidFill>
                       <a:srgbClr val="C5D6E9"/>
                     </a:solidFill>
@@ -14667,6 +15886,21 @@
                     </a:p>
                   </a:txBody>
                   <a:tcPr marL="0" marR="91440" marT="41910" marB="41910" anchor="ctr">
+                    <a:lnL w="12700" cap="flat" cmpd="sng" algn="ctr">
+                      <a:noFill/>
+                    </a:lnL>
+                    <a:lnR w="12700" cap="flat" cmpd="sng" algn="ctr">
+                      <a:noFill/>
+                    </a:lnR>
+                    <a:lnT w="12700" cap="flat" cmpd="sng" algn="ctr">
+                      <a:noFill/>
+                    </a:lnT>
+                    <a:lnB w="6350" cap="flat" cmpd="sng" algn="ctr">
+                      <a:solidFill>
+                        <a:srgbClr val="D9D9D9"/>
+                      </a:solidFill>
+                      <a:prstDash val="solid"/>
+                    </a:lnB>
                     <a:solidFill>
                       <a:srgbClr val="C5D6E9"/>
                     </a:solidFill>
@@ -14692,6 +15926,21 @@
                     </a:p>
                   </a:txBody>
                   <a:tcPr marL="127000" marR="91440" marT="41910" marB="41910" anchor="ctr">
+                    <a:lnL w="12700" cap="flat" cmpd="sng" algn="ctr">
+                      <a:noFill/>
+                    </a:lnL>
+                    <a:lnR w="12700" cap="flat" cmpd="sng" algn="ctr">
+                      <a:noFill/>
+                    </a:lnR>
+                    <a:lnT w="12700" cap="flat" cmpd="sng" algn="ctr">
+                      <a:noFill/>
+                    </a:lnT>
+                    <a:lnB w="6350" cap="flat" cmpd="sng" algn="ctr">
+                      <a:solidFill>
+                        <a:srgbClr val="D9D9D9"/>
+                      </a:solidFill>
+                      <a:prstDash val="solid"/>
+                    </a:lnB>
                     <a:solidFill>
                       <a:srgbClr val="FFFFFF"/>
                     </a:solidFill>
@@ -14714,6 +15963,21 @@
                     </a:p>
                   </a:txBody>
                   <a:tcPr marL="0" marR="91440" marT="41910" marB="41910" anchor="ctr">
+                    <a:lnL w="12700" cap="flat" cmpd="sng" algn="ctr">
+                      <a:noFill/>
+                    </a:lnL>
+                    <a:lnR w="12700" cap="flat" cmpd="sng" algn="ctr">
+                      <a:noFill/>
+                    </a:lnR>
+                    <a:lnT w="12700" cap="flat" cmpd="sng" algn="ctr">
+                      <a:noFill/>
+                    </a:lnT>
+                    <a:lnB w="6350" cap="flat" cmpd="sng" algn="ctr">
+                      <a:solidFill>
+                        <a:srgbClr val="D9D9D9"/>
+                      </a:solidFill>
+                      <a:prstDash val="solid"/>
+                    </a:lnB>
                     <a:solidFill>
                       <a:srgbClr val="FFFFFF"/>
                     </a:solidFill>
@@ -14739,6 +16003,21 @@
                     </a:p>
                   </a:txBody>
                   <a:tcPr marL="127000" marR="91440" marT="41910" marB="41910" anchor="ctr">
+                    <a:lnL w="12700" cap="flat" cmpd="sng" algn="ctr">
+                      <a:noFill/>
+                    </a:lnL>
+                    <a:lnR w="12700" cap="flat" cmpd="sng" algn="ctr">
+                      <a:noFill/>
+                    </a:lnR>
+                    <a:lnT w="12700" cap="flat" cmpd="sng" algn="ctr">
+                      <a:noFill/>
+                    </a:lnT>
+                    <a:lnB w="6350" cap="flat" cmpd="sng" algn="ctr">
+                      <a:solidFill>
+                        <a:srgbClr val="D9D9D9"/>
+                      </a:solidFill>
+                      <a:prstDash val="solid"/>
+                    </a:lnB>
                     <a:solidFill>
                       <a:srgbClr val="ECE7E2"/>
                     </a:solidFill>
@@ -14761,6 +16040,21 @@
                     </a:p>
                   </a:txBody>
                   <a:tcPr marL="0" marR="91440" marT="41910" marB="41910" anchor="ctr">
+                    <a:lnL w="12700" cap="flat" cmpd="sng" algn="ctr">
+                      <a:noFill/>
+                    </a:lnL>
+                    <a:lnR w="12700" cap="flat" cmpd="sng" algn="ctr">
+                      <a:noFill/>
+                    </a:lnR>
+                    <a:lnT w="12700" cap="flat" cmpd="sng" algn="ctr">
+                      <a:noFill/>
+                    </a:lnT>
+                    <a:lnB w="6350" cap="flat" cmpd="sng" algn="ctr">
+                      <a:solidFill>
+                        <a:srgbClr val="D9D9D9"/>
+                      </a:solidFill>
+                      <a:prstDash val="solid"/>
+                    </a:lnB>
                     <a:solidFill>
                       <a:srgbClr val="ECE7E2"/>
                     </a:solidFill>
@@ -14786,6 +16080,21 @@
                     </a:p>
                   </a:txBody>
                   <a:tcPr marL="127000" marR="91440" marT="41910" marB="41910" anchor="ctr">
+                    <a:lnL w="12700" cap="flat" cmpd="sng" algn="ctr">
+                      <a:noFill/>
+                    </a:lnL>
+                    <a:lnR w="12700" cap="flat" cmpd="sng" algn="ctr">
+                      <a:noFill/>
+                    </a:lnR>
+                    <a:lnT w="12700" cap="flat" cmpd="sng" algn="ctr">
+                      <a:noFill/>
+                    </a:lnT>
+                    <a:lnB w="6350" cap="flat" cmpd="sng" algn="ctr">
+                      <a:solidFill>
+                        <a:srgbClr val="D9D9D9"/>
+                      </a:solidFill>
+                      <a:prstDash val="solid"/>
+                    </a:lnB>
                     <a:solidFill>
                       <a:srgbClr val="FFFFFF"/>
                     </a:solidFill>
@@ -14838,6 +16147,21 @@
                     </a:p>
                   </a:txBody>
                   <a:tcPr marL="0" marR="91440" marT="41910" marB="41910" anchor="ctr">
+                    <a:lnL w="12700" cap="flat" cmpd="sng" algn="ctr">
+                      <a:noFill/>
+                    </a:lnL>
+                    <a:lnR w="12700" cap="flat" cmpd="sng" algn="ctr">
+                      <a:noFill/>
+                    </a:lnR>
+                    <a:lnT w="12700" cap="flat" cmpd="sng" algn="ctr">
+                      <a:noFill/>
+                    </a:lnT>
+                    <a:lnB w="6350" cap="flat" cmpd="sng" algn="ctr">
+                      <a:solidFill>
+                        <a:srgbClr val="D9D9D9"/>
+                      </a:solidFill>
+                      <a:prstDash val="solid"/>
+                    </a:lnB>
                     <a:solidFill>
                       <a:srgbClr val="FFFFFF"/>
                     </a:solidFill>
@@ -14863,6 +16187,21 @@
                     </a:p>
                   </a:txBody>
                   <a:tcPr marL="127000" marR="91440" marT="41910" marB="41910" anchor="ctr">
+                    <a:lnL w="12700" cap="flat" cmpd="sng" algn="ctr">
+                      <a:noFill/>
+                    </a:lnL>
+                    <a:lnR w="12700" cap="flat" cmpd="sng" algn="ctr">
+                      <a:noFill/>
+                    </a:lnR>
+                    <a:lnT w="12700" cap="flat" cmpd="sng" algn="ctr">
+                      <a:noFill/>
+                    </a:lnT>
+                    <a:lnB w="6350" cap="flat" cmpd="sng" algn="ctr">
+                      <a:solidFill>
+                        <a:srgbClr val="D9D9D9"/>
+                      </a:solidFill>
+                      <a:prstDash val="solid"/>
+                    </a:lnB>
                     <a:solidFill>
                       <a:srgbClr val="ECE7E2"/>
                     </a:solidFill>
@@ -14885,6 +16224,21 @@
                     </a:p>
                   </a:txBody>
                   <a:tcPr marL="0" marR="91440" marT="41910" marB="41910" anchor="ctr">
+                    <a:lnL w="12700" cap="flat" cmpd="sng" algn="ctr">
+                      <a:noFill/>
+                    </a:lnL>
+                    <a:lnR w="12700" cap="flat" cmpd="sng" algn="ctr">
+                      <a:noFill/>
+                    </a:lnR>
+                    <a:lnT w="12700" cap="flat" cmpd="sng" algn="ctr">
+                      <a:noFill/>
+                    </a:lnT>
+                    <a:lnB w="6350" cap="flat" cmpd="sng" algn="ctr">
+                      <a:solidFill>
+                        <a:srgbClr val="D9D9D9"/>
+                      </a:solidFill>
+                      <a:prstDash val="solid"/>
+                    </a:lnB>
                     <a:solidFill>
                       <a:srgbClr val="ECE7E2"/>
                     </a:solidFill>
@@ -14910,6 +16264,21 @@
                     </a:p>
                   </a:txBody>
                   <a:tcPr marL="127000" marR="91440" marT="41910" marB="41910" anchor="ctr">
+                    <a:lnL w="12700" cap="flat" cmpd="sng" algn="ctr">
+                      <a:noFill/>
+                    </a:lnL>
+                    <a:lnR w="12700" cap="flat" cmpd="sng" algn="ctr">
+                      <a:noFill/>
+                    </a:lnR>
+                    <a:lnT w="12700" cap="flat" cmpd="sng" algn="ctr">
+                      <a:noFill/>
+                    </a:lnT>
+                    <a:lnB w="6350" cap="flat" cmpd="sng" algn="ctr">
+                      <a:solidFill>
+                        <a:srgbClr val="D9D9D9"/>
+                      </a:solidFill>
+                      <a:prstDash val="solid"/>
+                    </a:lnB>
                     <a:solidFill>
                       <a:srgbClr val="FFFFFF"/>
                     </a:solidFill>
@@ -14962,6 +16331,21 @@
                     </a:p>
                   </a:txBody>
                   <a:tcPr marL="0" marR="91440" marT="41910" marB="41910" anchor="ctr">
+                    <a:lnL w="12700" cap="flat" cmpd="sng" algn="ctr">
+                      <a:noFill/>
+                    </a:lnL>
+                    <a:lnR w="12700" cap="flat" cmpd="sng" algn="ctr">
+                      <a:noFill/>
+                    </a:lnR>
+                    <a:lnT w="12700" cap="flat" cmpd="sng" algn="ctr">
+                      <a:noFill/>
+                    </a:lnT>
+                    <a:lnB w="6350" cap="flat" cmpd="sng" algn="ctr">
+                      <a:solidFill>
+                        <a:srgbClr val="D9D9D9"/>
+                      </a:solidFill>
+                      <a:prstDash val="solid"/>
+                    </a:lnB>
                     <a:solidFill>
                       <a:srgbClr val="FFFFFF"/>
                     </a:solidFill>
@@ -14987,6 +16371,21 @@
                     </a:p>
                   </a:txBody>
                   <a:tcPr marL="127000" marR="91440" marT="41910" marB="41910" anchor="ctr">
+                    <a:lnL w="12700" cap="flat" cmpd="sng" algn="ctr">
+                      <a:noFill/>
+                    </a:lnL>
+                    <a:lnR w="12700" cap="flat" cmpd="sng" algn="ctr">
+                      <a:noFill/>
+                    </a:lnR>
+                    <a:lnT w="12700" cap="flat" cmpd="sng" algn="ctr">
+                      <a:noFill/>
+                    </a:lnT>
+                    <a:lnB w="6350" cap="flat" cmpd="sng" algn="ctr">
+                      <a:solidFill>
+                        <a:srgbClr val="D9D9D9"/>
+                      </a:solidFill>
+                      <a:prstDash val="solid"/>
+                    </a:lnB>
                     <a:solidFill>
                       <a:srgbClr val="ECE7E2"/>
                     </a:solidFill>
@@ -15009,6 +16408,21 @@
                     </a:p>
                   </a:txBody>
                   <a:tcPr marL="0" marR="91440" marT="41910" marB="41910" anchor="ctr">
+                    <a:lnL w="12700" cap="flat" cmpd="sng" algn="ctr">
+                      <a:noFill/>
+                    </a:lnL>
+                    <a:lnR w="12700" cap="flat" cmpd="sng" algn="ctr">
+                      <a:noFill/>
+                    </a:lnR>
+                    <a:lnT w="12700" cap="flat" cmpd="sng" algn="ctr">
+                      <a:noFill/>
+                    </a:lnT>
+                    <a:lnB w="6350" cap="flat" cmpd="sng" algn="ctr">
+                      <a:solidFill>
+                        <a:srgbClr val="D9D9D9"/>
+                      </a:solidFill>
+                      <a:prstDash val="solid"/>
+                    </a:lnB>
                     <a:solidFill>
                       <a:srgbClr val="ECE7E2"/>
                     </a:solidFill>
@@ -15034,6 +16448,21 @@
                     </a:p>
                   </a:txBody>
                   <a:tcPr marL="127000" marR="91440" marT="41910" marB="41910" anchor="ctr">
+                    <a:lnL w="12700" cap="flat" cmpd="sng" algn="ctr">
+                      <a:noFill/>
+                    </a:lnL>
+                    <a:lnR w="12700" cap="flat" cmpd="sng" algn="ctr">
+                      <a:noFill/>
+                    </a:lnR>
+                    <a:lnT w="12700" cap="flat" cmpd="sng" algn="ctr">
+                      <a:noFill/>
+                    </a:lnT>
+                    <a:lnB w="6350" cap="flat" cmpd="sng" algn="ctr">
+                      <a:solidFill>
+                        <a:srgbClr val="D9D9D9"/>
+                      </a:solidFill>
+                      <a:prstDash val="solid"/>
+                    </a:lnB>
                     <a:solidFill>
                       <a:srgbClr val="FFFFFF"/>
                     </a:solidFill>
@@ -15056,6 +16485,21 @@
                     </a:p>
                   </a:txBody>
                   <a:tcPr marL="0" marR="91440" marT="41910" marB="41910" anchor="ctr">
+                    <a:lnL w="12700" cap="flat" cmpd="sng" algn="ctr">
+                      <a:noFill/>
+                    </a:lnL>
+                    <a:lnR w="12700" cap="flat" cmpd="sng" algn="ctr">
+                      <a:noFill/>
+                    </a:lnR>
+                    <a:lnT w="12700" cap="flat" cmpd="sng" algn="ctr">
+                      <a:noFill/>
+                    </a:lnT>
+                    <a:lnB w="6350" cap="flat" cmpd="sng" algn="ctr">
+                      <a:solidFill>
+                        <a:srgbClr val="D9D9D9"/>
+                      </a:solidFill>
+                      <a:prstDash val="solid"/>
+                    </a:lnB>
                     <a:solidFill>
                       <a:srgbClr val="FFFFFF"/>
                     </a:solidFill>
@@ -15093,6 +16537,21 @@
                     </a:p>
                   </a:txBody>
                   <a:tcPr marL="127000" marR="91440" marT="41910" marB="41910" anchor="ctr">
+                    <a:lnL w="12700" cap="flat" cmpd="sng" algn="ctr">
+                      <a:noFill/>
+                    </a:lnL>
+                    <a:lnR w="12700" cap="flat" cmpd="sng" algn="ctr">
+                      <a:noFill/>
+                    </a:lnR>
+                    <a:lnT w="12700" cap="flat" cmpd="sng" algn="ctr">
+                      <a:noFill/>
+                    </a:lnT>
+                    <a:lnB w="6350" cap="flat" cmpd="sng" algn="ctr">
+                      <a:solidFill>
+                        <a:srgbClr val="D9D9D9"/>
+                      </a:solidFill>
+                      <a:prstDash val="solid"/>
+                    </a:lnB>
                     <a:solidFill>
                       <a:srgbClr val="ECE7E2"/>
                     </a:solidFill>
@@ -15115,6 +16574,21 @@
                     </a:p>
                   </a:txBody>
                   <a:tcPr marL="0" marR="91440" marT="41910" marB="41910" anchor="ctr">
+                    <a:lnL w="12700" cap="flat" cmpd="sng" algn="ctr">
+                      <a:noFill/>
+                    </a:lnL>
+                    <a:lnR w="12700" cap="flat" cmpd="sng" algn="ctr">
+                      <a:noFill/>
+                    </a:lnR>
+                    <a:lnT w="12700" cap="flat" cmpd="sng" algn="ctr">
+                      <a:noFill/>
+                    </a:lnT>
+                    <a:lnB w="6350" cap="flat" cmpd="sng" algn="ctr">
+                      <a:solidFill>
+                        <a:srgbClr val="D9D9D9"/>
+                      </a:solidFill>
+                      <a:prstDash val="solid"/>
+                    </a:lnB>
                     <a:solidFill>
                       <a:srgbClr val="ECE7E2"/>
                     </a:solidFill>
@@ -15165,6 +16639,21 @@
                     </a:p>
                   </a:txBody>
                   <a:tcPr marL="127000" marR="91440" marT="41910" marB="41910" anchor="ctr">
+                    <a:lnL w="12700" cap="flat" cmpd="sng" algn="ctr">
+                      <a:noFill/>
+                    </a:lnL>
+                    <a:lnR w="12700" cap="flat" cmpd="sng" algn="ctr">
+                      <a:noFill/>
+                    </a:lnR>
+                    <a:lnT w="12700" cap="flat" cmpd="sng" algn="ctr">
+                      <a:noFill/>
+                    </a:lnT>
+                    <a:lnB w="6350" cap="flat" cmpd="sng" algn="ctr">
+                      <a:solidFill>
+                        <a:srgbClr val="D9D9D9"/>
+                      </a:solidFill>
+                      <a:prstDash val="solid"/>
+                    </a:lnB>
                     <a:solidFill>
                       <a:srgbClr val="C5D6E9"/>
                     </a:solidFill>
@@ -15187,6 +16676,21 @@
                     </a:p>
                   </a:txBody>
                   <a:tcPr marL="0" marR="91440" marT="41910" marB="41910" anchor="ctr">
+                    <a:lnL w="12700" cap="flat" cmpd="sng" algn="ctr">
+                      <a:noFill/>
+                    </a:lnL>
+                    <a:lnR w="12700" cap="flat" cmpd="sng" algn="ctr">
+                      <a:noFill/>
+                    </a:lnR>
+                    <a:lnT w="12700" cap="flat" cmpd="sng" algn="ctr">
+                      <a:noFill/>
+                    </a:lnT>
+                    <a:lnB w="6350" cap="flat" cmpd="sng" algn="ctr">
+                      <a:solidFill>
+                        <a:srgbClr val="D9D9D9"/>
+                      </a:solidFill>
+                      <a:prstDash val="solid"/>
+                    </a:lnB>
                     <a:solidFill>
                       <a:srgbClr val="C5D6E9"/>
                     </a:solidFill>
@@ -15212,6 +16716,21 @@
                     </a:p>
                   </a:txBody>
                   <a:tcPr marL="127000" marR="91440" marT="41910" marB="41910" anchor="ctr">
+                    <a:lnL w="12700" cap="flat" cmpd="sng" algn="ctr">
+                      <a:noFill/>
+                    </a:lnL>
+                    <a:lnR w="12700" cap="flat" cmpd="sng" algn="ctr">
+                      <a:noFill/>
+                    </a:lnR>
+                    <a:lnT w="12700" cap="flat" cmpd="sng" algn="ctr">
+                      <a:noFill/>
+                    </a:lnT>
+                    <a:lnB w="6350" cap="flat" cmpd="sng" algn="ctr">
+                      <a:solidFill>
+                        <a:srgbClr val="D9D9D9"/>
+                      </a:solidFill>
+                      <a:prstDash val="solid"/>
+                    </a:lnB>
                     <a:solidFill>
                       <a:srgbClr val="FFFFFF"/>
                     </a:solidFill>
@@ -15294,6 +16813,21 @@
                     </a:p>
                   </a:txBody>
                   <a:tcPr marL="0" marR="91440" marT="41910" marB="41910" anchor="ctr">
+                    <a:lnL w="12700" cap="flat" cmpd="sng" algn="ctr">
+                      <a:noFill/>
+                    </a:lnL>
+                    <a:lnR w="12700" cap="flat" cmpd="sng" algn="ctr">
+                      <a:noFill/>
+                    </a:lnR>
+                    <a:lnT w="12700" cap="flat" cmpd="sng" algn="ctr">
+                      <a:noFill/>
+                    </a:lnT>
+                    <a:lnB w="6350" cap="flat" cmpd="sng" algn="ctr">
+                      <a:solidFill>
+                        <a:srgbClr val="D9D9D9"/>
+                      </a:solidFill>
+                      <a:prstDash val="solid"/>
+                    </a:lnB>
                     <a:solidFill>
                       <a:srgbClr val="FFFFFF"/>
                     </a:solidFill>
@@ -15319,6 +16853,21 @@
                     </a:p>
                   </a:txBody>
                   <a:tcPr marL="127000" marR="91440" marT="41910" marB="41910" anchor="ctr">
+                    <a:lnL w="12700" cap="flat" cmpd="sng" algn="ctr">
+                      <a:noFill/>
+                    </a:lnL>
+                    <a:lnR w="12700" cap="flat" cmpd="sng" algn="ctr">
+                      <a:noFill/>
+                    </a:lnR>
+                    <a:lnT w="12700" cap="flat" cmpd="sng" algn="ctr">
+                      <a:noFill/>
+                    </a:lnT>
+                    <a:lnB w="6350" cap="flat" cmpd="sng" algn="ctr">
+                      <a:solidFill>
+                        <a:srgbClr val="D9D9D9"/>
+                      </a:solidFill>
+                      <a:prstDash val="solid"/>
+                    </a:lnB>
                     <a:solidFill>
                       <a:srgbClr val="ECE7E2"/>
                     </a:solidFill>
@@ -15341,6 +16890,21 @@
                     </a:p>
                   </a:txBody>
                   <a:tcPr marL="0" marR="91440" marT="41910" marB="41910" anchor="ctr">
+                    <a:lnL w="12700" cap="flat" cmpd="sng" algn="ctr">
+                      <a:noFill/>
+                    </a:lnL>
+                    <a:lnR w="12700" cap="flat" cmpd="sng" algn="ctr">
+                      <a:noFill/>
+                    </a:lnR>
+                    <a:lnT w="12700" cap="flat" cmpd="sng" algn="ctr">
+                      <a:noFill/>
+                    </a:lnT>
+                    <a:lnB w="6350" cap="flat" cmpd="sng" algn="ctr">
+                      <a:solidFill>
+                        <a:srgbClr val="D9D9D9"/>
+                      </a:solidFill>
+                      <a:prstDash val="solid"/>
+                    </a:lnB>
                     <a:solidFill>
                       <a:srgbClr val="ECE7E2"/>
                     </a:solidFill>
@@ -15366,6 +16930,21 @@
                     </a:p>
                   </a:txBody>
                   <a:tcPr marL="127000" marR="91440" marT="41910" marB="41910" anchor="ctr">
+                    <a:lnL w="12700" cap="flat" cmpd="sng" algn="ctr">
+                      <a:noFill/>
+                    </a:lnL>
+                    <a:lnR w="12700" cap="flat" cmpd="sng" algn="ctr">
+                      <a:noFill/>
+                    </a:lnR>
+                    <a:lnT w="12700" cap="flat" cmpd="sng" algn="ctr">
+                      <a:noFill/>
+                    </a:lnT>
+                    <a:lnB w="6350" cap="flat" cmpd="sng" algn="ctr">
+                      <a:solidFill>
+                        <a:srgbClr val="D9D9D9"/>
+                      </a:solidFill>
+                      <a:prstDash val="solid"/>
+                    </a:lnB>
                     <a:solidFill>
                       <a:srgbClr val="FFFFFF"/>
                     </a:solidFill>
@@ -15418,6 +16997,21 @@
                     </a:p>
                   </a:txBody>
                   <a:tcPr marL="0" marR="91440" marT="41910" marB="41910" anchor="ctr">
+                    <a:lnL w="12700" cap="flat" cmpd="sng" algn="ctr">
+                      <a:noFill/>
+                    </a:lnL>
+                    <a:lnR w="12700" cap="flat" cmpd="sng" algn="ctr">
+                      <a:noFill/>
+                    </a:lnR>
+                    <a:lnT w="12700" cap="flat" cmpd="sng" algn="ctr">
+                      <a:noFill/>
+                    </a:lnT>
+                    <a:lnB w="6350" cap="flat" cmpd="sng" algn="ctr">
+                      <a:solidFill>
+                        <a:srgbClr val="D9D9D9"/>
+                      </a:solidFill>
+                      <a:prstDash val="solid"/>
+                    </a:lnB>
                     <a:solidFill>
                       <a:srgbClr val="FFFFFF"/>
                     </a:solidFill>
@@ -15443,6 +17037,21 @@
                     </a:p>
                   </a:txBody>
                   <a:tcPr marL="127000" marR="91440" marT="41910" marB="41910" anchor="ctr">
+                    <a:lnL w="12700" cap="flat" cmpd="sng" algn="ctr">
+                      <a:noFill/>
+                    </a:lnL>
+                    <a:lnR w="12700" cap="flat" cmpd="sng" algn="ctr">
+                      <a:noFill/>
+                    </a:lnR>
+                    <a:lnT w="12700" cap="flat" cmpd="sng" algn="ctr">
+                      <a:noFill/>
+                    </a:lnT>
+                    <a:lnB w="6350" cap="flat" cmpd="sng" algn="ctr">
+                      <a:solidFill>
+                        <a:srgbClr val="D9D9D9"/>
+                      </a:solidFill>
+                      <a:prstDash val="solid"/>
+                    </a:lnB>
                     <a:solidFill>
                       <a:srgbClr val="ECE7E2"/>
                     </a:solidFill>
@@ -15484,6 +17093,21 @@
                     </a:p>
                   </a:txBody>
                   <a:tcPr marL="0" marR="91440" marT="41910" marB="41910" anchor="ctr">
+                    <a:lnL w="12700" cap="flat" cmpd="sng" algn="ctr">
+                      <a:noFill/>
+                    </a:lnL>
+                    <a:lnR w="12700" cap="flat" cmpd="sng" algn="ctr">
+                      <a:noFill/>
+                    </a:lnR>
+                    <a:lnT w="12700" cap="flat" cmpd="sng" algn="ctr">
+                      <a:noFill/>
+                    </a:lnT>
+                    <a:lnB w="6350" cap="flat" cmpd="sng" algn="ctr">
+                      <a:solidFill>
+                        <a:srgbClr val="D9D9D9"/>
+                      </a:solidFill>
+                      <a:prstDash val="solid"/>
+                    </a:lnB>
                     <a:solidFill>
                       <a:srgbClr val="ECE7E2"/>
                     </a:solidFill>
@@ -15521,6 +17145,21 @@
                     </a:p>
                   </a:txBody>
                   <a:tcPr marL="127000" marR="91440" marT="41910" marB="41910" anchor="ctr">
+                    <a:lnL w="12700" cap="flat" cmpd="sng" algn="ctr">
+                      <a:noFill/>
+                    </a:lnL>
+                    <a:lnR w="12700" cap="flat" cmpd="sng" algn="ctr">
+                      <a:noFill/>
+                    </a:lnR>
+                    <a:lnT w="12700" cap="flat" cmpd="sng" algn="ctr">
+                      <a:noFill/>
+                    </a:lnT>
+                    <a:lnB w="6350" cap="flat" cmpd="sng" algn="ctr">
+                      <a:solidFill>
+                        <a:srgbClr val="D9D9D9"/>
+                      </a:solidFill>
+                      <a:prstDash val="solid"/>
+                    </a:lnB>
                     <a:solidFill>
                       <a:srgbClr val="FFFFFF"/>
                     </a:solidFill>
@@ -15543,6 +17182,21 @@
                     </a:p>
                   </a:txBody>
                   <a:tcPr marL="0" marR="91440" marT="41910" marB="41910" anchor="ctr">
+                    <a:lnL w="12700" cap="flat" cmpd="sng" algn="ctr">
+                      <a:noFill/>
+                    </a:lnL>
+                    <a:lnR w="12700" cap="flat" cmpd="sng" algn="ctr">
+                      <a:noFill/>
+                    </a:lnR>
+                    <a:lnT w="12700" cap="flat" cmpd="sng" algn="ctr">
+                      <a:noFill/>
+                    </a:lnT>
+                    <a:lnB w="6350" cap="flat" cmpd="sng" algn="ctr">
+                      <a:solidFill>
+                        <a:srgbClr val="D9D9D9"/>
+                      </a:solidFill>
+                      <a:prstDash val="solid"/>
+                    </a:lnB>
                     <a:solidFill>
                       <a:srgbClr val="FFFFFF"/>
                     </a:solidFill>
@@ -15568,6 +17222,21 @@
                     </a:p>
                   </a:txBody>
                   <a:tcPr marL="127000" marR="91440" marT="41910" marB="41910" anchor="ctr">
+                    <a:lnL w="12700" cap="flat" cmpd="sng" algn="ctr">
+                      <a:noFill/>
+                    </a:lnL>
+                    <a:lnR w="12700" cap="flat" cmpd="sng" algn="ctr">
+                      <a:noFill/>
+                    </a:lnR>
+                    <a:lnT w="12700" cap="flat" cmpd="sng" algn="ctr">
+                      <a:noFill/>
+                    </a:lnT>
+                    <a:lnB w="6350" cap="flat" cmpd="sng" algn="ctr">
+                      <a:solidFill>
+                        <a:srgbClr val="D9D9D9"/>
+                      </a:solidFill>
+                      <a:prstDash val="solid"/>
+                    </a:lnB>
                     <a:solidFill>
                       <a:srgbClr val="ECE7E2"/>
                     </a:solidFill>
@@ -15590,6 +17259,21 @@
                     </a:p>
                   </a:txBody>
                   <a:tcPr marL="0" marR="91440" marT="41910" marB="41910" anchor="ctr">
+                    <a:lnL w="12700" cap="flat" cmpd="sng" algn="ctr">
+                      <a:noFill/>
+                    </a:lnL>
+                    <a:lnR w="12700" cap="flat" cmpd="sng" algn="ctr">
+                      <a:noFill/>
+                    </a:lnR>
+                    <a:lnT w="12700" cap="flat" cmpd="sng" algn="ctr">
+                      <a:noFill/>
+                    </a:lnT>
+                    <a:lnB w="6350" cap="flat" cmpd="sng" algn="ctr">
+                      <a:solidFill>
+                        <a:srgbClr val="D9D9D9"/>
+                      </a:solidFill>
+                      <a:prstDash val="solid"/>
+                    </a:lnB>
                     <a:solidFill>
                       <a:srgbClr val="ECE7E2"/>
                     </a:solidFill>
@@ -15600,6 +17284,61 @@
           </a:graphicData>
         </a:graphic>
       </p:graphicFrame>
+      <p:sp>
+        <p:nvSpPr>
+          <p:cNvPr id="170" name="TextBox 169"/>
+          <p:cNvSpPr txBox="1"/>
+          <p:nvPr/>
+        </p:nvSpPr>
+        <p:spPr>
+          <a:xfrm>
+            <a:off x="812800" y="6250000"/>
+            <a:ext cx="10566400" cy="220000"/>
+          </a:xfrm>
+          <a:prstGeom prst="rect">
+            <a:avLst/>
+          </a:prstGeom>
+          <a:noFill/>
+        </p:spPr>
+        <p:txBody>
+          <a:bodyPr wrap="none" lIns="0" rIns="0" tIns="0" bIns="0" anchor="ctr">
+            <a:spAutoFit/>
+          </a:bodyPr>
+          <a:lstStyle/>
+          <a:p>
+            <a:pPr algn="l"/>
+            <a:r>
+              <a:rPr sz="800" i="1" u="sng">
+                <a:solidFill>
+                  <a:srgbClr val="2A5C8F"/>
+                </a:solidFill>
+                <a:latin typeface="Nunito Sans"/>
+                <a:hlinkClick r:id="rId25"/>
+              </a:rPr>
+              <a:t>firmware/aim/src/</a:t>
+            </a:r>
+            <a:r>
+              <a:rPr sz="800" i="1">
+                <a:solidFill>
+                  <a:srgbClr val="6B6F76"/>
+                </a:solidFill>
+                <a:latin typeface="Nunito Sans"/>
+              </a:rPr>
+              <a:t> · </a:t>
+            </a:r>
+            <a:r>
+              <a:rPr sz="800" i="1" u="sng">
+                <a:solidFill>
+                  <a:srgbClr val="2A5C8F"/>
+                </a:solidFill>
+                <a:latin typeface="Nunito Sans"/>
+                <a:hlinkClick r:id="rId26"/>
+              </a:rPr>
+              <a:t>eye/camera/</a:t>
+            </a:r>
+          </a:p>
+        </p:txBody>
+      </p:sp>
     </p:spTree>
   </p:cSld>
   <p:clrMapOvr>
@@ -15751,8 +17490,8 @@
         </p:nvSpPr>
         <p:spPr>
           <a:xfrm>
-            <a:off x="812800" y="1242020"/>
-            <a:ext cx="10883400" cy="332700"/>
+            <a:off x="812800" y="1280120"/>
+            <a:ext cx="10883400" cy="360660"/>
           </a:xfrm>
           <a:prstGeom prst="rect">
             <a:avLst/>
@@ -15786,7 +17525,7 @@
               <a:buNone/>
             </a:pPr>
             <a:r>
-              <a:rPr b="1" i="0" lang="en-US" sz="2200" u="none" cap="none" strike="noStrike">
+              <a:rPr b="1" i="0" lang="en-US" sz="2400" u="none" cap="none" strike="noStrike">
                 <a:solidFill>
                   <a:srgbClr val="232323"/>
                 </a:solidFill>
@@ -15818,8 +17557,8 @@
           <p:nvPr/>
         </p:nvGraphicFramePr>
         <p:xfrm>
-          <a:off x="812800" y="1638201"/>
-          <a:ext cx="10566400" cy="3308641"/>
+          <a:off x="812800" y="1650000"/>
+          <a:ext cx="10566400" cy="3071780"/>
         </p:xfrm>
         <a:graphic>
           <a:graphicData uri="http://schemas.openxmlformats.org/drawingml/2006/table">
@@ -15828,18 +17567,19 @@
                 <a:tableStyleId>{5940675A-B579-460E-94D1-54222C63F5DA}</a:tableStyleId>
               </a:tblPr>
               <a:tblGrid>
-                <a:gridCol w="3600000"/>
-                <a:gridCol w="5300000"/>
-                <a:gridCol w="1666400"/>
+                <a:gridCol w="3200000"/>
+                <a:gridCol w="3400000"/>
+                <a:gridCol w="2400000"/>
+                <a:gridCol w="1566400"/>
               </a:tblGrid>
-              <a:tr h="298641">
+              <a:tr h="260000">
                 <a:tc>
                   <a:txBody>
                     <a:bodyPr wrap="square"/>
                     <a:lstStyle/>
                     <a:p>
                       <a:r>
-                        <a:rPr sz="1100" b="1">
+                        <a:rPr sz="1050" b="1">
                           <a:solidFill>
                             <a:srgbClr val="232323"/>
                           </a:solidFill>
@@ -15850,98 +17590,23 @@
                     </a:p>
                   </a:txBody>
                   <a:tcPr marL="127000" marR="91440" marT="45720" marB="45720" anchor="ctr">
+                    <a:lnL w="12700" cap="flat" cmpd="sng" algn="ctr">
+                      <a:noFill/>
+                    </a:lnL>
+                    <a:lnR w="12700" cap="flat" cmpd="sng" algn="ctr">
+                      <a:noFill/>
+                    </a:lnR>
+                    <a:lnT w="12700" cap="flat" cmpd="sng" algn="ctr">
+                      <a:noFill/>
+                    </a:lnT>
+                    <a:lnB w="6350" cap="flat" cmpd="sng" algn="ctr">
+                      <a:solidFill>
+                        <a:srgbClr val="D9D9D9"/>
+                      </a:solidFill>
+                      <a:prstDash val="solid"/>
+                    </a:lnB>
                     <a:solidFill>
                       <a:srgbClr val="C5D6E9"/>
-                    </a:solidFill>
-                  </a:tcPr>
-                </a:tc>
-                <a:tc>
-                  <a:txBody>
-                    <a:bodyPr wrap="square"/>
-                    <a:lstStyle/>
-                    <a:p>
-                      <a:r>
-                        <a:rPr sz="1100" b="1">
-                          <a:solidFill>
-                            <a:srgbClr val="232323"/>
-                          </a:solidFill>
-                          <a:latin typeface="Nunito Sans"/>
-                        </a:rPr>
-                        <a:t>Рішення</a:t>
-                      </a:r>
-                    </a:p>
-                  </a:txBody>
-                  <a:tcPr marL="0" marR="91440" marT="45720" marB="45720" anchor="ctr">
-                    <a:solidFill>
-                      <a:srgbClr val="C5D6E9"/>
-                    </a:solidFill>
-                  </a:tcPr>
-                </a:tc>
-                <a:tc>
-                  <a:txBody>
-                    <a:bodyPr wrap="square"/>
-                    <a:lstStyle/>
-                    <a:p>
-                      <a:r>
-                        <a:rPr sz="1100" b="1">
-                          <a:solidFill>
-                            <a:srgbClr val="232323"/>
-                          </a:solidFill>
-                          <a:latin typeface="Nunito Sans"/>
-                        </a:rPr>
-                        <a:t>Статус</a:t>
-                      </a:r>
-                    </a:p>
-                  </a:txBody>
-                  <a:tcPr marL="0" marR="91440" marT="45720" marB="45720" anchor="ctr">
-                    <a:solidFill>
-                      <a:srgbClr val="C5D6E9"/>
-                    </a:solidFill>
-                  </a:tcPr>
-                </a:tc>
-              </a:tr>
-              <a:tr h="430000">
-                <a:tc>
-                  <a:txBody>
-                    <a:bodyPr wrap="square"/>
-                    <a:lstStyle/>
-                    <a:p>
-                      <a:r>
-                        <a:rPr sz="1100" b="1">
-                          <a:solidFill>
-                            <a:srgbClr val="232323"/>
-                          </a:solidFill>
-                          <a:latin typeface="Nunito Sans"/>
-                        </a:rPr>
-                        <a:t>Авто-наведення «злітає» → LINK_LOST</a:t>
-                      </a:r>
-                    </a:p>
-                  </a:txBody>
-                  <a:tcPr marL="127000" marR="91440" marT="45720" marB="45720" anchor="ctr">
-                    <a:solidFill>
-                      <a:srgbClr val="FFFFFF"/>
-                    </a:solidFill>
-                  </a:tcPr>
-                </a:tc>
-                <a:tc>
-                  <a:txBody>
-                    <a:bodyPr wrap="square"/>
-                    <a:lstStyle/>
-                    <a:p>
-                      <a:r>
-                        <a:rPr sz="1100" b="0">
-                          <a:solidFill>
-                            <a:srgbClr val="414C58"/>
-                          </a:solidFill>
-                          <a:latin typeface="Nunito Sans"/>
-                        </a:rPr>
-                        <a:t>Похибку обмежено до ±1 (dots.py, Protocol.hpp), менша робоча зона 60°/30°.</a:t>
-                      </a:r>
-                    </a:p>
-                  </a:txBody>
-                  <a:tcPr marL="0" marR="91440" marT="45720" marB="45720" anchor="ctr">
-                    <a:solidFill>
-                      <a:srgbClr val="FFFFFF"/>
                     </a:solidFill>
                   </a:tcPr>
                 </a:tc>
@@ -15957,127 +17622,28 @@
                           </a:solidFill>
                           <a:latin typeface="Nunito Sans"/>
                         </a:rPr>
-                        <a:t>Частково</a:t>
+                        <a:t>Причини</a:t>
                       </a:r>
                     </a:p>
                   </a:txBody>
                   <a:tcPr marL="0" marR="91440" marT="45720" marB="45720" anchor="ctr">
+                    <a:lnL w="12700" cap="flat" cmpd="sng" algn="ctr">
+                      <a:noFill/>
+                    </a:lnL>
+                    <a:lnR w="12700" cap="flat" cmpd="sng" algn="ctr">
+                      <a:noFill/>
+                    </a:lnR>
+                    <a:lnT w="12700" cap="flat" cmpd="sng" algn="ctr">
+                      <a:noFill/>
+                    </a:lnT>
+                    <a:lnB w="6350" cap="flat" cmpd="sng" algn="ctr">
+                      <a:solidFill>
+                        <a:srgbClr val="D9D9D9"/>
+                      </a:solidFill>
+                      <a:prstDash val="solid"/>
+                    </a:lnB>
                     <a:solidFill>
-                      <a:srgbClr val="FFFFFF"/>
-                    </a:solidFill>
-                  </a:tcPr>
-                </a:tc>
-              </a:tr>
-              <a:tr h="430000">
-                <a:tc>
-                  <a:txBody>
-                    <a:bodyPr wrap="square"/>
-                    <a:lstStyle/>
-                    <a:p>
-                      <a:r>
-                        <a:rPr sz="1100" b="1">
-                          <a:solidFill>
-                            <a:srgbClr val="232323"/>
-                          </a:solidFill>
-                          <a:latin typeface="Nunito Sans"/>
-                        </a:rPr>
-                        <a:t>Неправильні кути MIN/MAX</a:t>
-                      </a:r>
-                    </a:p>
-                  </a:txBody>
-                  <a:tcPr marL="127000" marR="91440" marT="45720" marB="45720" anchor="ctr">
-                    <a:solidFill>
-                      <a:srgbClr val="ECE7E2"/>
-                    </a:solidFill>
-                  </a:tcPr>
-                </a:tc>
-                <a:tc>
-                  <a:txBody>
-                    <a:bodyPr wrap="square"/>
-                    <a:lstStyle/>
-                    <a:p>
-                      <a:r>
-                        <a:rPr sz="1100" b="0">
-                          <a:solidFill>
-                            <a:srgbClr val="414C58"/>
-                          </a:solidFill>
-                          <a:latin typeface="Nunito Sans"/>
-                        </a:rPr>
-                        <a:t>Виміряно на стенді, прапорці напряму, static_assert тримає зону в межах ходу серво.</a:t>
-                      </a:r>
-                    </a:p>
-                  </a:txBody>
-                  <a:tcPr marL="0" marR="91440" marT="45720" marB="45720" anchor="ctr">
-                    <a:solidFill>
-                      <a:srgbClr val="ECE7E2"/>
-                    </a:solidFill>
-                  </a:tcPr>
-                </a:tc>
-                <a:tc>
-                  <a:txBody>
-                    <a:bodyPr wrap="square"/>
-                    <a:lstStyle/>
-                    <a:p>
-                      <a:r>
-                        <a:rPr sz="1050" b="0">
-                          <a:solidFill>
-                            <a:srgbClr val="414C58"/>
-                          </a:solidFill>
-                          <a:latin typeface="Nunito Sans"/>
-                        </a:rPr>
-                        <a:t>Виправлено</a:t>
-                      </a:r>
-                    </a:p>
-                  </a:txBody>
-                  <a:tcPr marL="0" marR="91440" marT="45720" marB="45720" anchor="ctr">
-                    <a:solidFill>
-                      <a:srgbClr val="ECE7E2"/>
-                    </a:solidFill>
-                  </a:tcPr>
-                </a:tc>
-              </a:tr>
-              <a:tr h="430000">
-                <a:tc>
-                  <a:txBody>
-                    <a:bodyPr wrap="square"/>
-                    <a:lstStyle/>
-                    <a:p>
-                      <a:r>
-                        <a:rPr sz="1100" b="1">
-                          <a:solidFill>
-                            <a:srgbClr val="232323"/>
-                          </a:solidFill>
-                          <a:latin typeface="Nunito Sans"/>
-                        </a:rPr>
-                        <a:t>Лазер блимає при запуску</a:t>
-                      </a:r>
-                    </a:p>
-                  </a:txBody>
-                  <a:tcPr marL="127000" marR="91440" marT="45720" marB="45720" anchor="ctr">
-                    <a:solidFill>
-                      <a:srgbClr val="FFFFFF"/>
-                    </a:solidFill>
-                  </a:tcPr>
-                </a:tc>
-                <a:tc>
-                  <a:txBody>
-                    <a:bodyPr wrap="square"/>
-                    <a:lstStyle/>
-                    <a:p>
-                      <a:r>
-                        <a:rPr sz="1100" b="1">
-                          <a:solidFill>
-                            <a:srgbClr val="232323"/>
-                          </a:solidFill>
-                          <a:latin typeface="Nunito Sans"/>
-                        </a:rPr>
-                        <a:t>TODO: причина й фікс.</a:t>
-                      </a:r>
-                    </a:p>
-                  </a:txBody>
-                  <a:tcPr marL="0" marR="91440" marT="45720" marB="45720" anchor="ctr">
-                    <a:solidFill>
-                      <a:srgbClr val="FFFFFF"/>
+                      <a:srgbClr val="C5D6E9"/>
                     </a:solidFill>
                   </a:tcPr>
                 </a:tc>
@@ -16093,59 +17659,28 @@
                           </a:solidFill>
                           <a:latin typeface="Nunito Sans"/>
                         </a:rPr>
-                        <a:t>Відкрито</a:t>
+                        <a:t>Рішення</a:t>
                       </a:r>
                     </a:p>
                   </a:txBody>
                   <a:tcPr marL="0" marR="91440" marT="45720" marB="45720" anchor="ctr">
+                    <a:lnL w="12700" cap="flat" cmpd="sng" algn="ctr">
+                      <a:noFill/>
+                    </a:lnL>
+                    <a:lnR w="12700" cap="flat" cmpd="sng" algn="ctr">
+                      <a:noFill/>
+                    </a:lnR>
+                    <a:lnT w="12700" cap="flat" cmpd="sng" algn="ctr">
+                      <a:noFill/>
+                    </a:lnT>
+                    <a:lnB w="6350" cap="flat" cmpd="sng" algn="ctr">
+                      <a:solidFill>
+                        <a:srgbClr val="D9D9D9"/>
+                      </a:solidFill>
+                      <a:prstDash val="solid"/>
+                    </a:lnB>
                     <a:solidFill>
-                      <a:srgbClr val="FFFFFF"/>
-                    </a:solidFill>
-                  </a:tcPr>
-                </a:tc>
-              </a:tr>
-              <a:tr h="430000">
-                <a:tc>
-                  <a:txBody>
-                    <a:bodyPr wrap="square"/>
-                    <a:lstStyle/>
-                    <a:p>
-                      <a:r>
-                        <a:rPr sz="1100" b="1">
-                          <a:solidFill>
-                            <a:srgbClr val="232323"/>
-                          </a:solidFill>
-                          <a:latin typeface="Nunito Sans"/>
-                        </a:rPr>
-                        <a:t>Дані не доходять до ESP32 при зміні розміру вікна ПК</a:t>
-                      </a:r>
-                    </a:p>
-                  </a:txBody>
-                  <a:tcPr marL="127000" marR="91440" marT="45720" marB="45720" anchor="ctr">
-                    <a:solidFill>
-                      <a:srgbClr val="ECE7E2"/>
-                    </a:solidFill>
-                  </a:tcPr>
-                </a:tc>
-                <a:tc>
-                  <a:txBody>
-                    <a:bodyPr wrap="square"/>
-                    <a:lstStyle/>
-                    <a:p>
-                      <a:r>
-                        <a:rPr sz="1100" b="1">
-                          <a:solidFill>
-                            <a:srgbClr val="232323"/>
-                          </a:solidFill>
-                          <a:latin typeface="Nunito Sans"/>
-                        </a:rPr>
-                        <a:t>TODO: причина й фікс.</a:t>
-                      </a:r>
-                    </a:p>
-                  </a:txBody>
-                  <a:tcPr marL="0" marR="91440" marT="45720" marB="45720" anchor="ctr">
-                    <a:solidFill>
-                      <a:srgbClr val="ECE7E2"/>
+                      <a:srgbClr val="C5D6E9"/>
                     </a:solidFill>
                   </a:tcPr>
                 </a:tc>
@@ -16161,35 +17696,65 @@
                           </a:solidFill>
                           <a:latin typeface="Nunito Sans"/>
                         </a:rPr>
-                        <a:t>Відкрито</a:t>
+                        <a:t>Статус</a:t>
                       </a:r>
                     </a:p>
                   </a:txBody>
                   <a:tcPr marL="0" marR="91440" marT="45720" marB="45720" anchor="ctr">
+                    <a:lnL w="12700" cap="flat" cmpd="sng" algn="ctr">
+                      <a:noFill/>
+                    </a:lnL>
+                    <a:lnR w="12700" cap="flat" cmpd="sng" algn="ctr">
+                      <a:noFill/>
+                    </a:lnR>
+                    <a:lnT w="12700" cap="flat" cmpd="sng" algn="ctr">
+                      <a:noFill/>
+                    </a:lnT>
+                    <a:lnB w="6350" cap="flat" cmpd="sng" algn="ctr">
+                      <a:solidFill>
+                        <a:srgbClr val="D9D9D9"/>
+                      </a:solidFill>
+                      <a:prstDash val="solid"/>
+                    </a:lnB>
                     <a:solidFill>
-                      <a:srgbClr val="ECE7E2"/>
+                      <a:srgbClr val="C5D6E9"/>
                     </a:solidFill>
                   </a:tcPr>
                 </a:tc>
               </a:tr>
-              <a:tr h="430000">
+              <a:tr h="525780">
                 <a:tc>
                   <a:txBody>
                     <a:bodyPr wrap="square"/>
                     <a:lstStyle/>
                     <a:p>
                       <a:r>
-                        <a:rPr sz="1100" b="1">
+                        <a:rPr sz="950" b="1">
                           <a:solidFill>
                             <a:srgbClr val="232323"/>
                           </a:solidFill>
                           <a:latin typeface="Nunito Sans"/>
                         </a:rPr>
-                        <a:t>ESP32 перезавантажується при від'єднанні UART0</a:t>
+                        <a:t>Авто-наведення «злітає» → LINK_LOST</a:t>
                       </a:r>
                     </a:p>
                   </a:txBody>
                   <a:tcPr marL="127000" marR="91440" marT="45720" marB="45720" anchor="ctr">
+                    <a:lnL w="12700" cap="flat" cmpd="sng" algn="ctr">
+                      <a:noFill/>
+                    </a:lnL>
+                    <a:lnR w="12700" cap="flat" cmpd="sng" algn="ctr">
+                      <a:noFill/>
+                    </a:lnR>
+                    <a:lnT w="12700" cap="flat" cmpd="sng" algn="ctr">
+                      <a:noFill/>
+                    </a:lnT>
+                    <a:lnB w="6350" cap="flat" cmpd="sng" algn="ctr">
+                      <a:solidFill>
+                        <a:srgbClr val="D9D9D9"/>
+                      </a:solidFill>
+                      <a:prstDash val="solid"/>
+                    </a:lnB>
                     <a:solidFill>
                       <a:srgbClr val="FFFFFF"/>
                     </a:solidFill>
@@ -16201,17 +17766,32 @@
                     <a:lstStyle/>
                     <a:p>
                       <a:r>
-                        <a:rPr sz="1100" b="0">
+                        <a:rPr sz="950" b="0">
                           <a:solidFill>
                             <a:srgbClr val="414C58"/>
                           </a:solidFill>
                           <a:latin typeface="Nunito Sans"/>
                         </a:rPr>
-                        <a:t>DTR/RTS імпульсує пін EN; serial_link.py примусово ставить dtr=False, rts=False.</a:t>
+                        <a:t>Точка губиться на кілька кадрів · вектор похибки тягне гімбал за межі зони</a:t>
                       </a:r>
                     </a:p>
                   </a:txBody>
                   <a:tcPr marL="0" marR="91440" marT="45720" marB="45720" anchor="ctr">
+                    <a:lnL w="12700" cap="flat" cmpd="sng" algn="ctr">
+                      <a:noFill/>
+                    </a:lnL>
+                    <a:lnR w="12700" cap="flat" cmpd="sng" algn="ctr">
+                      <a:noFill/>
+                    </a:lnR>
+                    <a:lnT w="12700" cap="flat" cmpd="sng" algn="ctr">
+                      <a:noFill/>
+                    </a:lnT>
+                    <a:lnB w="6350" cap="flat" cmpd="sng" algn="ctr">
+                      <a:solidFill>
+                        <a:srgbClr val="D9D9D9"/>
+                      </a:solidFill>
+                      <a:prstDash val="solid"/>
+                    </a:lnB>
                     <a:solidFill>
                       <a:srgbClr val="FFFFFF"/>
                     </a:solidFill>
@@ -16223,7 +17803,44 @@
                     <a:lstStyle/>
                     <a:p>
                       <a:r>
-                        <a:rPr sz="1050" b="1">
+                        <a:rPr sz="950" b="0">
+                          <a:solidFill>
+                            <a:srgbClr val="414C58"/>
+                          </a:solidFill>
+                          <a:latin typeface="Nunito Sans"/>
+                        </a:rPr>
+                        <a:t>Похибку обмежено до ±1 (dots.py, Protocol.hpp), менша робоча зона 60°/30°.</a:t>
+                      </a:r>
+                    </a:p>
+                  </a:txBody>
+                  <a:tcPr marL="0" marR="91440" marT="45720" marB="45720" anchor="ctr">
+                    <a:lnL w="12700" cap="flat" cmpd="sng" algn="ctr">
+                      <a:noFill/>
+                    </a:lnL>
+                    <a:lnR w="12700" cap="flat" cmpd="sng" algn="ctr">
+                      <a:noFill/>
+                    </a:lnR>
+                    <a:lnT w="12700" cap="flat" cmpd="sng" algn="ctr">
+                      <a:noFill/>
+                    </a:lnT>
+                    <a:lnB w="6350" cap="flat" cmpd="sng" algn="ctr">
+                      <a:solidFill>
+                        <a:srgbClr val="D9D9D9"/>
+                      </a:solidFill>
+                      <a:prstDash val="solid"/>
+                    </a:lnB>
+                    <a:solidFill>
+                      <a:srgbClr val="FFFFFF"/>
+                    </a:solidFill>
+                  </a:tcPr>
+                </a:tc>
+                <a:tc>
+                  <a:txBody>
+                    <a:bodyPr wrap="square"/>
+                    <a:lstStyle/>
+                    <a:p>
+                      <a:r>
+                        <a:rPr sz="1000" b="1">
                           <a:solidFill>
                             <a:srgbClr val="232323"/>
                           </a:solidFill>
@@ -16234,30 +17851,60 @@
                     </a:p>
                   </a:txBody>
                   <a:tcPr marL="0" marR="91440" marT="45720" marB="45720" anchor="ctr">
+                    <a:lnL w="12700" cap="flat" cmpd="sng" algn="ctr">
+                      <a:noFill/>
+                    </a:lnL>
+                    <a:lnR w="12700" cap="flat" cmpd="sng" algn="ctr">
+                      <a:noFill/>
+                    </a:lnR>
+                    <a:lnT w="12700" cap="flat" cmpd="sng" algn="ctr">
+                      <a:noFill/>
+                    </a:lnT>
+                    <a:lnB w="6350" cap="flat" cmpd="sng" algn="ctr">
+                      <a:solidFill>
+                        <a:srgbClr val="D9D9D9"/>
+                      </a:solidFill>
+                      <a:prstDash val="solid"/>
+                    </a:lnB>
                     <a:solidFill>
                       <a:srgbClr val="FFFFFF"/>
                     </a:solidFill>
                   </a:tcPr>
                 </a:tc>
               </a:tr>
-              <a:tr h="430000">
+              <a:tr h="525780">
                 <a:tc>
                   <a:txBody>
                     <a:bodyPr wrap="square"/>
                     <a:lstStyle/>
                     <a:p>
                       <a:r>
-                        <a:rPr sz="1100" b="1">
+                        <a:rPr sz="950" b="1">
                           <a:solidFill>
                             <a:srgbClr val="232323"/>
                           </a:solidFill>
                           <a:latin typeface="Nunito Sans"/>
                         </a:rPr>
-                        <a:t>Повільне наведення</a:t>
+                        <a:t>Неправильні кути MIN/MAX</a:t>
                       </a:r>
                     </a:p>
                   </a:txBody>
                   <a:tcPr marL="127000" marR="91440" marT="45720" marB="45720" anchor="ctr">
+                    <a:lnL w="12700" cap="flat" cmpd="sng" algn="ctr">
+                      <a:noFill/>
+                    </a:lnL>
+                    <a:lnR w="12700" cap="flat" cmpd="sng" algn="ctr">
+                      <a:noFill/>
+                    </a:lnR>
+                    <a:lnT w="12700" cap="flat" cmpd="sng" algn="ctr">
+                      <a:noFill/>
+                    </a:lnT>
+                    <a:lnB w="6350" cap="flat" cmpd="sng" algn="ctr">
+                      <a:solidFill>
+                        <a:srgbClr val="D9D9D9"/>
+                      </a:solidFill>
+                      <a:prstDash val="solid"/>
+                    </a:lnB>
                     <a:solidFill>
                       <a:srgbClr val="ECE7E2"/>
                     </a:solidFill>
@@ -16269,17 +17916,32 @@
                     <a:lstStyle/>
                     <a:p>
                       <a:r>
-                        <a:rPr sz="1100" b="1">
+                        <a:rPr sz="950" b="0">
                           <a:solidFill>
-                            <a:srgbClr val="232323"/>
+                            <a:srgbClr val="414C58"/>
                           </a:solidFill>
                           <a:latin typeface="Nunito Sans"/>
                         </a:rPr>
-                        <a:t>TODO: причина й фікс.</a:t>
+                        <a:t>Константи підібрані на око · переплутаний напрям обертання серво</a:t>
                       </a:r>
                     </a:p>
                   </a:txBody>
                   <a:tcPr marL="0" marR="91440" marT="45720" marB="45720" anchor="ctr">
+                    <a:lnL w="12700" cap="flat" cmpd="sng" algn="ctr">
+                      <a:noFill/>
+                    </a:lnL>
+                    <a:lnR w="12700" cap="flat" cmpd="sng" algn="ctr">
+                      <a:noFill/>
+                    </a:lnR>
+                    <a:lnT w="12700" cap="flat" cmpd="sng" algn="ctr">
+                      <a:noFill/>
+                    </a:lnT>
+                    <a:lnB w="6350" cap="flat" cmpd="sng" algn="ctr">
+                      <a:solidFill>
+                        <a:srgbClr val="D9D9D9"/>
+                      </a:solidFill>
+                      <a:prstDash val="solid"/>
+                    </a:lnB>
                     <a:solidFill>
                       <a:srgbClr val="ECE7E2"/>
                     </a:solidFill>
@@ -16291,41 +17953,108 @@
                     <a:lstStyle/>
                     <a:p>
                       <a:r>
-                        <a:rPr sz="1050" b="1">
+                        <a:rPr sz="950" b="0">
                           <a:solidFill>
-                            <a:srgbClr val="232323"/>
+                            <a:srgbClr val="414C58"/>
                           </a:solidFill>
                           <a:latin typeface="Nunito Sans"/>
                         </a:rPr>
-                        <a:t>Відкрито</a:t>
+                        <a:t>Виміряно на стенді, прапорці напряму, static_assert тримає зону в межах ходу серво.</a:t>
                       </a:r>
                     </a:p>
                   </a:txBody>
                   <a:tcPr marL="0" marR="91440" marT="45720" marB="45720" anchor="ctr">
+                    <a:lnL w="12700" cap="flat" cmpd="sng" algn="ctr">
+                      <a:noFill/>
+                    </a:lnL>
+                    <a:lnR w="12700" cap="flat" cmpd="sng" algn="ctr">
+                      <a:noFill/>
+                    </a:lnR>
+                    <a:lnT w="12700" cap="flat" cmpd="sng" algn="ctr">
+                      <a:noFill/>
+                    </a:lnT>
+                    <a:lnB w="6350" cap="flat" cmpd="sng" algn="ctr">
+                      <a:solidFill>
+                        <a:srgbClr val="D9D9D9"/>
+                      </a:solidFill>
+                      <a:prstDash val="solid"/>
+                    </a:lnB>
+                    <a:solidFill>
+                      <a:srgbClr val="ECE7E2"/>
+                    </a:solidFill>
+                  </a:tcPr>
+                </a:tc>
+                <a:tc>
+                  <a:txBody>
+                    <a:bodyPr wrap="square"/>
+                    <a:lstStyle/>
+                    <a:p>
+                      <a:r>
+                        <a:rPr sz="1000" b="0">
+                          <a:solidFill>
+                            <a:srgbClr val="414C58"/>
+                          </a:solidFill>
+                          <a:latin typeface="Nunito Sans"/>
+                        </a:rPr>
+                        <a:t>Виправлено</a:t>
+                      </a:r>
+                    </a:p>
+                  </a:txBody>
+                  <a:tcPr marL="0" marR="91440" marT="45720" marB="45720" anchor="ctr">
+                    <a:lnL w="12700" cap="flat" cmpd="sng" algn="ctr">
+                      <a:noFill/>
+                    </a:lnL>
+                    <a:lnR w="12700" cap="flat" cmpd="sng" algn="ctr">
+                      <a:noFill/>
+                    </a:lnR>
+                    <a:lnT w="12700" cap="flat" cmpd="sng" algn="ctr">
+                      <a:noFill/>
+                    </a:lnT>
+                    <a:lnB w="6350" cap="flat" cmpd="sng" algn="ctr">
+                      <a:solidFill>
+                        <a:srgbClr val="D9D9D9"/>
+                      </a:solidFill>
+                      <a:prstDash val="solid"/>
+                    </a:lnB>
                     <a:solidFill>
                       <a:srgbClr val="ECE7E2"/>
                     </a:solidFill>
                   </a:tcPr>
                 </a:tc>
               </a:tr>
-              <a:tr h="430000">
+              <a:tr h="236220">
                 <a:tc>
                   <a:txBody>
                     <a:bodyPr wrap="square"/>
                     <a:lstStyle/>
                     <a:p>
                       <a:r>
-                        <a:rPr sz="1100" b="1">
+                        <a:rPr sz="950" b="1">
                           <a:solidFill>
                             <a:srgbClr val="232323"/>
                           </a:solidFill>
                           <a:latin typeface="Nunito Sans"/>
                         </a:rPr>
-                        <a:t>Розпізнавання лазерної точки ненадійне (детектор губить точку на кілька кадрів)</a:t>
+                        <a:t>Лазер блимає при запуску</a:t>
                       </a:r>
                     </a:p>
                   </a:txBody>
                   <a:tcPr marL="127000" marR="91440" marT="45720" marB="45720" anchor="ctr">
+                    <a:lnL w="12700" cap="flat" cmpd="sng" algn="ctr">
+                      <a:noFill/>
+                    </a:lnL>
+                    <a:lnR w="12700" cap="flat" cmpd="sng" algn="ctr">
+                      <a:noFill/>
+                    </a:lnR>
+                    <a:lnT w="12700" cap="flat" cmpd="sng" algn="ctr">
+                      <a:noFill/>
+                    </a:lnT>
+                    <a:lnB w="6350" cap="flat" cmpd="sng" algn="ctr">
+                      <a:solidFill>
+                        <a:srgbClr val="D9D9D9"/>
+                      </a:solidFill>
+                      <a:prstDash val="solid"/>
+                    </a:lnB>
                     <a:solidFill>
                       <a:srgbClr val="FFFFFF"/>
                     </a:solidFill>
@@ -16337,17 +18066,32 @@
                     <a:lstStyle/>
                     <a:p>
                       <a:r>
-                        <a:rPr sz="1100" b="0">
+                        <a:rPr sz="950" b="0">
                           <a:solidFill>
                             <a:srgbClr val="414C58"/>
                           </a:solidFill>
                           <a:latin typeface="Nunito Sans"/>
                         </a:rPr>
-                        <a:t>Частково - підбір порогів OpenCV (tracker.py); TODO: утримання позиції, фільтр стрибків.</a:t>
+                        <a:t>Не діагностовано (TODO)</a:t>
                       </a:r>
                     </a:p>
                   </a:txBody>
                   <a:tcPr marL="0" marR="91440" marT="45720" marB="45720" anchor="ctr">
+                    <a:lnL w="12700" cap="flat" cmpd="sng" algn="ctr">
+                      <a:noFill/>
+                    </a:lnL>
+                    <a:lnR w="12700" cap="flat" cmpd="sng" algn="ctr">
+                      <a:noFill/>
+                    </a:lnR>
+                    <a:lnT w="12700" cap="flat" cmpd="sng" algn="ctr">
+                      <a:noFill/>
+                    </a:lnT>
+                    <a:lnB w="6350" cap="flat" cmpd="sng" algn="ctr">
+                      <a:solidFill>
+                        <a:srgbClr val="D9D9D9"/>
+                      </a:solidFill>
+                      <a:prstDash val="solid"/>
+                    </a:lnB>
                     <a:solidFill>
                       <a:srgbClr val="FFFFFF"/>
                     </a:solidFill>
@@ -16359,7 +18103,344 @@
                     <a:lstStyle/>
                     <a:p>
                       <a:r>
-                        <a:rPr sz="1050" b="1">
+                        <a:rPr sz="950" b="1">
+                          <a:solidFill>
+                            <a:srgbClr val="232323"/>
+                          </a:solidFill>
+                          <a:latin typeface="Nunito Sans"/>
+                        </a:rPr>
+                        <a:t>TODO: причина й фікс.</a:t>
+                      </a:r>
+                    </a:p>
+                  </a:txBody>
+                  <a:tcPr marL="0" marR="91440" marT="45720" marB="45720" anchor="ctr">
+                    <a:lnL w="12700" cap="flat" cmpd="sng" algn="ctr">
+                      <a:noFill/>
+                    </a:lnL>
+                    <a:lnR w="12700" cap="flat" cmpd="sng" algn="ctr">
+                      <a:noFill/>
+                    </a:lnR>
+                    <a:lnT w="12700" cap="flat" cmpd="sng" algn="ctr">
+                      <a:noFill/>
+                    </a:lnT>
+                    <a:lnB w="6350" cap="flat" cmpd="sng" algn="ctr">
+                      <a:solidFill>
+                        <a:srgbClr val="D9D9D9"/>
+                      </a:solidFill>
+                      <a:prstDash val="solid"/>
+                    </a:lnB>
+                    <a:solidFill>
+                      <a:srgbClr val="FFFFFF"/>
+                    </a:solidFill>
+                  </a:tcPr>
+                </a:tc>
+                <a:tc>
+                  <a:txBody>
+                    <a:bodyPr wrap="square"/>
+                    <a:lstStyle/>
+                    <a:p>
+                      <a:r>
+                        <a:rPr sz="1000" b="1">
+                          <a:solidFill>
+                            <a:srgbClr val="232323"/>
+                          </a:solidFill>
+                          <a:latin typeface="Nunito Sans"/>
+                        </a:rPr>
+                        <a:t>Відкрито</a:t>
+                      </a:r>
+                    </a:p>
+                  </a:txBody>
+                  <a:tcPr marL="0" marR="91440" marT="45720" marB="45720" anchor="ctr">
+                    <a:lnL w="12700" cap="flat" cmpd="sng" algn="ctr">
+                      <a:noFill/>
+                    </a:lnL>
+                    <a:lnR w="12700" cap="flat" cmpd="sng" algn="ctr">
+                      <a:noFill/>
+                    </a:lnR>
+                    <a:lnT w="12700" cap="flat" cmpd="sng" algn="ctr">
+                      <a:noFill/>
+                    </a:lnT>
+                    <a:lnB w="6350" cap="flat" cmpd="sng" algn="ctr">
+                      <a:solidFill>
+                        <a:srgbClr val="D9D9D9"/>
+                      </a:solidFill>
+                      <a:prstDash val="solid"/>
+                    </a:lnB>
+                    <a:solidFill>
+                      <a:srgbClr val="FFFFFF"/>
+                    </a:solidFill>
+                  </a:tcPr>
+                </a:tc>
+              </a:tr>
+              <a:tr h="381000">
+                <a:tc>
+                  <a:txBody>
+                    <a:bodyPr wrap="square"/>
+                    <a:lstStyle/>
+                    <a:p>
+                      <a:r>
+                        <a:rPr sz="950" b="1">
+                          <a:solidFill>
+                            <a:srgbClr val="232323"/>
+                          </a:solidFill>
+                          <a:latin typeface="Nunito Sans"/>
+                        </a:rPr>
+                        <a:t>Дані не доходять до ESP32 при зміні розміру вікна ПК</a:t>
+                      </a:r>
+                    </a:p>
+                  </a:txBody>
+                  <a:tcPr marL="127000" marR="91440" marT="45720" marB="45720" anchor="ctr">
+                    <a:lnL w="12700" cap="flat" cmpd="sng" algn="ctr">
+                      <a:noFill/>
+                    </a:lnL>
+                    <a:lnR w="12700" cap="flat" cmpd="sng" algn="ctr">
+                      <a:noFill/>
+                    </a:lnR>
+                    <a:lnT w="12700" cap="flat" cmpd="sng" algn="ctr">
+                      <a:noFill/>
+                    </a:lnT>
+                    <a:lnB w="6350" cap="flat" cmpd="sng" algn="ctr">
+                      <a:solidFill>
+                        <a:srgbClr val="D9D9D9"/>
+                      </a:solidFill>
+                      <a:prstDash val="solid"/>
+                    </a:lnB>
+                    <a:solidFill>
+                      <a:srgbClr val="ECE7E2"/>
+                    </a:solidFill>
+                  </a:tcPr>
+                </a:tc>
+                <a:tc>
+                  <a:txBody>
+                    <a:bodyPr wrap="square"/>
+                    <a:lstStyle/>
+                    <a:p>
+                      <a:r>
+                        <a:rPr sz="950" b="0">
+                          <a:solidFill>
+                            <a:srgbClr val="414C58"/>
+                          </a:solidFill>
+                          <a:latin typeface="Nunito Sans"/>
+                        </a:rPr>
+                        <a:t>Не діагностовано (TODO)</a:t>
+                      </a:r>
+                    </a:p>
+                  </a:txBody>
+                  <a:tcPr marL="0" marR="91440" marT="45720" marB="45720" anchor="ctr">
+                    <a:lnL w="12700" cap="flat" cmpd="sng" algn="ctr">
+                      <a:noFill/>
+                    </a:lnL>
+                    <a:lnR w="12700" cap="flat" cmpd="sng" algn="ctr">
+                      <a:noFill/>
+                    </a:lnR>
+                    <a:lnT w="12700" cap="flat" cmpd="sng" algn="ctr">
+                      <a:noFill/>
+                    </a:lnT>
+                    <a:lnB w="6350" cap="flat" cmpd="sng" algn="ctr">
+                      <a:solidFill>
+                        <a:srgbClr val="D9D9D9"/>
+                      </a:solidFill>
+                      <a:prstDash val="solid"/>
+                    </a:lnB>
+                    <a:solidFill>
+                      <a:srgbClr val="ECE7E2"/>
+                    </a:solidFill>
+                  </a:tcPr>
+                </a:tc>
+                <a:tc>
+                  <a:txBody>
+                    <a:bodyPr wrap="square"/>
+                    <a:lstStyle/>
+                    <a:p>
+                      <a:r>
+                        <a:rPr sz="950" b="1">
+                          <a:solidFill>
+                            <a:srgbClr val="232323"/>
+                          </a:solidFill>
+                          <a:latin typeface="Nunito Sans"/>
+                        </a:rPr>
+                        <a:t>TODO: причина й фікс.</a:t>
+                      </a:r>
+                    </a:p>
+                  </a:txBody>
+                  <a:tcPr marL="0" marR="91440" marT="45720" marB="45720" anchor="ctr">
+                    <a:lnL w="12700" cap="flat" cmpd="sng" algn="ctr">
+                      <a:noFill/>
+                    </a:lnL>
+                    <a:lnR w="12700" cap="flat" cmpd="sng" algn="ctr">
+                      <a:noFill/>
+                    </a:lnR>
+                    <a:lnT w="12700" cap="flat" cmpd="sng" algn="ctr">
+                      <a:noFill/>
+                    </a:lnT>
+                    <a:lnB w="6350" cap="flat" cmpd="sng" algn="ctr">
+                      <a:solidFill>
+                        <a:srgbClr val="D9D9D9"/>
+                      </a:solidFill>
+                      <a:prstDash val="solid"/>
+                    </a:lnB>
+                    <a:solidFill>
+                      <a:srgbClr val="ECE7E2"/>
+                    </a:solidFill>
+                  </a:tcPr>
+                </a:tc>
+                <a:tc>
+                  <a:txBody>
+                    <a:bodyPr wrap="square"/>
+                    <a:lstStyle/>
+                    <a:p>
+                      <a:r>
+                        <a:rPr sz="1000" b="1">
+                          <a:solidFill>
+                            <a:srgbClr val="232323"/>
+                          </a:solidFill>
+                          <a:latin typeface="Nunito Sans"/>
+                        </a:rPr>
+                        <a:t>Відкрито</a:t>
+                      </a:r>
+                    </a:p>
+                  </a:txBody>
+                  <a:tcPr marL="0" marR="91440" marT="45720" marB="45720" anchor="ctr">
+                    <a:lnL w="12700" cap="flat" cmpd="sng" algn="ctr">
+                      <a:noFill/>
+                    </a:lnL>
+                    <a:lnR w="12700" cap="flat" cmpd="sng" algn="ctr">
+                      <a:noFill/>
+                    </a:lnR>
+                    <a:lnT w="12700" cap="flat" cmpd="sng" algn="ctr">
+                      <a:noFill/>
+                    </a:lnT>
+                    <a:lnB w="6350" cap="flat" cmpd="sng" algn="ctr">
+                      <a:solidFill>
+                        <a:srgbClr val="D9D9D9"/>
+                      </a:solidFill>
+                      <a:prstDash val="solid"/>
+                    </a:lnB>
+                    <a:solidFill>
+                      <a:srgbClr val="ECE7E2"/>
+                    </a:solidFill>
+                  </a:tcPr>
+                </a:tc>
+              </a:tr>
+              <a:tr h="381000">
+                <a:tc>
+                  <a:txBody>
+                    <a:bodyPr wrap="square"/>
+                    <a:lstStyle/>
+                    <a:p>
+                      <a:r>
+                        <a:rPr sz="950" b="1">
+                          <a:solidFill>
+                            <a:srgbClr val="232323"/>
+                          </a:solidFill>
+                          <a:latin typeface="Nunito Sans"/>
+                        </a:rPr>
+                        <a:t>ESP32 перезавантажується при від'єднанні UART0</a:t>
+                      </a:r>
+                    </a:p>
+                  </a:txBody>
+                  <a:tcPr marL="127000" marR="91440" marT="45720" marB="45720" anchor="ctr">
+                    <a:lnL w="12700" cap="flat" cmpd="sng" algn="ctr">
+                      <a:noFill/>
+                    </a:lnL>
+                    <a:lnR w="12700" cap="flat" cmpd="sng" algn="ctr">
+                      <a:noFill/>
+                    </a:lnR>
+                    <a:lnT w="12700" cap="flat" cmpd="sng" algn="ctr">
+                      <a:noFill/>
+                    </a:lnT>
+                    <a:lnB w="6350" cap="flat" cmpd="sng" algn="ctr">
+                      <a:solidFill>
+                        <a:srgbClr val="D9D9D9"/>
+                      </a:solidFill>
+                      <a:prstDash val="solid"/>
+                    </a:lnB>
+                    <a:solidFill>
+                      <a:srgbClr val="FFFFFF"/>
+                    </a:solidFill>
+                  </a:tcPr>
+                </a:tc>
+                <a:tc>
+                  <a:txBody>
+                    <a:bodyPr wrap="square"/>
+                    <a:lstStyle/>
+                    <a:p>
+                      <a:r>
+                        <a:rPr sz="950" b="0">
+                          <a:solidFill>
+                            <a:srgbClr val="414C58"/>
+                          </a:solidFill>
+                          <a:latin typeface="Nunito Sans"/>
+                        </a:rPr>
+                        <a:t>USB-UART міст імпульсує пін EN сигналами DTR/RTS</a:t>
+                      </a:r>
+                    </a:p>
+                  </a:txBody>
+                  <a:tcPr marL="0" marR="91440" marT="45720" marB="45720" anchor="ctr">
+                    <a:lnL w="12700" cap="flat" cmpd="sng" algn="ctr">
+                      <a:noFill/>
+                    </a:lnL>
+                    <a:lnR w="12700" cap="flat" cmpd="sng" algn="ctr">
+                      <a:noFill/>
+                    </a:lnR>
+                    <a:lnT w="12700" cap="flat" cmpd="sng" algn="ctr">
+                      <a:noFill/>
+                    </a:lnT>
+                    <a:lnB w="6350" cap="flat" cmpd="sng" algn="ctr">
+                      <a:solidFill>
+                        <a:srgbClr val="D9D9D9"/>
+                      </a:solidFill>
+                      <a:prstDash val="solid"/>
+                    </a:lnB>
+                    <a:solidFill>
+                      <a:srgbClr val="FFFFFF"/>
+                    </a:solidFill>
+                  </a:tcPr>
+                </a:tc>
+                <a:tc>
+                  <a:txBody>
+                    <a:bodyPr wrap="square"/>
+                    <a:lstStyle/>
+                    <a:p>
+                      <a:r>
+                        <a:rPr sz="950" b="0">
+                          <a:solidFill>
+                            <a:srgbClr val="414C58"/>
+                          </a:solidFill>
+                          <a:latin typeface="Nunito Sans"/>
+                        </a:rPr>
+                        <a:t>serial_link.py примусово ставить dtr=False, rts=False.</a:t>
+                      </a:r>
+                    </a:p>
+                  </a:txBody>
+                  <a:tcPr marL="0" marR="91440" marT="45720" marB="45720" anchor="ctr">
+                    <a:lnL w="12700" cap="flat" cmpd="sng" algn="ctr">
+                      <a:noFill/>
+                    </a:lnL>
+                    <a:lnR w="12700" cap="flat" cmpd="sng" algn="ctr">
+                      <a:noFill/>
+                    </a:lnR>
+                    <a:lnT w="12700" cap="flat" cmpd="sng" algn="ctr">
+                      <a:noFill/>
+                    </a:lnT>
+                    <a:lnB w="6350" cap="flat" cmpd="sng" algn="ctr">
+                      <a:solidFill>
+                        <a:srgbClr val="D9D9D9"/>
+                      </a:solidFill>
+                      <a:prstDash val="solid"/>
+                    </a:lnB>
+                    <a:solidFill>
+                      <a:srgbClr val="FFFFFF"/>
+                    </a:solidFill>
+                  </a:tcPr>
+                </a:tc>
+                <a:tc>
+                  <a:txBody>
+                    <a:bodyPr wrap="square"/>
+                    <a:lstStyle/>
+                    <a:p>
+                      <a:r>
+                        <a:rPr sz="1000" b="1">
                           <a:solidFill>
                             <a:srgbClr val="232323"/>
                           </a:solidFill>
@@ -16370,6 +18451,321 @@
                     </a:p>
                   </a:txBody>
                   <a:tcPr marL="0" marR="91440" marT="45720" marB="45720" anchor="ctr">
+                    <a:lnL w="12700" cap="flat" cmpd="sng" algn="ctr">
+                      <a:noFill/>
+                    </a:lnL>
+                    <a:lnR w="12700" cap="flat" cmpd="sng" algn="ctr">
+                      <a:noFill/>
+                    </a:lnR>
+                    <a:lnT w="12700" cap="flat" cmpd="sng" algn="ctr">
+                      <a:noFill/>
+                    </a:lnT>
+                    <a:lnB w="6350" cap="flat" cmpd="sng" algn="ctr">
+                      <a:solidFill>
+                        <a:srgbClr val="D9D9D9"/>
+                      </a:solidFill>
+                      <a:prstDash val="solid"/>
+                    </a:lnB>
+                    <a:solidFill>
+                      <a:srgbClr val="FFFFFF"/>
+                    </a:solidFill>
+                  </a:tcPr>
+                </a:tc>
+              </a:tr>
+              <a:tr h="236220">
+                <a:tc>
+                  <a:txBody>
+                    <a:bodyPr wrap="square"/>
+                    <a:lstStyle/>
+                    <a:p>
+                      <a:r>
+                        <a:rPr sz="950" b="1">
+                          <a:solidFill>
+                            <a:srgbClr val="232323"/>
+                          </a:solidFill>
+                          <a:latin typeface="Nunito Sans"/>
+                        </a:rPr>
+                        <a:t>Повільне наведення</a:t>
+                      </a:r>
+                    </a:p>
+                  </a:txBody>
+                  <a:tcPr marL="127000" marR="91440" marT="45720" marB="45720" anchor="ctr">
+                    <a:lnL w="12700" cap="flat" cmpd="sng" algn="ctr">
+                      <a:noFill/>
+                    </a:lnL>
+                    <a:lnR w="12700" cap="flat" cmpd="sng" algn="ctr">
+                      <a:noFill/>
+                    </a:lnR>
+                    <a:lnT w="12700" cap="flat" cmpd="sng" algn="ctr">
+                      <a:noFill/>
+                    </a:lnT>
+                    <a:lnB w="6350" cap="flat" cmpd="sng" algn="ctr">
+                      <a:solidFill>
+                        <a:srgbClr val="D9D9D9"/>
+                      </a:solidFill>
+                      <a:prstDash val="solid"/>
+                    </a:lnB>
+                    <a:solidFill>
+                      <a:srgbClr val="ECE7E2"/>
+                    </a:solidFill>
+                  </a:tcPr>
+                </a:tc>
+                <a:tc>
+                  <a:txBody>
+                    <a:bodyPr wrap="square"/>
+                    <a:lstStyle/>
+                    <a:p>
+                      <a:r>
+                        <a:rPr sz="950" b="0">
+                          <a:solidFill>
+                            <a:srgbClr val="414C58"/>
+                          </a:solidFill>
+                          <a:latin typeface="Nunito Sans"/>
+                        </a:rPr>
+                        <a:t>Не діагностовано (TODO)</a:t>
+                      </a:r>
+                    </a:p>
+                  </a:txBody>
+                  <a:tcPr marL="0" marR="91440" marT="45720" marB="45720" anchor="ctr">
+                    <a:lnL w="12700" cap="flat" cmpd="sng" algn="ctr">
+                      <a:noFill/>
+                    </a:lnL>
+                    <a:lnR w="12700" cap="flat" cmpd="sng" algn="ctr">
+                      <a:noFill/>
+                    </a:lnR>
+                    <a:lnT w="12700" cap="flat" cmpd="sng" algn="ctr">
+                      <a:noFill/>
+                    </a:lnT>
+                    <a:lnB w="6350" cap="flat" cmpd="sng" algn="ctr">
+                      <a:solidFill>
+                        <a:srgbClr val="D9D9D9"/>
+                      </a:solidFill>
+                      <a:prstDash val="solid"/>
+                    </a:lnB>
+                    <a:solidFill>
+                      <a:srgbClr val="ECE7E2"/>
+                    </a:solidFill>
+                  </a:tcPr>
+                </a:tc>
+                <a:tc>
+                  <a:txBody>
+                    <a:bodyPr wrap="square"/>
+                    <a:lstStyle/>
+                    <a:p>
+                      <a:r>
+                        <a:rPr sz="950" b="1">
+                          <a:solidFill>
+                            <a:srgbClr val="232323"/>
+                          </a:solidFill>
+                          <a:latin typeface="Nunito Sans"/>
+                        </a:rPr>
+                        <a:t>TODO: причина й фікс.</a:t>
+                      </a:r>
+                    </a:p>
+                  </a:txBody>
+                  <a:tcPr marL="0" marR="91440" marT="45720" marB="45720" anchor="ctr">
+                    <a:lnL w="12700" cap="flat" cmpd="sng" algn="ctr">
+                      <a:noFill/>
+                    </a:lnL>
+                    <a:lnR w="12700" cap="flat" cmpd="sng" algn="ctr">
+                      <a:noFill/>
+                    </a:lnR>
+                    <a:lnT w="12700" cap="flat" cmpd="sng" algn="ctr">
+                      <a:noFill/>
+                    </a:lnT>
+                    <a:lnB w="6350" cap="flat" cmpd="sng" algn="ctr">
+                      <a:solidFill>
+                        <a:srgbClr val="D9D9D9"/>
+                      </a:solidFill>
+                      <a:prstDash val="solid"/>
+                    </a:lnB>
+                    <a:solidFill>
+                      <a:srgbClr val="ECE7E2"/>
+                    </a:solidFill>
+                  </a:tcPr>
+                </a:tc>
+                <a:tc>
+                  <a:txBody>
+                    <a:bodyPr wrap="square"/>
+                    <a:lstStyle/>
+                    <a:p>
+                      <a:r>
+                        <a:rPr sz="1000" b="1">
+                          <a:solidFill>
+                            <a:srgbClr val="232323"/>
+                          </a:solidFill>
+                          <a:latin typeface="Nunito Sans"/>
+                        </a:rPr>
+                        <a:t>Відкрито</a:t>
+                      </a:r>
+                    </a:p>
+                  </a:txBody>
+                  <a:tcPr marL="0" marR="91440" marT="45720" marB="45720" anchor="ctr">
+                    <a:lnL w="12700" cap="flat" cmpd="sng" algn="ctr">
+                      <a:noFill/>
+                    </a:lnL>
+                    <a:lnR w="12700" cap="flat" cmpd="sng" algn="ctr">
+                      <a:noFill/>
+                    </a:lnR>
+                    <a:lnT w="12700" cap="flat" cmpd="sng" algn="ctr">
+                      <a:noFill/>
+                    </a:lnT>
+                    <a:lnB w="6350" cap="flat" cmpd="sng" algn="ctr">
+                      <a:solidFill>
+                        <a:srgbClr val="D9D9D9"/>
+                      </a:solidFill>
+                      <a:prstDash val="solid"/>
+                    </a:lnB>
+                    <a:solidFill>
+                      <a:srgbClr val="ECE7E2"/>
+                    </a:solidFill>
+                  </a:tcPr>
+                </a:tc>
+              </a:tr>
+              <a:tr h="525780">
+                <a:tc>
+                  <a:txBody>
+                    <a:bodyPr wrap="square"/>
+                    <a:lstStyle/>
+                    <a:p>
+                      <a:r>
+                        <a:rPr sz="950" b="1">
+                          <a:solidFill>
+                            <a:srgbClr val="232323"/>
+                          </a:solidFill>
+                          <a:latin typeface="Nunito Sans"/>
+                        </a:rPr>
+                        <a:t>Розпізнавання лазерної точки ненадійне (детектор губить точку на кілька кадрів)</a:t>
+                      </a:r>
+                    </a:p>
+                  </a:txBody>
+                  <a:tcPr marL="127000" marR="91440" marT="45720" marB="45720" anchor="ctr">
+                    <a:lnL w="12700" cap="flat" cmpd="sng" algn="ctr">
+                      <a:noFill/>
+                    </a:lnL>
+                    <a:lnR w="12700" cap="flat" cmpd="sng" algn="ctr">
+                      <a:noFill/>
+                    </a:lnR>
+                    <a:lnT w="12700" cap="flat" cmpd="sng" algn="ctr">
+                      <a:noFill/>
+                    </a:lnT>
+                    <a:lnB w="6350" cap="flat" cmpd="sng" algn="ctr">
+                      <a:solidFill>
+                        <a:srgbClr val="D9D9D9"/>
+                      </a:solidFill>
+                      <a:prstDash val="solid"/>
+                    </a:lnB>
+                    <a:solidFill>
+                      <a:srgbClr val="FFFFFF"/>
+                    </a:solidFill>
+                  </a:tcPr>
+                </a:tc>
+                <a:tc>
+                  <a:txBody>
+                    <a:bodyPr wrap="square"/>
+                    <a:lstStyle/>
+                    <a:p>
+                      <a:r>
+                        <a:rPr sz="950" b="0">
+                          <a:solidFill>
+                            <a:srgbClr val="414C58"/>
+                          </a:solidFill>
+                          <a:latin typeface="Nunito Sans"/>
+                        </a:rPr>
+                        <a:t>Змінне освітлення збиває пороги OpenCV · точка тимчасово зникає з кадру</a:t>
+                      </a:r>
+                    </a:p>
+                  </a:txBody>
+                  <a:tcPr marL="0" marR="91440" marT="45720" marB="45720" anchor="ctr">
+                    <a:lnL w="12700" cap="flat" cmpd="sng" algn="ctr">
+                      <a:noFill/>
+                    </a:lnL>
+                    <a:lnR w="12700" cap="flat" cmpd="sng" algn="ctr">
+                      <a:noFill/>
+                    </a:lnR>
+                    <a:lnT w="12700" cap="flat" cmpd="sng" algn="ctr">
+                      <a:noFill/>
+                    </a:lnT>
+                    <a:lnB w="6350" cap="flat" cmpd="sng" algn="ctr">
+                      <a:solidFill>
+                        <a:srgbClr val="D9D9D9"/>
+                      </a:solidFill>
+                      <a:prstDash val="solid"/>
+                    </a:lnB>
+                    <a:solidFill>
+                      <a:srgbClr val="FFFFFF"/>
+                    </a:solidFill>
+                  </a:tcPr>
+                </a:tc>
+                <a:tc>
+                  <a:txBody>
+                    <a:bodyPr wrap="square"/>
+                    <a:lstStyle/>
+                    <a:p>
+                      <a:r>
+                        <a:rPr sz="950" b="0">
+                          <a:solidFill>
+                            <a:srgbClr val="414C58"/>
+                          </a:solidFill>
+                          <a:latin typeface="Nunito Sans"/>
+                        </a:rPr>
+                        <a:t>Підбір порогів OpenCV (tracker.py); TODO: утримання позиції, фільтр стрибків.</a:t>
+                      </a:r>
+                    </a:p>
+                  </a:txBody>
+                  <a:tcPr marL="0" marR="91440" marT="45720" marB="45720" anchor="ctr">
+                    <a:lnL w="12700" cap="flat" cmpd="sng" algn="ctr">
+                      <a:noFill/>
+                    </a:lnL>
+                    <a:lnR w="12700" cap="flat" cmpd="sng" algn="ctr">
+                      <a:noFill/>
+                    </a:lnR>
+                    <a:lnT w="12700" cap="flat" cmpd="sng" algn="ctr">
+                      <a:noFill/>
+                    </a:lnT>
+                    <a:lnB w="6350" cap="flat" cmpd="sng" algn="ctr">
+                      <a:solidFill>
+                        <a:srgbClr val="D9D9D9"/>
+                      </a:solidFill>
+                      <a:prstDash val="solid"/>
+                    </a:lnB>
+                    <a:solidFill>
+                      <a:srgbClr val="FFFFFF"/>
+                    </a:solidFill>
+                  </a:tcPr>
+                </a:tc>
+                <a:tc>
+                  <a:txBody>
+                    <a:bodyPr wrap="square"/>
+                    <a:lstStyle/>
+                    <a:p>
+                      <a:r>
+                        <a:rPr sz="1000" b="1">
+                          <a:solidFill>
+                            <a:srgbClr val="232323"/>
+                          </a:solidFill>
+                          <a:latin typeface="Nunito Sans"/>
+                        </a:rPr>
+                        <a:t>Частково</a:t>
+                      </a:r>
+                    </a:p>
+                  </a:txBody>
+                  <a:tcPr marL="0" marR="91440" marT="45720" marB="45720" anchor="ctr">
+                    <a:lnL w="12700" cap="flat" cmpd="sng" algn="ctr">
+                      <a:noFill/>
+                    </a:lnL>
+                    <a:lnR w="12700" cap="flat" cmpd="sng" algn="ctr">
+                      <a:noFill/>
+                    </a:lnR>
+                    <a:lnT w="12700" cap="flat" cmpd="sng" algn="ctr">
+                      <a:noFill/>
+                    </a:lnT>
+                    <a:lnB w="6350" cap="flat" cmpd="sng" algn="ctr">
+                      <a:solidFill>
+                        <a:srgbClr val="D9D9D9"/>
+                      </a:solidFill>
+                      <a:prstDash val="solid"/>
+                    </a:lnB>
                     <a:solidFill>
                       <a:srgbClr val="FFFFFF"/>
                     </a:solidFill>
@@ -16380,6 +18776,99 @@
           </a:graphicData>
         </a:graphic>
       </p:graphicFrame>
+      <p:sp>
+        <p:nvSpPr>
+          <p:cNvPr id="177" name="TextBox 176"/>
+          <p:cNvSpPr txBox="1"/>
+          <p:nvPr/>
+        </p:nvSpPr>
+        <p:spPr>
+          <a:xfrm>
+            <a:off x="812800" y="6250000"/>
+            <a:ext cx="10566400" cy="220000"/>
+          </a:xfrm>
+          <a:prstGeom prst="rect">
+            <a:avLst/>
+          </a:prstGeom>
+          <a:noFill/>
+        </p:spPr>
+        <p:txBody>
+          <a:bodyPr wrap="none" lIns="0" rIns="0" tIns="0" bIns="0" anchor="ctr">
+            <a:spAutoFit/>
+          </a:bodyPr>
+          <a:lstStyle/>
+          <a:p>
+            <a:pPr algn="l"/>
+            <a:r>
+              <a:rPr sz="800" i="1" u="sng">
+                <a:solidFill>
+                  <a:srgbClr val="2A5C8F"/>
+                </a:solidFill>
+                <a:latin typeface="Nunito Sans"/>
+                <a:hlinkClick r:id="rId3"/>
+              </a:rPr>
+              <a:t>docs/protocol.md</a:t>
+            </a:r>
+            <a:r>
+              <a:rPr sz="800" i="1">
+                <a:solidFill>
+                  <a:srgbClr val="6B6F76"/>
+                </a:solidFill>
+                <a:latin typeface="Nunito Sans"/>
+              </a:rPr>
+              <a:t> · </a:t>
+            </a:r>
+            <a:r>
+              <a:rPr sz="800" i="1" u="sng">
+                <a:solidFill>
+                  <a:srgbClr val="2A5C8F"/>
+                </a:solidFill>
+                <a:latin typeface="Nunito Sans"/>
+                <a:hlinkClick r:id="rId4"/>
+              </a:rPr>
+              <a:t>firmware/aim/src/tasks/LinkUart.hpp</a:t>
+            </a:r>
+            <a:r>
+              <a:rPr sz="800" i="1">
+                <a:solidFill>
+                  <a:srgbClr val="6B6F76"/>
+                </a:solidFill>
+                <a:latin typeface="Nunito Sans"/>
+              </a:rPr>
+              <a:t> · </a:t>
+            </a:r>
+            <a:r>
+              <a:rPr sz="800" i="1" u="sng">
+                <a:solidFill>
+                  <a:srgbClr val="2A5C8F"/>
+                </a:solidFill>
+                <a:latin typeface="Nunito Sans"/>
+                <a:hlinkClick r:id="rId5"/>
+              </a:rPr>
+              <a:t>eye/camera/serial_link.py</a:t>
+            </a:r>
+            <a:r>
+              <a:rPr sz="800" i="1">
+                <a:solidFill>
+                  <a:srgbClr val="6B6F76"/>
+                </a:solidFill>
+                <a:latin typeface="Nunito Sans"/>
+              </a:rPr>
+              <a:t> · </a:t>
+            </a:r>
+            <a:r>
+              <a:rPr sz="800" i="1" u="sng">
+                <a:solidFill>
+                  <a:srgbClr val="2A5C8F"/>
+                </a:solidFill>
+                <a:latin typeface="Nunito Sans"/>
+                <a:hlinkClick r:id="rId6"/>
+              </a:rPr>
+              <a:t>eye/camera/tracker.py</a:t>
+            </a:r>
+          </a:p>
+        </p:txBody>
+      </p:sp>
     </p:spTree>
   </p:cSld>
   <p:clrMapOvr>

--- a/workshop-7-final_project/docs/assestment/presentation/Laser Gimbal with Camera Tracking on ESP32-S3.pptx
+++ b/workshop-7-final_project/docs/assestment/presentation/Laser Gimbal with Camera Tracking on ESP32-S3.pptx
@@ -17558,7 +17558,7 @@
         </p:nvGraphicFramePr>
         <p:xfrm>
           <a:off x="812800" y="1650000"/>
-          <a:ext cx="10566400" cy="3071780"/>
+          <a:ext cx="10566400" cy="3452780"/>
         </p:xfrm>
         <a:graphic>
           <a:graphicData uri="http://schemas.openxmlformats.org/drawingml/2006/table">
@@ -18768,6 +18768,156 @@
                     </a:lnB>
                     <a:solidFill>
                       <a:srgbClr val="FFFFFF"/>
+                    </a:solidFill>
+                  </a:tcPr>
+                </a:tc>
+              </a:tr>
+              <a:tr h="381000">
+                <a:tc>
+                  <a:txBody>
+                    <a:bodyPr wrap="square"/>
+                    <a:lstStyle/>
+                    <a:p>
+                      <a:r>
+                        <a:rPr sz="950" b="1">
+                          <a:solidFill>
+                            <a:srgbClr val="232323"/>
+                          </a:solidFill>
+                          <a:latin typeface="Nunito Sans"/>
+                        </a:rPr>
+                        <a:t>Зв'язок COM/UART не відновлюється після від'єднання</a:t>
+                      </a:r>
+                    </a:p>
+                  </a:txBody>
+                  <a:tcPr marL="127000" marR="91440" marT="45720" marB="45720" anchor="ctr">
+                    <a:lnL w="12700" cap="flat" cmpd="sng" algn="ctr">
+                      <a:noFill/>
+                    </a:lnL>
+                    <a:lnR w="12700" cap="flat" cmpd="sng" algn="ctr">
+                      <a:noFill/>
+                    </a:lnR>
+                    <a:lnT w="12700" cap="flat" cmpd="sng" algn="ctr">
+                      <a:noFill/>
+                    </a:lnT>
+                    <a:lnB w="6350" cap="flat" cmpd="sng" algn="ctr">
+                      <a:solidFill>
+                        <a:srgbClr val="D9D9D9"/>
+                      </a:solidFill>
+                      <a:prstDash val="solid"/>
+                    </a:lnB>
+                    <a:solidFill>
+                      <a:srgbClr val="ECE7E2"/>
+                    </a:solidFill>
+                  </a:tcPr>
+                </a:tc>
+                <a:tc>
+                  <a:txBody>
+                    <a:bodyPr wrap="square"/>
+                    <a:lstStyle/>
+                    <a:p>
+                      <a:r>
+                        <a:rPr sz="950" b="0">
+                          <a:solidFill>
+                            <a:srgbClr val="414C58"/>
+                          </a:solidFill>
+                          <a:latin typeface="Nunito Sans"/>
+                        </a:rPr>
+                        <a:t>Не діагностовано (TODO)</a:t>
+                      </a:r>
+                    </a:p>
+                  </a:txBody>
+                  <a:tcPr marL="0" marR="91440" marT="45720" marB="45720" anchor="ctr">
+                    <a:lnL w="12700" cap="flat" cmpd="sng" algn="ctr">
+                      <a:noFill/>
+                    </a:lnL>
+                    <a:lnR w="12700" cap="flat" cmpd="sng" algn="ctr">
+                      <a:noFill/>
+                    </a:lnR>
+                    <a:lnT w="12700" cap="flat" cmpd="sng" algn="ctr">
+                      <a:noFill/>
+                    </a:lnT>
+                    <a:lnB w="6350" cap="flat" cmpd="sng" algn="ctr">
+                      <a:solidFill>
+                        <a:srgbClr val="D9D9D9"/>
+                      </a:solidFill>
+                      <a:prstDash val="solid"/>
+                    </a:lnB>
+                    <a:solidFill>
+                      <a:srgbClr val="ECE7E2"/>
+                    </a:solidFill>
+                  </a:tcPr>
+                </a:tc>
+                <a:tc>
+                  <a:txBody>
+                    <a:bodyPr wrap="square"/>
+                    <a:lstStyle/>
+                    <a:p>
+                      <a:r>
+                        <a:rPr sz="950" b="1">
+                          <a:solidFill>
+                            <a:srgbClr val="232323"/>
+                          </a:solidFill>
+                          <a:latin typeface="Nunito Sans"/>
+                        </a:rPr>
+                        <a:t>TODO: причина й фікс.</a:t>
+                      </a:r>
+                    </a:p>
+                  </a:txBody>
+                  <a:tcPr marL="0" marR="91440" marT="45720" marB="45720" anchor="ctr">
+                    <a:lnL w="12700" cap="flat" cmpd="sng" algn="ctr">
+                      <a:noFill/>
+                    </a:lnL>
+                    <a:lnR w="12700" cap="flat" cmpd="sng" algn="ctr">
+                      <a:noFill/>
+                    </a:lnR>
+                    <a:lnT w="12700" cap="flat" cmpd="sng" algn="ctr">
+                      <a:noFill/>
+                    </a:lnT>
+                    <a:lnB w="6350" cap="flat" cmpd="sng" algn="ctr">
+                      <a:solidFill>
+                        <a:srgbClr val="D9D9D9"/>
+                      </a:solidFill>
+                      <a:prstDash val="solid"/>
+                    </a:lnB>
+                    <a:solidFill>
+                      <a:srgbClr val="ECE7E2"/>
+                    </a:solidFill>
+                  </a:tcPr>
+                </a:tc>
+                <a:tc>
+                  <a:txBody>
+                    <a:bodyPr wrap="square"/>
+                    <a:lstStyle/>
+                    <a:p>
+                      <a:r>
+                        <a:rPr sz="1000" b="1">
+                          <a:solidFill>
+                            <a:srgbClr val="232323"/>
+                          </a:solidFill>
+                          <a:latin typeface="Nunito Sans"/>
+                        </a:rPr>
+                        <a:t>Відкрито</a:t>
+                      </a:r>
+                    </a:p>
+                  </a:txBody>
+                  <a:tcPr marL="0" marR="91440" marT="45720" marB="45720" anchor="ctr">
+                    <a:lnL w="12700" cap="flat" cmpd="sng" algn="ctr">
+                      <a:noFill/>
+                    </a:lnL>
+                    <a:lnR w="12700" cap="flat" cmpd="sng" algn="ctr">
+                      <a:noFill/>
+                    </a:lnR>
+                    <a:lnT w="12700" cap="flat" cmpd="sng" algn="ctr">
+                      <a:noFill/>
+                    </a:lnT>
+                    <a:lnB w="6350" cap="flat" cmpd="sng" algn="ctr">
+                      <a:solidFill>
+                        <a:srgbClr val="D9D9D9"/>
+                      </a:solidFill>
+                      <a:prstDash val="solid"/>
+                    </a:lnB>
+                    <a:solidFill>
+                      <a:srgbClr val="ECE7E2"/>
                     </a:solidFill>
                   </a:tcPr>
                 </a:tc>

--- a/workshop-7-final_project/docs/assestment/presentation/Laser Gimbal with Camera Tracking on ESP32-S3.pptx
+++ b/workshop-7-final_project/docs/assestment/presentation/Laser Gimbal with Camera Tracking on ESP32-S3.pptx
@@ -20,6 +20,7 @@
     <p:sldId id="266" r:id="rId16"/>
     <p:sldId id="267" r:id="rId17"/>
     <p:sldId id="268" r:id="rId18"/>
+    <p:sldId id="270" r:id="rId25"/>
     <p:sldId id="269" r:id="rId19"/>
   </p:sldIdLst>
   <p:sldSz cy="6858000" cx="12192000"/>
@@ -10335,6 +10336,374 @@
 </p:sld>
 </file>
 
+<file path=ppt/slides/slide14.xml><?xml version="1.0" encoding="utf-8"?>
+<p:sld xmlns:a="http://schemas.openxmlformats.org/drawingml/2006/main" xmlns:r="http://schemas.openxmlformats.org/officeDocument/2006/relationships" xmlns:mc="http://schemas.openxmlformats.org/markup-compatibility/2006" xmlns:mv="urn:schemas-microsoft-com:mac:vml" xmlns:p="http://schemas.openxmlformats.org/presentationml/2006/main" xmlns:c="http://schemas.openxmlformats.org/drawingml/2006/chart" xmlns:dgm="http://schemas.openxmlformats.org/drawingml/2006/diagram" xmlns:o="urn:schemas-microsoft-com:office:office" xmlns:v="urn:schemas-microsoft-com:vml" xmlns:pvml="urn:schemas-microsoft-com:office:powerpoint" xmlns:com="http://schemas.openxmlformats.org/drawingml/2006/compatibility" xmlns:p14="http://schemas.microsoft.com/office/powerpoint/2010/main" xmlns:p15="http://schemas.microsoft.com/office/powerpoint/2012/main" xmlns:ahyp="http://schemas.microsoft.com/office/drawing/2018/hyperlinkcolor">
+  <p:cSld>
+    <p:bg>
+      <p:bgPr>
+        <a:solidFill>
+          <a:srgbClr val="F7F6F5"/>
+        </a:solidFill>
+      </p:bgPr>
+    </p:bg>
+    <p:spTree>
+      <p:nvGrpSpPr>
+        <p:cNvPr id="1" name="Shape 1"/>
+        <p:cNvGrpSpPr/>
+        <p:nvPr/>
+      </p:nvGrpSpPr>
+      <p:grpSpPr>
+        <a:xfrm>
+          <a:off x="0" y="0"/>
+          <a:ext cx="0" cy="0"/>
+          <a:chOff x="0" y="0"/>
+          <a:chExt cx="0" cy="0"/>
+        </a:xfrm>
+      </p:grpSpPr>
+      <p:sp>
+        <p:nvSpPr>
+          <p:cNvPr id="2" name="Google Shape;2;p14"/>
+          <p:cNvSpPr/>
+          <p:nvPr/>
+        </p:nvSpPr>
+        <p:spPr>
+          <a:xfrm>
+            <a:off x="812800" y="812800"/>
+            <a:ext cx="1450000" cy="340320"/>
+          </a:xfrm>
+          <a:prstGeom prst="roundRect">
+            <a:avLst>
+              <a:gd fmla="val 37318" name="adj"/>
+            </a:avLst>
+          </a:prstGeom>
+          <a:solidFill>
+            <a:srgbClr val="DAE5F1"/>
+          </a:solidFill>
+          <a:ln>
+            <a:noFill/>
+          </a:ln>
+        </p:spPr>
+        <p:txBody>
+          <a:bodyPr anchorCtr="0" anchor="ctr" bIns="91425" lIns="91425" spcFirstLastPara="1" rIns="91425" wrap="square" tIns="91425">
+            <a:noAutofit/>
+          </a:bodyPr>
+          <a:lstStyle/>
+          <a:p>
+            <a:pPr indent="0" lvl="0" marL="0" rtl="0" algn="l">
+              <a:spcBef>
+                <a:spcPts val="0"/>
+              </a:spcBef>
+              <a:spcAft>
+                <a:spcPts val="0"/>
+              </a:spcAft>
+              <a:buNone/>
+            </a:pPr>
+            <a:r>
+              <a:t/>
+            </a:r>
+            <a:endParaRPr/>
+          </a:p>
+        </p:txBody>
+      </p:sp>
+      <p:sp>
+        <p:nvSpPr>
+          <p:cNvPr id="3" name="Google Shape;3;p14"/>
+          <p:cNvSpPr/>
+          <p:nvPr/>
+        </p:nvSpPr>
+        <p:spPr>
+          <a:xfrm>
+            <a:off x="952500" y="876300"/>
+            <a:ext cx="1267150" cy="238720"/>
+          </a:xfrm>
+          <a:prstGeom prst="rect">
+            <a:avLst/>
+          </a:prstGeom>
+          <a:noFill/>
+          <a:ln>
+            <a:noFill/>
+          </a:ln>
+        </p:spPr>
+        <p:txBody>
+          <a:bodyPr anchorCtr="0" anchor="t" bIns="0" lIns="0" spcFirstLastPara="1" rIns="0" wrap="square" tIns="0">
+            <a:normAutofit/>
+          </a:bodyPr>
+          <a:lstStyle/>
+          <a:p>
+            <a:pPr indent="0" lvl="0" marL="0" marR="0" rtl="0" algn="l">
+              <a:lnSpc>
+                <a:spcPct val="140000"/>
+              </a:lnSpc>
+              <a:spcBef>
+                <a:spcPts val="0"/>
+              </a:spcBef>
+              <a:spcAft>
+                <a:spcPts val="0"/>
+              </a:spcAft>
+              <a:buClr>
+                <a:srgbClr val="414C58"/>
+              </a:buClr>
+              <a:buSzPts val="1200"/>
+              <a:buFont typeface="Nunito Sans"/>
+              <a:buNone/>
+            </a:pPr>
+            <a:r>
+              <a:rPr b="1" i="0" lang="en-US" sz="1200" u="none" cap="none" strike="noStrike">
+                <a:solidFill>
+                  <a:srgbClr val="414C58"/>
+                </a:solidFill>
+                <a:latin typeface="Nunito Sans"/>
+                <a:ea typeface="Nunito Sans"/>
+                <a:cs typeface="Nunito Sans"/>
+                <a:sym typeface="Nunito Sans"/>
+              </a:rPr>
+              <a:t>ДЕМОНСТРАЦІЯ</a:t>
+            </a:r>
+            <a:endParaRPr b="0" i="0" sz="1200" u="none" cap="none" strike="noStrike">
+              <a:solidFill>
+                <a:schemeClr val="dk1"/>
+              </a:solidFill>
+              <a:latin typeface="Calibri"/>
+              <a:ea typeface="Calibri"/>
+              <a:cs typeface="Calibri"/>
+              <a:sym typeface="Calibri"/>
+            </a:endParaRPr>
+          </a:p>
+        </p:txBody>
+      </p:sp>
+      <p:sp>
+        <p:nvSpPr>
+          <p:cNvPr id="4" name="Google Shape;4;p14"/>
+          <p:cNvSpPr/>
+          <p:nvPr/>
+        </p:nvSpPr>
+        <p:spPr>
+          <a:xfrm>
+            <a:off x="812800" y="1280120"/>
+            <a:ext cx="10883392" cy="360660"/>
+          </a:xfrm>
+          <a:prstGeom prst="rect">
+            <a:avLst/>
+          </a:prstGeom>
+          <a:noFill/>
+          <a:ln>
+            <a:noFill/>
+          </a:ln>
+        </p:spPr>
+        <p:txBody>
+          <a:bodyPr anchorCtr="0" anchor="t" bIns="0" lIns="0" spcFirstLastPara="1" rIns="0" wrap="square" tIns="0">
+            <a:normAutofit/>
+          </a:bodyPr>
+          <a:lstStyle/>
+          <a:p>
+            <a:pPr indent="0" lvl="0" marL="0" marR="0" rtl="0" algn="l">
+              <a:lnSpc>
+                <a:spcPct val="110000"/>
+              </a:lnSpc>
+              <a:spcBef>
+                <a:spcPts val="0"/>
+              </a:spcBef>
+              <a:spcAft>
+                <a:spcPts val="0"/>
+              </a:spcAft>
+              <a:buClr>
+                <a:srgbClr val="232323"/>
+              </a:buClr>
+              <a:buSzPts val="2400"/>
+              <a:buFont typeface="Nunito Sans"/>
+              <a:buNone/>
+            </a:pPr>
+            <a:r>
+              <a:rPr b="1" i="0" lang="en-US" sz="2400" u="none" cap="none" strike="noStrike">
+                <a:solidFill>
+                  <a:srgbClr val="232323"/>
+                </a:solidFill>
+                <a:latin typeface="Nunito Sans"/>
+                <a:ea typeface="Nunito Sans"/>
+                <a:cs typeface="Nunito Sans"/>
+                <a:sym typeface="Nunito Sans"/>
+              </a:rPr>
+              <a:t>Демонстрація</a:t>
+            </a:r>
+            <a:endParaRPr b="0" i="0" sz="2400" u="none" cap="none" strike="noStrike">
+              <a:solidFill>
+                <a:schemeClr val="dk1"/>
+              </a:solidFill>
+              <a:latin typeface="Calibri"/>
+              <a:ea typeface="Calibri"/>
+              <a:cs typeface="Calibri"/>
+              <a:sym typeface="Calibri"/>
+            </a:endParaRPr>
+          </a:p>
+        </p:txBody>
+      </p:sp>
+      <p:pic>
+        <p:nvPicPr>
+          <p:cNvPr id="5" name="Стенд AIM на макетній платі" descr="Гімбал ESP32-S3 на макетній платі з лазером і проводкою"/>
+          <p:cNvPicPr>
+            <a:picLocks noChangeAspect="1"/>
+          </p:cNvPicPr>
+          <p:nvPr/>
+        </p:nvPicPr>
+        <p:blipFill>
+          <a:blip r:embed="rId2"/>
+          <a:stretch>
+            <a:fillRect/>
+          </a:stretch>
+        </p:blipFill>
+        <p:spPr>
+          <a:xfrm>
+            <a:off x="812800" y="1793180"/>
+            <a:ext cx="6254490" cy="4306820"/>
+          </a:xfrm>
+          <a:prstGeom prst="roundRect">
+            <a:avLst>
+              <a:gd fmla="val 5000" name="adj"/>
+            </a:avLst>
+          </a:prstGeom>
+          <a:ln w="12700">
+            <a:solidFill>
+              <a:srgbClr val="FFFFFF"/>
+            </a:solidFill>
+          </a:ln>
+          <a:effectLst>
+            <a:outerShdw blurRad="90000" dist="30000" dir="5400000" rotWithShape="0">
+              <a:srgbClr val="232323">
+                <a:alpha val="28000"/>
+              </a:srgbClr>
+            </a:outerShdw>
+          </a:effectLst>
+        </p:spPr>
+      </p:pic>
+      <p:pic>
+        <p:nvPicPr>
+          <p:cNvPr id="6" name="Знімок eye-app: авто-наведення" descr="Знімок екрана застосунку eye-app з панеллю телеметрії та PID-налаштувань під час авто-наведення"/>
+          <p:cNvPicPr>
+            <a:picLocks noChangeAspect="1"/>
+          </p:cNvPicPr>
+          <p:nvPr/>
+        </p:nvPicPr>
+        <p:blipFill>
+          <a:blip r:embed="rId3"/>
+          <a:stretch>
+            <a:fillRect/>
+          </a:stretch>
+        </p:blipFill>
+        <p:spPr>
+          <a:xfrm>
+            <a:off x="7668780" y="1793180"/>
+            <a:ext cx="3408931" cy="2023410"/>
+          </a:xfrm>
+          <a:prstGeom prst="roundRect">
+            <a:avLst>
+              <a:gd fmla="val 5000" name="adj"/>
+            </a:avLst>
+          </a:prstGeom>
+          <a:ln w="12700">
+            <a:solidFill>
+              <a:srgbClr val="FFFFFF"/>
+            </a:solidFill>
+          </a:ln>
+          <a:effectLst>
+            <a:outerShdw blurRad="90000" dist="30000" dir="5400000" rotWithShape="0">
+              <a:srgbClr val="232323">
+                <a:alpha val="28000"/>
+              </a:srgbClr>
+            </a:outerShdw>
+          </a:effectLst>
+        </p:spPr>
+      </p:pic>
+      <p:pic>
+        <p:nvPicPr>
+          <p:cNvPr id="7" name="Знімок eye-app: графік похибки" descr="Знімок екрана застосунку eye-app з debug-панеллю та графіком похибки наведення в часі"/>
+          <p:cNvPicPr>
+            <a:picLocks noChangeAspect="1"/>
+          </p:cNvPicPr>
+          <p:nvPr/>
+        </p:nvPicPr>
+        <p:blipFill>
+          <a:blip r:embed="rId4"/>
+          <a:stretch>
+            <a:fillRect/>
+          </a:stretch>
+        </p:blipFill>
+        <p:spPr>
+          <a:xfrm>
+            <a:off x="7664638" y="4076590"/>
+            <a:ext cx="3417213" cy="2023410"/>
+          </a:xfrm>
+          <a:prstGeom prst="roundRect">
+            <a:avLst>
+              <a:gd fmla="val 5000" name="adj"/>
+            </a:avLst>
+          </a:prstGeom>
+          <a:ln w="12700">
+            <a:solidFill>
+              <a:srgbClr val="FFFFFF"/>
+            </a:solidFill>
+          </a:ln>
+          <a:effectLst>
+            <a:outerShdw blurRad="90000" dist="30000" dir="5400000" rotWithShape="0">
+              <a:srgbClr val="232323">
+                <a:alpha val="28000"/>
+              </a:srgbClr>
+            </a:outerShdw>
+          </a:effectLst>
+        </p:spPr>
+      </p:pic>
+      <p:sp>
+        <p:nvSpPr>
+          <p:cNvPr id="8" name="TextBox 8"/>
+          <p:cNvSpPr txBox="1"/>
+          <p:nvPr/>
+        </p:nvSpPr>
+        <p:spPr>
+          <a:xfrm>
+            <a:off x="812800" y="6250000"/>
+            <a:ext cx="10566400" cy="220000"/>
+          </a:xfrm>
+          <a:prstGeom prst="rect">
+            <a:avLst/>
+          </a:prstGeom>
+          <a:noFill/>
+        </p:spPr>
+        <p:txBody>
+          <a:bodyPr wrap="none" lIns="0" rIns="0" tIns="0" bIns="0" anchor="ctr">
+            <a:spAutoFit/>
+          </a:bodyPr>
+          <a:lstStyle/>
+          <a:p>
+            <a:pPr algn="l"/>
+            <a:r>
+              <a:rPr sz="800" i="1" u="sng">
+                <a:solidFill>
+                  <a:srgbClr val="2A5C8F"/>
+                </a:solidFill>
+                <a:latin typeface="Nunito Sans"/>
+                <a:hlinkClick r:id="rId5"/>
+              </a:rPr>
+              <a:t>images/</a:t>
+            </a:r>
+            <a:r>
+              <a:rPr sz="800" i="1">
+                <a:solidFill>
+                  <a:srgbClr val="6B6F76"/>
+                </a:solidFill>
+                <a:latin typeface="Nunito Sans"/>
+              </a:rPr>
+              <a:t> · стенд AIM (ESP32-S3) та eye-app під час наведення на ціль</a:t>
+            </a:r>
+          </a:p>
+        </p:txBody>
+      </p:sp>
+    </p:spTree>
+  </p:cSld>
+  <p:clrMapOvr>
+    <a:masterClrMapping/>
+  </p:clrMapOvr>
+</p:sld>
+</file>
+
 <file path=ppt/slides/slide2.xml><?xml version="1.0" encoding="utf-8"?>
 <p:sld xmlns:a="http://schemas.openxmlformats.org/drawingml/2006/main" xmlns:r="http://schemas.openxmlformats.org/officeDocument/2006/relationships" xmlns:mc="http://schemas.openxmlformats.org/markup-compatibility/2006" xmlns:mv="urn:schemas-microsoft-com:mac:vml" xmlns:p="http://schemas.openxmlformats.org/presentationml/2006/main" xmlns:c="http://schemas.openxmlformats.org/drawingml/2006/chart" xmlns:dgm="http://schemas.openxmlformats.org/drawingml/2006/diagram" xmlns:o="urn:schemas-microsoft-com:office:office" xmlns:v="urn:schemas-microsoft-com:vml" xmlns:pvml="urn:schemas-microsoft-com:office:powerpoint" xmlns:com="http://schemas.openxmlformats.org/drawingml/2006/compatibility" xmlns:p14="http://schemas.microsoft.com/office/powerpoint/2010/main" xmlns:p15="http://schemas.microsoft.com/office/powerpoint/2012/main" xmlns:ahyp="http://schemas.microsoft.com/office/drawing/2018/hyperlinkcolor">
   <p:cSld>

--- a/workshop-7-final_project/docs/assestment/presentation/Laser Gimbal with Camera Tracking on ESP32-S3.pptx
+++ b/workshop-7-final_project/docs/assestment/presentation/Laser Gimbal with Camera Tracking on ESP32-S3.pptx
@@ -5234,7 +5234,7 @@
         <p:spPr>
           <a:xfrm>
             <a:off x="812800" y="812800"/>
-            <a:ext cx="1089372" cy="340320"/>
+            <a:ext cx="1466499" cy="340320"/>
           </a:xfrm>
           <a:prstGeom prst="roundRect">
             <a:avLst>
@@ -5279,7 +5279,7 @@
         <p:spPr>
           <a:xfrm>
             <a:off x="952500" y="876300"/>
-            <a:ext cx="860772" cy="238720"/>
+            <a:ext cx="1260528" cy="238720"/>
           </a:xfrm>
           <a:prstGeom prst="rect">
             <a:avLst/>
@@ -7064,7 +7064,7 @@
         <p:spPr>
           <a:xfrm>
             <a:off x="812800" y="812800"/>
-            <a:ext cx="1089372" cy="340320"/>
+            <a:ext cx="1466499" cy="340320"/>
           </a:xfrm>
           <a:prstGeom prst="roundRect">
             <a:avLst>
@@ -7109,7 +7109,7 @@
         <p:spPr>
           <a:xfrm>
             <a:off x="952500" y="876300"/>
-            <a:ext cx="860772" cy="238720"/>
+            <a:ext cx="1260528" cy="238720"/>
           </a:xfrm>
           <a:prstGeom prst="rect">
             <a:avLst/>
@@ -7838,7 +7838,7 @@
         <p:spPr>
           <a:xfrm>
             <a:off x="812800" y="812800"/>
-            <a:ext cx="1089372" cy="340320"/>
+            <a:ext cx="1466499" cy="340320"/>
           </a:xfrm>
           <a:prstGeom prst="roundRect">
             <a:avLst>
@@ -7883,7 +7883,7 @@
         <p:spPr>
           <a:xfrm>
             <a:off x="952500" y="876300"/>
-            <a:ext cx="860772" cy="238720"/>
+            <a:ext cx="1260528" cy="238720"/>
           </a:xfrm>
           <a:prstGeom prst="rect">
             <a:avLst/>
@@ -10369,7 +10369,7 @@
         <p:spPr>
           <a:xfrm>
             <a:off x="812800" y="812800"/>
-            <a:ext cx="1450000" cy="340320"/>
+            <a:ext cx="1710000" cy="340320"/>
           </a:xfrm>
           <a:prstGeom prst="roundRect">
             <a:avLst>
@@ -10414,7 +10414,7 @@
         <p:spPr>
           <a:xfrm>
             <a:off x="952500" y="876300"/>
-            <a:ext cx="1267150" cy="238720"/>
+            <a:ext cx="1520000" cy="238720"/>
           </a:xfrm>
           <a:prstGeom prst="rect">
             <a:avLst/>
@@ -10737,7 +10737,7 @@
         <p:spPr>
           <a:xfrm>
             <a:off x="812800" y="812800"/>
-            <a:ext cx="1028656" cy="340320"/>
+            <a:ext cx="1380000" cy="340320"/>
           </a:xfrm>
           <a:prstGeom prst="roundRect">
             <a:avLst>
@@ -10782,7 +10782,7 @@
         <p:spPr>
           <a:xfrm>
             <a:off x="952500" y="876300"/>
-            <a:ext cx="801801" cy="238720"/>
+            <a:ext cx="1150000" cy="238720"/>
           </a:xfrm>
           <a:prstGeom prst="rect">
             <a:avLst/>
@@ -12967,8 +12967,8 @@
         </p:nvSpPr>
         <p:spPr>
           <a:xfrm>
-            <a:off x="10509647" y="1935361"/>
-            <a:ext cx="840000" cy="238720"/>
+            <a:off x="10169069" y="1935361"/>
+            <a:ext cx="1120000" cy="238720"/>
           </a:xfrm>
           <a:prstGeom prst="rect">
             <a:avLst/>
@@ -13864,7 +13864,7 @@
         <p:spPr>
           <a:xfrm>
             <a:off x="812800" y="5647829"/>
-            <a:ext cx="4630440" cy="364430"/>
+            <a:ext cx="6000000" cy="364430"/>
           </a:xfrm>
           <a:prstGeom prst="roundRect">
             <a:avLst>
@@ -13909,7 +13909,7 @@
         <p:spPr>
           <a:xfrm>
             <a:off x="965200" y="5736729"/>
-            <a:ext cx="4455409" cy="212030"/>
+            <a:ext cx="5650000" cy="212030"/>
           </a:xfrm>
           <a:prstGeom prst="rect">
             <a:avLst/>
@@ -17749,7 +17749,7 @@
         <p:spPr>
           <a:xfrm>
             <a:off x="812800" y="812800"/>
-            <a:ext cx="1089372" cy="340320"/>
+            <a:ext cx="1466499" cy="340320"/>
           </a:xfrm>
           <a:prstGeom prst="roundRect">
             <a:avLst>
@@ -17794,7 +17794,7 @@
         <p:spPr>
           <a:xfrm>
             <a:off x="952500" y="876300"/>
-            <a:ext cx="860772" cy="238720"/>
+            <a:ext cx="1260528" cy="238720"/>
           </a:xfrm>
           <a:prstGeom prst="rect">
             <a:avLst/>

--- a/workshop-7-final_project/docs/assestment/presentation/Laser Gimbal with Camera Tracking on ESP32-S3.pptx
+++ b/workshop-7-final_project/docs/assestment/presentation/Laser Gimbal with Camera Tracking on ESP32-S3.pptx
@@ -20,6 +20,7 @@
     <p:sldId id="266" r:id="rId16"/>
     <p:sldId id="267" r:id="rId17"/>
     <p:sldId id="268" r:id="rId18"/>
+    <p:sldId id="271" r:id="rId26"/>
     <p:sldId id="270" r:id="rId25"/>
     <p:sldId id="269" r:id="rId19"/>
   </p:sldIdLst>
@@ -2387,6 +2388,164 @@
 </p:notes>
 </file>
 
+<file path=ppt/notesSlides/notesSlide15.xml><?xml version="1.0" encoding="utf-8"?>
+<p:notes xmlns:a="http://schemas.openxmlformats.org/drawingml/2006/main" xmlns:r="http://schemas.openxmlformats.org/officeDocument/2006/relationships" xmlns:mc="http://schemas.openxmlformats.org/markup-compatibility/2006" xmlns:mv="urn:schemas-microsoft-com:mac:vml" xmlns:p="http://schemas.openxmlformats.org/presentationml/2006/main" xmlns:c="http://schemas.openxmlformats.org/drawingml/2006/chart" xmlns:dgm="http://schemas.openxmlformats.org/drawingml/2006/diagram" xmlns:o="urn:schemas-microsoft-com:office:office" xmlns:v="urn:schemas-microsoft-com:vml" xmlns:pvml="urn:schemas-microsoft-com:office:powerpoint" xmlns:com="http://schemas.openxmlformats.org/drawingml/2006/compatibility" xmlns:p14="http://schemas.microsoft.com/office/powerpoint/2010/main" xmlns:p15="http://schemas.microsoft.com/office/powerpoint/2012/main" xmlns:ahyp="http://schemas.microsoft.com/office/drawing/2018/hyperlinkcolor" showMasterPhAnim="0" showMasterSp="0">
+  <p:cSld>
+    <p:spTree>
+      <p:nvGrpSpPr>
+        <p:cNvPr id="1" name="Shape 1"/>
+        <p:cNvGrpSpPr/>
+        <p:nvPr/>
+      </p:nvGrpSpPr>
+      <p:grpSpPr>
+        <a:xfrm>
+          <a:off x="0" y="0"/>
+          <a:ext cx="0" cy="0"/>
+          <a:chOff x="0" y="0"/>
+          <a:chExt cx="0" cy="0"/>
+        </a:xfrm>
+      </p:grpSpPr>
+      <p:sp>
+        <p:nvSpPr>
+          <p:cNvPr id="2" name="Google Shape;2;p15notes"/>
+          <p:cNvSpPr/>
+          <p:nvPr>
+            <p:ph idx="2" type="sldImg"/>
+          </p:nvPr>
+        </p:nvSpPr>
+        <p:spPr>
+          <a:xfrm>
+            <a:off x="685800" y="1143000"/>
+            <a:ext cx="5486400" cy="3086100"/>
+          </a:xfrm>
+          <a:custGeom>
+            <a:rect b="b" l="l" r="r" t="t"/>
+            <a:pathLst>
+              <a:path extrusionOk="0" h="120000" w="120000">
+                <a:moveTo>
+                  <a:pt x="0" y="0"/>
+                </a:moveTo>
+                <a:lnTo>
+                  <a:pt x="120000" y="0"/>
+                </a:lnTo>
+                <a:lnTo>
+                  <a:pt x="120000" y="120000"/>
+                </a:lnTo>
+                <a:lnTo>
+                  <a:pt x="0" y="120000"/>
+                </a:lnTo>
+                <a:close/>
+              </a:path>
+            </a:pathLst>
+          </a:custGeom>
+          <a:noFill/>
+          <a:ln cap="flat" cmpd="sng" w="12700">
+            <a:solidFill>
+              <a:srgbClr val="000000"/>
+            </a:solidFill>
+            <a:prstDash val="solid"/>
+            <a:round/>
+            <a:headEnd len="sm" w="sm" type="none"/>
+            <a:tailEnd len="sm" w="sm" type="none"/>
+          </a:ln>
+        </p:spPr>
+      </p:sp>
+      <p:sp>
+        <p:nvSpPr>
+          <p:cNvPr id="3" name="Google Shape;3;p15notes"/>
+          <p:cNvSpPr txBox="1"/>
+          <p:nvPr>
+            <p:ph idx="1" type="body"/>
+          </p:nvPr>
+        </p:nvSpPr>
+        <p:spPr>
+          <a:xfrm>
+            <a:off x="685800" y="4400550"/>
+            <a:ext cx="5486400" cy="3600450"/>
+          </a:xfrm>
+          <a:prstGeom prst="rect">
+            <a:avLst/>
+          </a:prstGeom>
+          <a:noFill/>
+          <a:ln>
+            <a:noFill/>
+          </a:ln>
+        </p:spPr>
+        <p:txBody>
+          <a:bodyPr anchorCtr="0" anchor="t" bIns="45700" lIns="91425" spcFirstLastPara="1" rIns="91425" wrap="square" tIns="45700">
+            <a:noAutofit/>
+          </a:bodyPr>
+          <a:lstStyle/>
+          <a:p>
+            <a:pPr indent="0" lvl="0" marL="0" rtl="0" algn="l">
+              <a:spcBef>
+                <a:spcPts val="0"/>
+              </a:spcBef>
+              <a:spcAft>
+                <a:spcPts val="0"/>
+              </a:spcAft>
+              <a:buNone/>
+            </a:pPr>
+            <a:r>
+              <a:rPr lang="en-US"/>
+              <a:t>Ці 5 графіків — крок цілі (одноразове зміщення) на стенді для двох режимів (AUTO_POSITIONAL, AUTO_VELOCITYEQUATION) і кількох PID. Вісь X — час у мс від старту логування (не з нуля), вісь Y — похибка, нормована приблизно в межах ±1. “Час до цілі” тут — час від стрибка похибки до входу в межу ≈5% амплітуди й утримання в ній. “Овершут” — перехід через нуль у протилежний бік більший за цю межу. Дані виміряні по пікселях графіків (error_graph.py), не з сирих логів — це оцінка, а не точний вимір. Головне: канал pan не овершутить ні в одному режимі, канал tilt — овершутить завжди на ~30%; збільшення I з 10 до 100 у VELOCITYEQUATION різко скорочує час до цілі.</a:t>
+            </a:r>
+            <a:endParaRPr/>
+          </a:p>
+        </p:txBody>
+      </p:sp>
+      <p:sp>
+        <p:nvSpPr>
+          <p:cNvPr id="4" name="Google Shape;4;p15notes"/>
+          <p:cNvSpPr txBox="1"/>
+          <p:nvPr>
+            <p:ph idx="12" type="sldNum"/>
+          </p:nvPr>
+        </p:nvSpPr>
+        <p:spPr>
+          <a:xfrm>
+            <a:off x="3884613" y="8685213"/>
+            <a:ext cx="2971800" cy="458787"/>
+          </a:xfrm>
+          <a:prstGeom prst="rect">
+            <a:avLst/>
+          </a:prstGeom>
+          <a:noFill/>
+          <a:ln>
+            <a:noFill/>
+          </a:ln>
+        </p:spPr>
+        <p:txBody>
+          <a:bodyPr anchorCtr="0" anchor="b" bIns="45700" lIns="91425" spcFirstLastPara="1" rIns="91425" wrap="square" tIns="45700">
+            <a:noAutofit/>
+          </a:bodyPr>
+          <a:lstStyle/>
+          <a:p>
+            <a:pPr indent="0" lvl="0" marL="0" rtl="0" algn="r">
+              <a:spcBef>
+                <a:spcPts val="0"/>
+              </a:spcBef>
+              <a:spcAft>
+                <a:spcPts val="0"/>
+              </a:spcAft>
+              <a:buNone/>
+            </a:pPr>
+            <a:fld id="{00000000-1234-1234-1234-123412341234}" type="slidenum">
+              <a:rPr lang="en-US"/>
+              <a:t>‹#›</a:t>
+            </a:fld>
+            <a:endParaRPr/>
+          </a:p>
+        </p:txBody>
+      </p:sp>
+    </p:spTree>
+  </p:cSld>
+  <p:clrMapOvr>
+    <a:masterClrMapping/>
+  </p:clrMapOvr>
+</p:notes>
+</file>
+
 <file path=ppt/notesSlides/notesSlide3.xml><?xml version="1.0" encoding="utf-8"?>
 <p:notes xmlns:a="http://schemas.openxmlformats.org/drawingml/2006/main" xmlns:r="http://schemas.openxmlformats.org/officeDocument/2006/relationships" xmlns:mc="http://schemas.openxmlformats.org/markup-compatibility/2006" xmlns:mv="urn:schemas-microsoft-com:mac:vml" xmlns:p="http://schemas.openxmlformats.org/presentationml/2006/main" xmlns:c="http://schemas.openxmlformats.org/drawingml/2006/chart" xmlns:dgm="http://schemas.openxmlformats.org/drawingml/2006/diagram" xmlns:o="urn:schemas-microsoft-com:office:office" xmlns:v="urn:schemas-microsoft-com:vml" xmlns:pvml="urn:schemas-microsoft-com:office:powerpoint" xmlns:com="http://schemas.openxmlformats.org/drawingml/2006/compatibility" xmlns:p14="http://schemas.microsoft.com/office/powerpoint/2010/main" xmlns:p15="http://schemas.microsoft.com/office/powerpoint/2012/main" xmlns:ahyp="http://schemas.microsoft.com/office/drawing/2018/hyperlinkcolor" showMasterPhAnim="0" showMasterSp="0">
   <p:cSld>
@@ -2804,6 +2963,22 @@
             <a:r>
               <a:rPr lang="en-US"/>
               <a:t>Головна ідея: ми задаємо швидкість, а не кут, і даємо прошивці інтегрувати швидкість у кут кожні 20 мілісекунд. Цей інтегратор означає, що зазвичай достатньо простого пропорційного регулятора — не треба вручну налаштовувати повний PID.</a:t>
+            </a:r>
+            <a:endParaRPr/>
+          </a:p>
+          <a:p>
+            <a:pPr indent="0" lvl="0" marL="0" rtl="0" algn="l">
+              <a:spcBef>
+                <a:spcPts val="0"/>
+              </a:spcBef>
+              <a:spcAft>
+                <a:spcPts val="0"/>
+              </a:spcAft>
+              <a:buNone/>
+            </a:pPr>
+            <a:r>
+              <a:rPr lang="en-US"/>
+              <a:t>Пастка з назвами: клас PositionalPid насправді видає швидкість (рампа/інтегратор), а клас VelocityEquationPid видає приріст кута напряму — назви класів навпаки тому, що PositionalPid зберігає позиційну форму рівняння (Kp*e + явний інтеграл), просто трактує вихід як швидкість. Обидва канали реалізовані й порівнювані (AUTO_POSITIONAL за замовчуванням, AUTO_VELOCITYEQUATION — для порівняння/точкового наведення), докладніше — docs/servo-control-strategies.md.</a:t>
             </a:r>
             <a:endParaRPr/>
           </a:p>
@@ -8370,7 +8545,7 @@
                 <a:cs typeface="Nunito Sans"/>
                 <a:sym typeface="Nunito Sans"/>
               </a:rPr>
-              <a:t>TODO</a:t>
+              <a:t>80–1160</a:t>
             </a:r>
             <a:endParaRPr b="0" i="0" sz="1100" u="none" cap="none" strike="noStrike">
               <a:solidFill>
@@ -8436,7 +8611,7 @@
                 <a:cs typeface="Nunito Sans"/>
                 <a:sym typeface="Nunito Sans"/>
               </a:rPr>
-              <a:t>Час встановлення</a:t>
+              <a:t>Час встановлення (мс)</a:t>
             </a:r>
             <a:endParaRPr b="0" i="0" sz="1000" u="none" cap="none" strike="noStrike">
               <a:solidFill>
@@ -8592,7 +8767,7 @@
                 <a:cs typeface="Nunito Sans"/>
                 <a:sym typeface="Nunito Sans"/>
               </a:rPr>
-              <a:t>TODO</a:t>
+              <a:t>27–33%</a:t>
             </a:r>
             <a:endParaRPr b="0" i="0" sz="1100" u="none" cap="none" strike="noStrike">
               <a:solidFill>
@@ -8658,7 +8833,7 @@
                 <a:cs typeface="Nunito Sans"/>
                 <a:sym typeface="Nunito Sans"/>
               </a:rPr>
-              <a:t>Макс. затримка запису на SD</a:t>
+              <a:t>Овершут (tilt)</a:t>
             </a:r>
             <a:endParaRPr b="0" i="0" sz="1000" u="none" cap="none" strike="noStrike">
               <a:solidFill>
@@ -8814,7 +8989,7 @@
                 <a:cs typeface="Nunito Sans"/>
                 <a:sym typeface="Nunito Sans"/>
               </a:rPr>
-              <a:t>TODO</a:t>
+              <a:t>~1–4%</a:t>
             </a:r>
             <a:endParaRPr b="0" i="0" sz="1100" u="none" cap="none" strike="noStrike">
               <a:solidFill>
@@ -8880,7 +9055,7 @@
                 <a:cs typeface="Nunito Sans"/>
                 <a:sym typeface="Nunito Sans"/>
               </a:rPr>
-              <a:t>Тривалий прогін без збоїв</a:t>
+              <a:t>Овершут (pan)</a:t>
             </a:r>
             <a:endParaRPr b="0" i="0" sz="1000" u="none" cap="none" strike="noStrike">
               <a:solidFill>
@@ -9213,7 +9388,7 @@
                 <a:cs typeface="Nunito Sans"/>
                 <a:sym typeface="Nunito Sans"/>
               </a:rPr>
-              <a:t>Графік — похибка від часу, до/після налаштування</a:t>
+              <a:t>Графіки похибки за режимом і PID</a:t>
             </a:r>
             <a:endParaRPr b="0" i="0" sz="1100" u="none" cap="none" strike="noStrike">
               <a:solidFill>
@@ -9324,7 +9499,7 @@
                 <a:cs typeface="Nunito Sans"/>
                 <a:sym typeface="Nunito Sans"/>
               </a:rPr>
-              <a:t>TODO</a:t>
+              <a:t>5</a:t>
             </a:r>
             <a:endParaRPr b="0" i="0" sz="950" u="none" cap="none" strike="noStrike">
               <a:solidFill>
@@ -9402,941 +9577,6 @@
 </file>
 
 <file path=ppt/slides/slide13.xml><?xml version="1.0" encoding="utf-8"?>
-<p:sld xmlns:a="http://schemas.openxmlformats.org/drawingml/2006/main" xmlns:r="http://schemas.openxmlformats.org/officeDocument/2006/relationships" xmlns:mc="http://schemas.openxmlformats.org/markup-compatibility/2006" xmlns:mv="urn:schemas-microsoft-com:mac:vml" xmlns:p="http://schemas.openxmlformats.org/presentationml/2006/main" xmlns:c="http://schemas.openxmlformats.org/drawingml/2006/chart" xmlns:dgm="http://schemas.openxmlformats.org/drawingml/2006/diagram" xmlns:o="urn:schemas-microsoft-com:office:office" xmlns:v="urn:schemas-microsoft-com:vml" xmlns:pvml="urn:schemas-microsoft-com:office:powerpoint" xmlns:com="http://schemas.openxmlformats.org/drawingml/2006/compatibility" xmlns:p14="http://schemas.microsoft.com/office/powerpoint/2010/main" xmlns:p15="http://schemas.microsoft.com/office/powerpoint/2012/main" xmlns:ahyp="http://schemas.microsoft.com/office/drawing/2018/hyperlinkcolor">
-  <p:cSld>
-    <p:bg>
-      <p:bgPr>
-        <a:solidFill>
-          <a:srgbClr val="F7F6F5"/>
-        </a:solidFill>
-      </p:bgPr>
-    </p:bg>
-    <p:spTree>
-      <p:nvGrpSpPr>
-        <p:cNvPr id="271" name="Shape 271"/>
-        <p:cNvGrpSpPr/>
-        <p:nvPr/>
-      </p:nvGrpSpPr>
-      <p:grpSpPr>
-        <a:xfrm>
-          <a:off x="0" y="0"/>
-          <a:ext cx="0" cy="0"/>
-          <a:chOff x="0" y="0"/>
-          <a:chExt cx="0" cy="0"/>
-        </a:xfrm>
-      </p:grpSpPr>
-      <p:sp>
-        <p:nvSpPr>
-          <p:cNvPr id="273" name="Google Shape;273;p14"/>
-          <p:cNvSpPr/>
-          <p:nvPr/>
-        </p:nvSpPr>
-        <p:spPr>
-          <a:xfrm>
-            <a:off x="812800" y="812800"/>
-            <a:ext cx="1054359" cy="340320"/>
-          </a:xfrm>
-          <a:prstGeom prst="roundRect">
-            <a:avLst>
-              <a:gd fmla="val 37318" name="adj"/>
-            </a:avLst>
-          </a:prstGeom>
-          <a:solidFill>
-            <a:srgbClr val="DAE5F1"/>
-          </a:solidFill>
-          <a:ln>
-            <a:noFill/>
-          </a:ln>
-        </p:spPr>
-        <p:txBody>
-          <a:bodyPr anchorCtr="0" anchor="ctr" bIns="91425" lIns="91425" spcFirstLastPara="1" rIns="91425" wrap="square" tIns="91425">
-            <a:noAutofit/>
-          </a:bodyPr>
-          <a:lstStyle/>
-          <a:p>
-            <a:pPr indent="0" lvl="0" marL="0" rtl="0" algn="l">
-              <a:spcBef>
-                <a:spcPts val="0"/>
-              </a:spcBef>
-              <a:spcAft>
-                <a:spcPts val="0"/>
-              </a:spcAft>
-              <a:buNone/>
-            </a:pPr>
-            <a:r>
-              <a:t/>
-            </a:r>
-            <a:endParaRPr/>
-          </a:p>
-        </p:txBody>
-      </p:sp>
-      <p:sp>
-        <p:nvSpPr>
-          <p:cNvPr id="274" name="Google Shape;274;p14"/>
-          <p:cNvSpPr/>
-          <p:nvPr/>
-        </p:nvSpPr>
-        <p:spPr>
-          <a:xfrm>
-            <a:off x="952500" y="876300"/>
-            <a:ext cx="833949" cy="238720"/>
-          </a:xfrm>
-          <a:prstGeom prst="rect">
-            <a:avLst/>
-          </a:prstGeom>
-          <a:noFill/>
-          <a:ln>
-            <a:noFill/>
-          </a:ln>
-        </p:spPr>
-        <p:txBody>
-          <a:bodyPr anchorCtr="0" anchor="t" bIns="0" lIns="0" spcFirstLastPara="1" rIns="0" wrap="square" tIns="0">
-            <a:normAutofit/>
-          </a:bodyPr>
-          <a:lstStyle/>
-          <a:p>
-            <a:pPr indent="0" lvl="0" marL="0" marR="0" rtl="0" algn="l">
-              <a:lnSpc>
-                <a:spcPct val="140000"/>
-              </a:lnSpc>
-              <a:spcBef>
-                <a:spcPts val="0"/>
-              </a:spcBef>
-              <a:spcAft>
-                <a:spcPts val="0"/>
-              </a:spcAft>
-              <a:buClr>
-                <a:srgbClr val="414C58"/>
-              </a:buClr>
-              <a:buSzPts val="1200"/>
-              <a:buFont typeface="Nunito Sans"/>
-              <a:buNone/>
-            </a:pPr>
-            <a:r>
-              <a:rPr b="1" i="0" lang="en-US" sz="1200" u="none" cap="none" strike="noStrike">
-                <a:solidFill>
-                  <a:srgbClr val="414C58"/>
-                </a:solidFill>
-                <a:latin typeface="Nunito Sans"/>
-                <a:ea typeface="Nunito Sans"/>
-                <a:cs typeface="Nunito Sans"/>
-                <a:sym typeface="Nunito Sans"/>
-              </a:rPr>
-              <a:t>ЩО ДАЛІ</a:t>
-            </a:r>
-            <a:endParaRPr b="0" i="0" sz="1200" u="none" cap="none" strike="noStrike">
-              <a:solidFill>
-                <a:schemeClr val="dk1"/>
-              </a:solidFill>
-              <a:latin typeface="Calibri"/>
-              <a:ea typeface="Calibri"/>
-              <a:cs typeface="Calibri"/>
-              <a:sym typeface="Calibri"/>
-            </a:endParaRPr>
-          </a:p>
-        </p:txBody>
-      </p:sp>
-      <p:sp>
-        <p:nvSpPr>
-          <p:cNvPr id="275" name="Google Shape;275;p14"/>
-          <p:cNvSpPr/>
-          <p:nvPr/>
-        </p:nvSpPr>
-        <p:spPr>
-          <a:xfrm>
-            <a:off x="812800" y="1280120"/>
-            <a:ext cx="10883392" cy="360660"/>
-          </a:xfrm>
-          <a:prstGeom prst="rect">
-            <a:avLst/>
-          </a:prstGeom>
-          <a:noFill/>
-          <a:ln>
-            <a:noFill/>
-          </a:ln>
-        </p:spPr>
-        <p:txBody>
-          <a:bodyPr anchorCtr="0" anchor="t" bIns="0" lIns="0" spcFirstLastPara="1" rIns="0" wrap="square" tIns="0">
-            <a:normAutofit/>
-          </a:bodyPr>
-          <a:lstStyle/>
-          <a:p>
-            <a:pPr indent="0" lvl="0" marL="0" marR="0" rtl="0" algn="l">
-              <a:lnSpc>
-                <a:spcPct val="110000"/>
-              </a:lnSpc>
-              <a:spcBef>
-                <a:spcPts val="0"/>
-              </a:spcBef>
-              <a:spcAft>
-                <a:spcPts val="0"/>
-              </a:spcAft>
-              <a:buClr>
-                <a:srgbClr val="232323"/>
-              </a:buClr>
-              <a:buSzPts val="2600"/>
-              <a:buFont typeface="Nunito Sans"/>
-              <a:buNone/>
-            </a:pPr>
-            <a:r>
-              <a:rPr b="1" i="0" lang="en-US" sz="2400" u="none" cap="none" strike="noStrike">
-                <a:solidFill>
-                  <a:srgbClr val="232323"/>
-                </a:solidFill>
-                <a:latin typeface="Nunito Sans"/>
-                <a:ea typeface="Nunito Sans"/>
-                <a:cs typeface="Nunito Sans"/>
-                <a:sym typeface="Nunito Sans"/>
-              </a:rPr>
-              <a:t>Що далі</a:t>
-            </a:r>
-            <a:endParaRPr b="0" i="0" sz="2600" u="none" cap="none" strike="noStrike">
-              <a:solidFill>
-                <a:schemeClr val="dk1"/>
-              </a:solidFill>
-              <a:latin typeface="Calibri"/>
-              <a:ea typeface="Calibri"/>
-              <a:cs typeface="Calibri"/>
-              <a:sym typeface="Calibri"/>
-            </a:endParaRPr>
-          </a:p>
-        </p:txBody>
-      </p:sp>
-      <p:sp>
-        <p:nvSpPr>
-          <p:cNvPr id="281" name="Google Shape;281;p14"/>
-          <p:cNvSpPr/>
-          <p:nvPr/>
-        </p:nvSpPr>
-        <p:spPr>
-          <a:xfrm>
-            <a:off x="812800" y="2024246"/>
-            <a:ext cx="5083200" cy="2431800"/>
-          </a:xfrm>
-          <a:prstGeom prst="roundRect">
-            <a:avLst>
-              <a:gd fmla="val 7113" name="adj"/>
-            </a:avLst>
-          </a:prstGeom>
-          <a:solidFill>
-            <a:srgbClr val="ECE7E2"/>
-          </a:solidFill>
-          <a:ln>
-            <a:noFill/>
-          </a:ln>
-        </p:spPr>
-        <p:txBody>
-          <a:bodyPr anchorCtr="0" anchor="ctr" bIns="91425" lIns="91425" spcFirstLastPara="1" rIns="91425" wrap="square" tIns="91425">
-            <a:noAutofit/>
-          </a:bodyPr>
-          <a:lstStyle/>
-          <a:p>
-            <a:pPr indent="0" lvl="0" marL="0" rtl="0" algn="l">
-              <a:spcBef>
-                <a:spcPts val="0"/>
-              </a:spcBef>
-              <a:spcAft>
-                <a:spcPts val="0"/>
-              </a:spcAft>
-              <a:buNone/>
-            </a:pPr>
-            <a:r>
-              <a:t/>
-            </a:r>
-            <a:endParaRPr/>
-          </a:p>
-        </p:txBody>
-      </p:sp>
-      <p:sp>
-        <p:nvSpPr>
-          <p:cNvPr id="282" name="Google Shape;282;p14"/>
-          <p:cNvSpPr/>
-          <p:nvPr/>
-        </p:nvSpPr>
-        <p:spPr>
-          <a:xfrm>
-            <a:off x="1041400" y="2252861"/>
-            <a:ext cx="406400" cy="406400"/>
-          </a:xfrm>
-          <a:prstGeom prst="roundRect">
-            <a:avLst>
-              <a:gd fmla="val 50000" name="adj"/>
-            </a:avLst>
-          </a:prstGeom>
-          <a:solidFill>
-            <a:srgbClr val="C5D6E9"/>
-          </a:solidFill>
-          <a:ln>
-            <a:noFill/>
-          </a:ln>
-        </p:spPr>
-        <p:txBody>
-          <a:bodyPr anchorCtr="0" anchor="ctr" bIns="91425" lIns="91425" spcFirstLastPara="1" rIns="91425" wrap="square" tIns="91425">
-            <a:noAutofit/>
-          </a:bodyPr>
-          <a:lstStyle/>
-          <a:p>
-            <a:pPr indent="0" lvl="0" marL="0" rtl="0" algn="l">
-              <a:spcBef>
-                <a:spcPts val="0"/>
-              </a:spcBef>
-              <a:spcAft>
-                <a:spcPts val="0"/>
-              </a:spcAft>
-              <a:buNone/>
-            </a:pPr>
-            <a:r>
-              <a:t/>
-            </a:r>
-            <a:endParaRPr/>
-          </a:p>
-        </p:txBody>
-      </p:sp>
-      <p:sp>
-        <p:nvSpPr>
-          <p:cNvPr id="283" name="Google Shape;283;p14"/>
-          <p:cNvSpPr/>
-          <p:nvPr/>
-        </p:nvSpPr>
-        <p:spPr>
-          <a:xfrm>
-            <a:off x="1187450" y="2322711"/>
-            <a:ext cx="165100" cy="292100"/>
-          </a:xfrm>
-          <a:prstGeom prst="rect">
-            <a:avLst/>
-          </a:prstGeom>
-          <a:noFill/>
-          <a:ln>
-            <a:noFill/>
-          </a:ln>
-        </p:spPr>
-        <p:txBody>
-          <a:bodyPr anchorCtr="0" anchor="t" bIns="0" lIns="0" spcFirstLastPara="1" rIns="0" wrap="square" tIns="0">
-            <a:normAutofit/>
-          </a:bodyPr>
-          <a:lstStyle/>
-          <a:p>
-            <a:pPr indent="0" lvl="0" marL="0" marR="0" rtl="0" algn="l">
-              <a:lnSpc>
-                <a:spcPct val="140000"/>
-              </a:lnSpc>
-              <a:spcBef>
-                <a:spcPts val="0"/>
-              </a:spcBef>
-              <a:spcAft>
-                <a:spcPts val="0"/>
-              </a:spcAft>
-              <a:buClr>
-                <a:srgbClr val="232323"/>
-              </a:buClr>
-              <a:buSzPts val="1500"/>
-              <a:buFont typeface="Nunito Sans"/>
-              <a:buNone/>
-            </a:pPr>
-            <a:r>
-              <a:rPr b="1" i="0" lang="en-US" sz="1500" u="none" cap="none" strike="noStrike">
-                <a:solidFill>
-                  <a:srgbClr val="232323"/>
-                </a:solidFill>
-                <a:latin typeface="Nunito Sans"/>
-                <a:ea typeface="Nunito Sans"/>
-                <a:cs typeface="Nunito Sans"/>
-                <a:sym typeface="Nunito Sans"/>
-              </a:rPr>
-              <a:t>1</a:t>
-            </a:r>
-            <a:endParaRPr b="0" i="0" sz="1500" u="none" cap="none" strike="noStrike">
-              <a:solidFill>
-                <a:schemeClr val="dk1"/>
-              </a:solidFill>
-              <a:latin typeface="Calibri"/>
-              <a:ea typeface="Calibri"/>
-              <a:cs typeface="Calibri"/>
-              <a:sym typeface="Calibri"/>
-            </a:endParaRPr>
-          </a:p>
-        </p:txBody>
-      </p:sp>
-      <p:sp>
-        <p:nvSpPr>
-          <p:cNvPr id="284" name="Google Shape;284;p14"/>
-          <p:cNvSpPr/>
-          <p:nvPr/>
-        </p:nvSpPr>
-        <p:spPr>
-          <a:xfrm>
-            <a:off x="1041400" y="2773561"/>
-            <a:ext cx="4626000" cy="292100"/>
-          </a:xfrm>
-          <a:prstGeom prst="rect">
-            <a:avLst/>
-          </a:prstGeom>
-          <a:noFill/>
-          <a:ln>
-            <a:noFill/>
-          </a:ln>
-        </p:spPr>
-        <p:txBody>
-          <a:bodyPr anchorCtr="0" anchor="t" bIns="0" lIns="0" spcFirstLastPara="1" rIns="0" wrap="square" tIns="0">
-            <a:normAutofit/>
-          </a:bodyPr>
-          <a:lstStyle/>
-          <a:p>
-            <a:pPr indent="0" lvl="0" marL="0" marR="0" rtl="0" algn="l">
-              <a:lnSpc>
-                <a:spcPct val="140000"/>
-              </a:lnSpc>
-              <a:spcBef>
-                <a:spcPts val="0"/>
-              </a:spcBef>
-              <a:spcAft>
-                <a:spcPts val="0"/>
-              </a:spcAft>
-              <a:buClr>
-                <a:srgbClr val="232323"/>
-              </a:buClr>
-              <a:buSzPts val="1500"/>
-              <a:buFont typeface="Nunito Sans"/>
-              <a:buNone/>
-            </a:pPr>
-            <a:r>
-              <a:rPr b="1" i="0" lang="en-US" sz="1500" u="none" cap="none" strike="noStrike">
-                <a:solidFill>
-                  <a:srgbClr val="232323"/>
-                </a:solidFill>
-                <a:latin typeface="Nunito Sans"/>
-                <a:ea typeface="Nunito Sans"/>
-                <a:cs typeface="Nunito Sans"/>
-                <a:sym typeface="Nunito Sans"/>
-              </a:rPr>
-              <a:t>Наступне</a:t>
-            </a:r>
-            <a:endParaRPr b="0" i="0" sz="1500" u="none" cap="none" strike="noStrike">
-              <a:solidFill>
-                <a:schemeClr val="dk1"/>
-              </a:solidFill>
-              <a:latin typeface="Calibri"/>
-              <a:ea typeface="Calibri"/>
-              <a:cs typeface="Calibri"/>
-              <a:sym typeface="Calibri"/>
-            </a:endParaRPr>
-          </a:p>
-        </p:txBody>
-      </p:sp>
-      <p:sp>
-        <p:nvSpPr>
-          <p:cNvPr id="285" name="Google Shape;285;p14"/>
-          <p:cNvSpPr/>
-          <p:nvPr/>
-        </p:nvSpPr>
-        <p:spPr>
-          <a:xfrm>
-            <a:off x="6296000" y="2024246"/>
-            <a:ext cx="5083200" cy="2431800"/>
-          </a:xfrm>
-          <a:prstGeom prst="roundRect">
-            <a:avLst>
-              <a:gd fmla="val 7113" name="adj"/>
-            </a:avLst>
-          </a:prstGeom>
-          <a:solidFill>
-            <a:srgbClr val="ECE7E2"/>
-          </a:solidFill>
-          <a:ln>
-            <a:noFill/>
-          </a:ln>
-        </p:spPr>
-        <p:txBody>
-          <a:bodyPr anchorCtr="0" anchor="ctr" bIns="91425" lIns="91425" spcFirstLastPara="1" rIns="91425" wrap="square" tIns="91425">
-            <a:noAutofit/>
-          </a:bodyPr>
-          <a:lstStyle/>
-          <a:p>
-            <a:pPr indent="0" lvl="0" marL="0" rtl="0" algn="l">
-              <a:spcBef>
-                <a:spcPts val="0"/>
-              </a:spcBef>
-              <a:spcAft>
-                <a:spcPts val="0"/>
-              </a:spcAft>
-              <a:buNone/>
-            </a:pPr>
-            <a:r>
-              <a:t/>
-            </a:r>
-            <a:endParaRPr/>
-          </a:p>
-        </p:txBody>
-      </p:sp>
-      <p:sp>
-        <p:nvSpPr>
-          <p:cNvPr id="286" name="Google Shape;286;p14"/>
-          <p:cNvSpPr/>
-          <p:nvPr/>
-        </p:nvSpPr>
-        <p:spPr>
-          <a:xfrm>
-            <a:off x="6524600" y="2252861"/>
-            <a:ext cx="406400" cy="406400"/>
-          </a:xfrm>
-          <a:prstGeom prst="roundRect">
-            <a:avLst>
-              <a:gd fmla="val 50000" name="adj"/>
-            </a:avLst>
-          </a:prstGeom>
-          <a:solidFill>
-            <a:srgbClr val="C5D6E9"/>
-          </a:solidFill>
-          <a:ln>
-            <a:noFill/>
-          </a:ln>
-        </p:spPr>
-        <p:txBody>
-          <a:bodyPr anchorCtr="0" anchor="ctr" bIns="91425" lIns="91425" spcFirstLastPara="1" rIns="91425" wrap="square" tIns="91425">
-            <a:noAutofit/>
-          </a:bodyPr>
-          <a:lstStyle/>
-          <a:p>
-            <a:pPr indent="0" lvl="0" marL="0" rtl="0" algn="l">
-              <a:spcBef>
-                <a:spcPts val="0"/>
-              </a:spcBef>
-              <a:spcAft>
-                <a:spcPts val="0"/>
-              </a:spcAft>
-              <a:buNone/>
-            </a:pPr>
-            <a:r>
-              <a:t/>
-            </a:r>
-            <a:endParaRPr/>
-          </a:p>
-        </p:txBody>
-      </p:sp>
-      <p:sp>
-        <p:nvSpPr>
-          <p:cNvPr id="287" name="Google Shape;287;p14"/>
-          <p:cNvSpPr/>
-          <p:nvPr/>
-        </p:nvSpPr>
-        <p:spPr>
-          <a:xfrm>
-            <a:off x="6670650" y="2322711"/>
-            <a:ext cx="165100" cy="292100"/>
-          </a:xfrm>
-          <a:prstGeom prst="rect">
-            <a:avLst/>
-          </a:prstGeom>
-          <a:noFill/>
-          <a:ln>
-            <a:noFill/>
-          </a:ln>
-        </p:spPr>
-        <p:txBody>
-          <a:bodyPr anchorCtr="0" anchor="t" bIns="0" lIns="0" spcFirstLastPara="1" rIns="0" wrap="square" tIns="0">
-            <a:normAutofit/>
-          </a:bodyPr>
-          <a:lstStyle/>
-          <a:p>
-            <a:pPr indent="0" lvl="0" marL="0" marR="0" rtl="0" algn="l">
-              <a:lnSpc>
-                <a:spcPct val="140000"/>
-              </a:lnSpc>
-              <a:spcBef>
-                <a:spcPts val="0"/>
-              </a:spcBef>
-              <a:spcAft>
-                <a:spcPts val="0"/>
-              </a:spcAft>
-              <a:buClr>
-                <a:srgbClr val="232323"/>
-              </a:buClr>
-              <a:buSzPts val="1500"/>
-              <a:buFont typeface="Nunito Sans"/>
-              <a:buNone/>
-            </a:pPr>
-            <a:r>
-              <a:rPr b="1" i="0" lang="en-US" sz="1500" u="none" cap="none" strike="noStrike">
-                <a:solidFill>
-                  <a:srgbClr val="232323"/>
-                </a:solidFill>
-                <a:latin typeface="Nunito Sans"/>
-                <a:ea typeface="Nunito Sans"/>
-                <a:cs typeface="Nunito Sans"/>
-                <a:sym typeface="Nunito Sans"/>
-              </a:rPr>
-              <a:t>2</a:t>
-            </a:r>
-            <a:endParaRPr b="0" i="0" sz="1500" u="none" cap="none" strike="noStrike">
-              <a:solidFill>
-                <a:schemeClr val="dk1"/>
-              </a:solidFill>
-              <a:latin typeface="Calibri"/>
-              <a:ea typeface="Calibri"/>
-              <a:cs typeface="Calibri"/>
-              <a:sym typeface="Calibri"/>
-            </a:endParaRPr>
-          </a:p>
-        </p:txBody>
-      </p:sp>
-      <p:sp>
-        <p:nvSpPr>
-          <p:cNvPr id="288" name="Google Shape;288;p14"/>
-          <p:cNvSpPr/>
-          <p:nvPr/>
-        </p:nvSpPr>
-        <p:spPr>
-          <a:xfrm>
-            <a:off x="6524600" y="2773561"/>
-            <a:ext cx="4626000" cy="292100"/>
-          </a:xfrm>
-          <a:prstGeom prst="rect">
-            <a:avLst/>
-          </a:prstGeom>
-          <a:noFill/>
-          <a:ln>
-            <a:noFill/>
-          </a:ln>
-        </p:spPr>
-        <p:txBody>
-          <a:bodyPr anchorCtr="0" anchor="t" bIns="0" lIns="0" spcFirstLastPara="1" rIns="0" wrap="square" tIns="0">
-            <a:normAutofit/>
-          </a:bodyPr>
-          <a:lstStyle/>
-          <a:p>
-            <a:pPr indent="0" lvl="0" marL="0" marR="0" rtl="0" algn="l">
-              <a:lnSpc>
-                <a:spcPct val="140000"/>
-              </a:lnSpc>
-              <a:spcBef>
-                <a:spcPts val="0"/>
-              </a:spcBef>
-              <a:spcAft>
-                <a:spcPts val="0"/>
-              </a:spcAft>
-              <a:buClr>
-                <a:srgbClr val="232323"/>
-              </a:buClr>
-              <a:buSzPts val="1500"/>
-              <a:buFont typeface="Nunito Sans"/>
-              <a:buNone/>
-            </a:pPr>
-            <a:r>
-              <a:rPr b="1" i="0" lang="en-US" sz="1500" u="none" cap="none" strike="noStrike">
-                <a:solidFill>
-                  <a:srgbClr val="232323"/>
-                </a:solidFill>
-                <a:latin typeface="Nunito Sans"/>
-                <a:ea typeface="Nunito Sans"/>
-                <a:cs typeface="Nunito Sans"/>
-                <a:sym typeface="Nunito Sans"/>
-              </a:rPr>
-              <a:t>Пізніше</a:t>
-            </a:r>
-            <a:endParaRPr b="0" i="0" sz="1500" u="none" cap="none" strike="noStrike">
-              <a:solidFill>
-                <a:schemeClr val="dk1"/>
-              </a:solidFill>
-              <a:latin typeface="Calibri"/>
-              <a:ea typeface="Calibri"/>
-              <a:cs typeface="Calibri"/>
-              <a:sym typeface="Calibri"/>
-            </a:endParaRPr>
-          </a:p>
-        </p:txBody>
-      </p:sp>
-      <p:sp>
-        <p:nvSpPr>
-          <p:cNvPr id="289" name="Google Shape;289;p14"/>
-          <p:cNvSpPr txBox="1"/>
-          <p:nvPr/>
-        </p:nvSpPr>
-        <p:spPr>
-          <a:xfrm>
-            <a:off x="6524600" y="3154561"/>
-            <a:ext cx="4626000" cy="1200000"/>
-          </a:xfrm>
-          <a:prstGeom prst="rect">
-            <a:avLst/>
-          </a:prstGeom>
-          <a:noFill/>
-          <a:ln>
-            <a:noFill/>
-          </a:ln>
-        </p:spPr>
-        <p:txBody>
-          <a:bodyPr anchorCtr="0" anchor="t" bIns="91425" lIns="91425" spcFirstLastPara="1" rIns="91425" wrap="square" tIns="91425">
-            <a:spAutoFit/>
-          </a:bodyPr>
-          <a:lstStyle/>
-          <a:p>
-            <a:pPr indent="-317500" lvl="0" marL="457200" rtl="0" algn="l">
-              <a:spcBef>
-                <a:spcPts val="0"/>
-              </a:spcBef>
-              <a:spcAft>
-                <a:spcPts val="0"/>
-              </a:spcAft>
-              <a:buSzPts val="1400"/>
-              <a:buChar char="→"/>
-            </a:pPr>
-            <a:r>
-              <a:rPr lang="en-US" sz="1200" b="1">
-                <a:solidFill>
-                  <a:srgbClr val="414C58"/>
-                </a:solidFill>
-                <a:latin typeface="Nunito Sans"/>
-              </a:rPr>
-              <a:t>YOLO</a:t>
-            </a:r>
-            <a:r>
-              <a:rPr lang="en-US" sz="1200" b="0">
-                <a:solidFill>
-                  <a:srgbClr val="414C58"/>
-                </a:solidFill>
-                <a:latin typeface="Nunito Sans"/>
-              </a:rPr>
-              <a:t>-детекція просто на камері</a:t>
-            </a:r>
-            <a:endParaRPr/>
-          </a:p>
-          <a:p>
-            <a:pPr indent="-317500" lvl="0" marL="457200" rtl="0" algn="l">
-              <a:spcBef>
-                <a:spcPts val="0"/>
-              </a:spcBef>
-              <a:spcAft>
-                <a:spcPts val="0"/>
-              </a:spcAft>
-              <a:buSzPts val="1400"/>
-              <a:buChar char="→"/>
-            </a:pPr>
-            <a:r>
-              <a:rPr lang="en-US" sz="1200" b="1">
-                <a:solidFill>
-                  <a:srgbClr val="414C58"/>
-                </a:solidFill>
-                <a:latin typeface="Nunito Sans"/>
-              </a:rPr>
-              <a:t>NRF24L01+</a:t>
-            </a:r>
-            <a:r>
-              <a:rPr lang="en-US" sz="1200" b="0">
-                <a:solidFill>
-                  <a:srgbClr val="414C58"/>
-                </a:solidFill>
-                <a:latin typeface="Nunito Sans"/>
-              </a:rPr>
-              <a:t> як альтернативний канал</a:t>
-            </a:r>
-            <a:endParaRPr/>
-          </a:p>
-          <a:p>
-            <a:pPr indent="-317500" lvl="0" marL="457200" rtl="0" algn="l">
-              <a:spcBef>
-                <a:spcPts val="0"/>
-              </a:spcBef>
-              <a:spcAft>
-                <a:spcPts val="0"/>
-              </a:spcAft>
-              <a:buSzPts val="1400"/>
-              <a:buChar char="→"/>
-            </a:pPr>
-            <a:r>
-              <a:rPr lang="en-US" sz="1200" b="0">
-                <a:solidFill>
-                  <a:srgbClr val="414C58"/>
-                </a:solidFill>
-                <a:latin typeface="Nunito Sans"/>
-              </a:rPr>
-              <a:t>Feed-forward за швидкістю цілі</a:t>
-            </a:r>
-            <a:endParaRPr/>
-          </a:p>
-          <a:p>
-            <a:pPr indent="-317500" lvl="0" marL="457200" rtl="0" algn="l">
-              <a:spcBef>
-                <a:spcPts val="0"/>
-              </a:spcBef>
-              <a:spcAft>
-                <a:spcPts val="0"/>
-              </a:spcAft>
-              <a:buSzPts val="1400"/>
-              <a:buChar char="→"/>
-            </a:pPr>
-            <a:r>
-              <a:rPr lang="en-US" sz="1200" b="0">
-                <a:solidFill>
-                  <a:srgbClr val="414C58"/>
-                </a:solidFill>
-                <a:latin typeface="Nunito Sans"/>
-              </a:rPr>
-              <a:t>OLED-меню на пульті PILOT</a:t>
-            </a:r>
-            <a:endParaRPr/>
-          </a:p>
-        </p:txBody>
-      </p:sp>
-      <p:sp>
-        <p:nvSpPr>
-          <p:cNvPr id="290" name="Google Shape;290;p14"/>
-          <p:cNvSpPr txBox="1"/>
-          <p:nvPr/>
-        </p:nvSpPr>
-        <p:spPr>
-          <a:xfrm>
-            <a:off x="1041400" y="3154561"/>
-            <a:ext cx="4626000" cy="1200000"/>
-          </a:xfrm>
-          <a:prstGeom prst="rect">
-            <a:avLst/>
-          </a:prstGeom>
-          <a:noFill/>
-          <a:ln>
-            <a:noFill/>
-          </a:ln>
-        </p:spPr>
-        <p:txBody>
-          <a:bodyPr anchorCtr="0" anchor="t" bIns="91425" lIns="91425" spcFirstLastPara="1" rIns="91425" wrap="square" tIns="91425">
-            <a:spAutoFit/>
-          </a:bodyPr>
-          <a:lstStyle/>
-          <a:p>
-            <a:pPr indent="-317500" lvl="0" marL="457200" rtl="0" algn="l">
-              <a:spcBef>
-                <a:spcPts val="0"/>
-              </a:spcBef>
-              <a:spcAft>
-                <a:spcPts val="0"/>
-              </a:spcAft>
-              <a:buSzPts val="1400"/>
-              <a:buChar char="→"/>
-            </a:pPr>
-            <a:r>
-              <a:rPr lang="en-US" sz="1200" b="0">
-                <a:solidFill>
-                  <a:srgbClr val="414C58"/>
-                </a:solidFill>
-                <a:latin typeface="Nunito Sans"/>
-              </a:rPr>
-              <a:t>PILOT (ESP32-C3): джойстик, дистанційний E-stop</a:t>
-            </a:r>
-            <a:endParaRPr/>
-          </a:p>
-          <a:p>
-            <a:pPr indent="-317500" lvl="0" marL="457200" rtl="0" algn="l">
-              <a:spcBef>
-                <a:spcPts val="0"/>
-              </a:spcBef>
-              <a:spcAft>
-                <a:spcPts val="0"/>
-              </a:spcAft>
-              <a:buSzPts val="1400"/>
-              <a:buChar char="→"/>
-            </a:pPr>
-            <a:r>
-              <a:rPr lang="en-US" sz="1200" b="0">
-                <a:solidFill>
-                  <a:srgbClr val="414C58"/>
-                </a:solidFill>
-                <a:latin typeface="Nunito Sans"/>
-              </a:rPr>
-              <a:t>MQTT конфіг-план і WiFi-телеметрія</a:t>
-            </a:r>
-            <a:endParaRPr/>
-          </a:p>
-          <a:p>
-            <a:pPr indent="-317500" lvl="0" marL="457200" rtl="0" algn="l">
-              <a:spcBef>
-                <a:spcPts val="0"/>
-              </a:spcBef>
-              <a:spcAft>
-                <a:spcPts val="0"/>
-              </a:spcAft>
-              <a:buSzPts val="1400"/>
-              <a:buChar char="→"/>
-            </a:pPr>
-            <a:r>
-              <a:rPr lang="en-US" sz="1200" b="0">
-                <a:solidFill>
-                  <a:srgbClr val="414C58"/>
-                </a:solidFill>
-                <a:latin typeface="Nunito Sans"/>
-              </a:rPr>
-              <a:t>VAULT (STM32): окремий вузол зберігання</a:t>
-            </a:r>
-            <a:endParaRPr/>
-          </a:p>
-          <a:p>
-            <a:pPr indent="-317500" lvl="0" marL="457200" rtl="0" algn="l">
-              <a:spcBef>
-                <a:spcPts val="0"/>
-              </a:spcBef>
-              <a:spcAft>
-                <a:spcPts val="0"/>
-              </a:spcAft>
-              <a:buSzPts val="1400"/>
-              <a:buChar char="→"/>
-            </a:pPr>
-            <a:r>
-              <a:rPr lang="en-US" sz="1200" b="0">
-                <a:solidFill>
-                  <a:srgbClr val="414C58"/>
-                </a:solidFill>
-                <a:latin typeface="Nunito Sans"/>
-              </a:rPr>
-              <a:t>Лазер на MOSFET з ШІМ-яскравістю</a:t>
-            </a:r>
-            <a:endParaRPr/>
-          </a:p>
-        </p:txBody>
-      </p:sp>
-      <p:sp>
-        <p:nvSpPr>
-          <p:cNvPr id="291" name="TextBox 290"/>
-          <p:cNvSpPr txBox="1"/>
-          <p:nvPr/>
-        </p:nvSpPr>
-        <p:spPr>
-          <a:xfrm>
-            <a:off x="812800" y="6250000"/>
-            <a:ext cx="10566400" cy="220000"/>
-          </a:xfrm>
-          <a:prstGeom prst="rect">
-            <a:avLst/>
-          </a:prstGeom>
-          <a:noFill/>
-        </p:spPr>
-        <p:txBody>
-          <a:bodyPr wrap="none" lIns="0" rIns="0" tIns="0" bIns="0" anchor="ctr">
-            <a:spAutoFit/>
-          </a:bodyPr>
-          <a:lstStyle/>
-          <a:p>
-            <a:pPr algn="l"/>
-            <a:r>
-              <a:rPr sz="800" i="1" u="sng">
-                <a:solidFill>
-                  <a:srgbClr val="2A5C8F"/>
-                </a:solidFill>
-                <a:latin typeface="Nunito Sans"/>
-                <a:hlinkClick r:id="rId3"/>
-              </a:rPr>
-              <a:t>README.md</a:t>
-            </a:r>
-          </a:p>
-        </p:txBody>
-      </p:sp>
-    </p:spTree>
-  </p:cSld>
-  <p:clrMapOvr>
-    <a:masterClrMapping/>
-  </p:clrMapOvr>
-</p:sld>
-</file>
-
-<file path=ppt/slides/slide14.xml><?xml version="1.0" encoding="utf-8"?>
 <p:sld xmlns:a="http://schemas.openxmlformats.org/drawingml/2006/main" xmlns:r="http://schemas.openxmlformats.org/officeDocument/2006/relationships" xmlns:mc="http://schemas.openxmlformats.org/markup-compatibility/2006" xmlns:mv="urn:schemas-microsoft-com:mac:vml" xmlns:p="http://schemas.openxmlformats.org/presentationml/2006/main" xmlns:c="http://schemas.openxmlformats.org/drawingml/2006/chart" xmlns:dgm="http://schemas.openxmlformats.org/drawingml/2006/diagram" xmlns:o="urn:schemas-microsoft-com:office:office" xmlns:v="urn:schemas-microsoft-com:vml" xmlns:pvml="urn:schemas-microsoft-com:office:powerpoint" xmlns:com="http://schemas.openxmlformats.org/drawingml/2006/compatibility" xmlns:p14="http://schemas.microsoft.com/office/powerpoint/2010/main" xmlns:p15="http://schemas.microsoft.com/office/powerpoint/2012/main" xmlns:ahyp="http://schemas.microsoft.com/office/drawing/2018/hyperlinkcolor">
   <p:cSld>
     <p:bg>
@@ -10704,6 +9944,2390 @@
 </p:sld>
 </file>
 
+<file path=ppt/slides/slide14.xml><?xml version="1.0" encoding="utf-8"?>
+<p:sld xmlns:a="http://schemas.openxmlformats.org/drawingml/2006/main" xmlns:r="http://schemas.openxmlformats.org/officeDocument/2006/relationships" xmlns:mc="http://schemas.openxmlformats.org/markup-compatibility/2006" xmlns:mv="urn:schemas-microsoft-com:mac:vml" xmlns:p="http://schemas.openxmlformats.org/presentationml/2006/main" xmlns:c="http://schemas.openxmlformats.org/drawingml/2006/chart" xmlns:dgm="http://schemas.openxmlformats.org/drawingml/2006/diagram" xmlns:o="urn:schemas-microsoft-com:office:office" xmlns:v="urn:schemas-microsoft-com:vml" xmlns:pvml="urn:schemas-microsoft-com:office:powerpoint" xmlns:com="http://schemas.openxmlformats.org/drawingml/2006/compatibility" xmlns:p14="http://schemas.microsoft.com/office/powerpoint/2010/main" xmlns:p15="http://schemas.microsoft.com/office/powerpoint/2012/main" xmlns:ahyp="http://schemas.microsoft.com/office/drawing/2018/hyperlinkcolor">
+  <p:cSld>
+    <p:bg>
+      <p:bgPr>
+        <a:solidFill>
+          <a:srgbClr val="F7F6F5"/>
+        </a:solidFill>
+      </p:bgPr>
+    </p:bg>
+    <p:spTree>
+      <p:nvGrpSpPr>
+        <p:cNvPr id="271" name="Shape 271"/>
+        <p:cNvGrpSpPr/>
+        <p:nvPr/>
+      </p:nvGrpSpPr>
+      <p:grpSpPr>
+        <a:xfrm>
+          <a:off x="0" y="0"/>
+          <a:ext cx="0" cy="0"/>
+          <a:chOff x="0" y="0"/>
+          <a:chExt cx="0" cy="0"/>
+        </a:xfrm>
+      </p:grpSpPr>
+      <p:sp>
+        <p:nvSpPr>
+          <p:cNvPr id="273" name="Google Shape;273;p14"/>
+          <p:cNvSpPr/>
+          <p:nvPr/>
+        </p:nvSpPr>
+        <p:spPr>
+          <a:xfrm>
+            <a:off x="812800" y="812800"/>
+            <a:ext cx="1054359" cy="340320"/>
+          </a:xfrm>
+          <a:prstGeom prst="roundRect">
+            <a:avLst>
+              <a:gd fmla="val 37318" name="adj"/>
+            </a:avLst>
+          </a:prstGeom>
+          <a:solidFill>
+            <a:srgbClr val="DAE5F1"/>
+          </a:solidFill>
+          <a:ln>
+            <a:noFill/>
+          </a:ln>
+        </p:spPr>
+        <p:txBody>
+          <a:bodyPr anchorCtr="0" anchor="ctr" bIns="91425" lIns="91425" spcFirstLastPara="1" rIns="91425" wrap="square" tIns="91425">
+            <a:noAutofit/>
+          </a:bodyPr>
+          <a:lstStyle/>
+          <a:p>
+            <a:pPr indent="0" lvl="0" marL="0" rtl="0" algn="l">
+              <a:spcBef>
+                <a:spcPts val="0"/>
+              </a:spcBef>
+              <a:spcAft>
+                <a:spcPts val="0"/>
+              </a:spcAft>
+              <a:buNone/>
+            </a:pPr>
+            <a:r>
+              <a:t/>
+            </a:r>
+            <a:endParaRPr/>
+          </a:p>
+        </p:txBody>
+      </p:sp>
+      <p:sp>
+        <p:nvSpPr>
+          <p:cNvPr id="274" name="Google Shape;274;p14"/>
+          <p:cNvSpPr/>
+          <p:nvPr/>
+        </p:nvSpPr>
+        <p:spPr>
+          <a:xfrm>
+            <a:off x="952500" y="876300"/>
+            <a:ext cx="833949" cy="238720"/>
+          </a:xfrm>
+          <a:prstGeom prst="rect">
+            <a:avLst/>
+          </a:prstGeom>
+          <a:noFill/>
+          <a:ln>
+            <a:noFill/>
+          </a:ln>
+        </p:spPr>
+        <p:txBody>
+          <a:bodyPr anchorCtr="0" anchor="t" bIns="0" lIns="0" spcFirstLastPara="1" rIns="0" wrap="square" tIns="0">
+            <a:normAutofit/>
+          </a:bodyPr>
+          <a:lstStyle/>
+          <a:p>
+            <a:pPr indent="0" lvl="0" marL="0" marR="0" rtl="0" algn="l">
+              <a:lnSpc>
+                <a:spcPct val="140000"/>
+              </a:lnSpc>
+              <a:spcBef>
+                <a:spcPts val="0"/>
+              </a:spcBef>
+              <a:spcAft>
+                <a:spcPts val="0"/>
+              </a:spcAft>
+              <a:buClr>
+                <a:srgbClr val="414C58"/>
+              </a:buClr>
+              <a:buSzPts val="1200"/>
+              <a:buFont typeface="Nunito Sans"/>
+              <a:buNone/>
+            </a:pPr>
+            <a:r>
+              <a:rPr b="1" i="0" lang="en-US" sz="1200" u="none" cap="none" strike="noStrike">
+                <a:solidFill>
+                  <a:srgbClr val="414C58"/>
+                </a:solidFill>
+                <a:latin typeface="Nunito Sans"/>
+                <a:ea typeface="Nunito Sans"/>
+                <a:cs typeface="Nunito Sans"/>
+                <a:sym typeface="Nunito Sans"/>
+              </a:rPr>
+              <a:t>ЩО ДАЛІ</a:t>
+            </a:r>
+            <a:endParaRPr b="0" i="0" sz="1200" u="none" cap="none" strike="noStrike">
+              <a:solidFill>
+                <a:schemeClr val="dk1"/>
+              </a:solidFill>
+              <a:latin typeface="Calibri"/>
+              <a:ea typeface="Calibri"/>
+              <a:cs typeface="Calibri"/>
+              <a:sym typeface="Calibri"/>
+            </a:endParaRPr>
+          </a:p>
+        </p:txBody>
+      </p:sp>
+      <p:sp>
+        <p:nvSpPr>
+          <p:cNvPr id="275" name="Google Shape;275;p14"/>
+          <p:cNvSpPr/>
+          <p:nvPr/>
+        </p:nvSpPr>
+        <p:spPr>
+          <a:xfrm>
+            <a:off x="812800" y="1280120"/>
+            <a:ext cx="10883392" cy="360660"/>
+          </a:xfrm>
+          <a:prstGeom prst="rect">
+            <a:avLst/>
+          </a:prstGeom>
+          <a:noFill/>
+          <a:ln>
+            <a:noFill/>
+          </a:ln>
+        </p:spPr>
+        <p:txBody>
+          <a:bodyPr anchorCtr="0" anchor="t" bIns="0" lIns="0" spcFirstLastPara="1" rIns="0" wrap="square" tIns="0">
+            <a:normAutofit/>
+          </a:bodyPr>
+          <a:lstStyle/>
+          <a:p>
+            <a:pPr indent="0" lvl="0" marL="0" marR="0" rtl="0" algn="l">
+              <a:lnSpc>
+                <a:spcPct val="110000"/>
+              </a:lnSpc>
+              <a:spcBef>
+                <a:spcPts val="0"/>
+              </a:spcBef>
+              <a:spcAft>
+                <a:spcPts val="0"/>
+              </a:spcAft>
+              <a:buClr>
+                <a:srgbClr val="232323"/>
+              </a:buClr>
+              <a:buSzPts val="2600"/>
+              <a:buFont typeface="Nunito Sans"/>
+              <a:buNone/>
+            </a:pPr>
+            <a:r>
+              <a:rPr b="1" i="0" lang="en-US" sz="2400" u="none" cap="none" strike="noStrike">
+                <a:solidFill>
+                  <a:srgbClr val="232323"/>
+                </a:solidFill>
+                <a:latin typeface="Nunito Sans"/>
+                <a:ea typeface="Nunito Sans"/>
+                <a:cs typeface="Nunito Sans"/>
+                <a:sym typeface="Nunito Sans"/>
+              </a:rPr>
+              <a:t>Що далі</a:t>
+            </a:r>
+            <a:endParaRPr b="0" i="0" sz="2600" u="none" cap="none" strike="noStrike">
+              <a:solidFill>
+                <a:schemeClr val="dk1"/>
+              </a:solidFill>
+              <a:latin typeface="Calibri"/>
+              <a:ea typeface="Calibri"/>
+              <a:cs typeface="Calibri"/>
+              <a:sym typeface="Calibri"/>
+            </a:endParaRPr>
+          </a:p>
+        </p:txBody>
+      </p:sp>
+      <p:sp>
+        <p:nvSpPr>
+          <p:cNvPr id="281" name="Google Shape;281;p14"/>
+          <p:cNvSpPr/>
+          <p:nvPr/>
+        </p:nvSpPr>
+        <p:spPr>
+          <a:xfrm>
+            <a:off x="812800" y="2024246"/>
+            <a:ext cx="5083200" cy="2431800"/>
+          </a:xfrm>
+          <a:prstGeom prst="roundRect">
+            <a:avLst>
+              <a:gd fmla="val 7113" name="adj"/>
+            </a:avLst>
+          </a:prstGeom>
+          <a:solidFill>
+            <a:srgbClr val="ECE7E2"/>
+          </a:solidFill>
+          <a:ln>
+            <a:noFill/>
+          </a:ln>
+        </p:spPr>
+        <p:txBody>
+          <a:bodyPr anchorCtr="0" anchor="ctr" bIns="91425" lIns="91425" spcFirstLastPara="1" rIns="91425" wrap="square" tIns="91425">
+            <a:noAutofit/>
+          </a:bodyPr>
+          <a:lstStyle/>
+          <a:p>
+            <a:pPr indent="0" lvl="0" marL="0" rtl="0" algn="l">
+              <a:spcBef>
+                <a:spcPts val="0"/>
+              </a:spcBef>
+              <a:spcAft>
+                <a:spcPts val="0"/>
+              </a:spcAft>
+              <a:buNone/>
+            </a:pPr>
+            <a:r>
+              <a:t/>
+            </a:r>
+            <a:endParaRPr/>
+          </a:p>
+        </p:txBody>
+      </p:sp>
+      <p:sp>
+        <p:nvSpPr>
+          <p:cNvPr id="282" name="Google Shape;282;p14"/>
+          <p:cNvSpPr/>
+          <p:nvPr/>
+        </p:nvSpPr>
+        <p:spPr>
+          <a:xfrm>
+            <a:off x="1041400" y="2252861"/>
+            <a:ext cx="406400" cy="406400"/>
+          </a:xfrm>
+          <a:prstGeom prst="roundRect">
+            <a:avLst>
+              <a:gd fmla="val 50000" name="adj"/>
+            </a:avLst>
+          </a:prstGeom>
+          <a:solidFill>
+            <a:srgbClr val="C5D6E9"/>
+          </a:solidFill>
+          <a:ln>
+            <a:noFill/>
+          </a:ln>
+        </p:spPr>
+        <p:txBody>
+          <a:bodyPr anchorCtr="0" anchor="ctr" bIns="91425" lIns="91425" spcFirstLastPara="1" rIns="91425" wrap="square" tIns="91425">
+            <a:noAutofit/>
+          </a:bodyPr>
+          <a:lstStyle/>
+          <a:p>
+            <a:pPr indent="0" lvl="0" marL="0" rtl="0" algn="l">
+              <a:spcBef>
+                <a:spcPts val="0"/>
+              </a:spcBef>
+              <a:spcAft>
+                <a:spcPts val="0"/>
+              </a:spcAft>
+              <a:buNone/>
+            </a:pPr>
+            <a:r>
+              <a:t/>
+            </a:r>
+            <a:endParaRPr/>
+          </a:p>
+        </p:txBody>
+      </p:sp>
+      <p:sp>
+        <p:nvSpPr>
+          <p:cNvPr id="283" name="Google Shape;283;p14"/>
+          <p:cNvSpPr/>
+          <p:nvPr/>
+        </p:nvSpPr>
+        <p:spPr>
+          <a:xfrm>
+            <a:off x="1187450" y="2322711"/>
+            <a:ext cx="165100" cy="292100"/>
+          </a:xfrm>
+          <a:prstGeom prst="rect">
+            <a:avLst/>
+          </a:prstGeom>
+          <a:noFill/>
+          <a:ln>
+            <a:noFill/>
+          </a:ln>
+        </p:spPr>
+        <p:txBody>
+          <a:bodyPr anchorCtr="0" anchor="t" bIns="0" lIns="0" spcFirstLastPara="1" rIns="0" wrap="square" tIns="0">
+            <a:normAutofit/>
+          </a:bodyPr>
+          <a:lstStyle/>
+          <a:p>
+            <a:pPr indent="0" lvl="0" marL="0" marR="0" rtl="0" algn="l">
+              <a:lnSpc>
+                <a:spcPct val="140000"/>
+              </a:lnSpc>
+              <a:spcBef>
+                <a:spcPts val="0"/>
+              </a:spcBef>
+              <a:spcAft>
+                <a:spcPts val="0"/>
+              </a:spcAft>
+              <a:buClr>
+                <a:srgbClr val="232323"/>
+              </a:buClr>
+              <a:buSzPts val="1500"/>
+              <a:buFont typeface="Nunito Sans"/>
+              <a:buNone/>
+            </a:pPr>
+            <a:r>
+              <a:rPr b="1" i="0" lang="en-US" sz="1500" u="none" cap="none" strike="noStrike">
+                <a:solidFill>
+                  <a:srgbClr val="232323"/>
+                </a:solidFill>
+                <a:latin typeface="Nunito Sans"/>
+                <a:ea typeface="Nunito Sans"/>
+                <a:cs typeface="Nunito Sans"/>
+                <a:sym typeface="Nunito Sans"/>
+              </a:rPr>
+              <a:t>1</a:t>
+            </a:r>
+            <a:endParaRPr b="0" i="0" sz="1500" u="none" cap="none" strike="noStrike">
+              <a:solidFill>
+                <a:schemeClr val="dk1"/>
+              </a:solidFill>
+              <a:latin typeface="Calibri"/>
+              <a:ea typeface="Calibri"/>
+              <a:cs typeface="Calibri"/>
+              <a:sym typeface="Calibri"/>
+            </a:endParaRPr>
+          </a:p>
+        </p:txBody>
+      </p:sp>
+      <p:sp>
+        <p:nvSpPr>
+          <p:cNvPr id="284" name="Google Shape;284;p14"/>
+          <p:cNvSpPr/>
+          <p:nvPr/>
+        </p:nvSpPr>
+        <p:spPr>
+          <a:xfrm>
+            <a:off x="1041400" y="2773561"/>
+            <a:ext cx="4626000" cy="292100"/>
+          </a:xfrm>
+          <a:prstGeom prst="rect">
+            <a:avLst/>
+          </a:prstGeom>
+          <a:noFill/>
+          <a:ln>
+            <a:noFill/>
+          </a:ln>
+        </p:spPr>
+        <p:txBody>
+          <a:bodyPr anchorCtr="0" anchor="t" bIns="0" lIns="0" spcFirstLastPara="1" rIns="0" wrap="square" tIns="0">
+            <a:normAutofit/>
+          </a:bodyPr>
+          <a:lstStyle/>
+          <a:p>
+            <a:pPr indent="0" lvl="0" marL="0" marR="0" rtl="0" algn="l">
+              <a:lnSpc>
+                <a:spcPct val="140000"/>
+              </a:lnSpc>
+              <a:spcBef>
+                <a:spcPts val="0"/>
+              </a:spcBef>
+              <a:spcAft>
+                <a:spcPts val="0"/>
+              </a:spcAft>
+              <a:buClr>
+                <a:srgbClr val="232323"/>
+              </a:buClr>
+              <a:buSzPts val="1500"/>
+              <a:buFont typeface="Nunito Sans"/>
+              <a:buNone/>
+            </a:pPr>
+            <a:r>
+              <a:rPr b="1" i="0" lang="en-US" sz="1500" u="none" cap="none" strike="noStrike">
+                <a:solidFill>
+                  <a:srgbClr val="232323"/>
+                </a:solidFill>
+                <a:latin typeface="Nunito Sans"/>
+                <a:ea typeface="Nunito Sans"/>
+                <a:cs typeface="Nunito Sans"/>
+                <a:sym typeface="Nunito Sans"/>
+              </a:rPr>
+              <a:t>Наступне</a:t>
+            </a:r>
+            <a:endParaRPr b="0" i="0" sz="1500" u="none" cap="none" strike="noStrike">
+              <a:solidFill>
+                <a:schemeClr val="dk1"/>
+              </a:solidFill>
+              <a:latin typeface="Calibri"/>
+              <a:ea typeface="Calibri"/>
+              <a:cs typeface="Calibri"/>
+              <a:sym typeface="Calibri"/>
+            </a:endParaRPr>
+          </a:p>
+        </p:txBody>
+      </p:sp>
+      <p:sp>
+        <p:nvSpPr>
+          <p:cNvPr id="285" name="Google Shape;285;p14"/>
+          <p:cNvSpPr/>
+          <p:nvPr/>
+        </p:nvSpPr>
+        <p:spPr>
+          <a:xfrm>
+            <a:off x="6296000" y="2024246"/>
+            <a:ext cx="5083200" cy="2431800"/>
+          </a:xfrm>
+          <a:prstGeom prst="roundRect">
+            <a:avLst>
+              <a:gd fmla="val 7113" name="adj"/>
+            </a:avLst>
+          </a:prstGeom>
+          <a:solidFill>
+            <a:srgbClr val="ECE7E2"/>
+          </a:solidFill>
+          <a:ln>
+            <a:noFill/>
+          </a:ln>
+        </p:spPr>
+        <p:txBody>
+          <a:bodyPr anchorCtr="0" anchor="ctr" bIns="91425" lIns="91425" spcFirstLastPara="1" rIns="91425" wrap="square" tIns="91425">
+            <a:noAutofit/>
+          </a:bodyPr>
+          <a:lstStyle/>
+          <a:p>
+            <a:pPr indent="0" lvl="0" marL="0" rtl="0" algn="l">
+              <a:spcBef>
+                <a:spcPts val="0"/>
+              </a:spcBef>
+              <a:spcAft>
+                <a:spcPts val="0"/>
+              </a:spcAft>
+              <a:buNone/>
+            </a:pPr>
+            <a:r>
+              <a:t/>
+            </a:r>
+            <a:endParaRPr/>
+          </a:p>
+        </p:txBody>
+      </p:sp>
+      <p:sp>
+        <p:nvSpPr>
+          <p:cNvPr id="286" name="Google Shape;286;p14"/>
+          <p:cNvSpPr/>
+          <p:nvPr/>
+        </p:nvSpPr>
+        <p:spPr>
+          <a:xfrm>
+            <a:off x="6524600" y="2252861"/>
+            <a:ext cx="406400" cy="406400"/>
+          </a:xfrm>
+          <a:prstGeom prst="roundRect">
+            <a:avLst>
+              <a:gd fmla="val 50000" name="adj"/>
+            </a:avLst>
+          </a:prstGeom>
+          <a:solidFill>
+            <a:srgbClr val="C5D6E9"/>
+          </a:solidFill>
+          <a:ln>
+            <a:noFill/>
+          </a:ln>
+        </p:spPr>
+        <p:txBody>
+          <a:bodyPr anchorCtr="0" anchor="ctr" bIns="91425" lIns="91425" spcFirstLastPara="1" rIns="91425" wrap="square" tIns="91425">
+            <a:noAutofit/>
+          </a:bodyPr>
+          <a:lstStyle/>
+          <a:p>
+            <a:pPr indent="0" lvl="0" marL="0" rtl="0" algn="l">
+              <a:spcBef>
+                <a:spcPts val="0"/>
+              </a:spcBef>
+              <a:spcAft>
+                <a:spcPts val="0"/>
+              </a:spcAft>
+              <a:buNone/>
+            </a:pPr>
+            <a:r>
+              <a:t/>
+            </a:r>
+            <a:endParaRPr/>
+          </a:p>
+        </p:txBody>
+      </p:sp>
+      <p:sp>
+        <p:nvSpPr>
+          <p:cNvPr id="287" name="Google Shape;287;p14"/>
+          <p:cNvSpPr/>
+          <p:nvPr/>
+        </p:nvSpPr>
+        <p:spPr>
+          <a:xfrm>
+            <a:off x="6670650" y="2322711"/>
+            <a:ext cx="165100" cy="292100"/>
+          </a:xfrm>
+          <a:prstGeom prst="rect">
+            <a:avLst/>
+          </a:prstGeom>
+          <a:noFill/>
+          <a:ln>
+            <a:noFill/>
+          </a:ln>
+        </p:spPr>
+        <p:txBody>
+          <a:bodyPr anchorCtr="0" anchor="t" bIns="0" lIns="0" spcFirstLastPara="1" rIns="0" wrap="square" tIns="0">
+            <a:normAutofit/>
+          </a:bodyPr>
+          <a:lstStyle/>
+          <a:p>
+            <a:pPr indent="0" lvl="0" marL="0" marR="0" rtl="0" algn="l">
+              <a:lnSpc>
+                <a:spcPct val="140000"/>
+              </a:lnSpc>
+              <a:spcBef>
+                <a:spcPts val="0"/>
+              </a:spcBef>
+              <a:spcAft>
+                <a:spcPts val="0"/>
+              </a:spcAft>
+              <a:buClr>
+                <a:srgbClr val="232323"/>
+              </a:buClr>
+              <a:buSzPts val="1500"/>
+              <a:buFont typeface="Nunito Sans"/>
+              <a:buNone/>
+            </a:pPr>
+            <a:r>
+              <a:rPr b="1" i="0" lang="en-US" sz="1500" u="none" cap="none" strike="noStrike">
+                <a:solidFill>
+                  <a:srgbClr val="232323"/>
+                </a:solidFill>
+                <a:latin typeface="Nunito Sans"/>
+                <a:ea typeface="Nunito Sans"/>
+                <a:cs typeface="Nunito Sans"/>
+                <a:sym typeface="Nunito Sans"/>
+              </a:rPr>
+              <a:t>2</a:t>
+            </a:r>
+            <a:endParaRPr b="0" i="0" sz="1500" u="none" cap="none" strike="noStrike">
+              <a:solidFill>
+                <a:schemeClr val="dk1"/>
+              </a:solidFill>
+              <a:latin typeface="Calibri"/>
+              <a:ea typeface="Calibri"/>
+              <a:cs typeface="Calibri"/>
+              <a:sym typeface="Calibri"/>
+            </a:endParaRPr>
+          </a:p>
+        </p:txBody>
+      </p:sp>
+      <p:sp>
+        <p:nvSpPr>
+          <p:cNvPr id="288" name="Google Shape;288;p14"/>
+          <p:cNvSpPr/>
+          <p:nvPr/>
+        </p:nvSpPr>
+        <p:spPr>
+          <a:xfrm>
+            <a:off x="6524600" y="2773561"/>
+            <a:ext cx="4626000" cy="292100"/>
+          </a:xfrm>
+          <a:prstGeom prst="rect">
+            <a:avLst/>
+          </a:prstGeom>
+          <a:noFill/>
+          <a:ln>
+            <a:noFill/>
+          </a:ln>
+        </p:spPr>
+        <p:txBody>
+          <a:bodyPr anchorCtr="0" anchor="t" bIns="0" lIns="0" spcFirstLastPara="1" rIns="0" wrap="square" tIns="0">
+            <a:normAutofit/>
+          </a:bodyPr>
+          <a:lstStyle/>
+          <a:p>
+            <a:pPr indent="0" lvl="0" marL="0" marR="0" rtl="0" algn="l">
+              <a:lnSpc>
+                <a:spcPct val="140000"/>
+              </a:lnSpc>
+              <a:spcBef>
+                <a:spcPts val="0"/>
+              </a:spcBef>
+              <a:spcAft>
+                <a:spcPts val="0"/>
+              </a:spcAft>
+              <a:buClr>
+                <a:srgbClr val="232323"/>
+              </a:buClr>
+              <a:buSzPts val="1500"/>
+              <a:buFont typeface="Nunito Sans"/>
+              <a:buNone/>
+            </a:pPr>
+            <a:r>
+              <a:rPr b="1" i="0" lang="en-US" sz="1500" u="none" cap="none" strike="noStrike">
+                <a:solidFill>
+                  <a:srgbClr val="232323"/>
+                </a:solidFill>
+                <a:latin typeface="Nunito Sans"/>
+                <a:ea typeface="Nunito Sans"/>
+                <a:cs typeface="Nunito Sans"/>
+                <a:sym typeface="Nunito Sans"/>
+              </a:rPr>
+              <a:t>Пізніше</a:t>
+            </a:r>
+            <a:endParaRPr b="0" i="0" sz="1500" u="none" cap="none" strike="noStrike">
+              <a:solidFill>
+                <a:schemeClr val="dk1"/>
+              </a:solidFill>
+              <a:latin typeface="Calibri"/>
+              <a:ea typeface="Calibri"/>
+              <a:cs typeface="Calibri"/>
+              <a:sym typeface="Calibri"/>
+            </a:endParaRPr>
+          </a:p>
+        </p:txBody>
+      </p:sp>
+      <p:sp>
+        <p:nvSpPr>
+          <p:cNvPr id="289" name="Google Shape;289;p14"/>
+          <p:cNvSpPr txBox="1"/>
+          <p:nvPr/>
+        </p:nvSpPr>
+        <p:spPr>
+          <a:xfrm>
+            <a:off x="6524600" y="3154561"/>
+            <a:ext cx="4626000" cy="1200000"/>
+          </a:xfrm>
+          <a:prstGeom prst="rect">
+            <a:avLst/>
+          </a:prstGeom>
+          <a:noFill/>
+          <a:ln>
+            <a:noFill/>
+          </a:ln>
+        </p:spPr>
+        <p:txBody>
+          <a:bodyPr anchorCtr="0" anchor="t" bIns="91425" lIns="91425" spcFirstLastPara="1" rIns="91425" wrap="square" tIns="91425">
+            <a:spAutoFit/>
+          </a:bodyPr>
+          <a:lstStyle/>
+          <a:p>
+            <a:pPr indent="-317500" lvl="0" marL="457200" rtl="0" algn="l">
+              <a:spcBef>
+                <a:spcPts val="0"/>
+              </a:spcBef>
+              <a:spcAft>
+                <a:spcPts val="0"/>
+              </a:spcAft>
+              <a:buSzPts val="1400"/>
+              <a:buChar char="→"/>
+            </a:pPr>
+            <a:r>
+              <a:rPr lang="en-US" sz="1200" b="1">
+                <a:solidFill>
+                  <a:srgbClr val="414C58"/>
+                </a:solidFill>
+                <a:latin typeface="Nunito Sans"/>
+              </a:rPr>
+              <a:t>YOLO</a:t>
+            </a:r>
+            <a:r>
+              <a:rPr lang="en-US" sz="1200" b="0">
+                <a:solidFill>
+                  <a:srgbClr val="414C58"/>
+                </a:solidFill>
+                <a:latin typeface="Nunito Sans"/>
+              </a:rPr>
+              <a:t>-детекція просто на камері</a:t>
+            </a:r>
+            <a:endParaRPr/>
+          </a:p>
+          <a:p>
+            <a:pPr indent="-317500" lvl="0" marL="457200" rtl="0" algn="l">
+              <a:spcBef>
+                <a:spcPts val="0"/>
+              </a:spcBef>
+              <a:spcAft>
+                <a:spcPts val="0"/>
+              </a:spcAft>
+              <a:buSzPts val="1400"/>
+              <a:buChar char="→"/>
+            </a:pPr>
+            <a:r>
+              <a:rPr lang="en-US" sz="1200" b="1">
+                <a:solidFill>
+                  <a:srgbClr val="414C58"/>
+                </a:solidFill>
+                <a:latin typeface="Nunito Sans"/>
+              </a:rPr>
+              <a:t>NRF24L01+</a:t>
+            </a:r>
+            <a:r>
+              <a:rPr lang="en-US" sz="1200" b="0">
+                <a:solidFill>
+                  <a:srgbClr val="414C58"/>
+                </a:solidFill>
+                <a:latin typeface="Nunito Sans"/>
+              </a:rPr>
+              <a:t> як альтернативний канал</a:t>
+            </a:r>
+            <a:endParaRPr/>
+          </a:p>
+          <a:p>
+            <a:pPr indent="-317500" lvl="0" marL="457200" rtl="0" algn="l">
+              <a:spcBef>
+                <a:spcPts val="0"/>
+              </a:spcBef>
+              <a:spcAft>
+                <a:spcPts val="0"/>
+              </a:spcAft>
+              <a:buSzPts val="1400"/>
+              <a:buChar char="→"/>
+            </a:pPr>
+            <a:r>
+              <a:rPr lang="en-US" sz="1200" b="0">
+                <a:solidFill>
+                  <a:srgbClr val="414C58"/>
+                </a:solidFill>
+                <a:latin typeface="Nunito Sans"/>
+              </a:rPr>
+              <a:t>Feed-forward за швидкістю цілі</a:t>
+            </a:r>
+            <a:endParaRPr/>
+          </a:p>
+          <a:p>
+            <a:pPr indent="-317500" lvl="0" marL="457200" rtl="0" algn="l">
+              <a:spcBef>
+                <a:spcPts val="0"/>
+              </a:spcBef>
+              <a:spcAft>
+                <a:spcPts val="0"/>
+              </a:spcAft>
+              <a:buSzPts val="1400"/>
+              <a:buChar char="→"/>
+            </a:pPr>
+            <a:r>
+              <a:rPr lang="en-US" sz="1200" b="0">
+                <a:solidFill>
+                  <a:srgbClr val="414C58"/>
+                </a:solidFill>
+                <a:latin typeface="Nunito Sans"/>
+              </a:rPr>
+              <a:t>OLED-меню на пульті PILOT</a:t>
+            </a:r>
+            <a:endParaRPr/>
+          </a:p>
+        </p:txBody>
+      </p:sp>
+      <p:sp>
+        <p:nvSpPr>
+          <p:cNvPr id="290" name="Google Shape;290;p14"/>
+          <p:cNvSpPr txBox="1"/>
+          <p:nvPr/>
+        </p:nvSpPr>
+        <p:spPr>
+          <a:xfrm>
+            <a:off x="1041400" y="3154561"/>
+            <a:ext cx="4626000" cy="1200000"/>
+          </a:xfrm>
+          <a:prstGeom prst="rect">
+            <a:avLst/>
+          </a:prstGeom>
+          <a:noFill/>
+          <a:ln>
+            <a:noFill/>
+          </a:ln>
+        </p:spPr>
+        <p:txBody>
+          <a:bodyPr anchorCtr="0" anchor="t" bIns="91425" lIns="91425" spcFirstLastPara="1" rIns="91425" wrap="square" tIns="91425">
+            <a:spAutoFit/>
+          </a:bodyPr>
+          <a:lstStyle/>
+          <a:p>
+            <a:pPr indent="-317500" lvl="0" marL="457200" rtl="0" algn="l">
+              <a:spcBef>
+                <a:spcPts val="0"/>
+              </a:spcBef>
+              <a:spcAft>
+                <a:spcPts val="0"/>
+              </a:spcAft>
+              <a:buSzPts val="1400"/>
+              <a:buChar char="→"/>
+            </a:pPr>
+            <a:r>
+              <a:rPr lang="en-US" sz="1200" b="0">
+                <a:solidFill>
+                  <a:srgbClr val="414C58"/>
+                </a:solidFill>
+                <a:latin typeface="Nunito Sans"/>
+              </a:rPr>
+              <a:t>PILOT (ESP32-C3): джойстик, дистанційний E-stop</a:t>
+            </a:r>
+            <a:endParaRPr/>
+          </a:p>
+          <a:p>
+            <a:pPr indent="-317500" lvl="0" marL="457200" rtl="0" algn="l">
+              <a:spcBef>
+                <a:spcPts val="0"/>
+              </a:spcBef>
+              <a:spcAft>
+                <a:spcPts val="0"/>
+              </a:spcAft>
+              <a:buSzPts val="1400"/>
+              <a:buChar char="→"/>
+            </a:pPr>
+            <a:r>
+              <a:rPr lang="en-US" sz="1200" b="0">
+                <a:solidFill>
+                  <a:srgbClr val="414C58"/>
+                </a:solidFill>
+                <a:latin typeface="Nunito Sans"/>
+              </a:rPr>
+              <a:t>MQTT конфіг-план і WiFi-телеметрія</a:t>
+            </a:r>
+            <a:endParaRPr/>
+          </a:p>
+          <a:p>
+            <a:pPr indent="-317500" lvl="0" marL="457200" rtl="0" algn="l">
+              <a:spcBef>
+                <a:spcPts val="0"/>
+              </a:spcBef>
+              <a:spcAft>
+                <a:spcPts val="0"/>
+              </a:spcAft>
+              <a:buSzPts val="1400"/>
+              <a:buChar char="→"/>
+            </a:pPr>
+            <a:r>
+              <a:rPr lang="en-US" sz="1200" b="0">
+                <a:solidFill>
+                  <a:srgbClr val="414C58"/>
+                </a:solidFill>
+                <a:latin typeface="Nunito Sans"/>
+              </a:rPr>
+              <a:t>VAULT (STM32): окремий вузол зберігання</a:t>
+            </a:r>
+            <a:endParaRPr/>
+          </a:p>
+          <a:p>
+            <a:pPr indent="-317500" lvl="0" marL="457200" rtl="0" algn="l">
+              <a:spcBef>
+                <a:spcPts val="0"/>
+              </a:spcBef>
+              <a:spcAft>
+                <a:spcPts val="0"/>
+              </a:spcAft>
+              <a:buSzPts val="1400"/>
+              <a:buChar char="→"/>
+            </a:pPr>
+            <a:r>
+              <a:rPr lang="en-US" sz="1200" b="0">
+                <a:solidFill>
+                  <a:srgbClr val="414C58"/>
+                </a:solidFill>
+                <a:latin typeface="Nunito Sans"/>
+              </a:rPr>
+              <a:t>Лазер на MOSFET з ШІМ-яскравістю</a:t>
+            </a:r>
+            <a:endParaRPr/>
+          </a:p>
+        </p:txBody>
+      </p:sp>
+      <p:sp>
+        <p:nvSpPr>
+          <p:cNvPr id="291" name="TextBox 290"/>
+          <p:cNvSpPr txBox="1"/>
+          <p:nvPr/>
+        </p:nvSpPr>
+        <p:spPr>
+          <a:xfrm>
+            <a:off x="812800" y="6250000"/>
+            <a:ext cx="10566400" cy="220000"/>
+          </a:xfrm>
+          <a:prstGeom prst="rect">
+            <a:avLst/>
+          </a:prstGeom>
+          <a:noFill/>
+        </p:spPr>
+        <p:txBody>
+          <a:bodyPr wrap="none" lIns="0" rIns="0" tIns="0" bIns="0" anchor="ctr">
+            <a:spAutoFit/>
+          </a:bodyPr>
+          <a:lstStyle/>
+          <a:p>
+            <a:pPr algn="l"/>
+            <a:r>
+              <a:rPr sz="800" i="1" u="sng">
+                <a:solidFill>
+                  <a:srgbClr val="2A5C8F"/>
+                </a:solidFill>
+                <a:latin typeface="Nunito Sans"/>
+                <a:hlinkClick r:id="rId3"/>
+              </a:rPr>
+              <a:t>README.md</a:t>
+            </a:r>
+          </a:p>
+        </p:txBody>
+      </p:sp>
+    </p:spTree>
+  </p:cSld>
+  <p:clrMapOvr>
+    <a:masterClrMapping/>
+  </p:clrMapOvr>
+</p:sld>
+</file>
+
+<file path=ppt/slides/slide15.xml><?xml version="1.0" encoding="utf-8"?>
+<p:sld xmlns:a="http://schemas.openxmlformats.org/drawingml/2006/main" xmlns:r="http://schemas.openxmlformats.org/officeDocument/2006/relationships" xmlns:mc="http://schemas.openxmlformats.org/markup-compatibility/2006" xmlns:mv="urn:schemas-microsoft-com:mac:vml" xmlns:p="http://schemas.openxmlformats.org/presentationml/2006/main" xmlns:c="http://schemas.openxmlformats.org/drawingml/2006/chart" xmlns:dgm="http://schemas.openxmlformats.org/drawingml/2006/diagram" xmlns:o="urn:schemas-microsoft-com:office:office" xmlns:v="urn:schemas-microsoft-com:vml" xmlns:pvml="urn:schemas-microsoft-com:office:powerpoint" xmlns:com="http://schemas.openxmlformats.org/drawingml/2006/compatibility" xmlns:p14="http://schemas.microsoft.com/office/powerpoint/2010/main" xmlns:p15="http://schemas.microsoft.com/office/powerpoint/2012/main" xmlns:ahyp="http://schemas.microsoft.com/office/drawing/2018/hyperlinkcolor">
+  <p:cSld>
+    <p:bg>
+      <p:bgPr>
+        <a:solidFill>
+          <a:srgbClr val="F7F6F5"/>
+        </a:solidFill>
+      </p:bgPr>
+    </p:bg>
+    <p:spTree>
+      <p:nvGrpSpPr>
+        <p:cNvPr id="299" name="Shape 299"/>
+        <p:cNvGrpSpPr/>
+        <p:nvPr/>
+      </p:nvGrpSpPr>
+      <p:grpSpPr>
+        <a:xfrm>
+          <a:off x="0" y="0"/>
+          <a:ext cx="0" cy="0"/>
+          <a:chOff x="0" y="0"/>
+          <a:chExt cx="0" cy="0"/>
+        </a:xfrm>
+      </p:grpSpPr>
+      <p:sp>
+        <p:nvSpPr>
+          <p:cNvPr id="300" name="Google Shape;tag;bg"/>
+          <p:cNvSpPr/>
+          <p:nvPr/>
+        </p:nvSpPr>
+        <p:spPr>
+          <a:xfrm>
+            <a:off x="812800" y="812800"/>
+            <a:ext cx="1466499" cy="340320"/>
+          </a:xfrm>
+          <a:prstGeom prst="roundRect">
+            <a:avLst>
+              <a:gd fmla="val 37318" name="adj"/>
+            </a:avLst>
+          </a:prstGeom>
+          <a:solidFill>
+            <a:srgbClr val="DAE5F1"/>
+          </a:solidFill>
+          <a:ln>
+            <a:noFill/>
+          </a:ln>
+        </p:spPr>
+        <p:txBody>
+          <a:bodyPr anchorCtr="0" anchor="ctr" bIns="91425" lIns="91425" spcFirstLastPara="1" rIns="91425" wrap="square" tIns="91425">
+            <a:noAutofit/>
+          </a:bodyPr>
+          <a:lstStyle/>
+          <a:p>
+            <a:pPr indent="0" lvl="0" marL="0" rtl="0" algn="l">
+              <a:spcBef>
+                <a:spcPts val="0"/>
+              </a:spcBef>
+              <a:spcAft>
+                <a:spcPts val="0"/>
+              </a:spcAft>
+              <a:buNone/>
+            </a:pPr>
+            <a:r>
+              <a:t/>
+            </a:r>
+            <a:endParaRPr/>
+          </a:p>
+        </p:txBody>
+      </p:sp>
+      <p:sp>
+        <p:nvSpPr>
+          <p:cNvPr id="301" name="Google Shape;tag;txt"/>
+          <p:cNvSpPr/>
+          <p:nvPr/>
+        </p:nvSpPr>
+        <p:spPr>
+          <a:xfrm>
+            <a:off x="952500" y="876300"/>
+            <a:ext cx="1260528" cy="238720"/>
+          </a:xfrm>
+          <a:prstGeom prst="rect">
+            <a:avLst/>
+          </a:prstGeom>
+          <a:noFill/>
+          <a:ln>
+            <a:noFill/>
+          </a:ln>
+        </p:spPr>
+        <p:txBody>
+          <a:bodyPr anchorCtr="0" anchor="t" bIns="0" lIns="0" spcFirstLastPara="1" rIns="0" wrap="square" tIns="0">
+            <a:normAutofit/>
+          </a:bodyPr>
+          <a:lstStyle/>
+          <a:p>
+            <a:pPr indent="0" lvl="0" marL="0" marR="0" rtl="0" algn="l">
+              <a:lnSpc>
+                <a:spcPct val="140000"/>
+              </a:lnSpc>
+              <a:spcBef>
+                <a:spcPts val="0"/>
+              </a:spcBef>
+              <a:spcAft>
+                <a:spcPts val="0"/>
+              </a:spcAft>
+              <a:buNone/>
+            </a:pPr>
+            <a:r>
+              <a:rPr b="1" i="0" lang="en-US" sz="1200" u="none" cap="none" strike="noStrike">
+                <a:solidFill>
+                  <a:srgbClr val="414C58"/>
+                </a:solidFill>
+                <a:latin typeface="Nunito Sans"/>
+                <a:ea typeface="Nunito Sans"/>
+                <a:cs typeface="Nunito Sans"/>
+                <a:sym typeface="Nunito Sans"/>
+              </a:rPr>
+              <a:t>РЕЗУЛЬТАТИ</a:t>
+            </a:r>
+            <a:endParaRPr b="0" i="0" sz="1200" u="none" cap="none" strike="noStrike">
+              <a:solidFill>
+                <a:schemeClr val="dk1"/>
+              </a:solidFill>
+              <a:latin typeface="Calibri"/>
+              <a:ea typeface="Calibri"/>
+              <a:cs typeface="Calibri"/>
+              <a:sym typeface="Calibri"/>
+            </a:endParaRPr>
+          </a:p>
+        </p:txBody>
+      </p:sp>
+      <p:sp>
+        <p:nvSpPr>
+          <p:cNvPr id="302" name="Google Shape;title"/>
+          <p:cNvSpPr/>
+          <p:nvPr/>
+        </p:nvSpPr>
+        <p:spPr>
+          <a:xfrm>
+            <a:off x="812800" y="1280120"/>
+            <a:ext cx="10883392" cy="360660"/>
+          </a:xfrm>
+          <a:prstGeom prst="rect">
+            <a:avLst/>
+          </a:prstGeom>
+          <a:noFill/>
+          <a:ln>
+            <a:noFill/>
+          </a:ln>
+        </p:spPr>
+        <p:txBody>
+          <a:bodyPr anchorCtr="0" anchor="t" bIns="0" lIns="0" spcFirstLastPara="1" rIns="0" wrap="square" tIns="0">
+            <a:normAutofit/>
+          </a:bodyPr>
+          <a:lstStyle/>
+          <a:p>
+            <a:pPr indent="0" lvl="0" marL="0" marR="0" rtl="0" algn="l">
+              <a:lnSpc>
+                <a:spcPct val="110000"/>
+              </a:lnSpc>
+              <a:spcBef>
+                <a:spcPts val="0"/>
+              </a:spcBef>
+              <a:spcAft>
+                <a:spcPts val="0"/>
+              </a:spcAft>
+              <a:buNone/>
+            </a:pPr>
+            <a:r>
+              <a:rPr b="1" i="0" lang="en-US" sz="2400" u="none" cap="none" strike="noStrike">
+                <a:solidFill>
+                  <a:srgbClr val="232323"/>
+                </a:solidFill>
+                <a:latin typeface="Nunito Sans"/>
+                <a:ea typeface="Nunito Sans"/>
+                <a:cs typeface="Nunito Sans"/>
+                <a:sym typeface="Nunito Sans"/>
+              </a:rPr>
+              <a:t>Графіки похибки: режим і PID</a:t>
+            </a:r>
+            <a:endParaRPr b="0" i="0" sz="2400" u="none" cap="none" strike="noStrike">
+              <a:solidFill>
+                <a:schemeClr val="dk1"/>
+              </a:solidFill>
+              <a:latin typeface="Calibri"/>
+              <a:ea typeface="Calibri"/>
+              <a:cs typeface="Calibri"/>
+              <a:sym typeface="Calibri"/>
+            </a:endParaRPr>
+          </a:p>
+        </p:txBody>
+      </p:sp>
+      <p:sp>
+        <p:nvSpPr>
+          <p:cNvPr id="303" name="Google Shape;cell-title-303"/>
+          <p:cNvSpPr/>
+          <p:nvPr/>
+        </p:nvSpPr>
+        <p:spPr>
+          <a:xfrm>
+            <a:off x="1949900" y="1793180"/>
+            <a:ext cx="2577400" cy="190000"/>
+          </a:xfrm>
+          <a:prstGeom prst="rect">
+            <a:avLst/>
+          </a:prstGeom>
+          <a:noFill/>
+          <a:ln>
+            <a:noFill/>
+          </a:ln>
+        </p:spPr>
+        <p:txBody>
+          <a:bodyPr anchorCtr="0" anchor="t" bIns="0" lIns="0" spcFirstLastPara="1" rIns="0" wrap="square" tIns="0">
+            <a:normAutofit/>
+          </a:bodyPr>
+          <a:lstStyle/>
+          <a:p>
+            <a:pPr indent="0" lvl="0" marL="0" marR="0" rtl="0" algn="l">
+              <a:lnSpc>
+                <a:spcPct val="115000"/>
+              </a:lnSpc>
+              <a:spcBef>
+                <a:spcPts val="0"/>
+              </a:spcBef>
+              <a:spcAft>
+                <a:spcPts val="0"/>
+              </a:spcAft>
+              <a:buNone/>
+            </a:pPr>
+            <a:r>
+              <a:rPr b="1" i="0" lang="en-US" sz="900" u="none" cap="none" strike="noStrike">
+                <a:solidFill>
+                  <a:srgbClr val="232323"/>
+                </a:solidFill>
+                <a:latin typeface="Nunito Sans"/>
+                <a:ea typeface="Nunito Sans"/>
+                <a:cs typeface="Nunito Sans"/>
+                <a:sym typeface="Nunito Sans"/>
+              </a:rPr>
+              <a:t>VELOCITYEQUATION · P1/I10/D0</a:t>
+            </a:r>
+            <a:endParaRPr b="0" i="0" sz="900" u="none" cap="none" strike="noStrike">
+              <a:solidFill>
+                <a:schemeClr val="dk1"/>
+              </a:solidFill>
+              <a:latin typeface="Calibri"/>
+              <a:ea typeface="Calibri"/>
+              <a:cs typeface="Calibri"/>
+              <a:sym typeface="Calibri"/>
+            </a:endParaRPr>
+          </a:p>
+        </p:txBody>
+      </p:sp>
+      <p:pic>
+        <p:nvPicPr>
+          <p:cNvPr id="304" name="Google Shape;cell-img-304"/>
+          <p:cNvPicPr>
+            <a:picLocks noChangeAspect="1"/>
+          </p:cNvPicPr>
+          <p:nvPr/>
+        </p:nvPicPr>
+        <p:blipFill>
+          <a:blip r:embed="rId2"/>
+          <a:stretch>
+            <a:fillRect/>
+          </a:stretch>
+        </p:blipFill>
+        <p:spPr>
+          <a:xfrm>
+            <a:off x="1949900" y="2018180"/>
+            <a:ext cx="2577400" cy="1521400"/>
+          </a:xfrm>
+          <a:prstGeom prst="roundRect">
+            <a:avLst>
+              <a:gd fmla="val 4000" name="adj"/>
+            </a:avLst>
+          </a:prstGeom>
+          <a:ln w="12700">
+            <a:solidFill>
+              <a:srgbClr val="FFFFFF"/>
+            </a:solidFill>
+          </a:ln>
+          <a:effectLst>
+            <a:outerShdw blurRad="60000" dist="20000" dir="5400000" rotWithShape="0">
+              <a:srgbClr val="232323">
+                <a:alpha val="22000"/>
+              </a:srgbClr>
+            </a:outerShdw>
+          </a:effectLst>
+        </p:spPr>
+      </p:pic>
+      <p:sp>
+        <p:nvSpPr>
+          <p:cNvPr id="305" name="Google Shape;cell-metrics-305"/>
+          <p:cNvSpPr/>
+          <p:nvPr/>
+        </p:nvSpPr>
+        <p:spPr>
+          <a:xfrm>
+            <a:off x="1949900" y="3574580"/>
+            <a:ext cx="2577400" cy="300000"/>
+          </a:xfrm>
+          <a:prstGeom prst="rect">
+            <a:avLst/>
+          </a:prstGeom>
+          <a:noFill/>
+          <a:ln>
+            <a:noFill/>
+          </a:ln>
+        </p:spPr>
+        <p:txBody>
+          <a:bodyPr anchorCtr="0" anchor="t" bIns="0" lIns="0" spcFirstLastPara="1" rIns="0" wrap="square" tIns="0">
+            <a:normAutofit/>
+          </a:bodyPr>
+          <a:lstStyle/>
+          <a:p>
+            <a:pPr indent="0" lvl="0" marL="0" marR="0" rtl="0" algn="l">
+              <a:lnSpc>
+                <a:spcPct val="125000"/>
+              </a:lnSpc>
+              <a:spcBef>
+                <a:spcPts val="0"/>
+              </a:spcBef>
+              <a:spcAft>
+                <a:spcPts val="0"/>
+              </a:spcAft>
+              <a:buNone/>
+            </a:pPr>
+            <a:r>
+              <a:rPr b="0" i="0" lang="en-US" sz="750" u="none" cap="none" strike="noStrike">
+                <a:solidFill>
+                  <a:srgbClr val="414C58"/>
+                </a:solidFill>
+                <a:latin typeface="Nunito Sans"/>
+                <a:ea typeface="Nunito Sans"/>
+                <a:cs typeface="Nunito Sans"/>
+                <a:sym typeface="Nunito Sans"/>
+              </a:rPr>
+              <a:t>pan: 745 мс, без овершуту</a:t>
+            </a:r>
+            <a:endParaRPr b="0" i="0" sz="750" u="none" cap="none" strike="noStrike">
+              <a:solidFill>
+                <a:schemeClr val="dk1"/>
+              </a:solidFill>
+              <a:latin typeface="Calibri"/>
+              <a:ea typeface="Calibri"/>
+              <a:cs typeface="Calibri"/>
+              <a:sym typeface="Calibri"/>
+            </a:endParaRPr>
+          </a:p>
+          <a:p>
+            <a:pPr indent="0" lvl="0" marL="0" marR="0" rtl="0" algn="l">
+              <a:lnSpc>
+                <a:spcPct val="125000"/>
+              </a:lnSpc>
+              <a:spcBef>
+                <a:spcPts val="0"/>
+              </a:spcBef>
+              <a:spcAft>
+                <a:spcPts val="0"/>
+              </a:spcAft>
+              <a:buNone/>
+            </a:pPr>
+            <a:r>
+              <a:rPr b="0" i="0" lang="en-US" sz="750" u="none" cap="none" strike="noStrike">
+                <a:solidFill>
+                  <a:srgbClr val="414C58"/>
+                </a:solidFill>
+                <a:latin typeface="Nunito Sans"/>
+                <a:ea typeface="Nunito Sans"/>
+                <a:cs typeface="Nunito Sans"/>
+                <a:sym typeface="Nunito Sans"/>
+              </a:rPr>
+              <a:t>tilt: 1160 мс, овершут ~27%</a:t>
+            </a:r>
+            <a:endParaRPr b="0" i="0" sz="750" u="none" cap="none" strike="noStrike">
+              <a:solidFill>
+                <a:schemeClr val="dk1"/>
+              </a:solidFill>
+              <a:latin typeface="Calibri"/>
+              <a:ea typeface="Calibri"/>
+              <a:cs typeface="Calibri"/>
+              <a:sym typeface="Calibri"/>
+            </a:endParaRPr>
+          </a:p>
+        </p:txBody>
+      </p:sp>
+      <p:sp>
+        <p:nvSpPr>
+          <p:cNvPr id="306" name="Google Shape;cell-title-306"/>
+          <p:cNvSpPr/>
+          <p:nvPr/>
+        </p:nvSpPr>
+        <p:spPr>
+          <a:xfrm>
+            <a:off x="4807300" y="1793180"/>
+            <a:ext cx="2577400" cy="190000"/>
+          </a:xfrm>
+          <a:prstGeom prst="rect">
+            <a:avLst/>
+          </a:prstGeom>
+          <a:noFill/>
+          <a:ln>
+            <a:noFill/>
+          </a:ln>
+        </p:spPr>
+        <p:txBody>
+          <a:bodyPr anchorCtr="0" anchor="t" bIns="0" lIns="0" spcFirstLastPara="1" rIns="0" wrap="square" tIns="0">
+            <a:normAutofit/>
+          </a:bodyPr>
+          <a:lstStyle/>
+          <a:p>
+            <a:pPr indent="0" lvl="0" marL="0" marR="0" rtl="0" algn="l">
+              <a:lnSpc>
+                <a:spcPct val="115000"/>
+              </a:lnSpc>
+              <a:spcBef>
+                <a:spcPts val="0"/>
+              </a:spcBef>
+              <a:spcAft>
+                <a:spcPts val="0"/>
+              </a:spcAft>
+              <a:buNone/>
+            </a:pPr>
+            <a:r>
+              <a:rPr b="1" i="0" lang="en-US" sz="900" u="none" cap="none" strike="noStrike">
+                <a:solidFill>
+                  <a:srgbClr val="232323"/>
+                </a:solidFill>
+                <a:latin typeface="Nunito Sans"/>
+                <a:ea typeface="Nunito Sans"/>
+                <a:cs typeface="Nunito Sans"/>
+                <a:sym typeface="Nunito Sans"/>
+              </a:rPr>
+              <a:t>VELOCITYEQUATION · P1/I50/D0</a:t>
+            </a:r>
+            <a:endParaRPr b="0" i="0" sz="900" u="none" cap="none" strike="noStrike">
+              <a:solidFill>
+                <a:schemeClr val="dk1"/>
+              </a:solidFill>
+              <a:latin typeface="Calibri"/>
+              <a:ea typeface="Calibri"/>
+              <a:cs typeface="Calibri"/>
+              <a:sym typeface="Calibri"/>
+            </a:endParaRPr>
+          </a:p>
+        </p:txBody>
+      </p:sp>
+      <p:pic>
+        <p:nvPicPr>
+          <p:cNvPr id="307" name="Google Shape;cell-img-307"/>
+          <p:cNvPicPr>
+            <a:picLocks noChangeAspect="1"/>
+          </p:cNvPicPr>
+          <p:nvPr/>
+        </p:nvPicPr>
+        <p:blipFill>
+          <a:blip r:embed="rId3"/>
+          <a:stretch>
+            <a:fillRect/>
+          </a:stretch>
+        </p:blipFill>
+        <p:spPr>
+          <a:xfrm>
+            <a:off x="4807300" y="2018180"/>
+            <a:ext cx="2577400" cy="1521400"/>
+          </a:xfrm>
+          <a:prstGeom prst="roundRect">
+            <a:avLst>
+              <a:gd fmla="val 4000" name="adj"/>
+            </a:avLst>
+          </a:prstGeom>
+          <a:ln w="12700">
+            <a:solidFill>
+              <a:srgbClr val="FFFFFF"/>
+            </a:solidFill>
+          </a:ln>
+          <a:effectLst>
+            <a:outerShdw blurRad="60000" dist="20000" dir="5400000" rotWithShape="0">
+              <a:srgbClr val="232323">
+                <a:alpha val="22000"/>
+              </a:srgbClr>
+            </a:outerShdw>
+          </a:effectLst>
+        </p:spPr>
+      </p:pic>
+      <p:sp>
+        <p:nvSpPr>
+          <p:cNvPr id="308" name="Google Shape;cell-metrics-308"/>
+          <p:cNvSpPr/>
+          <p:nvPr/>
+        </p:nvSpPr>
+        <p:spPr>
+          <a:xfrm>
+            <a:off x="4807300" y="3574580"/>
+            <a:ext cx="2577400" cy="300000"/>
+          </a:xfrm>
+          <a:prstGeom prst="rect">
+            <a:avLst/>
+          </a:prstGeom>
+          <a:noFill/>
+          <a:ln>
+            <a:noFill/>
+          </a:ln>
+        </p:spPr>
+        <p:txBody>
+          <a:bodyPr anchorCtr="0" anchor="t" bIns="0" lIns="0" spcFirstLastPara="1" rIns="0" wrap="square" tIns="0">
+            <a:normAutofit/>
+          </a:bodyPr>
+          <a:lstStyle/>
+          <a:p>
+            <a:pPr indent="0" lvl="0" marL="0" marR="0" rtl="0" algn="l">
+              <a:lnSpc>
+                <a:spcPct val="125000"/>
+              </a:lnSpc>
+              <a:spcBef>
+                <a:spcPts val="0"/>
+              </a:spcBef>
+              <a:spcAft>
+                <a:spcPts val="0"/>
+              </a:spcAft>
+              <a:buNone/>
+            </a:pPr>
+            <a:r>
+              <a:rPr b="0" i="0" lang="en-US" sz="750" u="none" cap="none" strike="noStrike">
+                <a:solidFill>
+                  <a:srgbClr val="414C58"/>
+                </a:solidFill>
+                <a:latin typeface="Nunito Sans"/>
+                <a:ea typeface="Nunito Sans"/>
+                <a:cs typeface="Nunito Sans"/>
+                <a:sym typeface="Nunito Sans"/>
+              </a:rPr>
+              <a:t>pan: 169 мс, без овершуту</a:t>
+            </a:r>
+            <a:endParaRPr b="0" i="0" sz="750" u="none" cap="none" strike="noStrike">
+              <a:solidFill>
+                <a:schemeClr val="dk1"/>
+              </a:solidFill>
+              <a:latin typeface="Calibri"/>
+              <a:ea typeface="Calibri"/>
+              <a:cs typeface="Calibri"/>
+              <a:sym typeface="Calibri"/>
+            </a:endParaRPr>
+          </a:p>
+          <a:p>
+            <a:pPr indent="0" lvl="0" marL="0" marR="0" rtl="0" algn="l">
+              <a:lnSpc>
+                <a:spcPct val="125000"/>
+              </a:lnSpc>
+              <a:spcBef>
+                <a:spcPts val="0"/>
+              </a:spcBef>
+              <a:spcAft>
+                <a:spcPts val="0"/>
+              </a:spcAft>
+              <a:buNone/>
+            </a:pPr>
+            <a:r>
+              <a:rPr b="0" i="0" lang="en-US" sz="750" u="none" cap="none" strike="noStrike">
+                <a:solidFill>
+                  <a:srgbClr val="414C58"/>
+                </a:solidFill>
+                <a:latin typeface="Nunito Sans"/>
+                <a:ea typeface="Nunito Sans"/>
+                <a:cs typeface="Nunito Sans"/>
+                <a:sym typeface="Nunito Sans"/>
+              </a:rPr>
+              <a:t>tilt: 335 мс, овершут ~32%</a:t>
+            </a:r>
+            <a:endParaRPr b="0" i="0" sz="750" u="none" cap="none" strike="noStrike">
+              <a:solidFill>
+                <a:schemeClr val="dk1"/>
+              </a:solidFill>
+              <a:latin typeface="Calibri"/>
+              <a:ea typeface="Calibri"/>
+              <a:cs typeface="Calibri"/>
+              <a:sym typeface="Calibri"/>
+            </a:endParaRPr>
+          </a:p>
+        </p:txBody>
+      </p:sp>
+      <p:sp>
+        <p:nvSpPr>
+          <p:cNvPr id="309" name="Google Shape;cell-title-309"/>
+          <p:cNvSpPr/>
+          <p:nvPr/>
+        </p:nvSpPr>
+        <p:spPr>
+          <a:xfrm>
+            <a:off x="7664700" y="1793180"/>
+            <a:ext cx="2577400" cy="190000"/>
+          </a:xfrm>
+          <a:prstGeom prst="rect">
+            <a:avLst/>
+          </a:prstGeom>
+          <a:noFill/>
+          <a:ln>
+            <a:noFill/>
+          </a:ln>
+        </p:spPr>
+        <p:txBody>
+          <a:bodyPr anchorCtr="0" anchor="t" bIns="0" lIns="0" spcFirstLastPara="1" rIns="0" wrap="square" tIns="0">
+            <a:normAutofit/>
+          </a:bodyPr>
+          <a:lstStyle/>
+          <a:p>
+            <a:pPr indent="0" lvl="0" marL="0" marR="0" rtl="0" algn="l">
+              <a:lnSpc>
+                <a:spcPct val="115000"/>
+              </a:lnSpc>
+              <a:spcBef>
+                <a:spcPts val="0"/>
+              </a:spcBef>
+              <a:spcAft>
+                <a:spcPts val="0"/>
+              </a:spcAft>
+              <a:buNone/>
+            </a:pPr>
+            <a:r>
+              <a:rPr b="1" i="0" lang="en-US" sz="900" u="none" cap="none" strike="noStrike">
+                <a:solidFill>
+                  <a:srgbClr val="232323"/>
+                </a:solidFill>
+                <a:latin typeface="Nunito Sans"/>
+                <a:ea typeface="Nunito Sans"/>
+                <a:cs typeface="Nunito Sans"/>
+                <a:sym typeface="Nunito Sans"/>
+              </a:rPr>
+              <a:t>VELOCITYEQUATION · P1/I100/D0</a:t>
+            </a:r>
+            <a:endParaRPr b="0" i="0" sz="900" u="none" cap="none" strike="noStrike">
+              <a:solidFill>
+                <a:schemeClr val="dk1"/>
+              </a:solidFill>
+              <a:latin typeface="Calibri"/>
+              <a:ea typeface="Calibri"/>
+              <a:cs typeface="Calibri"/>
+              <a:sym typeface="Calibri"/>
+            </a:endParaRPr>
+          </a:p>
+        </p:txBody>
+      </p:sp>
+      <p:pic>
+        <p:nvPicPr>
+          <p:cNvPr id="310" name="Google Shape;cell-img-310"/>
+          <p:cNvPicPr>
+            <a:picLocks noChangeAspect="1"/>
+          </p:cNvPicPr>
+          <p:nvPr/>
+        </p:nvPicPr>
+        <p:blipFill>
+          <a:blip r:embed="rId4"/>
+          <a:stretch>
+            <a:fillRect/>
+          </a:stretch>
+        </p:blipFill>
+        <p:spPr>
+          <a:xfrm>
+            <a:off x="7664700" y="2018180"/>
+            <a:ext cx="2577400" cy="1521400"/>
+          </a:xfrm>
+          <a:prstGeom prst="roundRect">
+            <a:avLst>
+              <a:gd fmla="val 4000" name="adj"/>
+            </a:avLst>
+          </a:prstGeom>
+          <a:ln w="12700">
+            <a:solidFill>
+              <a:srgbClr val="FFFFFF"/>
+            </a:solidFill>
+          </a:ln>
+          <a:effectLst>
+            <a:outerShdw blurRad="60000" dist="20000" dir="5400000" rotWithShape="0">
+              <a:srgbClr val="232323">
+                <a:alpha val="22000"/>
+              </a:srgbClr>
+            </a:outerShdw>
+          </a:effectLst>
+        </p:spPr>
+      </p:pic>
+      <p:sp>
+        <p:nvSpPr>
+          <p:cNvPr id="311" name="Google Shape;cell-metrics-311"/>
+          <p:cNvSpPr/>
+          <p:nvPr/>
+        </p:nvSpPr>
+        <p:spPr>
+          <a:xfrm>
+            <a:off x="7664700" y="3574580"/>
+            <a:ext cx="2577400" cy="300000"/>
+          </a:xfrm>
+          <a:prstGeom prst="rect">
+            <a:avLst/>
+          </a:prstGeom>
+          <a:noFill/>
+          <a:ln>
+            <a:noFill/>
+          </a:ln>
+        </p:spPr>
+        <p:txBody>
+          <a:bodyPr anchorCtr="0" anchor="t" bIns="0" lIns="0" spcFirstLastPara="1" rIns="0" wrap="square" tIns="0">
+            <a:normAutofit/>
+          </a:bodyPr>
+          <a:lstStyle/>
+          <a:p>
+            <a:pPr indent="0" lvl="0" marL="0" marR="0" rtl="0" algn="l">
+              <a:lnSpc>
+                <a:spcPct val="125000"/>
+              </a:lnSpc>
+              <a:spcBef>
+                <a:spcPts val="0"/>
+              </a:spcBef>
+              <a:spcAft>
+                <a:spcPts val="0"/>
+              </a:spcAft>
+              <a:buNone/>
+            </a:pPr>
+            <a:r>
+              <a:rPr b="0" i="0" lang="en-US" sz="750" u="none" cap="none" strike="noStrike">
+                <a:solidFill>
+                  <a:srgbClr val="414C58"/>
+                </a:solidFill>
+                <a:latin typeface="Nunito Sans"/>
+                <a:ea typeface="Nunito Sans"/>
+                <a:cs typeface="Nunito Sans"/>
+                <a:sym typeface="Nunito Sans"/>
+              </a:rPr>
+              <a:t>pan: 81 мс, без овершуту</a:t>
+            </a:r>
+            <a:endParaRPr b="0" i="0" sz="750" u="none" cap="none" strike="noStrike">
+              <a:solidFill>
+                <a:schemeClr val="dk1"/>
+              </a:solidFill>
+              <a:latin typeface="Calibri"/>
+              <a:ea typeface="Calibri"/>
+              <a:cs typeface="Calibri"/>
+              <a:sym typeface="Calibri"/>
+            </a:endParaRPr>
+          </a:p>
+          <a:p>
+            <a:pPr indent="0" lvl="0" marL="0" marR="0" rtl="0" algn="l">
+              <a:lnSpc>
+                <a:spcPct val="125000"/>
+              </a:lnSpc>
+              <a:spcBef>
+                <a:spcPts val="0"/>
+              </a:spcBef>
+              <a:spcAft>
+                <a:spcPts val="0"/>
+              </a:spcAft>
+              <a:buNone/>
+            </a:pPr>
+            <a:r>
+              <a:rPr b="0" i="0" lang="en-US" sz="750" u="none" cap="none" strike="noStrike">
+                <a:solidFill>
+                  <a:srgbClr val="414C58"/>
+                </a:solidFill>
+                <a:latin typeface="Nunito Sans"/>
+                <a:ea typeface="Nunito Sans"/>
+                <a:cs typeface="Nunito Sans"/>
+                <a:sym typeface="Nunito Sans"/>
+              </a:rPr>
+              <a:t>tilt: 146 мс, овершут ~33%</a:t>
+            </a:r>
+            <a:endParaRPr b="0" i="0" sz="750" u="none" cap="none" strike="noStrike">
+              <a:solidFill>
+                <a:schemeClr val="dk1"/>
+              </a:solidFill>
+              <a:latin typeface="Calibri"/>
+              <a:ea typeface="Calibri"/>
+              <a:cs typeface="Calibri"/>
+              <a:sym typeface="Calibri"/>
+            </a:endParaRPr>
+          </a:p>
+        </p:txBody>
+      </p:sp>
+      <p:sp>
+        <p:nvSpPr>
+          <p:cNvPr id="312" name="Google Shape;cell-title-312"/>
+          <p:cNvSpPr/>
+          <p:nvPr/>
+        </p:nvSpPr>
+        <p:spPr>
+          <a:xfrm>
+            <a:off x="1949900" y="4094580"/>
+            <a:ext cx="2577400" cy="190000"/>
+          </a:xfrm>
+          <a:prstGeom prst="rect">
+            <a:avLst/>
+          </a:prstGeom>
+          <a:noFill/>
+          <a:ln>
+            <a:noFill/>
+          </a:ln>
+        </p:spPr>
+        <p:txBody>
+          <a:bodyPr anchorCtr="0" anchor="t" bIns="0" lIns="0" spcFirstLastPara="1" rIns="0" wrap="square" tIns="0">
+            <a:normAutofit/>
+          </a:bodyPr>
+          <a:lstStyle/>
+          <a:p>
+            <a:pPr indent="0" lvl="0" marL="0" marR="0" rtl="0" algn="l">
+              <a:lnSpc>
+                <a:spcPct val="115000"/>
+              </a:lnSpc>
+              <a:spcBef>
+                <a:spcPts val="0"/>
+              </a:spcBef>
+              <a:spcAft>
+                <a:spcPts val="0"/>
+              </a:spcAft>
+              <a:buNone/>
+            </a:pPr>
+            <a:r>
+              <a:rPr b="1" i="0" lang="en-US" sz="900" u="none" cap="none" strike="noStrike">
+                <a:solidFill>
+                  <a:srgbClr val="232323"/>
+                </a:solidFill>
+                <a:latin typeface="Nunito Sans"/>
+                <a:ea typeface="Nunito Sans"/>
+                <a:cs typeface="Nunito Sans"/>
+                <a:sym typeface="Nunito Sans"/>
+              </a:rPr>
+              <a:t>POSITIONAL · pan P40/I2 · tilt P35/I2</a:t>
+            </a:r>
+            <a:endParaRPr b="0" i="0" sz="900" u="none" cap="none" strike="noStrike">
+              <a:solidFill>
+                <a:schemeClr val="dk1"/>
+              </a:solidFill>
+              <a:latin typeface="Calibri"/>
+              <a:ea typeface="Calibri"/>
+              <a:cs typeface="Calibri"/>
+              <a:sym typeface="Calibri"/>
+            </a:endParaRPr>
+          </a:p>
+        </p:txBody>
+      </p:sp>
+      <p:pic>
+        <p:nvPicPr>
+          <p:cNvPr id="313" name="Google Shape;cell-img-313"/>
+          <p:cNvPicPr>
+            <a:picLocks noChangeAspect="1"/>
+          </p:cNvPicPr>
+          <p:nvPr/>
+        </p:nvPicPr>
+        <p:blipFill>
+          <a:blip r:embed="rId5"/>
+          <a:stretch>
+            <a:fillRect/>
+          </a:stretch>
+        </p:blipFill>
+        <p:spPr>
+          <a:xfrm>
+            <a:off x="1949900" y="4319580"/>
+            <a:ext cx="2577400" cy="1521400"/>
+          </a:xfrm>
+          <a:prstGeom prst="roundRect">
+            <a:avLst>
+              <a:gd fmla="val 4000" name="adj"/>
+            </a:avLst>
+          </a:prstGeom>
+          <a:ln w="12700">
+            <a:solidFill>
+              <a:srgbClr val="FFFFFF"/>
+            </a:solidFill>
+          </a:ln>
+          <a:effectLst>
+            <a:outerShdw blurRad="60000" dist="20000" dir="5400000" rotWithShape="0">
+              <a:srgbClr val="232323">
+                <a:alpha val="22000"/>
+              </a:srgbClr>
+            </a:outerShdw>
+          </a:effectLst>
+        </p:spPr>
+      </p:pic>
+      <p:sp>
+        <p:nvSpPr>
+          <p:cNvPr id="314" name="Google Shape;cell-metrics-314"/>
+          <p:cNvSpPr/>
+          <p:nvPr/>
+        </p:nvSpPr>
+        <p:spPr>
+          <a:xfrm>
+            <a:off x="1949900" y="5875980"/>
+            <a:ext cx="2577400" cy="300000"/>
+          </a:xfrm>
+          <a:prstGeom prst="rect">
+            <a:avLst/>
+          </a:prstGeom>
+          <a:noFill/>
+          <a:ln>
+            <a:noFill/>
+          </a:ln>
+        </p:spPr>
+        <p:txBody>
+          <a:bodyPr anchorCtr="0" anchor="t" bIns="0" lIns="0" spcFirstLastPara="1" rIns="0" wrap="square" tIns="0">
+            <a:normAutofit/>
+          </a:bodyPr>
+          <a:lstStyle/>
+          <a:p>
+            <a:pPr indent="0" lvl="0" marL="0" marR="0" rtl="0" algn="l">
+              <a:lnSpc>
+                <a:spcPct val="125000"/>
+              </a:lnSpc>
+              <a:spcBef>
+                <a:spcPts val="0"/>
+              </a:spcBef>
+              <a:spcAft>
+                <a:spcPts val="0"/>
+              </a:spcAft>
+              <a:buNone/>
+            </a:pPr>
+            <a:r>
+              <a:rPr b="0" i="0" lang="en-US" sz="750" u="none" cap="none" strike="noStrike">
+                <a:solidFill>
+                  <a:srgbClr val="414C58"/>
+                </a:solidFill>
+                <a:latin typeface="Nunito Sans"/>
+                <a:ea typeface="Nunito Sans"/>
+                <a:cs typeface="Nunito Sans"/>
+                <a:sym typeface="Nunito Sans"/>
+              </a:rPr>
+              <a:t>pan: 171 мс, без овершуту</a:t>
+            </a:r>
+            <a:endParaRPr b="0" i="0" sz="750" u="none" cap="none" strike="noStrike">
+              <a:solidFill>
+                <a:schemeClr val="dk1"/>
+              </a:solidFill>
+              <a:latin typeface="Calibri"/>
+              <a:ea typeface="Calibri"/>
+              <a:cs typeface="Calibri"/>
+              <a:sym typeface="Calibri"/>
+            </a:endParaRPr>
+          </a:p>
+          <a:p>
+            <a:pPr indent="0" lvl="0" marL="0" marR="0" rtl="0" algn="l">
+              <a:lnSpc>
+                <a:spcPct val="125000"/>
+              </a:lnSpc>
+              <a:spcBef>
+                <a:spcPts val="0"/>
+              </a:spcBef>
+              <a:spcAft>
+                <a:spcPts val="0"/>
+              </a:spcAft>
+              <a:buNone/>
+            </a:pPr>
+            <a:r>
+              <a:rPr b="0" i="0" lang="en-US" sz="750" u="none" cap="none" strike="noStrike">
+                <a:solidFill>
+                  <a:srgbClr val="414C58"/>
+                </a:solidFill>
+                <a:latin typeface="Nunito Sans"/>
+                <a:ea typeface="Nunito Sans"/>
+                <a:cs typeface="Nunito Sans"/>
+                <a:sym typeface="Nunito Sans"/>
+              </a:rPr>
+              <a:t>tilt: 592 мс, овершут ~27%</a:t>
+            </a:r>
+            <a:endParaRPr b="0" i="0" sz="750" u="none" cap="none" strike="noStrike">
+              <a:solidFill>
+                <a:schemeClr val="dk1"/>
+              </a:solidFill>
+              <a:latin typeface="Calibri"/>
+              <a:ea typeface="Calibri"/>
+              <a:cs typeface="Calibri"/>
+              <a:sym typeface="Calibri"/>
+            </a:endParaRPr>
+          </a:p>
+        </p:txBody>
+      </p:sp>
+      <p:sp>
+        <p:nvSpPr>
+          <p:cNvPr id="315" name="Google Shape;cell-title-315"/>
+          <p:cNvSpPr/>
+          <p:nvPr/>
+        </p:nvSpPr>
+        <p:spPr>
+          <a:xfrm>
+            <a:off x="4807300" y="4094580"/>
+            <a:ext cx="2577400" cy="190000"/>
+          </a:xfrm>
+          <a:prstGeom prst="rect">
+            <a:avLst/>
+          </a:prstGeom>
+          <a:noFill/>
+          <a:ln>
+            <a:noFill/>
+          </a:ln>
+        </p:spPr>
+        <p:txBody>
+          <a:bodyPr anchorCtr="0" anchor="t" bIns="0" lIns="0" spcFirstLastPara="1" rIns="0" wrap="square" tIns="0">
+            <a:normAutofit/>
+          </a:bodyPr>
+          <a:lstStyle/>
+          <a:p>
+            <a:pPr indent="0" lvl="0" marL="0" marR="0" rtl="0" algn="l">
+              <a:lnSpc>
+                <a:spcPct val="115000"/>
+              </a:lnSpc>
+              <a:spcBef>
+                <a:spcPts val="0"/>
+              </a:spcBef>
+              <a:spcAft>
+                <a:spcPts val="0"/>
+              </a:spcAft>
+              <a:buNone/>
+            </a:pPr>
+            <a:r>
+              <a:rPr b="1" i="0" lang="en-US" sz="900" u="none" cap="none" strike="noStrike">
+                <a:solidFill>
+                  <a:srgbClr val="232323"/>
+                </a:solidFill>
+                <a:latin typeface="Nunito Sans"/>
+                <a:ea typeface="Nunito Sans"/>
+                <a:cs typeface="Nunito Sans"/>
+                <a:sym typeface="Nunito Sans"/>
+              </a:rPr>
+              <a:t>POSITIONAL · pan P100/I10 · tilt P100/I9</a:t>
+            </a:r>
+            <a:endParaRPr b="0" i="0" sz="900" u="none" cap="none" strike="noStrike">
+              <a:solidFill>
+                <a:schemeClr val="dk1"/>
+              </a:solidFill>
+              <a:latin typeface="Calibri"/>
+              <a:ea typeface="Calibri"/>
+              <a:cs typeface="Calibri"/>
+              <a:sym typeface="Calibri"/>
+            </a:endParaRPr>
+          </a:p>
+        </p:txBody>
+      </p:sp>
+      <p:pic>
+        <p:nvPicPr>
+          <p:cNvPr id="316" name="Google Shape;cell-img-316"/>
+          <p:cNvPicPr>
+            <a:picLocks noChangeAspect="1"/>
+          </p:cNvPicPr>
+          <p:nvPr/>
+        </p:nvPicPr>
+        <p:blipFill>
+          <a:blip r:embed="rId6"/>
+          <a:stretch>
+            <a:fillRect/>
+          </a:stretch>
+        </p:blipFill>
+        <p:spPr>
+          <a:xfrm>
+            <a:off x="4807300" y="4319580"/>
+            <a:ext cx="2577400" cy="1521400"/>
+          </a:xfrm>
+          <a:prstGeom prst="roundRect">
+            <a:avLst>
+              <a:gd fmla="val 4000" name="adj"/>
+            </a:avLst>
+          </a:prstGeom>
+          <a:ln w="12700">
+            <a:solidFill>
+              <a:srgbClr val="FFFFFF"/>
+            </a:solidFill>
+          </a:ln>
+          <a:effectLst>
+            <a:outerShdw blurRad="60000" dist="20000" dir="5400000" rotWithShape="0">
+              <a:srgbClr val="232323">
+                <a:alpha val="22000"/>
+              </a:srgbClr>
+            </a:outerShdw>
+          </a:effectLst>
+        </p:spPr>
+      </p:pic>
+      <p:sp>
+        <p:nvSpPr>
+          <p:cNvPr id="317" name="Google Shape;cell-metrics-317"/>
+          <p:cNvSpPr/>
+          <p:nvPr/>
+        </p:nvSpPr>
+        <p:spPr>
+          <a:xfrm>
+            <a:off x="4807300" y="5875980"/>
+            <a:ext cx="2577400" cy="300000"/>
+          </a:xfrm>
+          <a:prstGeom prst="rect">
+            <a:avLst/>
+          </a:prstGeom>
+          <a:noFill/>
+          <a:ln>
+            <a:noFill/>
+          </a:ln>
+        </p:spPr>
+        <p:txBody>
+          <a:bodyPr anchorCtr="0" anchor="t" bIns="0" lIns="0" spcFirstLastPara="1" rIns="0" wrap="square" tIns="0">
+            <a:normAutofit/>
+          </a:bodyPr>
+          <a:lstStyle/>
+          <a:p>
+            <a:pPr indent="0" lvl="0" marL="0" marR="0" rtl="0" algn="l">
+              <a:lnSpc>
+                <a:spcPct val="125000"/>
+              </a:lnSpc>
+              <a:spcBef>
+                <a:spcPts val="0"/>
+              </a:spcBef>
+              <a:spcAft>
+                <a:spcPts val="0"/>
+              </a:spcAft>
+              <a:buNone/>
+            </a:pPr>
+            <a:r>
+              <a:rPr b="0" i="0" lang="en-US" sz="750" u="none" cap="none" strike="noStrike">
+                <a:solidFill>
+                  <a:srgbClr val="414C58"/>
+                </a:solidFill>
+                <a:latin typeface="Nunito Sans"/>
+                <a:ea typeface="Nunito Sans"/>
+                <a:cs typeface="Nunito Sans"/>
+                <a:sym typeface="Nunito Sans"/>
+              </a:rPr>
+              <a:t>pan: 80 мс, без овершуту</a:t>
+            </a:r>
+            <a:endParaRPr b="0" i="0" sz="750" u="none" cap="none" strike="noStrike">
+              <a:solidFill>
+                <a:schemeClr val="dk1"/>
+              </a:solidFill>
+              <a:latin typeface="Calibri"/>
+              <a:ea typeface="Calibri"/>
+              <a:cs typeface="Calibri"/>
+              <a:sym typeface="Calibri"/>
+            </a:endParaRPr>
+          </a:p>
+          <a:p>
+            <a:pPr indent="0" lvl="0" marL="0" marR="0" rtl="0" algn="l">
+              <a:lnSpc>
+                <a:spcPct val="125000"/>
+              </a:lnSpc>
+              <a:spcBef>
+                <a:spcPts val="0"/>
+              </a:spcBef>
+              <a:spcAft>
+                <a:spcPts val="0"/>
+              </a:spcAft>
+              <a:buNone/>
+            </a:pPr>
+            <a:r>
+              <a:rPr b="0" i="0" lang="en-US" sz="750" u="none" cap="none" strike="noStrike">
+                <a:solidFill>
+                  <a:srgbClr val="414C58"/>
+                </a:solidFill>
+                <a:latin typeface="Nunito Sans"/>
+                <a:ea typeface="Nunito Sans"/>
+                <a:cs typeface="Nunito Sans"/>
+                <a:sym typeface="Nunito Sans"/>
+              </a:rPr>
+              <a:t>tilt: 475 мс, овершут ~29%</a:t>
+            </a:r>
+            <a:endParaRPr b="0" i="0" sz="750" u="none" cap="none" strike="noStrike">
+              <a:solidFill>
+                <a:schemeClr val="dk1"/>
+              </a:solidFill>
+              <a:latin typeface="Calibri"/>
+              <a:ea typeface="Calibri"/>
+              <a:cs typeface="Calibri"/>
+              <a:sym typeface="Calibri"/>
+            </a:endParaRPr>
+          </a:p>
+        </p:txBody>
+      </p:sp>
+      <p:sp>
+        <p:nvSpPr>
+          <p:cNvPr id="318" name="Google Shape;insight;bg"/>
+          <p:cNvSpPr/>
+          <p:nvPr/>
+        </p:nvSpPr>
+        <p:spPr>
+          <a:xfrm>
+            <a:off x="7664700" y="4094580"/>
+            <a:ext cx="2577400" cy="2081400"/>
+          </a:xfrm>
+          <a:prstGeom prst="roundRect">
+            <a:avLst>
+              <a:gd fmla="val 6000" name="adj"/>
+            </a:avLst>
+          </a:prstGeom>
+          <a:solidFill>
+            <a:srgbClr val="ECE7E2"/>
+          </a:solidFill>
+          <a:ln>
+            <a:noFill/>
+          </a:ln>
+        </p:spPr>
+        <p:txBody>
+          <a:bodyPr anchorCtr="0" anchor="ctr" bIns="91425" lIns="91425" spcFirstLastPara="1" rIns="91425" wrap="square" tIns="91425">
+            <a:noAutofit/>
+          </a:bodyPr>
+          <a:lstStyle/>
+          <a:p>
+            <a:pPr indent="0" lvl="0" marL="0" rtl="0" algn="l">
+              <a:spcBef>
+                <a:spcPts val="0"/>
+              </a:spcBef>
+              <a:spcAft>
+                <a:spcPts val="0"/>
+              </a:spcAft>
+              <a:buNone/>
+            </a:pPr>
+            <a:r>
+              <a:t/>
+            </a:r>
+            <a:endParaRPr/>
+          </a:p>
+        </p:txBody>
+      </p:sp>
+      <p:sp>
+        <p:nvSpPr>
+          <p:cNvPr id="319" name="Google Shape;insight;txt"/>
+          <p:cNvSpPr/>
+          <p:nvPr/>
+        </p:nvSpPr>
+        <p:spPr>
+          <a:xfrm>
+            <a:off x="7824700" y="4254580"/>
+            <a:ext cx="2257400" cy="1761400"/>
+          </a:xfrm>
+          <a:prstGeom prst="rect">
+            <a:avLst/>
+          </a:prstGeom>
+          <a:noFill/>
+          <a:ln>
+            <a:noFill/>
+          </a:ln>
+        </p:spPr>
+        <p:txBody>
+          <a:bodyPr anchorCtr="0" anchor="t" bIns="0" lIns="0" spcFirstLastPara="1" rIns="0" wrap="square" tIns="0">
+            <a:normAutofit/>
+          </a:bodyPr>
+          <a:lstStyle/>
+          <a:p>
+            <a:pPr indent="0" lvl="0" marL="0" marR="0" rtl="0" algn="l">
+              <a:lnSpc>
+                <a:spcPct val="130000"/>
+              </a:lnSpc>
+              <a:spcBef>
+                <a:spcPts val="0"/>
+              </a:spcBef>
+              <a:spcAft>
+                <a:spcPts val="0"/>
+              </a:spcAft>
+              <a:buNone/>
+            </a:pPr>
+            <a:r>
+              <a:rPr b="1" i="0" lang="en-US" sz="900" u="none" cap="none" strike="noStrike">
+                <a:solidFill>
+                  <a:srgbClr val="232323"/>
+                </a:solidFill>
+                <a:latin typeface="Nunito Sans"/>
+                <a:ea typeface="Nunito Sans"/>
+                <a:cs typeface="Nunito Sans"/>
+                <a:sym typeface="Nunito Sans"/>
+              </a:rPr>
+              <a:t>Спостереження</a:t>
+            </a:r>
+            <a:endParaRPr b="0" i="0" sz="900" u="none" cap="none" strike="noStrike">
+              <a:solidFill>
+                <a:schemeClr val="dk1"/>
+              </a:solidFill>
+              <a:latin typeface="Calibri"/>
+              <a:ea typeface="Calibri"/>
+              <a:cs typeface="Calibri"/>
+              <a:sym typeface="Calibri"/>
+            </a:endParaRPr>
+          </a:p>
+          <a:p>
+            <a:pPr indent="0" lvl="0" marL="0" marR="0" rtl="0" algn="l">
+              <a:lnSpc>
+                <a:spcPct val="130000"/>
+              </a:lnSpc>
+              <a:spcBef>
+                <a:spcPts val="0"/>
+              </a:spcBef>
+              <a:spcAft>
+                <a:spcPts val="0"/>
+              </a:spcAft>
+              <a:buNone/>
+            </a:pPr>
+            <a:r>
+              <a:rPr b="0" i="0" lang="en-US" sz="750" u="none" cap="none" strike="noStrike">
+                <a:solidFill>
+                  <a:srgbClr val="414C58"/>
+                </a:solidFill>
+                <a:latin typeface="Nunito Sans"/>
+                <a:ea typeface="Nunito Sans"/>
+                <a:cs typeface="Nunito Sans"/>
+                <a:sym typeface="Nunito Sans"/>
+              </a:rPr>
+              <a:t>Канал tilt овершутить на всіх режимах і PID (~27–33%); канал pan — практично ні (~1–4%).</a:t>
+            </a:r>
+            <a:endParaRPr b="0" i="0" sz="750" u="none" cap="none" strike="noStrike">
+              <a:solidFill>
+                <a:schemeClr val="dk1"/>
+              </a:solidFill>
+              <a:latin typeface="Calibri"/>
+              <a:ea typeface="Calibri"/>
+              <a:cs typeface="Calibri"/>
+              <a:sym typeface="Calibri"/>
+            </a:endParaRPr>
+          </a:p>
+          <a:p>
+            <a:pPr indent="0" lvl="0" marL="0" marR="0" rtl="0" algn="l">
+              <a:lnSpc>
+                <a:spcPct val="130000"/>
+              </a:lnSpc>
+              <a:spcBef>
+                <a:spcPts val="0"/>
+              </a:spcBef>
+              <a:spcAft>
+                <a:spcPts val="0"/>
+              </a:spcAft>
+              <a:buNone/>
+            </a:pPr>
+            <a:r>
+              <a:rPr b="0" i="0" lang="en-US" sz="750" u="none" cap="none" strike="noStrike">
+                <a:solidFill>
+                  <a:srgbClr val="414C58"/>
+                </a:solidFill>
+                <a:latin typeface="Nunito Sans"/>
+                <a:ea typeface="Nunito Sans"/>
+                <a:cs typeface="Nunito Sans"/>
+                <a:sym typeface="Nunito Sans"/>
+              </a:rPr>
+              <a:t>Найшвидше усталення: VELOCITYEQUATION P1/I100 — pan 81 мс, tilt 146 мс.</a:t>
+            </a:r>
+            <a:endParaRPr b="0" i="0" sz="750" u="none" cap="none" strike="noStrike">
+              <a:solidFill>
+                <a:schemeClr val="dk1"/>
+              </a:solidFill>
+              <a:latin typeface="Calibri"/>
+              <a:ea typeface="Calibri"/>
+              <a:cs typeface="Calibri"/>
+              <a:sym typeface="Calibri"/>
+            </a:endParaRPr>
+          </a:p>
+          <a:p>
+            <a:pPr indent="0" lvl="0" marL="0" marR="0" rtl="0" algn="l">
+              <a:lnSpc>
+                <a:spcPct val="130000"/>
+              </a:lnSpc>
+              <a:spcBef>
+                <a:spcPts val="0"/>
+              </a:spcBef>
+              <a:spcAft>
+                <a:spcPts val="0"/>
+              </a:spcAft>
+              <a:buNone/>
+            </a:pPr>
+            <a:r>
+              <a:rPr b="0" i="0" lang="en-US" sz="750" u="none" cap="none" strike="noStrike">
+                <a:solidFill>
+                  <a:srgbClr val="414C58"/>
+                </a:solidFill>
+                <a:latin typeface="Nunito Sans"/>
+                <a:ea typeface="Nunito Sans"/>
+                <a:cs typeface="Nunito Sans"/>
+                <a:sym typeface="Nunito Sans"/>
+              </a:rPr>
+              <a:t>Найповільніше: VELOCITYEQUATION P1/I10 — pan 745 мс, tilt 1160 мс.</a:t>
+            </a:r>
+            <a:endParaRPr b="0" i="0" sz="750" u="none" cap="none" strike="noStrike">
+              <a:solidFill>
+                <a:schemeClr val="dk1"/>
+              </a:solidFill>
+              <a:latin typeface="Calibri"/>
+              <a:ea typeface="Calibri"/>
+              <a:cs typeface="Calibri"/>
+              <a:sym typeface="Calibri"/>
+            </a:endParaRPr>
+          </a:p>
+        </p:txBody>
+      </p:sp>
+      <p:sp>
+        <p:nvSpPr>
+          <p:cNvPr id="320" name="TextBox 320"/>
+          <p:cNvSpPr txBox="1"/>
+          <p:nvPr/>
+        </p:nvSpPr>
+        <p:spPr>
+          <a:xfrm>
+            <a:off x="812800" y="6540000"/>
+            <a:ext cx="10566400" cy="220000"/>
+          </a:xfrm>
+          <a:prstGeom prst="rect">
+            <a:avLst/>
+          </a:prstGeom>
+          <a:noFill/>
+        </p:spPr>
+        <p:txBody>
+          <a:bodyPr wrap="none" lIns="0" rIns="0" tIns="0" bIns="0" anchor="ctr">
+            <a:spAutoFit/>
+          </a:bodyPr>
+          <a:lstStyle/>
+          <a:p>
+            <a:pPr algn="l"/>
+            <a:r>
+              <a:rPr sz="800" i="1" u="sng">
+                <a:solidFill>
+                  <a:srgbClr val="2A5C8F"/>
+                </a:solidFill>
+                <a:latin typeface="Nunito Sans"/>
+                <a:hlinkClick r:id="rId8"/>
+              </a:rPr>
+              <a:t>docs/assestment/verification/README.md</a:t>
+            </a:r>
+            <a:r>
+              <a:rPr sz="800" i="1">
+                <a:solidFill>
+                  <a:srgbClr val="6B6F76"/>
+                </a:solidFill>
+                <a:latin typeface="Nunito Sans"/>
+              </a:rPr>
+              <a:t> · </a:t>
+            </a:r>
+            <a:r>
+              <a:rPr sz="800" i="1" u="sng">
+                <a:solidFill>
+                  <a:srgbClr val="2A5C8F"/>
+                </a:solidFill>
+                <a:latin typeface="Nunito Sans"/>
+                <a:hlinkClick r:id="rId9"/>
+              </a:rPr>
+              <a:t>eye/camera/error_graph.py</a:t>
+            </a:r>
+            <a:r>
+              <a:rPr sz="800" i="1">
+                <a:solidFill>
+                  <a:srgbClr val="6B6F76"/>
+                </a:solidFill>
+                <a:latin typeface="Nunito Sans"/>
+              </a:rPr>
+              <a:t> · логи: docs/assestment/presentation/graphs-to-target-with-different-mode-and-pids/</a:t>
+            </a:r>
+          </a:p>
+        </p:txBody>
+      </p:sp>
+    </p:spTree>
+  </p:cSld>
+  <p:clrMapOvr>
+    <a:masterClrMapping/>
+  </p:clrMapOvr>
+</p:sld>
+</file>
+
 <file path=ppt/slides/slide2.xml><?xml version="1.0" encoding="utf-8"?>
 <p:sld xmlns:a="http://schemas.openxmlformats.org/drawingml/2006/main" xmlns:r="http://schemas.openxmlformats.org/officeDocument/2006/relationships" xmlns:mc="http://schemas.openxmlformats.org/markup-compatibility/2006" xmlns:mv="urn:schemas-microsoft-com:mac:vml" xmlns:p="http://schemas.openxmlformats.org/presentationml/2006/main" xmlns:c="http://schemas.openxmlformats.org/drawingml/2006/chart" xmlns:dgm="http://schemas.openxmlformats.org/drawingml/2006/diagram" xmlns:o="urn:schemas-microsoft-com:office:office" xmlns:v="urn:schemas-microsoft-com:vml" xmlns:pvml="urn:schemas-microsoft-com:office:powerpoint" xmlns:com="http://schemas.openxmlformats.org/drawingml/2006/compatibility" xmlns:p14="http://schemas.microsoft.com/office/powerpoint/2010/main" xmlns:p15="http://schemas.microsoft.com/office/powerpoint/2012/main" xmlns:ahyp="http://schemas.microsoft.com/office/drawing/2018/hyperlinkcolor">
   <p:cSld>
@@ -12226,1373 +13850,6 @@
       </p:sp>
       <p:sp>
         <p:nvSpPr>
-          <p:cNvPr id="67" name="Google Shape;67;p5"/>
-          <p:cNvSpPr/>
-          <p:nvPr/>
-        </p:nvSpPr>
-        <p:spPr>
-          <a:xfrm>
-            <a:off x="812800" y="1821061"/>
-            <a:ext cx="1300163" cy="441920"/>
-          </a:xfrm>
-          <a:prstGeom prst="roundRect">
-            <a:avLst>
-              <a:gd fmla="val 20117" name="adj"/>
-            </a:avLst>
-          </a:prstGeom>
-          <a:solidFill>
-            <a:srgbClr val="ECE7E2"/>
-          </a:solidFill>
-          <a:ln>
-            <a:noFill/>
-          </a:ln>
-        </p:spPr>
-        <p:txBody>
-          <a:bodyPr anchorCtr="0" anchor="ctr" bIns="91425" lIns="91425" spcFirstLastPara="1" rIns="91425" wrap="square" tIns="91425">
-            <a:noAutofit/>
-          </a:bodyPr>
-          <a:lstStyle/>
-          <a:p>
-            <a:pPr indent="0" lvl="0" marL="0" rtl="0" algn="l">
-              <a:spcBef>
-                <a:spcPts val="0"/>
-              </a:spcBef>
-              <a:spcAft>
-                <a:spcPts val="0"/>
-              </a:spcAft>
-              <a:buNone/>
-            </a:pPr>
-            <a:r>
-              <a:t/>
-            </a:r>
-            <a:endParaRPr/>
-          </a:p>
-        </p:txBody>
-      </p:sp>
-      <p:sp>
-        <p:nvSpPr>
-          <p:cNvPr id="68" name="Google Shape;68;p5"/>
-          <p:cNvSpPr/>
-          <p:nvPr/>
-        </p:nvSpPr>
-        <p:spPr>
-          <a:xfrm>
-            <a:off x="1263253" y="1935361"/>
-            <a:ext cx="820000" cy="238720"/>
-          </a:xfrm>
-          <a:prstGeom prst="rect">
-            <a:avLst/>
-          </a:prstGeom>
-          <a:noFill/>
-          <a:ln>
-            <a:noFill/>
-          </a:ln>
-        </p:spPr>
-        <p:txBody>
-          <a:bodyPr anchorCtr="0" anchor="t" bIns="0" lIns="0" spcFirstLastPara="1" rIns="0" wrap="square" tIns="0">
-            <a:normAutofit/>
-          </a:bodyPr>
-          <a:lstStyle/>
-          <a:p>
-            <a:pPr indent="0" lvl="0" marL="0" marR="0" rtl="0" algn="ctr">
-              <a:lnSpc>
-                <a:spcPct val="140000"/>
-              </a:lnSpc>
-              <a:spcBef>
-                <a:spcPts val="0"/>
-              </a:spcBef>
-              <a:spcAft>
-                <a:spcPts val="0"/>
-              </a:spcAft>
-              <a:buClr>
-                <a:srgbClr val="232323"/>
-              </a:buClr>
-              <a:buSzPts val="1200"/>
-              <a:buFont typeface="Nunito Sans"/>
-              <a:buNone/>
-            </a:pPr>
-            <a:r>
-              <a:rPr b="1" i="0" lang="en-US" sz="1200" u="none" cap="none" strike="noStrike">
-                <a:solidFill>
-                  <a:srgbClr val="232323"/>
-                </a:solidFill>
-                <a:latin typeface="Nunito Sans"/>
-                <a:ea typeface="Nunito Sans"/>
-                <a:cs typeface="Nunito Sans"/>
-                <a:sym typeface="Nunito Sans"/>
-              </a:rPr>
-              <a:t>похибка</a:t>
-            </a:r>
-            <a:endParaRPr b="0" i="0" sz="1200" u="none" cap="none" strike="noStrike">
-              <a:solidFill>
-                <a:schemeClr val="dk1"/>
-              </a:solidFill>
-              <a:latin typeface="Calibri"/>
-              <a:ea typeface="Calibri"/>
-              <a:cs typeface="Calibri"/>
-              <a:sym typeface="Calibri"/>
-            </a:endParaRPr>
-          </a:p>
-        </p:txBody>
-      </p:sp>
-      <p:pic>
-        <p:nvPicPr>
-          <p:cNvPr descr="arrow-right" id="69" name="Google Shape;69;p5"/>
-          <p:cNvPicPr preferRelativeResize="0"/>
-          <p:nvPr/>
-        </p:nvPicPr>
-        <p:blipFill rotWithShape="1">
-          <a:blip r:embed="rId3">
-            <a:alphaModFix/>
-          </a:blip>
-          <a:srcRect b="0" l="0" r="0" t="0"/>
-          <a:stretch/>
-        </p:blipFill>
-        <p:spPr>
-          <a:xfrm>
-            <a:off x="2201863" y="1965821"/>
-            <a:ext cx="304800" cy="152400"/>
-          </a:xfrm>
-          <a:prstGeom prst="rect">
-            <a:avLst/>
-          </a:prstGeom>
-          <a:noFill/>
-          <a:ln>
-            <a:noFill/>
-          </a:ln>
-        </p:spPr>
-      </p:pic>
-      <p:sp>
-        <p:nvSpPr>
-          <p:cNvPr id="70" name="Google Shape;70;p5"/>
-          <p:cNvSpPr/>
-          <p:nvPr/>
-        </p:nvSpPr>
-        <p:spPr>
-          <a:xfrm>
-            <a:off x="2595563" y="1821061"/>
-            <a:ext cx="1300262" cy="441920"/>
-          </a:xfrm>
-          <a:prstGeom prst="roundRect">
-            <a:avLst>
-              <a:gd fmla="val 20117" name="adj"/>
-            </a:avLst>
-          </a:prstGeom>
-          <a:solidFill>
-            <a:srgbClr val="ECE7E2"/>
-          </a:solidFill>
-          <a:ln>
-            <a:noFill/>
-          </a:ln>
-        </p:spPr>
-        <p:txBody>
-          <a:bodyPr anchorCtr="0" anchor="ctr" bIns="91425" lIns="91425" spcFirstLastPara="1" rIns="91425" wrap="square" tIns="91425">
-            <a:noAutofit/>
-          </a:bodyPr>
-          <a:lstStyle/>
-          <a:p>
-            <a:pPr indent="0" lvl="0" marL="0" rtl="0" algn="l">
-              <a:spcBef>
-                <a:spcPts val="0"/>
-              </a:spcBef>
-              <a:spcAft>
-                <a:spcPts val="0"/>
-              </a:spcAft>
-              <a:buNone/>
-            </a:pPr>
-            <a:r>
-              <a:t/>
-            </a:r>
-            <a:endParaRPr/>
-          </a:p>
-        </p:txBody>
-      </p:sp>
-      <p:sp>
-        <p:nvSpPr>
-          <p:cNvPr id="71" name="Google Shape;71;p5"/>
-          <p:cNvSpPr/>
-          <p:nvPr/>
-        </p:nvSpPr>
-        <p:spPr>
-          <a:xfrm>
-            <a:off x="3091061" y="1935361"/>
-            <a:ext cx="309166" cy="238720"/>
-          </a:xfrm>
-          <a:prstGeom prst="rect">
-            <a:avLst/>
-          </a:prstGeom>
-          <a:noFill/>
-          <a:ln>
-            <a:noFill/>
-          </a:ln>
-        </p:spPr>
-        <p:txBody>
-          <a:bodyPr anchorCtr="0" anchor="t" bIns="0" lIns="0" spcFirstLastPara="1" rIns="0" wrap="square" tIns="0">
-            <a:normAutofit/>
-          </a:bodyPr>
-          <a:lstStyle/>
-          <a:p>
-            <a:pPr indent="0" lvl="0" marL="0" marR="0" rtl="0" algn="ctr">
-              <a:lnSpc>
-                <a:spcPct val="140000"/>
-              </a:lnSpc>
-              <a:spcBef>
-                <a:spcPts val="0"/>
-              </a:spcBef>
-              <a:spcAft>
-                <a:spcPts val="0"/>
-              </a:spcAft>
-              <a:buClr>
-                <a:srgbClr val="232323"/>
-              </a:buClr>
-              <a:buSzPts val="1200"/>
-              <a:buFont typeface="Nunito Sans"/>
-              <a:buNone/>
-            </a:pPr>
-            <a:r>
-              <a:rPr b="1" i="0" lang="en-US" sz="1200" u="none" cap="none" strike="noStrike">
-                <a:solidFill>
-                  <a:srgbClr val="232323"/>
-                </a:solidFill>
-                <a:latin typeface="Nunito Sans"/>
-                <a:ea typeface="Nunito Sans"/>
-                <a:cs typeface="Nunito Sans"/>
-                <a:sym typeface="Nunito Sans"/>
-              </a:rPr>
-              <a:t>PID</a:t>
-            </a:r>
-            <a:endParaRPr b="0" i="0" sz="1200" u="none" cap="none" strike="noStrike">
-              <a:solidFill>
-                <a:schemeClr val="dk1"/>
-              </a:solidFill>
-              <a:latin typeface="Calibri"/>
-              <a:ea typeface="Calibri"/>
-              <a:cs typeface="Calibri"/>
-              <a:sym typeface="Calibri"/>
-            </a:endParaRPr>
-          </a:p>
-        </p:txBody>
-      </p:sp>
-      <p:pic>
-        <p:nvPicPr>
-          <p:cNvPr descr="arrow-right" id="72" name="Google Shape;72;p5"/>
-          <p:cNvPicPr preferRelativeResize="0"/>
-          <p:nvPr/>
-        </p:nvPicPr>
-        <p:blipFill rotWithShape="1">
-          <a:blip r:embed="rId3">
-            <a:alphaModFix/>
-          </a:blip>
-          <a:srcRect b="0" l="0" r="0" t="0"/>
-          <a:stretch/>
-        </p:blipFill>
-        <p:spPr>
-          <a:xfrm>
-            <a:off x="3984724" y="1965821"/>
-            <a:ext cx="304800" cy="152400"/>
-          </a:xfrm>
-          <a:prstGeom prst="rect">
-            <a:avLst/>
-          </a:prstGeom>
-          <a:noFill/>
-          <a:ln>
-            <a:noFill/>
-          </a:ln>
-        </p:spPr>
-      </p:pic>
-      <p:sp>
-        <p:nvSpPr>
-          <p:cNvPr id="73" name="Google Shape;73;p5"/>
-          <p:cNvSpPr/>
-          <p:nvPr/>
-        </p:nvSpPr>
-        <p:spPr>
-          <a:xfrm>
-            <a:off x="4378424" y="1821061"/>
-            <a:ext cx="1300262" cy="441920"/>
-          </a:xfrm>
-          <a:prstGeom prst="roundRect">
-            <a:avLst>
-              <a:gd fmla="val 20117" name="adj"/>
-            </a:avLst>
-          </a:prstGeom>
-          <a:solidFill>
-            <a:srgbClr val="ECE7E2"/>
-          </a:solidFill>
-          <a:ln>
-            <a:noFill/>
-          </a:ln>
-        </p:spPr>
-        <p:txBody>
-          <a:bodyPr anchorCtr="0" anchor="ctr" bIns="91425" lIns="91425" spcFirstLastPara="1" rIns="91425" wrap="square" tIns="91425">
-            <a:noAutofit/>
-          </a:bodyPr>
-          <a:lstStyle/>
-          <a:p>
-            <a:pPr indent="0" lvl="0" marL="0" rtl="0" algn="l">
-              <a:spcBef>
-                <a:spcPts val="0"/>
-              </a:spcBef>
-              <a:spcAft>
-                <a:spcPts val="0"/>
-              </a:spcAft>
-              <a:buNone/>
-            </a:pPr>
-            <a:r>
-              <a:t/>
-            </a:r>
-            <a:endParaRPr/>
-          </a:p>
-        </p:txBody>
-      </p:sp>
-      <p:sp>
-        <p:nvSpPr>
-          <p:cNvPr id="74" name="Google Shape;74;p5"/>
-          <p:cNvSpPr/>
-          <p:nvPr/>
-        </p:nvSpPr>
-        <p:spPr>
-          <a:xfrm>
-            <a:off x="4791869" y="1935361"/>
-            <a:ext cx="850000" cy="238720"/>
-          </a:xfrm>
-          <a:prstGeom prst="rect">
-            <a:avLst/>
-          </a:prstGeom>
-          <a:noFill/>
-          <a:ln>
-            <a:noFill/>
-          </a:ln>
-        </p:spPr>
-        <p:txBody>
-          <a:bodyPr anchorCtr="0" anchor="t" bIns="0" lIns="0" spcFirstLastPara="1" rIns="0" wrap="square" tIns="0">
-            <a:normAutofit/>
-          </a:bodyPr>
-          <a:lstStyle/>
-          <a:p>
-            <a:pPr indent="0" lvl="0" marL="0" marR="0" rtl="0" algn="ctr">
-              <a:lnSpc>
-                <a:spcPct val="140000"/>
-              </a:lnSpc>
-              <a:spcBef>
-                <a:spcPts val="0"/>
-              </a:spcBef>
-              <a:spcAft>
-                <a:spcPts val="0"/>
-              </a:spcAft>
-              <a:buClr>
-                <a:srgbClr val="232323"/>
-              </a:buClr>
-              <a:buSzPts val="1200"/>
-              <a:buFont typeface="Nunito Sans"/>
-              <a:buNone/>
-            </a:pPr>
-            <a:r>
-              <a:rPr b="1" i="0" lang="en-US" sz="1200" u="none" cap="none" strike="noStrike">
-                <a:solidFill>
-                  <a:srgbClr val="232323"/>
-                </a:solidFill>
-                <a:latin typeface="Nunito Sans"/>
-                <a:ea typeface="Nunito Sans"/>
-                <a:cs typeface="Nunito Sans"/>
-                <a:sym typeface="Nunito Sans"/>
-              </a:rPr>
-              <a:t>швидкість</a:t>
-            </a:r>
-            <a:endParaRPr b="0" i="0" sz="1200" u="none" cap="none" strike="noStrike">
-              <a:solidFill>
-                <a:schemeClr val="dk1"/>
-              </a:solidFill>
-              <a:latin typeface="Calibri"/>
-              <a:ea typeface="Calibri"/>
-              <a:cs typeface="Calibri"/>
-              <a:sym typeface="Calibri"/>
-            </a:endParaRPr>
-          </a:p>
-        </p:txBody>
-      </p:sp>
-      <p:pic>
-        <p:nvPicPr>
-          <p:cNvPr descr="arrow-right" id="75" name="Google Shape;75;p5"/>
-          <p:cNvPicPr preferRelativeResize="0"/>
-          <p:nvPr/>
-        </p:nvPicPr>
-        <p:blipFill rotWithShape="1">
-          <a:blip r:embed="rId3">
-            <a:alphaModFix/>
-          </a:blip>
-          <a:srcRect b="0" l="0" r="0" t="0"/>
-          <a:stretch/>
-        </p:blipFill>
-        <p:spPr>
-          <a:xfrm>
-            <a:off x="5767586" y="1965821"/>
-            <a:ext cx="304800" cy="152400"/>
-          </a:xfrm>
-          <a:prstGeom prst="rect">
-            <a:avLst/>
-          </a:prstGeom>
-          <a:noFill/>
-          <a:ln>
-            <a:noFill/>
-          </a:ln>
-        </p:spPr>
-      </p:pic>
-      <p:sp>
-        <p:nvSpPr>
-          <p:cNvPr id="76" name="Google Shape;76;p5"/>
-          <p:cNvSpPr/>
-          <p:nvPr/>
-        </p:nvSpPr>
-        <p:spPr>
-          <a:xfrm>
-            <a:off x="6161286" y="1829891"/>
-            <a:ext cx="1652191" cy="424160"/>
-          </a:xfrm>
-          <a:prstGeom prst="roundRect">
-            <a:avLst>
-              <a:gd fmla="val 20959" name="adj"/>
-            </a:avLst>
-          </a:prstGeom>
-          <a:solidFill>
-            <a:srgbClr val="C5D6E9"/>
-          </a:solidFill>
-          <a:ln>
-            <a:noFill/>
-          </a:ln>
-        </p:spPr>
-        <p:txBody>
-          <a:bodyPr anchorCtr="0" anchor="ctr" bIns="91425" lIns="91425" spcFirstLastPara="1" rIns="91425" wrap="square" tIns="91425">
-            <a:noAutofit/>
-          </a:bodyPr>
-          <a:lstStyle/>
-          <a:p>
-            <a:pPr indent="0" lvl="0" marL="0" rtl="0" algn="l">
-              <a:spcBef>
-                <a:spcPts val="0"/>
-              </a:spcBef>
-              <a:spcAft>
-                <a:spcPts val="0"/>
-              </a:spcAft>
-              <a:buNone/>
-            </a:pPr>
-            <a:r>
-              <a:t/>
-            </a:r>
-            <a:endParaRPr/>
-          </a:p>
-        </p:txBody>
-      </p:sp>
-      <p:sp>
-        <p:nvSpPr>
-          <p:cNvPr id="77" name="Google Shape;77;p5"/>
-          <p:cNvSpPr/>
-          <p:nvPr/>
-        </p:nvSpPr>
-        <p:spPr>
-          <a:xfrm>
-            <a:off x="6325493" y="1944191"/>
-            <a:ext cx="1323777" cy="220960"/>
-          </a:xfrm>
-          <a:prstGeom prst="rect">
-            <a:avLst/>
-          </a:prstGeom>
-          <a:noFill/>
-          <a:ln>
-            <a:noFill/>
-          </a:ln>
-        </p:spPr>
-        <p:txBody>
-          <a:bodyPr anchorCtr="0" anchor="t" bIns="0" lIns="0" spcFirstLastPara="1" rIns="0" wrap="square" tIns="0">
-            <a:normAutofit/>
-          </a:bodyPr>
-          <a:lstStyle/>
-          <a:p>
-            <a:pPr indent="0" lvl="0" marL="0" marR="0" rtl="0" algn="ctr">
-              <a:lnSpc>
-                <a:spcPct val="140000"/>
-              </a:lnSpc>
-              <a:spcBef>
-                <a:spcPts val="0"/>
-              </a:spcBef>
-              <a:spcAft>
-                <a:spcPts val="0"/>
-              </a:spcAft>
-              <a:buClr>
-                <a:srgbClr val="232323"/>
-              </a:buClr>
-              <a:buSzPts val="1100"/>
-              <a:buFont typeface="Nunito Sans"/>
-              <a:buNone/>
-            </a:pPr>
-            <a:r>
-              <a:rPr b="1" i="0" lang="en-US" sz="1100" u="none" cap="none" strike="noStrike">
-                <a:solidFill>
-                  <a:srgbClr val="232323"/>
-                </a:solidFill>
-                <a:latin typeface="Nunito Sans"/>
-                <a:ea typeface="Nunito Sans"/>
-                <a:cs typeface="Nunito Sans"/>
-                <a:sym typeface="Nunito Sans"/>
-              </a:rPr>
-              <a:t>підсумовується кожні 20 мс</a:t>
-            </a:r>
-            <a:endParaRPr b="0" i="0" sz="1100" u="none" cap="none" strike="noStrike">
-              <a:solidFill>
-                <a:schemeClr val="dk1"/>
-              </a:solidFill>
-              <a:latin typeface="Calibri"/>
-              <a:ea typeface="Calibri"/>
-              <a:cs typeface="Calibri"/>
-              <a:sym typeface="Calibri"/>
-            </a:endParaRPr>
-          </a:p>
-        </p:txBody>
-      </p:sp>
-      <p:pic>
-        <p:nvPicPr>
-          <p:cNvPr descr="arrow-right" id="78" name="Google Shape;78;p5"/>
-          <p:cNvPicPr preferRelativeResize="0"/>
-          <p:nvPr/>
-        </p:nvPicPr>
-        <p:blipFill rotWithShape="1">
-          <a:blip r:embed="rId3">
-            <a:alphaModFix/>
-          </a:blip>
-          <a:srcRect b="0" l="0" r="0" t="0"/>
-          <a:stretch/>
-        </p:blipFill>
-        <p:spPr>
-          <a:xfrm>
-            <a:off x="7902377" y="1965821"/>
-            <a:ext cx="304800" cy="152400"/>
-          </a:xfrm>
-          <a:prstGeom prst="rect">
-            <a:avLst/>
-          </a:prstGeom>
-          <a:noFill/>
-          <a:ln>
-            <a:noFill/>
-          </a:ln>
-        </p:spPr>
-      </p:pic>
-      <p:sp>
-        <p:nvSpPr>
-          <p:cNvPr id="79" name="Google Shape;79;p5"/>
-          <p:cNvSpPr/>
-          <p:nvPr/>
-        </p:nvSpPr>
-        <p:spPr>
-          <a:xfrm>
-            <a:off x="8296077" y="1821061"/>
-            <a:ext cx="1300262" cy="441920"/>
-          </a:xfrm>
-          <a:prstGeom prst="roundRect">
-            <a:avLst>
-              <a:gd fmla="val 20117" name="adj"/>
-            </a:avLst>
-          </a:prstGeom>
-          <a:solidFill>
-            <a:srgbClr val="ECE7E2"/>
-          </a:solidFill>
-          <a:ln>
-            <a:noFill/>
-          </a:ln>
-        </p:spPr>
-        <p:txBody>
-          <a:bodyPr anchorCtr="0" anchor="ctr" bIns="91425" lIns="91425" spcFirstLastPara="1" rIns="91425" wrap="square" tIns="91425">
-            <a:noAutofit/>
-          </a:bodyPr>
-          <a:lstStyle/>
-          <a:p>
-            <a:pPr indent="0" lvl="0" marL="0" rtl="0" algn="l">
-              <a:spcBef>
-                <a:spcPts val="0"/>
-              </a:spcBef>
-              <a:spcAft>
-                <a:spcPts val="0"/>
-              </a:spcAft>
-              <a:buNone/>
-            </a:pPr>
-            <a:r>
-              <a:t/>
-            </a:r>
-            <a:endParaRPr/>
-          </a:p>
-        </p:txBody>
-      </p:sp>
-      <p:sp>
-        <p:nvSpPr>
-          <p:cNvPr id="80" name="Google Shape;80;p5"/>
-          <p:cNvSpPr/>
-          <p:nvPr/>
-        </p:nvSpPr>
-        <p:spPr>
-          <a:xfrm>
-            <a:off x="8723213" y="1935361"/>
-            <a:ext cx="445889" cy="238720"/>
-          </a:xfrm>
-          <a:prstGeom prst="rect">
-            <a:avLst/>
-          </a:prstGeom>
-          <a:noFill/>
-          <a:ln>
-            <a:noFill/>
-          </a:ln>
-        </p:spPr>
-        <p:txBody>
-          <a:bodyPr anchorCtr="0" anchor="t" bIns="0" lIns="0" spcFirstLastPara="1" rIns="0" wrap="square" tIns="0">
-            <a:normAutofit/>
-          </a:bodyPr>
-          <a:lstStyle/>
-          <a:p>
-            <a:pPr indent="0" lvl="0" marL="0" marR="0" rtl="0" algn="ctr">
-              <a:lnSpc>
-                <a:spcPct val="140000"/>
-              </a:lnSpc>
-              <a:spcBef>
-                <a:spcPts val="0"/>
-              </a:spcBef>
-              <a:spcAft>
-                <a:spcPts val="0"/>
-              </a:spcAft>
-              <a:buClr>
-                <a:srgbClr val="232323"/>
-              </a:buClr>
-              <a:buSzPts val="1200"/>
-              <a:buFont typeface="Nunito Sans"/>
-              <a:buNone/>
-            </a:pPr>
-            <a:r>
-              <a:rPr b="1" i="0" lang="en-US" sz="1200" u="none" cap="none" strike="noStrike">
-                <a:solidFill>
-                  <a:srgbClr val="232323"/>
-                </a:solidFill>
-                <a:latin typeface="Nunito Sans"/>
-                <a:ea typeface="Nunito Sans"/>
-                <a:cs typeface="Nunito Sans"/>
-                <a:sym typeface="Nunito Sans"/>
-              </a:rPr>
-              <a:t>кут</a:t>
-            </a:r>
-            <a:endParaRPr b="0" i="0" sz="1200" u="none" cap="none" strike="noStrike">
-              <a:solidFill>
-                <a:schemeClr val="dk1"/>
-              </a:solidFill>
-              <a:latin typeface="Calibri"/>
-              <a:ea typeface="Calibri"/>
-              <a:cs typeface="Calibri"/>
-              <a:sym typeface="Calibri"/>
-            </a:endParaRPr>
-          </a:p>
-        </p:txBody>
-      </p:sp>
-      <p:pic>
-        <p:nvPicPr>
-          <p:cNvPr descr="arrow-right" id="81" name="Google Shape;81;p5"/>
-          <p:cNvPicPr preferRelativeResize="0"/>
-          <p:nvPr/>
-        </p:nvPicPr>
-        <p:blipFill rotWithShape="1">
-          <a:blip r:embed="rId3">
-            <a:alphaModFix/>
-          </a:blip>
-          <a:srcRect b="0" l="0" r="0" t="0"/>
-          <a:stretch/>
-        </p:blipFill>
-        <p:spPr>
-          <a:xfrm>
-            <a:off x="9685238" y="1965821"/>
-            <a:ext cx="304800" cy="152400"/>
-          </a:xfrm>
-          <a:prstGeom prst="rect">
-            <a:avLst/>
-          </a:prstGeom>
-          <a:noFill/>
-          <a:ln>
-            <a:noFill/>
-          </a:ln>
-        </p:spPr>
-      </p:pic>
-      <p:sp>
-        <p:nvSpPr>
-          <p:cNvPr id="82" name="Google Shape;82;p5"/>
-          <p:cNvSpPr/>
-          <p:nvPr/>
-        </p:nvSpPr>
-        <p:spPr>
-          <a:xfrm>
-            <a:off x="10078938" y="1821061"/>
-            <a:ext cx="1300262" cy="441920"/>
-          </a:xfrm>
-          <a:prstGeom prst="roundRect">
-            <a:avLst>
-              <a:gd fmla="val 20117" name="adj"/>
-            </a:avLst>
-          </a:prstGeom>
-          <a:solidFill>
-            <a:srgbClr val="ECE7E2"/>
-          </a:solidFill>
-          <a:ln>
-            <a:noFill/>
-          </a:ln>
-        </p:spPr>
-        <p:txBody>
-          <a:bodyPr anchorCtr="0" anchor="ctr" bIns="91425" lIns="91425" spcFirstLastPara="1" rIns="91425" wrap="square" tIns="91425">
-            <a:noAutofit/>
-          </a:bodyPr>
-          <a:lstStyle/>
-          <a:p>
-            <a:pPr indent="0" lvl="0" marL="0" rtl="0" algn="l">
-              <a:spcBef>
-                <a:spcPts val="0"/>
-              </a:spcBef>
-              <a:spcAft>
-                <a:spcPts val="0"/>
-              </a:spcAft>
-              <a:buNone/>
-            </a:pPr>
-            <a:r>
-              <a:t/>
-            </a:r>
-            <a:endParaRPr/>
-          </a:p>
-        </p:txBody>
-      </p:sp>
-      <p:sp>
-        <p:nvSpPr>
-          <p:cNvPr id="83" name="Google Shape;83;p5"/>
-          <p:cNvSpPr/>
-          <p:nvPr/>
-        </p:nvSpPr>
-        <p:spPr>
-          <a:xfrm>
-            <a:off x="10169069" y="1935361"/>
-            <a:ext cx="1120000" cy="238720"/>
-          </a:xfrm>
-          <a:prstGeom prst="rect">
-            <a:avLst/>
-          </a:prstGeom>
-          <a:noFill/>
-          <a:ln>
-            <a:noFill/>
-          </a:ln>
-        </p:spPr>
-        <p:txBody>
-          <a:bodyPr anchorCtr="0" anchor="t" bIns="0" lIns="0" spcFirstLastPara="1" rIns="0" wrap="square" tIns="0">
-            <a:normAutofit/>
-          </a:bodyPr>
-          <a:lstStyle/>
-          <a:p>
-            <a:pPr indent="0" lvl="0" marL="0" marR="0" rtl="0" algn="ctr">
-              <a:lnSpc>
-                <a:spcPct val="140000"/>
-              </a:lnSpc>
-              <a:spcBef>
-                <a:spcPts val="0"/>
-              </a:spcBef>
-              <a:spcAft>
-                <a:spcPts val="0"/>
-              </a:spcAft>
-              <a:buClr>
-                <a:srgbClr val="232323"/>
-              </a:buClr>
-              <a:buSzPts val="1200"/>
-              <a:buFont typeface="Nunito Sans"/>
-              <a:buNone/>
-            </a:pPr>
-            <a:r>
-              <a:rPr b="1" i="0" lang="en-US" sz="1200" u="none" cap="none" strike="noStrike">
-                <a:solidFill>
-                  <a:srgbClr val="232323"/>
-                </a:solidFill>
-                <a:latin typeface="Nunito Sans"/>
-                <a:ea typeface="Nunito Sans"/>
-                <a:cs typeface="Nunito Sans"/>
-                <a:sym typeface="Nunito Sans"/>
-              </a:rPr>
-              <a:t>сервопривід</a:t>
-            </a:r>
-            <a:endParaRPr b="0" i="0" sz="1200" u="none" cap="none" strike="noStrike">
-              <a:solidFill>
-                <a:schemeClr val="dk1"/>
-              </a:solidFill>
-              <a:latin typeface="Calibri"/>
-              <a:ea typeface="Calibri"/>
-              <a:cs typeface="Calibri"/>
-              <a:sym typeface="Calibri"/>
-            </a:endParaRPr>
-          </a:p>
-        </p:txBody>
-      </p:sp>
-      <p:sp>
-        <p:nvSpPr>
-          <p:cNvPr id="84" name="Google Shape;84;p5"/>
-          <p:cNvSpPr/>
-          <p:nvPr/>
-        </p:nvSpPr>
-        <p:spPr>
-          <a:xfrm>
-            <a:off x="812800" y="2966067"/>
-            <a:ext cx="5181600" cy="1100000"/>
-          </a:xfrm>
-          <a:prstGeom prst="roundRect">
-            <a:avLst>
-              <a:gd fmla="val 10391" name="adj"/>
-            </a:avLst>
-          </a:prstGeom>
-          <a:solidFill>
-            <a:srgbClr val="ECE7E2"/>
-          </a:solidFill>
-          <a:ln>
-            <a:noFill/>
-          </a:ln>
-        </p:spPr>
-        <p:txBody>
-          <a:bodyPr anchorCtr="0" anchor="ctr" bIns="91425" lIns="91425" spcFirstLastPara="1" rIns="91425" wrap="square" tIns="91425">
-            <a:noAutofit/>
-          </a:bodyPr>
-          <a:lstStyle/>
-          <a:p>
-            <a:pPr indent="0" lvl="0" marL="0" rtl="0" algn="l">
-              <a:spcBef>
-                <a:spcPts val="0"/>
-              </a:spcBef>
-              <a:spcAft>
-                <a:spcPts val="0"/>
-              </a:spcAft>
-              <a:buNone/>
-            </a:pPr>
-            <a:r>
-              <a:t/>
-            </a:r>
-            <a:endParaRPr/>
-          </a:p>
-        </p:txBody>
-      </p:sp>
-      <p:sp>
-        <p:nvSpPr>
-          <p:cNvPr id="85" name="Google Shape;85;p5"/>
-          <p:cNvSpPr/>
-          <p:nvPr/>
-        </p:nvSpPr>
-        <p:spPr>
-          <a:xfrm>
-            <a:off x="990600" y="3143867"/>
-            <a:ext cx="4970780" cy="274241"/>
-          </a:xfrm>
-          <a:prstGeom prst="rect">
-            <a:avLst/>
-          </a:prstGeom>
-          <a:noFill/>
-          <a:ln>
-            <a:noFill/>
-          </a:ln>
-        </p:spPr>
-        <p:txBody>
-          <a:bodyPr anchorCtr="0" anchor="t" bIns="0" lIns="0" spcFirstLastPara="1" rIns="0" wrap="square" tIns="0">
-            <a:normAutofit/>
-          </a:bodyPr>
-          <a:lstStyle/>
-          <a:p>
-            <a:pPr indent="0" lvl="0" marL="0" marR="0" rtl="0" algn="l">
-              <a:lnSpc>
-                <a:spcPct val="140000"/>
-              </a:lnSpc>
-              <a:spcBef>
-                <a:spcPts val="0"/>
-              </a:spcBef>
-              <a:spcAft>
-                <a:spcPts val="0"/>
-              </a:spcAft>
-              <a:buClr>
-                <a:srgbClr val="232323"/>
-              </a:buClr>
-              <a:buSzPts val="1400"/>
-              <a:buFont typeface="Nunito Sans"/>
-              <a:buNone/>
-            </a:pPr>
-            <a:r>
-              <a:rPr b="1" i="0" lang="en-US" sz="1400" u="none" cap="none" strike="noStrike">
-                <a:solidFill>
-                  <a:srgbClr val="232323"/>
-                </a:solidFill>
-                <a:latin typeface="Nunito Sans"/>
-                <a:ea typeface="Nunito Sans"/>
-                <a:cs typeface="Nunito Sans"/>
-                <a:sym typeface="Nunito Sans"/>
-              </a:rPr>
-              <a:t>PID позиції (пряме керування)</a:t>
-            </a:r>
-            <a:endParaRPr b="0" i="0" sz="1400" u="none" cap="none" strike="noStrike">
-              <a:solidFill>
-                <a:schemeClr val="dk1"/>
-              </a:solidFill>
-              <a:latin typeface="Calibri"/>
-              <a:ea typeface="Calibri"/>
-              <a:cs typeface="Calibri"/>
-              <a:sym typeface="Calibri"/>
-            </a:endParaRPr>
-          </a:p>
-        </p:txBody>
-      </p:sp>
-      <p:sp>
-        <p:nvSpPr>
-          <p:cNvPr id="87" name="Google Shape;87;p5"/>
-          <p:cNvSpPr/>
-          <p:nvPr/>
-        </p:nvSpPr>
-        <p:spPr>
-          <a:xfrm>
-            <a:off x="990600" y="3468908"/>
-            <a:ext cx="4970780" cy="550000"/>
-          </a:xfrm>
-          <a:prstGeom prst="rect">
-            <a:avLst/>
-          </a:prstGeom>
-          <a:noFill/>
-          <a:ln>
-            <a:noFill/>
-          </a:ln>
-        </p:spPr>
-        <p:txBody>
-          <a:bodyPr anchorCtr="0" anchor="t" bIns="0" lIns="0" spcFirstLastPara="1" rIns="0" wrap="square" tIns="0">
-            <a:normAutofit/>
-          </a:bodyPr>
-          <a:lstStyle/>
-          <a:p>
-            <a:pPr indent="0" lvl="0" marL="0" marR="0" rtl="0" algn="l">
-              <a:lnSpc>
-                <a:spcPct val="140000"/>
-              </a:lnSpc>
-              <a:spcBef>
-                <a:spcPts val="0"/>
-              </a:spcBef>
-              <a:spcAft>
-                <a:spcPts val="0"/>
-              </a:spcAft>
-              <a:buClr>
-                <a:srgbClr val="232323"/>
-              </a:buClr>
-              <a:buSzPts val="1100"/>
-              <a:buFont typeface="Nunito Sans"/>
-              <a:buNone/>
-            </a:pPr>
-            <a:r>
-              <a:rPr b="0" i="0" lang="en-US" sz="1200" u="none" cap="none" strike="noStrike">
-                <a:solidFill>
-                  <a:srgbClr val="414C58"/>
-                </a:solidFill>
-                <a:latin typeface="Nunito Sans"/>
-                <a:ea typeface="Nunito Sans"/>
-                <a:cs typeface="Nunito Sans"/>
-                <a:sym typeface="Nunito Sans"/>
-              </a:rPr>
-              <a:t>Вихід PID стає кутом сервопривода напряму.</a:t>
-            </a:r>
-            <a:endParaRPr b="0" i="0" sz="1100" u="none" cap="none" strike="noStrike">
-              <a:solidFill>
-                <a:schemeClr val="dk1"/>
-              </a:solidFill>
-              <a:latin typeface="Calibri"/>
-              <a:ea typeface="Calibri"/>
-              <a:cs typeface="Calibri"/>
-              <a:sym typeface="Calibri"/>
-            </a:endParaRPr>
-          </a:p>
-          <a:p>
-            <a:pPr indent="0" lvl="0" marL="0" marR="0" rtl="0" algn="l">
-              <a:lnSpc>
-                <a:spcPct val="140000"/>
-              </a:lnSpc>
-              <a:spcBef>
-                <a:spcPts val="0"/>
-              </a:spcBef>
-              <a:spcAft>
-                <a:spcPts val="0"/>
-              </a:spcAft>
-              <a:buClr>
-                <a:srgbClr val="232323"/>
-              </a:buClr>
-              <a:buSzPts val="1100"/>
-              <a:buFont typeface="Nunito Sans"/>
-              <a:buNone/>
-            </a:pPr>
-            <a:r>
-              <a:rPr b="0" i="0" lang="en-US" sz="1200" u="none" cap="none" strike="noStrike">
-                <a:solidFill>
-                  <a:srgbClr val="414C58"/>
-                </a:solidFill>
-                <a:latin typeface="Nunito Sans"/>
-                <a:ea typeface="Nunito Sans"/>
-                <a:cs typeface="Nunito Sans"/>
-                <a:sym typeface="Nunito Sans"/>
-              </a:rPr>
-              <a:t>Кожен шумний кадр — це різкий стрибок позиції.</a:t>
-            </a:r>
-            <a:endParaRPr b="0" i="0" sz="1100" u="none" cap="none" strike="noStrike">
-              <a:solidFill>
-                <a:schemeClr val="dk1"/>
-              </a:solidFill>
-              <a:latin typeface="Calibri"/>
-              <a:ea typeface="Calibri"/>
-              <a:cs typeface="Calibri"/>
-              <a:sym typeface="Calibri"/>
-            </a:endParaRPr>
-          </a:p>
-        </p:txBody>
-      </p:sp>
-      <p:sp>
-        <p:nvSpPr>
-          <p:cNvPr id="88" name="Google Shape;88;p5"/>
-          <p:cNvSpPr/>
-          <p:nvPr/>
-        </p:nvSpPr>
-        <p:spPr>
-          <a:xfrm>
-            <a:off x="6197600" y="2966067"/>
-            <a:ext cx="5181600" cy="1100000"/>
-          </a:xfrm>
-          <a:prstGeom prst="roundRect">
-            <a:avLst>
-              <a:gd fmla="val 10391" name="adj"/>
-            </a:avLst>
-          </a:prstGeom>
-          <a:solidFill>
-            <a:srgbClr val="C5D6E9"/>
-          </a:solidFill>
-          <a:ln>
-            <a:noFill/>
-          </a:ln>
-        </p:spPr>
-        <p:txBody>
-          <a:bodyPr anchorCtr="0" anchor="ctr" bIns="91425" lIns="91425" spcFirstLastPara="1" rIns="91425" wrap="square" tIns="91425">
-            <a:noAutofit/>
-          </a:bodyPr>
-          <a:lstStyle/>
-          <a:p>
-            <a:pPr indent="0" lvl="0" marL="0" rtl="0" algn="l">
-              <a:spcBef>
-                <a:spcPts val="0"/>
-              </a:spcBef>
-              <a:spcAft>
-                <a:spcPts val="0"/>
-              </a:spcAft>
-              <a:buNone/>
-            </a:pPr>
-            <a:r>
-              <a:t/>
-            </a:r>
-            <a:endParaRPr/>
-          </a:p>
-        </p:txBody>
-      </p:sp>
-      <p:sp>
-        <p:nvSpPr>
-          <p:cNvPr id="89" name="Google Shape;89;p5"/>
-          <p:cNvSpPr/>
-          <p:nvPr/>
-        </p:nvSpPr>
-        <p:spPr>
-          <a:xfrm>
-            <a:off x="6375400" y="3143867"/>
-            <a:ext cx="4970780" cy="274241"/>
-          </a:xfrm>
-          <a:prstGeom prst="rect">
-            <a:avLst/>
-          </a:prstGeom>
-          <a:noFill/>
-          <a:ln>
-            <a:noFill/>
-          </a:ln>
-        </p:spPr>
-        <p:txBody>
-          <a:bodyPr anchorCtr="0" anchor="t" bIns="0" lIns="0" spcFirstLastPara="1" rIns="0" wrap="square" tIns="0">
-            <a:normAutofit/>
-          </a:bodyPr>
-          <a:lstStyle/>
-          <a:p>
-            <a:pPr indent="0" lvl="0" marL="0" marR="0" rtl="0" algn="l">
-              <a:lnSpc>
-                <a:spcPct val="140000"/>
-              </a:lnSpc>
-              <a:spcBef>
-                <a:spcPts val="0"/>
-              </a:spcBef>
-              <a:spcAft>
-                <a:spcPts val="0"/>
-              </a:spcAft>
-              <a:buClr>
-                <a:srgbClr val="232323"/>
-              </a:buClr>
-              <a:buSzPts val="1400"/>
-              <a:buFont typeface="Nunito Sans"/>
-              <a:buNone/>
-            </a:pPr>
-            <a:r>
-              <a:rPr b="1" i="0" lang="en-US" sz="1400" u="none" cap="none" strike="noStrike">
-                <a:solidFill>
-                  <a:srgbClr val="232323"/>
-                </a:solidFill>
-                <a:latin typeface="Nunito Sans"/>
-                <a:ea typeface="Nunito Sans"/>
-                <a:cs typeface="Nunito Sans"/>
-                <a:sym typeface="Nunito Sans"/>
-              </a:rPr>
-              <a:t>Команда швидкості (наш варіант)</a:t>
-            </a:r>
-            <a:endParaRPr b="0" i="0" sz="1400" u="none" cap="none" strike="noStrike">
-              <a:solidFill>
-                <a:schemeClr val="dk1"/>
-              </a:solidFill>
-              <a:latin typeface="Calibri"/>
-              <a:ea typeface="Calibri"/>
-              <a:cs typeface="Calibri"/>
-              <a:sym typeface="Calibri"/>
-            </a:endParaRPr>
-          </a:p>
-        </p:txBody>
-      </p:sp>
-      <p:sp>
-        <p:nvSpPr>
-          <p:cNvPr id="90" name="Google Shape;90;p5"/>
-          <p:cNvSpPr/>
-          <p:nvPr/>
-        </p:nvSpPr>
-        <p:spPr>
-          <a:xfrm>
-            <a:off x="6375400" y="3468908"/>
-            <a:ext cx="4970780" cy="550000"/>
-          </a:xfrm>
-          <a:prstGeom prst="rect">
-            <a:avLst/>
-          </a:prstGeom>
-          <a:noFill/>
-          <a:ln>
-            <a:noFill/>
-          </a:ln>
-        </p:spPr>
-        <p:txBody>
-          <a:bodyPr anchorCtr="0" anchor="t" bIns="0" lIns="0" spcFirstLastPara="1" rIns="0" wrap="square" tIns="0">
-            <a:normAutofit/>
-          </a:bodyPr>
-          <a:lstStyle/>
-          <a:p>
-            <a:pPr indent="0" lvl="0" marL="0" marR="0" rtl="0" algn="l">
-              <a:lnSpc>
-                <a:spcPct val="140000"/>
-              </a:lnSpc>
-              <a:spcBef>
-                <a:spcPts val="0"/>
-              </a:spcBef>
-              <a:spcAft>
-                <a:spcPts val="0"/>
-              </a:spcAft>
-              <a:buClr>
-                <a:srgbClr val="414C58"/>
-              </a:buClr>
-              <a:buSzPts val="1200"/>
-              <a:buFont typeface="Nunito Sans"/>
-              <a:buNone/>
-            </a:pPr>
-            <a:r>
-              <a:rPr b="0" i="0" lang="en-US" sz="1200" u="none" cap="none" strike="noStrike">
-                <a:solidFill>
-                  <a:srgbClr val="414C58"/>
-                </a:solidFill>
-                <a:latin typeface="Nunito Sans"/>
-                <a:ea typeface="Nunito Sans"/>
-                <a:cs typeface="Nunito Sans"/>
-                <a:sym typeface="Nunito Sans"/>
-              </a:rPr>
-              <a:t>Вихід PID стає швидкістю; ESP32 інтегрує її в кут щотику.</a:t>
-            </a:r>
-            <a:endParaRPr b="0" i="0" sz="1200" u="none" cap="none" strike="noStrike">
-              <a:solidFill>
-                <a:schemeClr val="dk1"/>
-              </a:solidFill>
-              <a:latin typeface="Calibri"/>
-              <a:ea typeface="Calibri"/>
-              <a:cs typeface="Calibri"/>
-              <a:sym typeface="Calibri"/>
-            </a:endParaRPr>
-          </a:p>
-          <a:p>
-            <a:pPr indent="0" lvl="0" marL="0" marR="0" rtl="0" algn="l">
-              <a:lnSpc>
-                <a:spcPct val="140000"/>
-              </a:lnSpc>
-              <a:spcBef>
-                <a:spcPts val="0"/>
-              </a:spcBef>
-              <a:spcAft>
-                <a:spcPts val="0"/>
-              </a:spcAft>
-              <a:buClr>
-                <a:srgbClr val="414C58"/>
-              </a:buClr>
-              <a:buSzPts val="1200"/>
-              <a:buFont typeface="Nunito Sans"/>
-              <a:buNone/>
-            </a:pPr>
-            <a:r>
-              <a:rPr b="0" i="0" lang="en-US" sz="1200" u="none" cap="none" strike="noStrike">
-                <a:solidFill>
-                  <a:srgbClr val="414C58"/>
-                </a:solidFill>
-                <a:latin typeface="Nunito Sans"/>
-                <a:ea typeface="Nunito Sans"/>
-                <a:cs typeface="Nunito Sans"/>
-                <a:sym typeface="Nunito Sans"/>
-              </a:rPr>
-              <a:t>Шум усереднюється, рух плавний і обмежений за швидкістю.</a:t>
-            </a:r>
-            <a:endParaRPr b="0" i="0" sz="1200" u="none" cap="none" strike="noStrike">
-              <a:solidFill>
-                <a:schemeClr val="dk1"/>
-              </a:solidFill>
-              <a:latin typeface="Calibri"/>
-              <a:ea typeface="Calibri"/>
-              <a:cs typeface="Calibri"/>
-              <a:sym typeface="Calibri"/>
-            </a:endParaRPr>
-          </a:p>
-        </p:txBody>
-      </p:sp>
-      <p:sp>
-        <p:nvSpPr>
-          <p:cNvPr id="91" name="Google Shape;91;p5"/>
-          <p:cNvSpPr/>
-          <p:nvPr/>
-        </p:nvSpPr>
-        <p:spPr>
-          <a:xfrm>
-            <a:off x="812800" y="4769153"/>
-            <a:ext cx="10883392" cy="256480"/>
-          </a:xfrm>
-          <a:prstGeom prst="rect">
-            <a:avLst/>
-          </a:prstGeom>
-          <a:noFill/>
-          <a:ln>
-            <a:noFill/>
-          </a:ln>
-        </p:spPr>
-        <p:txBody>
-          <a:bodyPr anchorCtr="0" anchor="t" bIns="0" lIns="0" spcFirstLastPara="1" rIns="0" wrap="square" tIns="0">
-            <a:normAutofit/>
-          </a:bodyPr>
-          <a:lstStyle/>
-          <a:p>
-            <a:pPr indent="0" lvl="0" marL="0" marR="0" rtl="0" algn="l">
-              <a:lnSpc>
-                <a:spcPct val="140000"/>
-              </a:lnSpc>
-              <a:spcBef>
-                <a:spcPts val="0"/>
-              </a:spcBef>
-              <a:spcAft>
-                <a:spcPts val="0"/>
-              </a:spcAft>
-              <a:buClr>
-                <a:srgbClr val="232323"/>
-              </a:buClr>
-              <a:buSzPts val="1300"/>
-              <a:buFont typeface="Nunito Sans"/>
-              <a:buNone/>
-            </a:pPr>
-            <a:r>
-              <a:rPr b="0" i="0" lang="en-US" sz="1300" u="none" cap="none" strike="noStrike">
-                <a:solidFill>
-                  <a:srgbClr val="232323"/>
-                </a:solidFill>
-                <a:latin typeface="Nunito Sans"/>
-                <a:ea typeface="Nunito Sans"/>
-                <a:cs typeface="Nunito Sans"/>
-                <a:sym typeface="Nunito Sans"/>
-              </a:rPr>
-              <a:t>Наш випадок: камера і ціль обидві рухаються, кадр завжди шумний — саме для цього зроблена швидкісна форма.</a:t>
-            </a:r>
-            <a:endParaRPr b="0" i="0" sz="1300" u="none" cap="none" strike="noStrike">
-              <a:solidFill>
-                <a:schemeClr val="dk1"/>
-              </a:solidFill>
-              <a:latin typeface="Calibri"/>
-              <a:ea typeface="Calibri"/>
-              <a:cs typeface="Calibri"/>
-              <a:sym typeface="Calibri"/>
-            </a:endParaRPr>
-          </a:p>
-        </p:txBody>
-      </p:sp>
-      <p:sp>
-        <p:nvSpPr>
-          <p:cNvPr id="92" name="Google Shape;92;p5"/>
-          <p:cNvSpPr/>
-          <p:nvPr/>
-        </p:nvSpPr>
-        <p:spPr>
-          <a:xfrm>
-            <a:off x="812800" y="5085633"/>
-            <a:ext cx="10883392" cy="256480"/>
-          </a:xfrm>
-          <a:prstGeom prst="rect">
-            <a:avLst/>
-          </a:prstGeom>
-          <a:noFill/>
-          <a:ln>
-            <a:noFill/>
-          </a:ln>
-        </p:spPr>
-        <p:txBody>
-          <a:bodyPr anchorCtr="0" anchor="t" bIns="0" lIns="0" spcFirstLastPara="1" rIns="0" wrap="square" tIns="0">
-            <a:normAutofit/>
-          </a:bodyPr>
-          <a:lstStyle/>
-          <a:p>
-            <a:pPr indent="0" lvl="0" marL="0" marR="0" rtl="0" algn="l">
-              <a:lnSpc>
-                <a:spcPct val="140000"/>
-              </a:lnSpc>
-              <a:spcBef>
-                <a:spcPts val="0"/>
-              </a:spcBef>
-              <a:spcAft>
-                <a:spcPts val="0"/>
-              </a:spcAft>
-              <a:buClr>
-                <a:srgbClr val="232323"/>
-              </a:buClr>
-              <a:buSzPts val="1300"/>
-              <a:buFont typeface="Nunito Sans"/>
-              <a:buNone/>
-            </a:pPr>
-            <a:r>
-              <a:rPr b="1" i="0" lang="en-US" sz="1300" u="none" cap="none" strike="noStrike">
-                <a:solidFill>
-                  <a:srgbClr val="232323"/>
-                </a:solidFill>
-                <a:latin typeface="Nunito Sans"/>
-                <a:ea typeface="Nunito Sans"/>
-                <a:cs typeface="Nunito Sans"/>
-                <a:sym typeface="Nunito Sans"/>
-              </a:rPr>
-              <a:t>Результат: плавний рух сервопривода, менше перерегулювання і ривків.</a:t>
-            </a:r>
-            <a:endParaRPr b="0" i="0" sz="1300" u="none" cap="none" strike="noStrike">
-              <a:solidFill>
-                <a:schemeClr val="dk1"/>
-              </a:solidFill>
-              <a:latin typeface="Calibri"/>
-              <a:ea typeface="Calibri"/>
-              <a:cs typeface="Calibri"/>
-              <a:sym typeface="Calibri"/>
-            </a:endParaRPr>
-          </a:p>
-        </p:txBody>
-      </p:sp>
-      <p:sp>
-        <p:nvSpPr>
           <p:cNvPr id="93" name="TextBox 92"/>
           <p:cNvSpPr txBox="1"/>
           <p:nvPr/>
@@ -13641,7 +13898,1069 @@
                 <a:latin typeface="Nunito Sans"/>
                 <a:hlinkClick r:id="rId5"/>
               </a:rPr>
-              <a:t>docs/protocol.md</a:t>
+              <a:t>docs/pid_controller_equations_positional_vs_velocity.md</a:t>
+            </a:r>
+          </a:p>
+        </p:txBody>
+      </p:sp>
+      <p:sp>
+        <p:nvSpPr>
+          <p:cNvPr id="94" name="Rounded Rectangle 93"/>
+          <p:cNvSpPr/>
+          <p:nvPr/>
+        </p:nvSpPr>
+        <p:spPr>
+          <a:xfrm>
+            <a:off x="812800" y="1780000"/>
+            <a:ext cx="10883392" cy="1980000"/>
+          </a:xfrm>
+          <a:prstGeom prst="roundRect">
+            <a:avLst>
+              <a:gd name="adj" fmla="val 8000"/>
+            </a:avLst>
+          </a:prstGeom>
+          <a:solidFill>
+            <a:srgbClr val="C5D6E9"/>
+          </a:solidFill>
+          <a:ln>
+            <a:noFill/>
+          </a:ln>
+          <a:effectLst/>
+        </p:spPr>
+        <p:style>
+          <a:lnRef idx="1">
+            <a:schemeClr val="accent1"/>
+          </a:lnRef>
+          <a:fillRef idx="3">
+            <a:schemeClr val="accent1"/>
+          </a:fillRef>
+          <a:effectRef idx="2">
+            <a:schemeClr val="accent1"/>
+          </a:effectRef>
+          <a:fontRef idx="minor">
+            <a:schemeClr val="lt1"/>
+          </a:fontRef>
+        </p:style>
+        <p:txBody>
+          <a:bodyPr rtlCol="0" anchor="ctr"/>
+          <a:lstStyle/>
+          <a:p>
+            <a:pPr algn="ctr"/>
+          </a:p>
+        </p:txBody>
+      </p:sp>
+      <p:sp>
+        <p:nvSpPr>
+          <p:cNvPr id="95" name="TextBox 94"/>
+          <p:cNvSpPr txBox="1"/>
+          <p:nvPr/>
+        </p:nvSpPr>
+        <p:spPr>
+          <a:xfrm>
+            <a:off x="1066800" y="1930000"/>
+            <a:ext cx="10375392" cy="320000"/>
+          </a:xfrm>
+          <a:prstGeom prst="rect">
+            <a:avLst/>
+          </a:prstGeom>
+          <a:noFill/>
+        </p:spPr>
+        <p:txBody>
+          <a:bodyPr wrap="square" lIns="0" rIns="0" tIns="0" bIns="0" anchor="t">
+            <a:spAutoFit/>
+          </a:bodyPr>
+          <a:lstStyle/>
+          <a:p>
+            <a:pPr algn="l">
+              <a:lnSpc>
+                <a:spcPct val="140000"/>
+              </a:lnSpc>
+            </a:pPr>
+            <a:r>
+              <a:rPr sz="1400" b="1">
+                <a:solidFill>
+                  <a:srgbClr val="232323"/>
+                </a:solidFill>
+                <a:latin typeface="Nunito Sans"/>
+              </a:rPr>
+              <a:t>PositionalPid — швидкість (за замовчуванням)</a:t>
+            </a:r>
+          </a:p>
+        </p:txBody>
+      </p:sp>
+      <p:sp>
+        <p:nvSpPr>
+          <p:cNvPr id="96" name="Rounded Rectangle 95"/>
+          <p:cNvSpPr/>
+          <p:nvPr/>
+        </p:nvSpPr>
+        <p:spPr>
+          <a:xfrm>
+            <a:off x="1066800" y="2400000"/>
+            <a:ext cx="1867078" cy="440000"/>
+          </a:xfrm>
+          <a:prstGeom prst="roundRect">
+            <a:avLst>
+              <a:gd name="adj" fmla="val 16000"/>
+            </a:avLst>
+          </a:prstGeom>
+          <a:solidFill>
+            <a:srgbClr val="FFFFFF"/>
+          </a:solidFill>
+          <a:ln>
+            <a:noFill/>
+          </a:ln>
+          <a:effectLst/>
+        </p:spPr>
+        <p:style>
+          <a:lnRef idx="1">
+            <a:schemeClr val="accent1"/>
+          </a:lnRef>
+          <a:fillRef idx="3">
+            <a:schemeClr val="accent1"/>
+          </a:fillRef>
+          <a:effectRef idx="2">
+            <a:schemeClr val="accent1"/>
+          </a:effectRef>
+          <a:fontRef idx="minor">
+            <a:schemeClr val="lt1"/>
+          </a:fontRef>
+        </p:style>
+        <p:txBody>
+          <a:bodyPr rtlCol="0" anchor="ctr" wrap="square" lIns="45000" rIns="45000" tIns="18000" bIns="18000"/>
+          <a:lstStyle/>
+          <a:p>
+            <a:pPr algn="ctr">
+              <a:lnSpc>
+                <a:spcPct val="105000"/>
+              </a:lnSpc>
+            </a:pPr>
+            <a:r>
+              <a:rPr sz="1100" b="1">
+                <a:solidFill>
+                  <a:srgbClr val="232323"/>
+                </a:solidFill>
+                <a:latin typeface="Nunito Sans"/>
+              </a:rPr>
+              <a:t>похибка</a:t>
+            </a:r>
+          </a:p>
+        </p:txBody>
+      </p:sp>
+      <p:pic>
+        <p:nvPicPr>
+          <p:cNvPr id="97" name="Picture 96" descr="image.png"/>
+          <p:cNvPicPr>
+            <a:picLocks noChangeAspect="1"/>
+          </p:cNvPicPr>
+          <p:nvPr/>
+        </p:nvPicPr>
+        <p:blipFill>
+          <a:blip r:embed="rId3"/>
+          <a:stretch>
+            <a:fillRect/>
+          </a:stretch>
+        </p:blipFill>
+        <p:spPr>
+          <a:xfrm>
+            <a:off x="2933878" y="2555000"/>
+            <a:ext cx="260000" cy="130000"/>
+          </a:xfrm>
+          <a:prstGeom prst="rect">
+            <a:avLst/>
+          </a:prstGeom>
+        </p:spPr>
+      </p:pic>
+      <p:sp>
+        <p:nvSpPr>
+          <p:cNvPr id="98" name="Rounded Rectangle 97"/>
+          <p:cNvSpPr/>
+          <p:nvPr/>
+        </p:nvSpPr>
+        <p:spPr>
+          <a:xfrm>
+            <a:off x="3193878" y="2400000"/>
+            <a:ext cx="1867078" cy="440000"/>
+          </a:xfrm>
+          <a:prstGeom prst="roundRect">
+            <a:avLst>
+              <a:gd name="adj" fmla="val 16000"/>
+            </a:avLst>
+          </a:prstGeom>
+          <a:solidFill>
+            <a:srgbClr val="FFFFFF"/>
+          </a:solidFill>
+          <a:ln>
+            <a:noFill/>
+          </a:ln>
+          <a:effectLst/>
+        </p:spPr>
+        <p:style>
+          <a:lnRef idx="1">
+            <a:schemeClr val="accent1"/>
+          </a:lnRef>
+          <a:fillRef idx="3">
+            <a:schemeClr val="accent1"/>
+          </a:fillRef>
+          <a:effectRef idx="2">
+            <a:schemeClr val="accent1"/>
+          </a:effectRef>
+          <a:fontRef idx="minor">
+            <a:schemeClr val="lt1"/>
+          </a:fontRef>
+        </p:style>
+        <p:txBody>
+          <a:bodyPr rtlCol="0" anchor="ctr" wrap="square" lIns="45000" rIns="45000" tIns="18000" bIns="18000"/>
+          <a:lstStyle/>
+          <a:p>
+            <a:pPr algn="ctr">
+              <a:lnSpc>
+                <a:spcPct val="105000"/>
+              </a:lnSpc>
+            </a:pPr>
+            <a:r>
+              <a:rPr sz="1100" b="1">
+                <a:solidFill>
+                  <a:srgbClr val="232323"/>
+                </a:solidFill>
+                <a:latin typeface="Nunito Sans"/>
+              </a:rPr>
+              <a:t>PID</a:t>
+            </a:r>
+          </a:p>
+        </p:txBody>
+      </p:sp>
+      <p:pic>
+        <p:nvPicPr>
+          <p:cNvPr id="99" name="Picture 98" descr="image.png"/>
+          <p:cNvPicPr>
+            <a:picLocks noChangeAspect="1"/>
+          </p:cNvPicPr>
+          <p:nvPr/>
+        </p:nvPicPr>
+        <p:blipFill>
+          <a:blip r:embed="rId3"/>
+          <a:stretch>
+            <a:fillRect/>
+          </a:stretch>
+        </p:blipFill>
+        <p:spPr>
+          <a:xfrm>
+            <a:off x="5060956" y="2555000"/>
+            <a:ext cx="260000" cy="130000"/>
+          </a:xfrm>
+          <a:prstGeom prst="rect">
+            <a:avLst/>
+          </a:prstGeom>
+        </p:spPr>
+      </p:pic>
+      <p:sp>
+        <p:nvSpPr>
+          <p:cNvPr id="100" name="Rounded Rectangle 99"/>
+          <p:cNvSpPr/>
+          <p:nvPr/>
+        </p:nvSpPr>
+        <p:spPr>
+          <a:xfrm>
+            <a:off x="5320956" y="2400000"/>
+            <a:ext cx="1867078" cy="440000"/>
+          </a:xfrm>
+          <a:prstGeom prst="roundRect">
+            <a:avLst>
+              <a:gd name="adj" fmla="val 16000"/>
+            </a:avLst>
+          </a:prstGeom>
+          <a:solidFill>
+            <a:srgbClr val="FFFFFF"/>
+          </a:solidFill>
+          <a:ln>
+            <a:noFill/>
+          </a:ln>
+          <a:effectLst/>
+        </p:spPr>
+        <p:style>
+          <a:lnRef idx="1">
+            <a:schemeClr val="accent1"/>
+          </a:lnRef>
+          <a:fillRef idx="3">
+            <a:schemeClr val="accent1"/>
+          </a:fillRef>
+          <a:effectRef idx="2">
+            <a:schemeClr val="accent1"/>
+          </a:effectRef>
+          <a:fontRef idx="minor">
+            <a:schemeClr val="lt1"/>
+          </a:fontRef>
+        </p:style>
+        <p:txBody>
+          <a:bodyPr rtlCol="0" anchor="ctr" wrap="square" lIns="45000" rIns="45000" tIns="18000" bIns="18000"/>
+          <a:lstStyle/>
+          <a:p>
+            <a:pPr algn="ctr">
+              <a:lnSpc>
+                <a:spcPct val="105000"/>
+              </a:lnSpc>
+            </a:pPr>
+            <a:r>
+              <a:rPr sz="1100" b="1">
+                <a:solidFill>
+                  <a:srgbClr val="232323"/>
+                </a:solidFill>
+                <a:latin typeface="Nunito Sans"/>
+              </a:rPr>
+              <a:t>швидкість</a:t>
+            </a:r>
+          </a:p>
+        </p:txBody>
+      </p:sp>
+      <p:pic>
+        <p:nvPicPr>
+          <p:cNvPr id="101" name="Picture 100" descr="image.png"/>
+          <p:cNvPicPr>
+            <a:picLocks noChangeAspect="1"/>
+          </p:cNvPicPr>
+          <p:nvPr/>
+        </p:nvPicPr>
+        <p:blipFill>
+          <a:blip r:embed="rId3"/>
+          <a:stretch>
+            <a:fillRect/>
+          </a:stretch>
+        </p:blipFill>
+        <p:spPr>
+          <a:xfrm>
+            <a:off x="7188034" y="2555000"/>
+            <a:ext cx="260000" cy="130000"/>
+          </a:xfrm>
+          <a:prstGeom prst="rect">
+            <a:avLst/>
+          </a:prstGeom>
+        </p:spPr>
+      </p:pic>
+      <p:sp>
+        <p:nvSpPr>
+          <p:cNvPr id="102" name="Rounded Rectangle 101"/>
+          <p:cNvSpPr/>
+          <p:nvPr/>
+        </p:nvSpPr>
+        <p:spPr>
+          <a:xfrm>
+            <a:off x="7448034" y="2400000"/>
+            <a:ext cx="1867078" cy="440000"/>
+          </a:xfrm>
+          <a:prstGeom prst="roundRect">
+            <a:avLst>
+              <a:gd name="adj" fmla="val 16000"/>
+            </a:avLst>
+          </a:prstGeom>
+          <a:solidFill>
+            <a:srgbClr val="9FBEDD"/>
+          </a:solidFill>
+          <a:ln>
+            <a:noFill/>
+          </a:ln>
+          <a:effectLst/>
+        </p:spPr>
+        <p:style>
+          <a:lnRef idx="1">
+            <a:schemeClr val="accent1"/>
+          </a:lnRef>
+          <a:fillRef idx="3">
+            <a:schemeClr val="accent1"/>
+          </a:fillRef>
+          <a:effectRef idx="2">
+            <a:schemeClr val="accent1"/>
+          </a:effectRef>
+          <a:fontRef idx="minor">
+            <a:schemeClr val="lt1"/>
+          </a:fontRef>
+        </p:style>
+        <p:txBody>
+          <a:bodyPr rtlCol="0" anchor="ctr" wrap="square" lIns="45000" rIns="45000" tIns="18000" bIns="18000"/>
+          <a:lstStyle/>
+          <a:p>
+            <a:pPr algn="ctr">
+              <a:lnSpc>
+                <a:spcPct val="105000"/>
+              </a:lnSpc>
+            </a:pPr>
+            <a:r>
+              <a:rPr sz="1100" b="1">
+                <a:solidFill>
+                  <a:srgbClr val="232323"/>
+                </a:solidFill>
+                <a:latin typeface="Nunito Sans"/>
+              </a:rPr>
+              <a:t>Σ кожні 20мс</a:t>
+            </a:r>
+          </a:p>
+        </p:txBody>
+      </p:sp>
+      <p:pic>
+        <p:nvPicPr>
+          <p:cNvPr id="103" name="Picture 102" descr="image.png"/>
+          <p:cNvPicPr>
+            <a:picLocks noChangeAspect="1"/>
+          </p:cNvPicPr>
+          <p:nvPr/>
+        </p:nvPicPr>
+        <p:blipFill>
+          <a:blip r:embed="rId3"/>
+          <a:stretch>
+            <a:fillRect/>
+          </a:stretch>
+        </p:blipFill>
+        <p:spPr>
+          <a:xfrm>
+            <a:off x="9315112" y="2555000"/>
+            <a:ext cx="260000" cy="130000"/>
+          </a:xfrm>
+          <a:prstGeom prst="rect">
+            <a:avLst/>
+          </a:prstGeom>
+        </p:spPr>
+      </p:pic>
+      <p:sp>
+        <p:nvSpPr>
+          <p:cNvPr id="104" name="Rounded Rectangle 103"/>
+          <p:cNvSpPr/>
+          <p:nvPr/>
+        </p:nvSpPr>
+        <p:spPr>
+          <a:xfrm>
+            <a:off x="9575112" y="2400000"/>
+            <a:ext cx="1867078" cy="440000"/>
+          </a:xfrm>
+          <a:prstGeom prst="roundRect">
+            <a:avLst>
+              <a:gd name="adj" fmla="val 16000"/>
+            </a:avLst>
+          </a:prstGeom>
+          <a:solidFill>
+            <a:srgbClr val="FFFFFF"/>
+          </a:solidFill>
+          <a:ln>
+            <a:noFill/>
+          </a:ln>
+          <a:effectLst/>
+        </p:spPr>
+        <p:style>
+          <a:lnRef idx="1">
+            <a:schemeClr val="accent1"/>
+          </a:lnRef>
+          <a:fillRef idx="3">
+            <a:schemeClr val="accent1"/>
+          </a:fillRef>
+          <a:effectRef idx="2">
+            <a:schemeClr val="accent1"/>
+          </a:effectRef>
+          <a:fontRef idx="minor">
+            <a:schemeClr val="lt1"/>
+          </a:fontRef>
+        </p:style>
+        <p:txBody>
+          <a:bodyPr rtlCol="0" anchor="ctr" wrap="square" lIns="45000" rIns="45000" tIns="18000" bIns="18000"/>
+          <a:lstStyle/>
+          <a:p>
+            <a:pPr algn="ctr">
+              <a:lnSpc>
+                <a:spcPct val="105000"/>
+              </a:lnSpc>
+            </a:pPr>
+            <a:r>
+              <a:rPr sz="1100" b="1">
+                <a:solidFill>
+                  <a:srgbClr val="232323"/>
+                </a:solidFill>
+                <a:latin typeface="Nunito Sans"/>
+              </a:rPr>
+              <a:t>сервопривід</a:t>
+            </a:r>
+          </a:p>
+        </p:txBody>
+      </p:sp>
+      <p:sp>
+        <p:nvSpPr>
+          <p:cNvPr id="105" name="TextBox 104"/>
+          <p:cNvSpPr txBox="1"/>
+          <p:nvPr/>
+        </p:nvSpPr>
+        <p:spPr>
+          <a:xfrm>
+            <a:off x="1066800" y="2990000"/>
+            <a:ext cx="10375392" cy="620000"/>
+          </a:xfrm>
+          <a:prstGeom prst="rect">
+            <a:avLst/>
+          </a:prstGeom>
+          <a:noFill/>
+        </p:spPr>
+        <p:txBody>
+          <a:bodyPr wrap="square" lIns="0" rIns="0" tIns="0" bIns="0" anchor="t">
+            <a:spAutoFit/>
+          </a:bodyPr>
+          <a:lstStyle/>
+          <a:p>
+            <a:pPr algn="l">
+              <a:lnSpc>
+                <a:spcPct val="140000"/>
+              </a:lnSpc>
+            </a:pPr>
+            <a:r>
+              <a:rPr sz="1200" b="0">
+                <a:solidFill>
+                  <a:srgbClr val="414C58"/>
+                </a:solidFill>
+                <a:latin typeface="Nunito Sans"/>
+              </a:rPr>
+              <a:t>Вихід PID стає швидкістю; ESP32 інтегрує її в кут щотику.</a:t>
+            </a:r>
+          </a:p>
+          <a:p>
+            <a:pPr algn="l">
+              <a:lnSpc>
+                <a:spcPct val="140000"/>
+              </a:lnSpc>
+            </a:pPr>
+            <a:r>
+              <a:rPr sz="1200" b="0">
+                <a:solidFill>
+                  <a:srgbClr val="414C58"/>
+                </a:solidFill>
+                <a:latin typeface="Nunito Sans"/>
+              </a:rPr>
+              <a:t>Шум усереднюється, рух плавний і обмежений за швидкістю.</a:t>
+            </a:r>
+          </a:p>
+        </p:txBody>
+      </p:sp>
+      <p:sp>
+        <p:nvSpPr>
+          <p:cNvPr id="106" name="Rounded Rectangle 105"/>
+          <p:cNvSpPr/>
+          <p:nvPr/>
+        </p:nvSpPr>
+        <p:spPr>
+          <a:xfrm>
+            <a:off x="812800" y="4020000"/>
+            <a:ext cx="10883392" cy="1980000"/>
+          </a:xfrm>
+          <a:prstGeom prst="roundRect">
+            <a:avLst>
+              <a:gd name="adj" fmla="val 8000"/>
+            </a:avLst>
+          </a:prstGeom>
+          <a:solidFill>
+            <a:srgbClr val="ECE7E2"/>
+          </a:solidFill>
+          <a:ln>
+            <a:noFill/>
+          </a:ln>
+          <a:effectLst/>
+        </p:spPr>
+        <p:style>
+          <a:lnRef idx="1">
+            <a:schemeClr val="accent1"/>
+          </a:lnRef>
+          <a:fillRef idx="3">
+            <a:schemeClr val="accent1"/>
+          </a:fillRef>
+          <a:effectRef idx="2">
+            <a:schemeClr val="accent1"/>
+          </a:effectRef>
+          <a:fontRef idx="minor">
+            <a:schemeClr val="lt1"/>
+          </a:fontRef>
+        </p:style>
+        <p:txBody>
+          <a:bodyPr rtlCol="0" anchor="ctr"/>
+          <a:lstStyle/>
+          <a:p>
+            <a:pPr algn="ctr"/>
+          </a:p>
+        </p:txBody>
+      </p:sp>
+      <p:sp>
+        <p:nvSpPr>
+          <p:cNvPr id="107" name="TextBox 106"/>
+          <p:cNvSpPr txBox="1"/>
+          <p:nvPr/>
+        </p:nvSpPr>
+        <p:spPr>
+          <a:xfrm>
+            <a:off x="1066800" y="4170000"/>
+            <a:ext cx="10375392" cy="320000"/>
+          </a:xfrm>
+          <a:prstGeom prst="rect">
+            <a:avLst/>
+          </a:prstGeom>
+          <a:noFill/>
+        </p:spPr>
+        <p:txBody>
+          <a:bodyPr wrap="square" lIns="0" rIns="0" tIns="0" bIns="0" anchor="t">
+            <a:spAutoFit/>
+          </a:bodyPr>
+          <a:lstStyle/>
+          <a:p>
+            <a:pPr algn="l">
+              <a:lnSpc>
+                <a:spcPct val="140000"/>
+              </a:lnSpc>
+            </a:pPr>
+            <a:r>
+              <a:rPr sz="1400" b="1">
+                <a:solidFill>
+                  <a:srgbClr val="232323"/>
+                </a:solidFill>
+                <a:latin typeface="Nunito Sans"/>
+              </a:rPr>
+              <a:t>VelocityEquationPid — приріст кута</a:t>
+            </a:r>
+          </a:p>
+        </p:txBody>
+      </p:sp>
+      <p:sp>
+        <p:nvSpPr>
+          <p:cNvPr id="108" name="Rounded Rectangle 107"/>
+          <p:cNvSpPr/>
+          <p:nvPr/>
+        </p:nvSpPr>
+        <p:spPr>
+          <a:xfrm>
+            <a:off x="1066800" y="4640000"/>
+            <a:ext cx="1867078" cy="440000"/>
+          </a:xfrm>
+          <a:prstGeom prst="roundRect">
+            <a:avLst>
+              <a:gd name="adj" fmla="val 16000"/>
+            </a:avLst>
+          </a:prstGeom>
+          <a:solidFill>
+            <a:srgbClr val="FFFFFF"/>
+          </a:solidFill>
+          <a:ln>
+            <a:noFill/>
+          </a:ln>
+          <a:effectLst/>
+        </p:spPr>
+        <p:style>
+          <a:lnRef idx="1">
+            <a:schemeClr val="accent1"/>
+          </a:lnRef>
+          <a:fillRef idx="3">
+            <a:schemeClr val="accent1"/>
+          </a:fillRef>
+          <a:effectRef idx="2">
+            <a:schemeClr val="accent1"/>
+          </a:effectRef>
+          <a:fontRef idx="minor">
+            <a:schemeClr val="lt1"/>
+          </a:fontRef>
+        </p:style>
+        <p:txBody>
+          <a:bodyPr rtlCol="0" anchor="ctr" wrap="square" lIns="45000" rIns="45000" tIns="18000" bIns="18000"/>
+          <a:lstStyle/>
+          <a:p>
+            <a:pPr algn="ctr">
+              <a:lnSpc>
+                <a:spcPct val="105000"/>
+              </a:lnSpc>
+            </a:pPr>
+            <a:r>
+              <a:rPr sz="1100" b="1">
+                <a:solidFill>
+                  <a:srgbClr val="232323"/>
+                </a:solidFill>
+                <a:latin typeface="Nunito Sans"/>
+              </a:rPr>
+              <a:t>похибка</a:t>
+            </a:r>
+          </a:p>
+        </p:txBody>
+      </p:sp>
+      <p:pic>
+        <p:nvPicPr>
+          <p:cNvPr id="109" name="Picture 108" descr="image.png"/>
+          <p:cNvPicPr>
+            <a:picLocks noChangeAspect="1"/>
+          </p:cNvPicPr>
+          <p:nvPr/>
+        </p:nvPicPr>
+        <p:blipFill>
+          <a:blip r:embed="rId3"/>
+          <a:stretch>
+            <a:fillRect/>
+          </a:stretch>
+        </p:blipFill>
+        <p:spPr>
+          <a:xfrm>
+            <a:off x="2933878" y="4795000"/>
+            <a:ext cx="260000" cy="130000"/>
+          </a:xfrm>
+          <a:prstGeom prst="rect">
+            <a:avLst/>
+          </a:prstGeom>
+        </p:spPr>
+      </p:pic>
+      <p:sp>
+        <p:nvSpPr>
+          <p:cNvPr id="110" name="Rounded Rectangle 109"/>
+          <p:cNvSpPr/>
+          <p:nvPr/>
+        </p:nvSpPr>
+        <p:spPr>
+          <a:xfrm>
+            <a:off x="3193878" y="4640000"/>
+            <a:ext cx="1867078" cy="440000"/>
+          </a:xfrm>
+          <a:prstGeom prst="roundRect">
+            <a:avLst>
+              <a:gd name="adj" fmla="val 16000"/>
+            </a:avLst>
+          </a:prstGeom>
+          <a:solidFill>
+            <a:srgbClr val="FFFFFF"/>
+          </a:solidFill>
+          <a:ln>
+            <a:noFill/>
+          </a:ln>
+          <a:effectLst/>
+        </p:spPr>
+        <p:style>
+          <a:lnRef idx="1">
+            <a:schemeClr val="accent1"/>
+          </a:lnRef>
+          <a:fillRef idx="3">
+            <a:schemeClr val="accent1"/>
+          </a:fillRef>
+          <a:effectRef idx="2">
+            <a:schemeClr val="accent1"/>
+          </a:effectRef>
+          <a:fontRef idx="minor">
+            <a:schemeClr val="lt1"/>
+          </a:fontRef>
+        </p:style>
+        <p:txBody>
+          <a:bodyPr rtlCol="0" anchor="ctr" wrap="square" lIns="45000" rIns="45000" tIns="18000" bIns="18000"/>
+          <a:lstStyle/>
+          <a:p>
+            <a:pPr algn="ctr">
+              <a:lnSpc>
+                <a:spcPct val="105000"/>
+              </a:lnSpc>
+            </a:pPr>
+            <a:r>
+              <a:rPr sz="1100" b="1">
+                <a:solidFill>
+                  <a:srgbClr val="232323"/>
+                </a:solidFill>
+                <a:latin typeface="Nunito Sans"/>
+              </a:rPr>
+              <a:t>PID</a:t>
+            </a:r>
+          </a:p>
+        </p:txBody>
+      </p:sp>
+      <p:pic>
+        <p:nvPicPr>
+          <p:cNvPr id="111" name="Picture 110" descr="image.png"/>
+          <p:cNvPicPr>
+            <a:picLocks noChangeAspect="1"/>
+          </p:cNvPicPr>
+          <p:nvPr/>
+        </p:nvPicPr>
+        <p:blipFill>
+          <a:blip r:embed="rId3"/>
+          <a:stretch>
+            <a:fillRect/>
+          </a:stretch>
+        </p:blipFill>
+        <p:spPr>
+          <a:xfrm>
+            <a:off x="5060956" y="4795000"/>
+            <a:ext cx="260000" cy="130000"/>
+          </a:xfrm>
+          <a:prstGeom prst="rect">
+            <a:avLst/>
+          </a:prstGeom>
+        </p:spPr>
+      </p:pic>
+      <p:sp>
+        <p:nvSpPr>
+          <p:cNvPr id="112" name="Rounded Rectangle 111"/>
+          <p:cNvSpPr/>
+          <p:nvPr/>
+        </p:nvSpPr>
+        <p:spPr>
+          <a:xfrm>
+            <a:off x="5320956" y="4640000"/>
+            <a:ext cx="1867078" cy="440000"/>
+          </a:xfrm>
+          <a:prstGeom prst="roundRect">
+            <a:avLst>
+              <a:gd name="adj" fmla="val 16000"/>
+            </a:avLst>
+          </a:prstGeom>
+          <a:solidFill>
+            <a:srgbClr val="FFFFFF"/>
+          </a:solidFill>
+          <a:ln>
+            <a:noFill/>
+          </a:ln>
+          <a:effectLst/>
+        </p:spPr>
+        <p:style>
+          <a:lnRef idx="1">
+            <a:schemeClr val="accent1"/>
+          </a:lnRef>
+          <a:fillRef idx="3">
+            <a:schemeClr val="accent1"/>
+          </a:fillRef>
+          <a:effectRef idx="2">
+            <a:schemeClr val="accent1"/>
+          </a:effectRef>
+          <a:fontRef idx="minor">
+            <a:schemeClr val="lt1"/>
+          </a:fontRef>
+        </p:style>
+        <p:txBody>
+          <a:bodyPr rtlCol="0" anchor="ctr" wrap="square" lIns="45000" rIns="45000" tIns="18000" bIns="18000"/>
+          <a:lstStyle/>
+          <a:p>
+            <a:pPr algn="ctr">
+              <a:lnSpc>
+                <a:spcPct val="105000"/>
+              </a:lnSpc>
+            </a:pPr>
+            <a:r>
+              <a:rPr sz="1100" b="1">
+                <a:solidFill>
+                  <a:srgbClr val="232323"/>
+                </a:solidFill>
+                <a:latin typeface="Nunito Sans"/>
+              </a:rPr>
+              <a:t>приріст Δu</a:t>
+            </a:r>
+          </a:p>
+        </p:txBody>
+      </p:sp>
+      <p:pic>
+        <p:nvPicPr>
+          <p:cNvPr id="113" name="Picture 112" descr="image.png"/>
+          <p:cNvPicPr>
+            <a:picLocks noChangeAspect="1"/>
+          </p:cNvPicPr>
+          <p:nvPr/>
+        </p:nvPicPr>
+        <p:blipFill>
+          <a:blip r:embed="rId3"/>
+          <a:stretch>
+            <a:fillRect/>
+          </a:stretch>
+        </p:blipFill>
+        <p:spPr>
+          <a:xfrm>
+            <a:off x="7188034" y="4795000"/>
+            <a:ext cx="260000" cy="130000"/>
+          </a:xfrm>
+          <a:prstGeom prst="rect">
+            <a:avLst/>
+          </a:prstGeom>
+        </p:spPr>
+      </p:pic>
+      <p:sp>
+        <p:nvSpPr>
+          <p:cNvPr id="114" name="Rounded Rectangle 113"/>
+          <p:cNvSpPr/>
+          <p:nvPr/>
+        </p:nvSpPr>
+        <p:spPr>
+          <a:xfrm>
+            <a:off x="7448034" y="4640000"/>
+            <a:ext cx="1867078" cy="440000"/>
+          </a:xfrm>
+          <a:prstGeom prst="roundRect">
+            <a:avLst>
+              <a:gd name="adj" fmla="val 16000"/>
+            </a:avLst>
+          </a:prstGeom>
+          <a:solidFill>
+            <a:srgbClr val="D9CFC2"/>
+          </a:solidFill>
+          <a:ln>
+            <a:noFill/>
+          </a:ln>
+          <a:effectLst/>
+        </p:spPr>
+        <p:style>
+          <a:lnRef idx="1">
+            <a:schemeClr val="accent1"/>
+          </a:lnRef>
+          <a:fillRef idx="3">
+            <a:schemeClr val="accent1"/>
+          </a:fillRef>
+          <a:effectRef idx="2">
+            <a:schemeClr val="accent1"/>
+          </a:effectRef>
+          <a:fontRef idx="minor">
+            <a:schemeClr val="lt1"/>
+          </a:fontRef>
+        </p:style>
+        <p:txBody>
+          <a:bodyPr rtlCol="0" anchor="ctr" wrap="square" lIns="45000" rIns="45000" tIns="18000" bIns="18000"/>
+          <a:lstStyle/>
+          <a:p>
+            <a:pPr algn="ctr">
+              <a:lnSpc>
+                <a:spcPct val="105000"/>
+              </a:lnSpc>
+            </a:pPr>
+            <a:r>
+              <a:rPr sz="1100" b="1">
+                <a:solidFill>
+                  <a:srgbClr val="232323"/>
+                </a:solidFill>
+                <a:latin typeface="Nunito Sans"/>
+              </a:rPr>
+              <a:t>кут += Δu</a:t>
+            </a:r>
+          </a:p>
+        </p:txBody>
+      </p:sp>
+      <p:pic>
+        <p:nvPicPr>
+          <p:cNvPr id="115" name="Picture 114" descr="image.png"/>
+          <p:cNvPicPr>
+            <a:picLocks noChangeAspect="1"/>
+          </p:cNvPicPr>
+          <p:nvPr/>
+        </p:nvPicPr>
+        <p:blipFill>
+          <a:blip r:embed="rId3"/>
+          <a:stretch>
+            <a:fillRect/>
+          </a:stretch>
+        </p:blipFill>
+        <p:spPr>
+          <a:xfrm>
+            <a:off x="9315112" y="4795000"/>
+            <a:ext cx="260000" cy="130000"/>
+          </a:xfrm>
+          <a:prstGeom prst="rect">
+            <a:avLst/>
+          </a:prstGeom>
+        </p:spPr>
+      </p:pic>
+      <p:sp>
+        <p:nvSpPr>
+          <p:cNvPr id="116" name="Rounded Rectangle 115"/>
+          <p:cNvSpPr/>
+          <p:nvPr/>
+        </p:nvSpPr>
+        <p:spPr>
+          <a:xfrm>
+            <a:off x="9575112" y="4640000"/>
+            <a:ext cx="1867078" cy="440000"/>
+          </a:xfrm>
+          <a:prstGeom prst="roundRect">
+            <a:avLst>
+              <a:gd name="adj" fmla="val 16000"/>
+            </a:avLst>
+          </a:prstGeom>
+          <a:solidFill>
+            <a:srgbClr val="FFFFFF"/>
+          </a:solidFill>
+          <a:ln>
+            <a:noFill/>
+          </a:ln>
+          <a:effectLst/>
+        </p:spPr>
+        <p:style>
+          <a:lnRef idx="1">
+            <a:schemeClr val="accent1"/>
+          </a:lnRef>
+          <a:fillRef idx="3">
+            <a:schemeClr val="accent1"/>
+          </a:fillRef>
+          <a:effectRef idx="2">
+            <a:schemeClr val="accent1"/>
+          </a:effectRef>
+          <a:fontRef idx="minor">
+            <a:schemeClr val="lt1"/>
+          </a:fontRef>
+        </p:style>
+        <p:txBody>
+          <a:bodyPr rtlCol="0" anchor="ctr" wrap="square" lIns="45000" rIns="45000" tIns="18000" bIns="18000"/>
+          <a:lstStyle/>
+          <a:p>
+            <a:pPr algn="ctr">
+              <a:lnSpc>
+                <a:spcPct val="105000"/>
+              </a:lnSpc>
+            </a:pPr>
+            <a:r>
+              <a:rPr sz="1100" b="1">
+                <a:solidFill>
+                  <a:srgbClr val="232323"/>
+                </a:solidFill>
+                <a:latin typeface="Nunito Sans"/>
+              </a:rPr>
+              <a:t>сервопривід</a:t>
+            </a:r>
+          </a:p>
+        </p:txBody>
+      </p:sp>
+      <p:sp>
+        <p:nvSpPr>
+          <p:cNvPr id="117" name="TextBox 116"/>
+          <p:cNvSpPr txBox="1"/>
+          <p:nvPr/>
+        </p:nvSpPr>
+        <p:spPr>
+          <a:xfrm>
+            <a:off x="1066800" y="5230000"/>
+            <a:ext cx="10375392" cy="620000"/>
+          </a:xfrm>
+          <a:prstGeom prst="rect">
+            <a:avLst/>
+          </a:prstGeom>
+          <a:noFill/>
+        </p:spPr>
+        <p:txBody>
+          <a:bodyPr wrap="square" lIns="0" rIns="0" tIns="0" bIns="0" anchor="t">
+            <a:spAutoFit/>
+          </a:bodyPr>
+          <a:lstStyle/>
+          <a:p>
+            <a:pPr algn="l">
+              <a:lnSpc>
+                <a:spcPct val="140000"/>
+              </a:lnSpc>
+            </a:pPr>
+            <a:r>
+              <a:rPr sz="1200" b="0">
+                <a:solidFill>
+                  <a:srgbClr val="414C58"/>
+                </a:solidFill>
+                <a:latin typeface="Nunito Sans"/>
+              </a:rPr>
+              <a:t>Вихід PID — приріст кута Δu; кут += Δu, без інтегратора.</a:t>
+            </a:r>
+          </a:p>
+          <a:p>
+            <a:pPr algn="l">
+              <a:lnSpc>
+                <a:spcPct val="140000"/>
+              </a:lnSpc>
+            </a:pPr>
+            <a:r>
+              <a:rPr sz="1200" b="0">
+                <a:solidFill>
+                  <a:srgbClr val="414C58"/>
+                </a:solidFill>
+                <a:latin typeface="Nunito Sans"/>
+              </a:rPr>
+              <a:t>Швидко на стрибок цілі, але шум кадра — стрибок позиції.</a:t>
             </a:r>
           </a:p>
         </p:txBody>

--- a/workshop-7-final_project/docs/assestment/presentation/Laser Gimbal with Camera Tracking on ESP32-S3.pptx
+++ b/workshop-7-final_project/docs/assestment/presentation/Laser Gimbal with Camera Tracking on ESP32-S3.pptx
@@ -7038,7 +7038,7 @@
                           </a:solidFill>
                           <a:latin typeface="Nunito Sans"/>
                         </a:rPr>
-                        <a:t>Автофокус вимкнено, фіксована позиція лінзи (--focus=130); live-підбір у speed.py.</a:t>
+                        <a:t>Автофокус вимкнено, фіксована позиція лінзи (--focus=130); live-підбір фокусу в UI оператора.</a:t>
                       </a:r>
                     </a:p>
                   </a:txBody>
@@ -17507,7 +17507,7 @@
         </p:nvGraphicFramePr>
         <p:xfrm>
           <a:off x="812800" y="2098302"/>
-          <a:ext cx="5340096" cy="3418641"/>
+          <a:ext cx="5340096" cy="4018641"/>
         </p:xfrm>
         <a:graphic>
           <a:graphicData uri="http://schemas.openxmlformats.org/drawingml/2006/table">
@@ -17822,6 +17822,25 @@
                           <a:hlinkClick r:id="rId7"/>
                         </a:rPr>
                         <a:t>Gimbal.hpp</a:t>
+                      </a:r>
+                      <a:r>
+                        <a:rPr sz="1050" b="0" u="none">
+                          <a:solidFill>
+                            <a:srgbClr val="414C58"/>
+                          </a:solidFill>
+                          <a:latin typeface="Nunito Sans"/>
+                        </a:rPr>
+                        <a:t> через один </a:t>
+                      </a:r>
+                      <a:r>
+                        <a:rPr sz="1050" b="0" u="sng">
+                          <a:solidFill>
+                            <a:srgbClr val="2A5C8F"/>
+                          </a:solidFill>
+                          <a:latin typeface="Nunito Sans"/>
+                          <a:hlinkClick r:id="rId12"/>
+                        </a:rPr>
+                        <a:t>IInputChannel.hpp</a:t>
                       </a:r>
                       <a:r>
                         <a:rPr sz="1050" b="0" u="none">
@@ -18129,9 +18148,21 @@
                             <a:srgbClr val="2A5C8F"/>
                           </a:solidFill>
                           <a:latin typeface="Nunito Sans"/>
-                          <a:hlinkClick r:id="rId12"/>
+                          <a:hlinkClick r:id="rId13"/>
                         </a:rPr>
-                        <a:t>utils/Pid.hpp</a:t>
+                        <a:t>NoneChannel.hpp</a:t>
+                      </a:r>
+                    </a:p>
+                    <a:p>
+                      <a:r>
+                        <a:rPr sz="1050" b="1" u="sng">
+                          <a:solidFill>
+                            <a:srgbClr val="2A5C8F"/>
+                          </a:solidFill>
+                          <a:latin typeface="Nunito Sans"/>
+                          <a:hlinkClick r:id="rId14"/>
+                        </a:rPr>
+                        <a:t>ManualChannel.hpp</a:t>
                       </a:r>
                     </a:p>
                   </a:txBody>
@@ -18168,7 +18199,7 @@
                           </a:solidFill>
                           <a:latin typeface="Nunito Sans"/>
                         </a:rPr>
-                        <a:t>Швидкісна форма PID: вихід = швидкість, інтегрується в кут щотику.</a:t>
+                        <a:t>Порожній канал (гімбал стоїть) і ручне керування швидкістю з ПК, з таймаутом.</a:t>
                       </a:r>
                     </a:p>
                   </a:txBody>
@@ -18206,9 +18237,27 @@
                             <a:srgbClr val="2A5C8F"/>
                           </a:solidFill>
                           <a:latin typeface="Nunito Sans"/>
-                          <a:hlinkClick r:id="rId13"/>
+                          <a:hlinkClick r:id="rId24"/>
                         </a:rPr>
-                        <a:t>AutoChannel.hpp</a:t>
+                        <a:t>AutoPositional</a:t>
+                      </a:r>
+                      <a:br>
+                        <a:rPr sz="1050" b="1" u="sng">
+                          <a:solidFill>
+                            <a:srgbClr val="2A5C8F"/>
+                          </a:solidFill>
+                          <a:latin typeface="Nunito Sans"/>
+                        </a:rPr>
+                      </a:br>
+                      <a:r>
+                        <a:rPr sz="1050" b="1" u="sng">
+                          <a:solidFill>
+                            <a:srgbClr val="2A5C8F"/>
+                          </a:solidFill>
+                          <a:latin typeface="Nunito Sans"/>
+                          <a:hlinkClick r:id="rId24"/>
+                        </a:rPr>
+                        <a:t>Channel.hpp</a:t>
                       </a:r>
                     </a:p>
                     <a:p>
@@ -18218,9 +18267,27 @@
                             <a:srgbClr val="2A5C8F"/>
                           </a:solidFill>
                           <a:latin typeface="Nunito Sans"/>
-                          <a:hlinkClick r:id="rId14"/>
+                          <a:hlinkClick r:id="rId27"/>
                         </a:rPr>
-                        <a:t>ManualChannel.hpp</a:t>
+                        <a:t>AutoVelocityEquation</a:t>
+                      </a:r>
+                      <a:br>
+                        <a:rPr sz="1050" b="1" u="sng">
+                          <a:solidFill>
+                            <a:srgbClr val="2A5C8F"/>
+                          </a:solidFill>
+                          <a:latin typeface="Nunito Sans"/>
+                        </a:rPr>
+                      </a:br>
+                      <a:r>
+                        <a:rPr sz="1050" b="1" u="sng">
+                          <a:solidFill>
+                            <a:srgbClr val="2A5C8F"/>
+                          </a:solidFill>
+                          <a:latin typeface="Nunito Sans"/>
+                          <a:hlinkClick r:id="rId27"/>
+                        </a:rPr>
+                        <a:t>Channel.hpp</a:t>
                       </a:r>
                     </a:p>
                   </a:txBody>
@@ -18257,7 +18324,67 @@
                           </a:solidFill>
                           <a:latin typeface="Nunito Sans"/>
                         </a:rPr>
-                        <a:t>Авто-наведення за похибкою від EYE та ручне керування з ПК.</a:t>
+                        <a:t>Два авто-режими наведення за похибкою EYE:</a:t>
+                      </a:r>
+                    </a:p>
+                    <a:p>
+                      <a:r>
+                        <a:rPr sz="1050" b="0" u="none">
+                          <a:solidFill>
+                            <a:srgbClr val="414C58"/>
+                          </a:solidFill>
+                          <a:latin typeface="Nunito Sans"/>
+                        </a:rPr>
+                        <a:t>→ позиційний </a:t>
+                      </a:r>
+                      <a:r>
+                        <a:rPr sz="1050" b="0" u="sng">
+                          <a:solidFill>
+                            <a:srgbClr val="2A5C8F"/>
+                          </a:solidFill>
+                          <a:latin typeface="Nunito Sans"/>
+                          <a:hlinkClick r:id="rId28"/>
+                        </a:rPr>
+                        <a:t>PositionalPid.hpp</a:t>
+                      </a:r>
+                      <a:r>
+                        <a:rPr sz="1050" b="0" u="none">
+                          <a:solidFill>
+                            <a:srgbClr val="414C58"/>
+                          </a:solidFill>
+                          <a:latin typeface="Nunito Sans"/>
+                        </a:rPr>
+                        <a:t> → швидкість.</a:t>
+                      </a:r>
+                    </a:p>
+                    <a:p>
+                      <a:r>
+                        <a:rPr sz="1050" b="0" u="none">
+                          <a:solidFill>
+                            <a:srgbClr val="414C58"/>
+                          </a:solidFill>
+                          <a:latin typeface="Nunito Sans"/>
+                        </a:rPr>
+                        <a:t>→ </a:t>
+                      </a:r>
+                      <a:r>
+                        <a:rPr sz="1050" b="0" u="sng">
+                          <a:solidFill>
+                            <a:srgbClr val="2A5C8F"/>
+                          </a:solidFill>
+                          <a:latin typeface="Nunito Sans"/>
+                          <a:hlinkClick r:id="rId29"/>
+                        </a:rPr>
+                        <a:t>VelocityEquationPid.hpp</a:t>
+                      </a:r>
+                      <a:r>
+                        <a:rPr sz="1050" b="0" u="none">
+                          <a:solidFill>
+                            <a:srgbClr val="414C58"/>
+                          </a:solidFill>
+                          <a:latin typeface="Nunito Sans"/>
+                        </a:rPr>
+                        <a:t> → дельта кута, moveTo().</a:t>
                       </a:r>
                     </a:p>
                   </a:txBody>
@@ -18297,7 +18424,7 @@
         </p:nvGraphicFramePr>
         <p:xfrm>
           <a:off x="6349096" y="2098302"/>
-          <a:ext cx="5340096" cy="2638641"/>
+          <a:ext cx="5340096" cy="2248641"/>
         </p:xfrm>
         <a:graphic>
           <a:graphicData uri="http://schemas.openxmlformats.org/drawingml/2006/table">
@@ -18887,83 +19014,6 @@
                     </a:lnB>
                     <a:solidFill>
                       <a:srgbClr val="FFFFFF"/>
-                    </a:solidFill>
-                  </a:tcPr>
-                </a:tc>
-              </a:tr>
-              <a:tr h="390000">
-                <a:tc>
-                  <a:txBody>
-                    <a:bodyPr wrap="square"/>
-                    <a:lstStyle/>
-                    <a:p>
-                      <a:r>
-                        <a:rPr sz="1050" b="1" u="sng">
-                          <a:solidFill>
-                            <a:srgbClr val="2A5C8F"/>
-                          </a:solidFill>
-                          <a:latin typeface="Nunito Sans"/>
-                          <a:hlinkClick r:id="rId24"/>
-                        </a:rPr>
-                        <a:t>speed.py</a:t>
-                      </a:r>
-                    </a:p>
-                  </a:txBody>
-                  <a:tcPr marL="127000" marR="91440" marT="41910" marB="41910" anchor="ctr">
-                    <a:lnL w="12700" cap="flat" cmpd="sng" algn="ctr">
-                      <a:noFill/>
-                    </a:lnL>
-                    <a:lnR w="12700" cap="flat" cmpd="sng" algn="ctr">
-                      <a:noFill/>
-                    </a:lnR>
-                    <a:lnT w="12700" cap="flat" cmpd="sng" algn="ctr">
-                      <a:noFill/>
-                    </a:lnT>
-                    <a:lnB w="6350" cap="flat" cmpd="sng" algn="ctr">
-                      <a:solidFill>
-                        <a:srgbClr val="D9D9D9"/>
-                      </a:solidFill>
-                      <a:prstDash val="solid"/>
-                    </a:lnB>
-                    <a:solidFill>
-                      <a:srgbClr val="ECE7E2"/>
-                    </a:solidFill>
-                  </a:tcPr>
-                </a:tc>
-                <a:tc>
-                  <a:txBody>
-                    <a:bodyPr wrap="square"/>
-                    <a:lstStyle/>
-                    <a:p>
-                      <a:r>
-                        <a:rPr sz="1050" b="0" u="none">
-                          <a:solidFill>
-                            <a:srgbClr val="414C58"/>
-                          </a:solidFill>
-                          <a:latin typeface="Nunito Sans"/>
-                        </a:rPr>
-                        <a:t>Live-підбір фокусу камери та швидкості наведення.</a:t>
-                      </a:r>
-                    </a:p>
-                  </a:txBody>
-                  <a:tcPr marL="0" marR="91440" marT="41910" marB="41910" anchor="ctr">
-                    <a:lnL w="12700" cap="flat" cmpd="sng" algn="ctr">
-                      <a:noFill/>
-                    </a:lnL>
-                    <a:lnR w="12700" cap="flat" cmpd="sng" algn="ctr">
-                      <a:noFill/>
-                    </a:lnR>
-                    <a:lnT w="12700" cap="flat" cmpd="sng" algn="ctr">
-                      <a:noFill/>
-                    </a:lnT>
-                    <a:lnB w="6350" cap="flat" cmpd="sng" algn="ctr">
-                      <a:solidFill>
-                        <a:srgbClr val="D9D9D9"/>
-                      </a:solidFill>
-                      <a:prstDash val="solid"/>
-                    </a:lnB>
-                    <a:solidFill>
-                      <a:srgbClr val="ECE7E2"/>
                     </a:solidFill>
                   </a:tcPr>
                 </a:tc>

--- a/workshop-7-final_project/docs/assestment/presentation/Laser Gimbal with Camera Tracking on ESP32-S3.pptx
+++ b/workshop-7-final_project/docs/assestment/presentation/Laser Gimbal with Camera Tracking on ESP32-S3.pptx
@@ -18474,7 +18474,7 @@
         </p:nvGraphicFramePr>
         <p:xfrm>
           <a:off x="812880" y="1649880"/>
-          <a:ext cx="10565280" cy="4102200"/>
+          <a:ext cx="10565280" cy="3866040"/>
         </p:xfrm>
         <a:graphic>
           <a:graphicData uri="http://schemas.openxmlformats.org/drawingml/2006/table">
@@ -19241,236 +19241,6 @@
                     </a:lnB>
                     <a:solidFill>
                       <a:srgbClr val="ECE7E2"/>
-                    </a:solidFill>
-                  </a:tcPr>
-                </a:tc>
-              </a:tr>
-              <a:tr h="236160">
-                <a:tc>
-                  <a:txBody>
-                    <a:bodyPr lIns="126720" anchor="ctr">
-                      <a:noAutofit/>
-                    </a:bodyPr>
-                    <a:p>
-                      <a:pPr>
-                        <a:lnSpc>
-                          <a:spcPct val="100000"/>
-                        </a:lnSpc>
-                      </a:pPr>
-                      <a:r>
-                        <a:rPr lang="en-US" sz="950" b="1" u="none" strike="noStrike">
-                          <a:solidFill>
-                            <a:srgbClr val="232323"/>
-                          </a:solidFill>
-                          <a:effectLst/>
-                          <a:uFillTx/>
-                          <a:latin typeface="Nunito Sans"/>
-                          <a:ea typeface="Arial"/>
-                        </a:rPr>
-                        <a:t>Лазер блимає при запуску</a:t>
-                      </a:r>
-                      <a:endParaRPr lang="en-US" sz="950" b="0" u="none" strike="noStrike">
-                        <a:solidFill>
-                          <a:srgbClr val="000000"/>
-                        </a:solidFill>
-                        <a:effectLst/>
-                        <a:uFillTx/>
-                        <a:latin typeface="Arial"/>
-                      </a:endParaRPr>
-                    </a:p>
-                  </a:txBody>
-                  <a:tcPr anchor="ctr" marL="126720" marR="91440" marT="45720" marB="45720">
-                    <a:lnL w="12240">
-                      <a:noFill/>
-                      <a:prstDash val="solid"/>
-                    </a:lnL>
-                    <a:lnR w="12240">
-                      <a:noFill/>
-                      <a:prstDash val="solid"/>
-                    </a:lnR>
-                    <a:lnT w="12240">
-                      <a:noFill/>
-                      <a:prstDash val="solid"/>
-                    </a:lnT>
-                    <a:lnB w="6480">
-                      <a:solidFill>
-                        <a:srgbClr val="D9D9D9"/>
-                      </a:solidFill>
-                      <a:prstDash val="solid"/>
-                    </a:lnB>
-                    <a:solidFill>
-                      <a:srgbClr val="FFFFFF"/>
-                    </a:solidFill>
-                  </a:tcPr>
-                </a:tc>
-                <a:tc>
-                  <a:txBody>
-                    <a:bodyPr lIns="0" anchor="ctr">
-                      <a:noAutofit/>
-                    </a:bodyPr>
-                    <a:p>
-                      <a:pPr>
-                        <a:lnSpc>
-                          <a:spcPct val="100000"/>
-                        </a:lnSpc>
-                      </a:pPr>
-                      <a:r>
-                        <a:rPr lang="en-US" sz="950" b="0" u="none" strike="noStrike">
-                          <a:solidFill>
-                            <a:srgbClr val="414C58"/>
-                          </a:solidFill>
-                          <a:effectLst/>
-                          <a:uFillTx/>
-                          <a:latin typeface="Nunito Sans"/>
-                          <a:ea typeface="Arial"/>
-                        </a:rPr>
-                        <a:t>Не діагностовано (TODO)</a:t>
-                      </a:r>
-                      <a:endParaRPr lang="en-US" sz="950" b="0" u="none" strike="noStrike">
-                        <a:solidFill>
-                          <a:srgbClr val="000000"/>
-                        </a:solidFill>
-                        <a:effectLst/>
-                        <a:uFillTx/>
-                        <a:latin typeface="Arial"/>
-                      </a:endParaRPr>
-                    </a:p>
-                  </a:txBody>
-                  <a:tcPr anchor="ctr" marL="0" marR="91440" marT="45720" marB="45720">
-                    <a:lnL w="12240">
-                      <a:noFill/>
-                      <a:prstDash val="solid"/>
-                    </a:lnL>
-                    <a:lnR w="12240">
-                      <a:noFill/>
-                      <a:prstDash val="solid"/>
-                    </a:lnR>
-                    <a:lnT w="12240">
-                      <a:noFill/>
-                      <a:prstDash val="solid"/>
-                    </a:lnT>
-                    <a:lnB w="6480">
-                      <a:solidFill>
-                        <a:srgbClr val="D9D9D9"/>
-                      </a:solidFill>
-                      <a:prstDash val="solid"/>
-                    </a:lnB>
-                    <a:solidFill>
-                      <a:srgbClr val="FFFFFF"/>
-                    </a:solidFill>
-                  </a:tcPr>
-                </a:tc>
-                <a:tc>
-                  <a:txBody>
-                    <a:bodyPr lIns="0" anchor="ctr">
-                      <a:noAutofit/>
-                    </a:bodyPr>
-                    <a:p>
-                      <a:pPr>
-                        <a:lnSpc>
-                          <a:spcPct val="100000"/>
-                        </a:lnSpc>
-                      </a:pPr>
-                      <a:r>
-                        <a:rPr lang="en-US" sz="950" b="1" u="none" strike="noStrike">
-                          <a:solidFill>
-                            <a:srgbClr val="232323"/>
-                          </a:solidFill>
-                          <a:effectLst/>
-                          <a:uFillTx/>
-                          <a:latin typeface="Nunito Sans"/>
-                          <a:ea typeface="Arial"/>
-                        </a:rPr>
-                        <a:t>TODO: причина й фікс.</a:t>
-                      </a:r>
-                      <a:endParaRPr lang="en-US" sz="950" b="0" u="none" strike="noStrike">
-                        <a:solidFill>
-                          <a:srgbClr val="000000"/>
-                        </a:solidFill>
-                        <a:effectLst/>
-                        <a:uFillTx/>
-                        <a:latin typeface="Arial"/>
-                      </a:endParaRPr>
-                    </a:p>
-                  </a:txBody>
-                  <a:tcPr anchor="ctr" marL="0" marR="91440" marT="45720" marB="45720">
-                    <a:lnL w="12240">
-                      <a:noFill/>
-                      <a:prstDash val="solid"/>
-                    </a:lnL>
-                    <a:lnR w="12240">
-                      <a:noFill/>
-                      <a:prstDash val="solid"/>
-                    </a:lnR>
-                    <a:lnT w="12240">
-                      <a:noFill/>
-                      <a:prstDash val="solid"/>
-                    </a:lnT>
-                    <a:lnB w="6480">
-                      <a:solidFill>
-                        <a:srgbClr val="D9D9D9"/>
-                      </a:solidFill>
-                      <a:prstDash val="solid"/>
-                    </a:lnB>
-                    <a:solidFill>
-                      <a:srgbClr val="FFFFFF"/>
-                    </a:solidFill>
-                  </a:tcPr>
-                </a:tc>
-                <a:tc>
-                  <a:txBody>
-                    <a:bodyPr lIns="0" anchor="ctr">
-                      <a:noAutofit/>
-                    </a:bodyPr>
-                    <a:p>
-                      <a:pPr>
-                        <a:lnSpc>
-                          <a:spcPct val="100000"/>
-                        </a:lnSpc>
-                      </a:pPr>
-                      <a:r>
-                        <a:rPr lang="en-US" sz="1000" b="1" u="none" strike="noStrike">
-                          <a:solidFill>
-                            <a:srgbClr val="232323"/>
-                          </a:solidFill>
-                          <a:effectLst/>
-                          <a:uFillTx/>
-                          <a:latin typeface="Nunito Sans"/>
-                          <a:ea typeface="Arial"/>
-                        </a:rPr>
-                        <a:t>Відкрито</a:t>
-                      </a:r>
-                      <a:endParaRPr lang="en-US" sz="1000" b="0" u="none" strike="noStrike">
-                        <a:solidFill>
-                          <a:srgbClr val="000000"/>
-                        </a:solidFill>
-                        <a:effectLst/>
-                        <a:uFillTx/>
-                        <a:latin typeface="Arial"/>
-                      </a:endParaRPr>
-                    </a:p>
-                  </a:txBody>
-                  <a:tcPr anchor="ctr" marL="0" marR="91440" marT="45720" marB="45720">
-                    <a:lnL w="12240">
-                      <a:noFill/>
-                      <a:prstDash val="solid"/>
-                    </a:lnL>
-                    <a:lnR w="12240">
-                      <a:noFill/>
-                      <a:prstDash val="solid"/>
-                    </a:lnR>
-                    <a:lnT w="12240">
-                      <a:noFill/>
-                      <a:prstDash val="solid"/>
-                    </a:lnT>
-                    <a:lnB w="6480">
-                      <a:solidFill>
-                        <a:srgbClr val="D9D9D9"/>
-                      </a:solidFill>
-                      <a:prstDash val="solid"/>
-                    </a:lnB>
-                    <a:solidFill>
-                      <a:srgbClr val="FFFFFF"/>
                     </a:solidFill>
                   </a:tcPr>
                 </a:tc>

--- a/workshop-7-final_project/docs/assestment/presentation/Laser Gimbal with Camera Tracking on ESP32-S3.pptx
+++ b/workshop-7-final_project/docs/assestment/presentation/Laser Gimbal with Camera Tracking on ESP32-S3.pptx
@@ -690,7 +690,7 @@
                 <a:latin typeface="Calibri"/>
                 <a:ea typeface="Calibri"/>
               </a:rPr>
-              <a:t>Це прийшло з огляду проєкту, а не зі стенда — це режими відмов, які ми виявили, продумавши монтаж і протокол ще до того, як вони стали інцидентами на стенді.</a:t>
+              <a:t>Це прийшло з огляду проєкту, а не зі стенда — це режими відмов, які я виявив, продумавши монтаж і протокол ще до того, як вони стали інцидентами на стенді.</a:t>
             </a:r>
             <a:endParaRPr lang="en-US" sz="1200" b="0" u="none" strike="noStrike">
               <a:solidFill>
@@ -1605,7 +1605,7 @@
                 <a:latin typeface="Calibri"/>
                 <a:ea typeface="Calibri"/>
               </a:rPr>
-              <a:t>Головна ідея: ми задаємо швидкість, а не кут, і даємо прошивці інтегрувати швидкість у кут кожні 20 мілісекунд. Цей інтегратор означає, що зазвичай достатньо простого пропорційного регулятора — не треба вручну налаштовувати повний PID.</a:t>
+              <a:t>Головна ідея: я задаю швидкість, а не кут, і даю прошивці інтегрувати швидкість у кут кожні 20 мілісекунд. Цей інтегратор означає, що зазвичай достатньо простого пропорційного регулятора — не треба вручну налаштовувати повний PID.</a:t>
             </a:r>
             <a:endParaRPr lang="en-US" sz="1200" b="0" u="none" strike="noStrike">
               <a:solidFill>
@@ -2185,7 +2185,7 @@
                 <a:latin typeface="Calibri"/>
                 <a:ea typeface="Calibri"/>
               </a:rPr>
-              <a:t>Шість невеликих рішень, які вберегли нас від більших проблем згодом. Варто затриматися на другому рядку: власне обмеження PID встановлене нижче жорсткої межі Gimbal, тож логіка anti-windup завжди бачить справжню межу — це перевіряється static_assert на етапі компіляції.</a:t>
+              <a:t>Вісім невеликих рішень, які вберегли мене від більших проблем згодом. Варто затриматися на другому рядку: власне обмеження PID встановлене нижче жорсткої межі Gimbal, тож логіка anti-windup завжди бачить справжню межу — це перевіряється static_assert на етапі компіляції.</a:t>
             </a:r>
             <a:endParaRPr lang="en-US" sz="1200" b="0" u="none" strike="noStrike">
               <a:solidFill>
@@ -2551,7 +2551,7 @@
                 <a:latin typeface="Calibri"/>
                 <a:ea typeface="Calibri"/>
               </a:rPr>
-              <a:t>Це реальні збої, з якими ми зіткнулися на стенді, а не гіпотетичні. Найстрашніший — зліт авто-наведення: пройдіться виправленням через обмеження уважно, це те, про що найімовірніше запитають.</a:t>
+              <a:t>Це реальні збої, з якими я зіткнувся на стенді, а не гіпотетичні. Найстрашніший — зліт авто-наведення: пройдіться виправленням через обмеження уважно, це те, про що найімовірніше запитають.</a:t>
             </a:r>
             <a:endParaRPr lang="en-US" sz="1200" b="0" u="none" strike="noStrike">
               <a:solidFill>
@@ -4269,7 +4269,7 @@
                 <a:latin typeface="Nunito Sans"/>
                 <a:ea typeface="Nunito Sans"/>
               </a:rPr>
-              <a:t>Інші проблеми з проєктування</a:t>
+              <a:t>Інші проблеми проєктування</a:t>
             </a:r>
             <a:endParaRPr lang="en-US" sz="2400" b="0" u="none" strike="noStrike">
               <a:solidFill>
@@ -4297,10 +4297,11 @@
             <a:tbl>
               <a:tblPr/>
               <a:tblGrid>
-                <a:gridCol w="3199680"/>
-                <a:gridCol w="3399840"/>
-                <a:gridCol w="2399760"/>
+                <a:gridCol w="2849680"/>
+                <a:gridCol w="2999840"/>
+                <a:gridCol w="2049760"/>
                 <a:gridCol w="1566360"/>
+                <a:gridCol w="1100000"/>
               </a:tblGrid>
               <a:tr h="259920">
                 <a:tc>
@@ -4438,7 +4439,7 @@
                           <a:latin typeface="Nunito Sans"/>
                           <a:ea typeface="Arial"/>
                         </a:rPr>
-                        <a:t>Що ми зробили</a:t>
+                        <a:t>Що зробив</a:t>
                       </a:r>
                       <a:endParaRPr lang="en-US" sz="1050" b="0" u="none" strike="noStrike">
                         <a:solidFill>
@@ -4496,6 +4497,63 @@
                           <a:ea typeface="Arial"/>
                         </a:rPr>
                         <a:t>Статус</a:t>
+                      </a:r>
+                      <a:endParaRPr lang="en-US" sz="1050" b="0" u="none" strike="noStrike">
+                        <a:solidFill>
+                          <a:srgbClr val="000000"/>
+                        </a:solidFill>
+                        <a:effectLst/>
+                        <a:uFillTx/>
+                        <a:latin typeface="Arial"/>
+                      </a:endParaRPr>
+                    </a:p>
+                  </a:txBody>
+                  <a:tcPr anchor="ctr" marL="0" marR="91440" marT="45720" marB="45720">
+                    <a:lnL w="12240">
+                      <a:noFill/>
+                      <a:prstDash val="solid"/>
+                    </a:lnL>
+                    <a:lnR w="12240">
+                      <a:noFill/>
+                      <a:prstDash val="solid"/>
+                    </a:lnR>
+                    <a:lnT w="12240">
+                      <a:noFill/>
+                      <a:prstDash val="solid"/>
+                    </a:lnT>
+                    <a:lnB w="6480">
+                      <a:solidFill>
+                        <a:srgbClr val="D9D9D9"/>
+                      </a:solidFill>
+                      <a:prstDash val="solid"/>
+                    </a:lnB>
+                    <a:solidFill>
+                      <a:srgbClr val="C5D6E9"/>
+                    </a:solidFill>
+                  </a:tcPr>
+                </a:tc>
+                <a:tc>
+                  <a:txBody>
+                    <a:bodyPr lIns="0" anchor="ctr">
+                      <a:noAutofit/>
+                    </a:bodyPr>
+                    <a:p>
+                      <a:pPr>
+                        <a:lnSpc>
+                          <a:spcPct val="100000"/>
+                        </a:lnSpc>
+                      </a:pPr>
+                      <a:r>
+                        <a:rPr lang="en-US" sz="1050" b="1" u="none" strike="noStrike">
+                          <a:solidFill>
+                            <a:srgbClr val="232323"/>
+                          </a:solidFill>
+                          <a:effectLst/>
+                          <a:uFillTx/>
+                          <a:latin typeface="Nunito Sans"/>
+                          <a:ea typeface="Arial"/>
+                        </a:rPr>
+                        <a:t>Код</a:t>
                       </a:r>
                       <a:endParaRPr lang="en-US" sz="1050" b="0" u="none" strike="noStrike">
                         <a:solidFill>
@@ -4761,6 +4819,92 @@
                     </a:solidFill>
                   </a:tcPr>
                 </a:tc>
+                <a:tc>
+                  <a:txBody>
+                    <a:bodyPr lIns="0" anchor="ctr">
+                      <a:noAutofit/>
+                    </a:bodyPr>
+                    <a:p>
+                      <a:pPr>
+                        <a:lnSpc>
+                          <a:spcPct val="100000"/>
+                        </a:lnSpc>
+                      </a:pPr>
+                      <a:r>
+                        <a:rPr lang="en-US" sz="950" b="0" u="sng" strike="noStrike">
+                          <a:solidFill>
+                            <a:srgbClr val="0563C1"/>
+                          </a:solidFill>
+                          <a:effectLst/>
+                          <a:uFillTx/>
+                          <a:latin typeface="Nunito Sans"/>
+                          <a:ea typeface="Arial"/>
+                          <a:hlinkClick r:id="rId7"/>
+                        </a:rPr>
+                        <a:t>Protocol.hpp</a:t>
+                      </a:r>
+                      <a:endParaRPr lang="en-US" sz="1000" b="0" u="none" strike="noStrike">
+                        <a:solidFill>
+                          <a:srgbClr val="000000"/>
+                        </a:solidFill>
+                        <a:effectLst/>
+                        <a:uFillTx/>
+                        <a:latin typeface="Arial"/>
+                      </a:endParaRPr>
+                    </a:p>
+                    <a:p>
+                      <a:pPr>
+                        <a:lnSpc>
+                          <a:spcPct val="100000"/>
+                        </a:lnSpc>
+                      </a:pPr>
+                      <a:r>
+                        <a:rPr lang="en-US" sz="950" b="0" u="sng" strike="noStrike">
+                          <a:solidFill>
+                            <a:srgbClr val="0563C1"/>
+                          </a:solidFill>
+                          <a:effectLst/>
+                          <a:uFillTx/>
+                          <a:latin typeface="Nunito Sans"/>
+                          <a:ea typeface="Arial"/>
+                          <a:hlinkClick r:id="rId8"/>
+                        </a:rPr>
+                        <a:t>Pinout.hpp</a:t>
+                      </a:r>
+                      <a:endParaRPr lang="en-US" sz="1000" b="0" u="none" strike="noStrike">
+                        <a:solidFill>
+                          <a:srgbClr val="000000"/>
+                        </a:solidFill>
+                        <a:effectLst/>
+                        <a:uFillTx/>
+                        <a:latin typeface="Arial"/>
+                      </a:endParaRPr>
+                    </a:p>
+                  </a:txBody>
+                  <a:tcPr anchor="ctr" marL="0" marR="91440" marT="45720" marB="45720">
+                    <a:lnL w="12240">
+                      <a:noFill/>
+                      <a:prstDash val="solid"/>
+                    </a:lnL>
+                    <a:lnR w="12240">
+                      <a:noFill/>
+                      <a:prstDash val="solid"/>
+                    </a:lnR>
+                    <a:lnT w="12240">
+                      <a:noFill/>
+                      <a:prstDash val="solid"/>
+                    </a:lnT>
+                    <a:lnB w="6480">
+                      <a:solidFill>
+                        <a:srgbClr val="D9D9D9"/>
+                      </a:solidFill>
+                      <a:prstDash val="solid"/>
+                    </a:lnB>
+                    <a:solidFill>
+                      <a:srgbClr val="FFFFFF"/>
+                    </a:solidFill>
+                  </a:tcPr>
+                </a:tc>
               </a:tr>
               <a:tr h="380880">
                 <a:tc>
@@ -4956,6 +5100,64 @@
                           <a:ea typeface="Arial"/>
                         </a:rPr>
                         <a:t>Виправлено</a:t>
+                      </a:r>
+                      <a:endParaRPr lang="en-US" sz="1000" b="0" u="none" strike="noStrike">
+                        <a:solidFill>
+                          <a:srgbClr val="000000"/>
+                        </a:solidFill>
+                        <a:effectLst/>
+                        <a:uFillTx/>
+                        <a:latin typeface="Arial"/>
+                      </a:endParaRPr>
+                    </a:p>
+                  </a:txBody>
+                  <a:tcPr anchor="ctr" marL="0" marR="91440" marT="45720" marB="45720">
+                    <a:lnL w="12240">
+                      <a:noFill/>
+                      <a:prstDash val="solid"/>
+                    </a:lnL>
+                    <a:lnR w="12240">
+                      <a:noFill/>
+                      <a:prstDash val="solid"/>
+                    </a:lnR>
+                    <a:lnT w="12240">
+                      <a:noFill/>
+                      <a:prstDash val="solid"/>
+                    </a:lnT>
+                    <a:lnB w="6480">
+                      <a:solidFill>
+                        <a:srgbClr val="D9D9D9"/>
+                      </a:solidFill>
+                      <a:prstDash val="solid"/>
+                    </a:lnB>
+                    <a:solidFill>
+                      <a:srgbClr val="ECE7E2"/>
+                    </a:solidFill>
+                  </a:tcPr>
+                </a:tc>
+                <a:tc>
+                  <a:txBody>
+                    <a:bodyPr lIns="0" anchor="ctr">
+                      <a:noAutofit/>
+                    </a:bodyPr>
+                    <a:p>
+                      <a:pPr>
+                        <a:lnSpc>
+                          <a:spcPct val="100000"/>
+                        </a:lnSpc>
+                      </a:pPr>
+                      <a:r>
+                        <a:rPr lang="en-US" sz="950" b="0" u="sng" strike="noStrike">
+                          <a:solidFill>
+                            <a:srgbClr val="0563C1"/>
+                          </a:solidFill>
+                          <a:effectLst/>
+                          <a:uFillTx/>
+                          <a:latin typeface="Nunito Sans"/>
+                          <a:ea typeface="Arial"/>
+                          <a:hlinkClick r:id="rId9"/>
+                        </a:rPr>
+                        <a:t>Relay.hpp</a:t>
                       </a:r>
                       <a:endParaRPr lang="en-US" sz="1000" b="0" u="none" strike="noStrike">
                         <a:solidFill>
@@ -5221,6 +5423,92 @@
                     </a:solidFill>
                   </a:tcPr>
                 </a:tc>
+                <a:tc>
+                  <a:txBody>
+                    <a:bodyPr lIns="0" anchor="ctr">
+                      <a:noAutofit/>
+                    </a:bodyPr>
+                    <a:p>
+                      <a:pPr>
+                        <a:lnSpc>
+                          <a:spcPct val="100000"/>
+                        </a:lnSpc>
+                      </a:pPr>
+                      <a:r>
+                        <a:rPr lang="en-US" sz="950" b="0" u="sng" strike="noStrike">
+                          <a:solidFill>
+                            <a:srgbClr val="0563C1"/>
+                          </a:solidFill>
+                          <a:effectLst/>
+                          <a:uFillTx/>
+                          <a:latin typeface="Nunito Sans"/>
+                          <a:ea typeface="Arial"/>
+                          <a:hlinkClick r:id="rId10"/>
+                        </a:rPr>
+                        <a:t>Logger.hpp</a:t>
+                      </a:r>
+                      <a:endParaRPr lang="en-US" sz="1000" b="0" u="none" strike="noStrike">
+                        <a:solidFill>
+                          <a:srgbClr val="000000"/>
+                        </a:solidFill>
+                        <a:effectLst/>
+                        <a:uFillTx/>
+                        <a:latin typeface="Arial"/>
+                      </a:endParaRPr>
+                    </a:p>
+                    <a:p>
+                      <a:pPr>
+                        <a:lnSpc>
+                          <a:spcPct val="100000"/>
+                        </a:lnSpc>
+                      </a:pPr>
+                      <a:r>
+                        <a:rPr lang="en-US" sz="950" b="0" u="sng" strike="noStrike">
+                          <a:solidFill>
+                            <a:srgbClr val="0563C1"/>
+                          </a:solidFill>
+                          <a:effectLst/>
+                          <a:uFillTx/>
+                          <a:latin typeface="Nunito Sans"/>
+                          <a:ea typeface="Arial"/>
+                          <a:hlinkClick r:id="rId11"/>
+                        </a:rPr>
+                        <a:t>LogQueue.hpp</a:t>
+                      </a:r>
+                      <a:endParaRPr lang="en-US" sz="1000" b="0" u="none" strike="noStrike">
+                        <a:solidFill>
+                          <a:srgbClr val="000000"/>
+                        </a:solidFill>
+                        <a:effectLst/>
+                        <a:uFillTx/>
+                        <a:latin typeface="Arial"/>
+                      </a:endParaRPr>
+                    </a:p>
+                  </a:txBody>
+                  <a:tcPr anchor="ctr" marL="0" marR="91440" marT="45720" marB="45720">
+                    <a:lnL w="12240">
+                      <a:noFill/>
+                      <a:prstDash val="solid"/>
+                    </a:lnL>
+                    <a:lnR w="12240">
+                      <a:noFill/>
+                      <a:prstDash val="solid"/>
+                    </a:lnR>
+                    <a:lnT w="12240">
+                      <a:noFill/>
+                      <a:prstDash val="solid"/>
+                    </a:lnT>
+                    <a:lnB w="6480">
+                      <a:solidFill>
+                        <a:srgbClr val="D9D9D9"/>
+                      </a:solidFill>
+                      <a:prstDash val="solid"/>
+                    </a:lnB>
+                    <a:solidFill>
+                      <a:srgbClr val="FFFFFF"/>
+                    </a:solidFill>
+                  </a:tcPr>
+                </a:tc>
               </a:tr>
               <a:tr h="380880">
                 <a:tc>
@@ -5301,7 +5589,7 @@
                           <a:latin typeface="Nunito Sans"/>
                           <a:ea typeface="Arial"/>
                         </a:rPr>
-                        <a:t>Затримка камери й обробки кадру вносить мертвий час, що обмежує підсилення PID</a:t>
+                        <a:t>Камера й обробка кадру додають мертвий час, який обмежує підсилення PID</a:t>
                       </a:r>
                       <a:endParaRPr lang="en-US" sz="950" b="0" u="none" strike="noStrike">
                         <a:solidFill>
@@ -5416,6 +5704,63 @@
                           <a:ea typeface="Arial"/>
                         </a:rPr>
                         <a:t>Відкрито</a:t>
+                      </a:r>
+                      <a:endParaRPr lang="en-US" sz="1000" b="0" u="none" strike="noStrike">
+                        <a:solidFill>
+                          <a:srgbClr val="000000"/>
+                        </a:solidFill>
+                        <a:effectLst/>
+                        <a:uFillTx/>
+                        <a:latin typeface="Arial"/>
+                      </a:endParaRPr>
+                    </a:p>
+                  </a:txBody>
+                  <a:tcPr anchor="ctr" marL="0" marR="91440" marT="45720" marB="45720">
+                    <a:lnL w="12240">
+                      <a:noFill/>
+                      <a:prstDash val="solid"/>
+                    </a:lnL>
+                    <a:lnR w="12240">
+                      <a:noFill/>
+                      <a:prstDash val="solid"/>
+                    </a:lnR>
+                    <a:lnT w="12240">
+                      <a:noFill/>
+                      <a:prstDash val="solid"/>
+                    </a:lnT>
+                    <a:lnB w="6480">
+                      <a:solidFill>
+                        <a:srgbClr val="D9D9D9"/>
+                      </a:solidFill>
+                      <a:prstDash val="solid"/>
+                    </a:lnB>
+                    <a:solidFill>
+                      <a:srgbClr val="ECE7E2"/>
+                    </a:solidFill>
+                  </a:tcPr>
+                </a:tc>
+                <a:tc>
+                  <a:txBody>
+                    <a:bodyPr lIns="0" anchor="ctr">
+                      <a:noAutofit/>
+                    </a:bodyPr>
+                    <a:p>
+                      <a:pPr>
+                        <a:lnSpc>
+                          <a:spcPct val="100000"/>
+                        </a:lnSpc>
+                      </a:pPr>
+                      <a:r>
+                        <a:rPr lang="en-US" sz="950" b="0" u="none" strike="noStrike">
+                          <a:solidFill>
+                            <a:srgbClr val="9AA0A6"/>
+                          </a:solidFill>
+                          <a:effectLst/>
+                          <a:uFillTx/>
+                          <a:latin typeface="Nunito Sans"/>
+                          <a:ea typeface="Arial"/>
+                        </a:rPr>
+                        <a:t>—</a:t>
                       </a:r>
                       <a:endParaRPr lang="en-US" sz="1000" b="0" u="none" strike="noStrike">
                         <a:solidFill>
@@ -5646,6 +5991,64 @@
                           <a:ea typeface="Arial"/>
                         </a:rPr>
                         <a:t>Виправлено</a:t>
+                      </a:r>
+                      <a:endParaRPr lang="en-US" sz="1000" b="0" u="none" strike="noStrike">
+                        <a:solidFill>
+                          <a:srgbClr val="000000"/>
+                        </a:solidFill>
+                        <a:effectLst/>
+                        <a:uFillTx/>
+                        <a:latin typeface="Arial"/>
+                      </a:endParaRPr>
+                    </a:p>
+                  </a:txBody>
+                  <a:tcPr anchor="ctr" marL="0" marR="91440" marT="45720" marB="45720">
+                    <a:lnL w="12240">
+                      <a:noFill/>
+                      <a:prstDash val="solid"/>
+                    </a:lnL>
+                    <a:lnR w="12240">
+                      <a:noFill/>
+                      <a:prstDash val="solid"/>
+                    </a:lnR>
+                    <a:lnT w="12240">
+                      <a:noFill/>
+                      <a:prstDash val="solid"/>
+                    </a:lnT>
+                    <a:lnB w="6480">
+                      <a:solidFill>
+                        <a:srgbClr val="D9D9D9"/>
+                      </a:solidFill>
+                      <a:prstDash val="solid"/>
+                    </a:lnB>
+                    <a:solidFill>
+                      <a:srgbClr val="ECE7E2"/>
+                    </a:solidFill>
+                  </a:tcPr>
+                </a:tc>
+                <a:tc>
+                  <a:txBody>
+                    <a:bodyPr lIns="0" anchor="ctr">
+                      <a:noAutofit/>
+                    </a:bodyPr>
+                    <a:p>
+                      <a:pPr>
+                        <a:lnSpc>
+                          <a:spcPct val="100000"/>
+                        </a:lnSpc>
+                      </a:pPr>
+                      <a:r>
+                        <a:rPr lang="en-US" sz="950" b="0" u="sng" strike="noStrike">
+                          <a:solidFill>
+                            <a:srgbClr val="0563C1"/>
+                          </a:solidFill>
+                          <a:effectLst/>
+                          <a:uFillTx/>
+                          <a:latin typeface="Nunito Sans"/>
+                          <a:ea typeface="Arial"/>
+                          <a:hlinkClick r:id="rId12"/>
+                        </a:rPr>
+                        <a:t>serial_link.py</a:t>
                       </a:r>
                       <a:endParaRPr lang="en-US" sz="1000" b="0" u="none" strike="noStrike">
                         <a:solidFill>
@@ -5953,6 +6356,63 @@
                     </a:solidFill>
                   </a:tcPr>
                 </a:tc>
+                <a:tc>
+                  <a:txBody>
+                    <a:bodyPr lIns="0" anchor="ctr">
+                      <a:noAutofit/>
+                    </a:bodyPr>
+                    <a:p>
+                      <a:pPr>
+                        <a:lnSpc>
+                          <a:spcPct val="100000"/>
+                        </a:lnSpc>
+                      </a:pPr>
+                      <a:r>
+                        <a:rPr lang="en-US" sz="950" b="0" u="none" strike="noStrike">
+                          <a:solidFill>
+                            <a:srgbClr val="9AA0A6"/>
+                          </a:solidFill>
+                          <a:effectLst/>
+                          <a:uFillTx/>
+                          <a:latin typeface="Nunito Sans"/>
+                          <a:ea typeface="Arial"/>
+                        </a:rPr>
+                        <a:t>—</a:t>
+                      </a:r>
+                      <a:endParaRPr lang="en-US" sz="1000" b="0" u="none" strike="noStrike">
+                        <a:solidFill>
+                          <a:srgbClr val="000000"/>
+                        </a:solidFill>
+                        <a:effectLst/>
+                        <a:uFillTx/>
+                        <a:latin typeface="Arial"/>
+                      </a:endParaRPr>
+                    </a:p>
+                  </a:txBody>
+                  <a:tcPr anchor="ctr" marL="0" marR="91440" marT="45720" marB="45720">
+                    <a:lnL w="12240">
+                      <a:noFill/>
+                      <a:prstDash val="solid"/>
+                    </a:lnL>
+                    <a:lnR w="12240">
+                      <a:noFill/>
+                      <a:prstDash val="solid"/>
+                    </a:lnR>
+                    <a:lnT w="12240">
+                      <a:noFill/>
+                      <a:prstDash val="solid"/>
+                    </a:lnT>
+                    <a:lnB w="6480">
+                      <a:solidFill>
+                        <a:srgbClr val="D9D9D9"/>
+                      </a:solidFill>
+                      <a:prstDash val="solid"/>
+                    </a:lnB>
+                    <a:solidFill>
+                      <a:srgbClr val="FFFFFF"/>
+                    </a:solidFill>
+                  </a:tcPr>
+                </a:tc>
               </a:tr>
               <a:tr h="525600">
                 <a:tc>
@@ -6148,6 +6608,64 @@
                           <a:ea typeface="Arial"/>
                         </a:rPr>
                         <a:t>Частково</a:t>
+                      </a:r>
+                      <a:endParaRPr lang="en-US" sz="1000" b="0" u="none" strike="noStrike">
+                        <a:solidFill>
+                          <a:srgbClr val="000000"/>
+                        </a:solidFill>
+                        <a:effectLst/>
+                        <a:uFillTx/>
+                        <a:latin typeface="Arial"/>
+                      </a:endParaRPr>
+                    </a:p>
+                  </a:txBody>
+                  <a:tcPr anchor="ctr" marL="0" marR="91440" marT="45720" marB="45720">
+                    <a:lnL w="12240">
+                      <a:noFill/>
+                      <a:prstDash val="solid"/>
+                    </a:lnL>
+                    <a:lnR w="12240">
+                      <a:noFill/>
+                      <a:prstDash val="solid"/>
+                    </a:lnR>
+                    <a:lnT w="12240">
+                      <a:noFill/>
+                      <a:prstDash val="solid"/>
+                    </a:lnT>
+                    <a:lnB w="6480">
+                      <a:solidFill>
+                        <a:srgbClr val="D9D9D9"/>
+                      </a:solidFill>
+                      <a:prstDash val="solid"/>
+                    </a:lnB>
+                    <a:solidFill>
+                      <a:srgbClr val="ECE7E2"/>
+                    </a:solidFill>
+                  </a:tcPr>
+                </a:tc>
+                <a:tc>
+                  <a:txBody>
+                    <a:bodyPr lIns="0" anchor="ctr">
+                      <a:noAutofit/>
+                    </a:bodyPr>
+                    <a:p>
+                      <a:pPr>
+                        <a:lnSpc>
+                          <a:spcPct val="100000"/>
+                        </a:lnSpc>
+                      </a:pPr>
+                      <a:r>
+                        <a:rPr lang="en-US" sz="950" b="0" u="sng" strike="noStrike">
+                          <a:solidFill>
+                            <a:srgbClr val="0563C1"/>
+                          </a:solidFill>
+                          <a:effectLst/>
+                          <a:uFillTx/>
+                          <a:latin typeface="Nunito Sans"/>
+                          <a:ea typeface="Arial"/>
+                          <a:hlinkClick r:id="rId13"/>
+                        </a:rPr>
+                        <a:t>recenter.py</a:t>
                       </a:r>
                       <a:endParaRPr lang="en-US" sz="1000" b="0" u="none" strike="noStrike">
                         <a:solidFill>
@@ -6378,6 +6896,92 @@
                           <a:ea typeface="Arial"/>
                         </a:rPr>
                         <a:t>Частково</a:t>
+                      </a:r>
+                      <a:endParaRPr lang="en-US" sz="1000" b="0" u="none" strike="noStrike">
+                        <a:solidFill>
+                          <a:srgbClr val="000000"/>
+                        </a:solidFill>
+                        <a:effectLst/>
+                        <a:uFillTx/>
+                        <a:latin typeface="Arial"/>
+                      </a:endParaRPr>
+                    </a:p>
+                  </a:txBody>
+                  <a:tcPr anchor="ctr" marL="0" marR="91440" marT="45720" marB="45720">
+                    <a:lnL w="12240">
+                      <a:noFill/>
+                      <a:prstDash val="solid"/>
+                    </a:lnL>
+                    <a:lnR w="12240">
+                      <a:noFill/>
+                      <a:prstDash val="solid"/>
+                    </a:lnR>
+                    <a:lnT w="12240">
+                      <a:noFill/>
+                      <a:prstDash val="solid"/>
+                    </a:lnT>
+                    <a:lnB w="6480">
+                      <a:solidFill>
+                        <a:srgbClr val="D9D9D9"/>
+                      </a:solidFill>
+                      <a:prstDash val="solid"/>
+                    </a:lnB>
+                    <a:solidFill>
+                      <a:srgbClr val="FFFFFF"/>
+                    </a:solidFill>
+                  </a:tcPr>
+                </a:tc>
+                <a:tc>
+                  <a:txBody>
+                    <a:bodyPr lIns="0" anchor="ctr">
+                      <a:noAutofit/>
+                    </a:bodyPr>
+                    <a:p>
+                      <a:pPr>
+                        <a:lnSpc>
+                          <a:spcPct val="100000"/>
+                        </a:lnSpc>
+                      </a:pPr>
+                      <a:r>
+                        <a:rPr lang="en-US" sz="950" b="0" u="sng" strike="noStrike">
+                          <a:solidFill>
+                            <a:srgbClr val="0563C1"/>
+                          </a:solidFill>
+                          <a:effectLst/>
+                          <a:uFillTx/>
+                          <a:latin typeface="Nunito Sans"/>
+                          <a:ea typeface="Arial"/>
+                          <a:hlinkClick r:id="rId14"/>
+                        </a:rPr>
+                        <a:t>tracker.py</a:t>
+                      </a:r>
+                      <a:endParaRPr lang="en-US" sz="1000" b="0" u="none" strike="noStrike">
+                        <a:solidFill>
+                          <a:srgbClr val="000000"/>
+                        </a:solidFill>
+                        <a:effectLst/>
+                        <a:uFillTx/>
+                        <a:latin typeface="Arial"/>
+                      </a:endParaRPr>
+                    </a:p>
+                    <a:p>
+                      <a:pPr>
+                        <a:lnSpc>
+                          <a:spcPct val="100000"/>
+                        </a:lnSpc>
+                      </a:pPr>
+                      <a:r>
+                        <a:rPr lang="en-US" sz="950" b="0" u="sng" strike="noStrike">
+                          <a:solidFill>
+                            <a:srgbClr val="0563C1"/>
+                          </a:solidFill>
+                          <a:effectLst/>
+                          <a:uFillTx/>
+                          <a:latin typeface="Nunito Sans"/>
+                          <a:ea typeface="Arial"/>
+                          <a:hlinkClick r:id="rId15"/>
+                        </a:rPr>
+                        <a:t>speed.py</a:t>
                       </a:r>
                       <a:endParaRPr lang="en-US" sz="1000" b="0" u="none" strike="noStrike">
                         <a:solidFill>
@@ -8537,20 +9141,7 @@
                 <a:latin typeface="Nunito Sans"/>
                 <a:ea typeface="Arial"/>
               </a:rPr>
-              <a:t> · стенд AIM (ESP32-S3) та eye-app під час наведення на ціль · </a:t>
-            </a:r>
-            <a:r>
-              <a:rPr lang="en-US" sz="800" b="0" i="1" u="sng" strike="noStrike">
-                <a:solidFill>
-                  <a:srgbClr val="0563C1"/>
-                </a:solidFill>
-                <a:effectLst/>
-                <a:uFillTx/>
-                <a:latin typeface="Nunito Sans"/>
-                <a:ea typeface="Arial"/>
-                <a:hlinkClick r:id="rId6"/>
-              </a:rPr>
-              <a:t>Video Demo 1</a:t>
+              <a:t> · стенд AIM (ESP32-S3) та eye-app під час наведення на ціль</a:t>
             </a:r>
             <a:endParaRPr lang="en-US" sz="800" b="0" u="none" strike="noStrike">
               <a:solidFill>
@@ -8563,6 +9154,105 @@
           </a:p>
         </p:txBody>
       </p:sp>
+      <p:sp>
+        <p:nvSpPr>
+          <p:cNvPr id="128" name="Video Demo Button">
+            <a:hlinkClick r:id="rId6"/>
+          </p:cNvPr>
+          <p:cNvSpPr/>
+          <p:nvPr/>
+        </p:nvSpPr>
+        <p:spPr>
+          <a:xfrm>
+            <a:off x="8779120" y="772380"/>
+            <a:ext cx="2600000" cy="420480"/>
+          </a:xfrm>
+          <a:prstGeom prst="roundRect">
+            <a:avLst>
+              <a:gd name="adj" fmla="val 50000"/>
+            </a:avLst>
+          </a:prstGeom>
+          <a:solidFill>
+            <a:srgbClr val="FF0000"/>
+          </a:solidFill>
+          <a:ln w="0">
+            <a:noFill/>
+          </a:ln>
+          <a:effectLst>
+            <a:outerShdw blurRad="50000" dir="5400000" dist="20000" rotWithShape="0">
+              <a:srgbClr val="232323">
+                <a:alpha val="35000"/>
+              </a:srgbClr>
+            </a:outerShdw>
+          </a:effectLst>
+        </p:spPr>
+        <p:style>
+          <a:lnRef idx="0"/>
+          <a:fillRef idx="0"/>
+          <a:effectRef idx="0"/>
+          <a:fontRef idx="minor"/>
+        </p:style>
+        <p:txBody>
+          <a:bodyPr lIns="90000" tIns="45720" rIns="90000" bIns="45720" anchor="ctr">
+            <a:noAutofit/>
+          </a:bodyPr>
+          <a:p>
+            <a:pPr algn="ctr"/>
+            <a:r>
+              <a:rPr lang="en-US" sz="1300" b="1" u="none" strike="noStrike">
+                <a:solidFill>
+                  <a:srgbClr val="FFFFFF"/>
+                </a:solidFill>
+                <a:effectLst/>
+                <a:uFillTx/>
+                <a:latin typeface="Nunito Sans"/>
+                <a:ea typeface="Nunito Sans"/>
+                <a:hlinkClick r:id="rId6"/>
+              </a:rPr>
+              <a:t>► Video Demo</a:t>
+            </a:r>
+            <a:endParaRPr lang="en-US" sz="1300" b="0" u="none" strike="noStrike">
+              <a:solidFill>
+                <a:srgbClr val="FFFFFF"/>
+              </a:solidFill>
+              <a:effectLst/>
+              <a:uFillTx/>
+              <a:latin typeface="Arial"/>
+            </a:endParaRPr>
+          </a:p>
+        </p:txBody>
+      </p:sp>
+      <p:pic>
+        <p:nvPicPr>
+          <p:cNvPr id="129" name="Video Demo QR" descr="QR code linking to the video demo">
+            <a:hlinkClick r:id="rId6"/>
+          </p:cNvPr>
+          <p:cNvPicPr>
+            <a:picLocks noChangeAspect="1"/>
+          </p:cNvPicPr>
+          <p:nvPr/>
+        </p:nvPicPr>
+        <p:blipFill>
+          <a:blip r:embed="rId7"/>
+          <a:stretch>
+            <a:fillRect/>
+          </a:stretch>
+        </p:blipFill>
+        <p:spPr>
+          <a:xfrm>
+            <a:off x="8207680" y="742620"/>
+            <a:ext cx="480000" cy="480000"/>
+          </a:xfrm>
+          <a:prstGeom prst="rect">
+            <a:avLst/>
+          </a:prstGeom>
+          <a:ln w="6350">
+            <a:solidFill>
+              <a:srgbClr val="D9D9D9"/>
+            </a:solidFill>
+          </a:ln>
+        </p:spPr>
+      </p:pic>
     </p:spTree>
   </p:cSld>
   <mc:AlternateContent>
@@ -13861,7 +14551,7 @@
         </p:nvGraphicFramePr>
         <p:xfrm>
           <a:off x="812880" y="1691640"/>
-          <a:ext cx="10565280" cy="3293640"/>
+          <a:ext cx="10565280" cy="4095120"/>
         </p:xfrm>
         <a:graphic>
           <a:graphicData uri="http://schemas.openxmlformats.org/drawingml/2006/table">
@@ -13870,7 +14560,8 @@
               <a:tblGrid>
                 <a:gridCol w="733680"/>
                 <a:gridCol w="4650480"/>
-                <a:gridCol w="5181480"/>
+                <a:gridCol w="4031480"/>
+                <a:gridCol w="1150000"/>
               </a:tblGrid>
               <a:tr h="398520">
                 <a:tc>
@@ -14044,8 +14735,65 @@
                     </a:solidFill>
                   </a:tcPr>
                 </a:tc>
+                <a:tc>
+                  <a:txBody>
+                    <a:bodyPr lIns="0" tIns="0" bIns="0" anchor="ctr">
+                      <a:noAutofit/>
+                    </a:bodyPr>
+                    <a:p>
+                      <a:pPr>
+                        <a:lnSpc>
+                          <a:spcPct val="100000"/>
+                        </a:lnSpc>
+                      </a:pPr>
+                      <a:r>
+                        <a:rPr lang="en-US" sz="1100" b="1" u="none" strike="noStrike">
+                          <a:solidFill>
+                            <a:srgbClr val="232323"/>
+                          </a:solidFill>
+                          <a:effectLst/>
+                          <a:uFillTx/>
+                          <a:latin typeface="Nunito Sans"/>
+                          <a:ea typeface="Arial"/>
+                        </a:rPr>
+                        <a:t>Код</a:t>
+                      </a:r>
+                      <a:endParaRPr lang="en-US" sz="1100" b="0" u="none" strike="noStrike">
+                        <a:solidFill>
+                          <a:srgbClr val="000000"/>
+                        </a:solidFill>
+                        <a:effectLst/>
+                        <a:uFillTx/>
+                        <a:latin typeface="Arial"/>
+                      </a:endParaRPr>
+                    </a:p>
+                  </a:txBody>
+                  <a:tcPr anchor="ctr" marL="0" marR="91440" marT="0" marB="0">
+                    <a:lnL w="12240">
+                      <a:noFill/>
+                      <a:prstDash val="solid"/>
+                    </a:lnL>
+                    <a:lnR w="12240">
+                      <a:noFill/>
+                      <a:prstDash val="solid"/>
+                    </a:lnR>
+                    <a:lnT w="12240">
+                      <a:noFill/>
+                      <a:prstDash val="solid"/>
+                    </a:lnT>
+                    <a:lnB w="6480">
+                      <a:solidFill>
+                        <a:srgbClr val="D9D9D9"/>
+                      </a:solidFill>
+                      <a:prstDash val="solid"/>
+                    </a:lnB>
+                    <a:solidFill>
+                      <a:srgbClr val="C5D6E9"/>
+                    </a:solidFill>
+                  </a:tcPr>
+                </a:tc>
               </a:tr>
-              <a:tr h="398520">
+              <a:tr h="1200000">
                 <a:tc>
                   <a:txBody>
                     <a:bodyPr lIns="126720" tIns="0" bIns="0" anchor="ctr">
@@ -14283,6 +15031,176 @@
                     </a:solidFill>
                   </a:tcPr>
                 </a:tc>
+                <a:tc>
+                  <a:txBody>
+                    <a:bodyPr lIns="0" tIns="0" bIns="0" anchor="ctr">
+                      <a:noAutofit/>
+                    </a:bodyPr>
+                    <a:p>
+                      <a:pPr>
+                        <a:lnSpc>
+                          <a:spcPct val="100000"/>
+                        </a:lnSpc>
+                      </a:pPr>
+                      <a:r>
+                        <a:rPr lang="en-US" sz="1100" b="0" u="sng" strike="noStrike">
+                          <a:solidFill>
+                            <a:srgbClr val="0563C1"/>
+                          </a:solidFill>
+                          <a:effectLst/>
+                          <a:uFillTx/>
+                          <a:latin typeface="Nunito Sans"/>
+                          <a:ea typeface="Arial"/>
+                          <a:hlinkClick r:id="rId5"/>
+                        </a:rPr>
+                        <a:t>Ctrl</a:t>
+                      </a:r>
+                      <a:endParaRPr lang="en-US" sz="1100" b="0" u="none" strike="noStrike">
+                        <a:solidFill>
+                          <a:srgbClr val="000000"/>
+                        </a:solidFill>
+                        <a:effectLst/>
+                        <a:uFillTx/>
+                        <a:latin typeface="Arial"/>
+                      </a:endParaRPr>
+                    </a:p>
+                    <a:p>
+                      <a:pPr>
+                        <a:lnSpc>
+                          <a:spcPct val="100000"/>
+                        </a:lnSpc>
+                      </a:pPr>
+                      <a:r>
+                        <a:rPr lang="en-US" sz="1100" b="0" u="sng" strike="noStrike">
+                          <a:solidFill>
+                            <a:srgbClr val="0563C1"/>
+                          </a:solidFill>
+                          <a:effectLst/>
+                          <a:uFillTx/>
+                          <a:latin typeface="Nunito Sans"/>
+                          <a:ea typeface="Arial"/>
+                          <a:hlinkClick r:id="rId6"/>
+                        </a:rPr>
+                        <a:t>AutoPositional</a:t>
+                      </a:r>
+                      <a:endParaRPr lang="en-US" sz="1100" b="0" u="none" strike="noStrike">
+                        <a:solidFill>
+                          <a:srgbClr val="000000"/>
+                        </a:solidFill>
+                        <a:effectLst/>
+                        <a:uFillTx/>
+                        <a:latin typeface="Arial"/>
+                      </a:endParaRPr>
+                    </a:p>
+                    <a:p>
+                      <a:pPr>
+                        <a:lnSpc>
+                          <a:spcPct val="100000"/>
+                        </a:lnSpc>
+                      </a:pPr>
+                      <a:r>
+                        <a:rPr lang="en-US" sz="1100" b="0" u="sng" strike="noStrike">
+                          <a:solidFill>
+                            <a:srgbClr val="0563C1"/>
+                          </a:solidFill>
+                          <a:effectLst/>
+                          <a:uFillTx/>
+                          <a:latin typeface="Nunito Sans"/>
+                          <a:ea typeface="Arial"/>
+                          <a:hlinkClick r:id="rId7"/>
+                        </a:rPr>
+                        <a:t>AutoVelocityEq</a:t>
+                      </a:r>
+                      <a:endParaRPr lang="en-US" sz="1100" b="0" u="none" strike="noStrike">
+                        <a:solidFill>
+                          <a:srgbClr val="000000"/>
+                        </a:solidFill>
+                        <a:effectLst/>
+                        <a:uFillTx/>
+                        <a:latin typeface="Arial"/>
+                      </a:endParaRPr>
+                    </a:p>
+                    <a:p>
+                      <a:pPr>
+                        <a:lnSpc>
+                          <a:spcPct val="100000"/>
+                        </a:lnSpc>
+                      </a:pPr>
+                      <a:r>
+                        <a:rPr lang="en-US" sz="1100" b="0" u="sng" strike="noStrike">
+                          <a:solidFill>
+                            <a:srgbClr val="0563C1"/>
+                          </a:solidFill>
+                          <a:effectLst/>
+                          <a:uFillTx/>
+                          <a:latin typeface="Nunito Sans"/>
+                          <a:ea typeface="Arial"/>
+                          <a:hlinkClick r:id="rId8"/>
+                        </a:rPr>
+                        <a:t>Manual</a:t>
+                      </a:r>
+                      <a:endParaRPr lang="en-US" sz="1100" b="0" u="none" strike="noStrike">
+                        <a:solidFill>
+                          <a:srgbClr val="000000"/>
+                        </a:solidFill>
+                        <a:effectLst/>
+                        <a:uFillTx/>
+                        <a:latin typeface="Arial"/>
+                      </a:endParaRPr>
+                    </a:p>
+                    <a:p>
+                      <a:pPr>
+                        <a:lnSpc>
+                          <a:spcPct val="100000"/>
+                        </a:lnSpc>
+                      </a:pPr>
+                      <a:r>
+                        <a:rPr lang="en-US" sz="1100" b="0" u="sng" strike="noStrike">
+                          <a:solidFill>
+                            <a:srgbClr val="0563C1"/>
+                          </a:solidFill>
+                          <a:effectLst/>
+                          <a:uFillTx/>
+                          <a:latin typeface="Nunito Sans"/>
+                          <a:ea typeface="Arial"/>
+                          <a:hlinkClick r:id="rId9"/>
+                        </a:rPr>
+                        <a:t>None</a:t>
+                      </a:r>
+                      <a:endParaRPr lang="en-US" sz="1100" b="0" u="none" strike="noStrike">
+                        <a:solidFill>
+                          <a:srgbClr val="000000"/>
+                        </a:solidFill>
+                        <a:effectLst/>
+                        <a:uFillTx/>
+                        <a:latin typeface="Arial"/>
+                      </a:endParaRPr>
+                    </a:p>
+                  </a:txBody>
+                  <a:tcPr anchor="ctr" marL="0" marR="91440" marT="0" marB="0">
+                    <a:lnL w="12240">
+                      <a:noFill/>
+                      <a:prstDash val="solid"/>
+                    </a:lnL>
+                    <a:lnR w="12240">
+                      <a:noFill/>
+                      <a:prstDash val="solid"/>
+                    </a:lnR>
+                    <a:lnT w="12240">
+                      <a:noFill/>
+                      <a:prstDash val="solid"/>
+                    </a:lnT>
+                    <a:lnB w="6480">
+                      <a:solidFill>
+                        <a:srgbClr val="D9D9D9"/>
+                      </a:solidFill>
+                      <a:prstDash val="solid"/>
+                    </a:lnB>
+                    <a:solidFill>
+                      <a:srgbClr val="FFFFFF"/>
+                    </a:solidFill>
+                  </a:tcPr>
+                </a:tc>
               </a:tr>
               <a:tr h="398520">
                 <a:tc>
@@ -14406,6 +15324,60 @@
                     </a:bodyPr>
                     <a:p>
                       <a:pPr/>
+                      <a:endParaRPr lang="en-US" sz="1800" b="0" u="none" strike="noStrike">
+                        <a:solidFill>
+                          <a:srgbClr val="000000"/>
+                        </a:solidFill>
+                        <a:effectLst/>
+                        <a:uFillTx/>
+                        <a:latin typeface="Arial"/>
+                      </a:endParaRPr>
+                    </a:p>
+                  </a:txBody>
+                  <a:tcPr anchor="ctr" marL="0" marR="91440" marT="0" marB="0">
+                    <a:lnL w="12240">
+                      <a:noFill/>
+                      <a:prstDash val="solid"/>
+                    </a:lnL>
+                    <a:lnR w="12240">
+                      <a:noFill/>
+                      <a:prstDash val="solid"/>
+                    </a:lnR>
+                    <a:lnT w="12240">
+                      <a:noFill/>
+                      <a:prstDash val="solid"/>
+                    </a:lnT>
+                    <a:lnB w="6480">
+                      <a:solidFill>
+                        <a:srgbClr val="D9D9D9"/>
+                      </a:solidFill>
+                      <a:prstDash val="solid"/>
+                    </a:lnB>
+                    <a:solidFill>
+                      <a:srgbClr val="ECE7E2"/>
+                    </a:solidFill>
+                  </a:tcPr>
+                </a:tc>
+                <a:tc>
+                  <a:txBody>
+                    <a:bodyPr lIns="0" tIns="0" bIns="0" anchor="ctr">
+                      <a:noAutofit/>
+                    </a:bodyPr>
+                    <a:p>
+                      <a:pPr/>
+                      <a:r>
+                        <a:rPr lang="en-US" sz="1100" b="0" u="sng" strike="noStrike">
+                          <a:solidFill>
+                            <a:srgbClr val="0563C1"/>
+                          </a:solidFill>
+                          <a:effectLst/>
+                          <a:uFillTx/>
+                          <a:latin typeface="Nunito Sans"/>
+                          <a:ea typeface="Arial"/>
+                          <a:hlinkClick r:id="rId10"/>
+                        </a:rPr>
+                        <a:t>Gimbal.hpp</a:t>
+                      </a:r>
                       <a:endParaRPr lang="en-US" sz="1800" b="0" u="none" strike="noStrike">
                         <a:solidFill>
                           <a:srgbClr val="000000"/>
@@ -14613,6 +15585,64 @@
                     </a:solidFill>
                   </a:tcPr>
                 </a:tc>
+                <a:tc>
+                  <a:txBody>
+                    <a:bodyPr lIns="0" tIns="0" bIns="0" anchor="ctr">
+                      <a:noAutofit/>
+                    </a:bodyPr>
+                    <a:p>
+                      <a:pPr>
+                        <a:lnSpc>
+                          <a:spcPct val="100000"/>
+                        </a:lnSpc>
+                      </a:pPr>
+                      <a:r>
+                        <a:rPr lang="en-US" sz="1100" b="0" u="sng" strike="noStrike">
+                          <a:solidFill>
+                            <a:srgbClr val="0563C1"/>
+                          </a:solidFill>
+                          <a:effectLst/>
+                          <a:uFillTx/>
+                          <a:latin typeface="Nunito Sans"/>
+                          <a:ea typeface="Arial"/>
+                          <a:hlinkClick r:id="rId11"/>
+                        </a:rPr>
+                        <a:t>dots.py</a:t>
+                      </a:r>
+                      <a:endParaRPr lang="en-US" sz="1100" b="0" u="none" strike="noStrike">
+                        <a:solidFill>
+                          <a:srgbClr val="000000"/>
+                        </a:solidFill>
+                        <a:effectLst/>
+                        <a:uFillTx/>
+                        <a:latin typeface="Arial"/>
+                      </a:endParaRPr>
+                    </a:p>
+                  </a:txBody>
+                  <a:tcPr anchor="ctr" marL="0" marR="91440" marT="0" marB="0">
+                    <a:lnL w="12240">
+                      <a:noFill/>
+                      <a:prstDash val="solid"/>
+                    </a:lnL>
+                    <a:lnR w="12240">
+                      <a:noFill/>
+                      <a:prstDash val="solid"/>
+                    </a:lnR>
+                    <a:lnT w="12240">
+                      <a:noFill/>
+                      <a:prstDash val="solid"/>
+                    </a:lnT>
+                    <a:lnB w="6480">
+                      <a:solidFill>
+                        <a:srgbClr val="D9D9D9"/>
+                      </a:solidFill>
+                      <a:prstDash val="solid"/>
+                    </a:lnB>
+                    <a:solidFill>
+                      <a:srgbClr val="FFFFFF"/>
+                    </a:solidFill>
+                  </a:tcPr>
+                </a:tc>
               </a:tr>
               <a:tr h="398520">
                 <a:tc>
@@ -14751,6 +15781,64 @@
                           <a:ea typeface="Arial"/>
                         </a:rPr>
                         <a:t>Телеметрія може загубитися. Керування — ні</a:t>
+                      </a:r>
+                      <a:endParaRPr lang="en-US" sz="1100" b="0" u="none" strike="noStrike">
+                        <a:solidFill>
+                          <a:srgbClr val="000000"/>
+                        </a:solidFill>
+                        <a:effectLst/>
+                        <a:uFillTx/>
+                        <a:latin typeface="Arial"/>
+                      </a:endParaRPr>
+                    </a:p>
+                  </a:txBody>
+                  <a:tcPr anchor="ctr" marL="0" marR="91440" marT="0" marB="0">
+                    <a:lnL w="12240">
+                      <a:noFill/>
+                      <a:prstDash val="solid"/>
+                    </a:lnL>
+                    <a:lnR w="12240">
+                      <a:noFill/>
+                      <a:prstDash val="solid"/>
+                    </a:lnR>
+                    <a:lnT w="12240">
+                      <a:noFill/>
+                      <a:prstDash val="solid"/>
+                    </a:lnT>
+                    <a:lnB w="6480">
+                      <a:solidFill>
+                        <a:srgbClr val="D9D9D9"/>
+                      </a:solidFill>
+                      <a:prstDash val="solid"/>
+                    </a:lnB>
+                    <a:solidFill>
+                      <a:srgbClr val="ECE7E2"/>
+                    </a:solidFill>
+                  </a:tcPr>
+                </a:tc>
+                <a:tc>
+                  <a:txBody>
+                    <a:bodyPr lIns="0" tIns="0" bIns="0" anchor="ctr">
+                      <a:noAutofit/>
+                    </a:bodyPr>
+                    <a:p>
+                      <a:pPr>
+                        <a:lnSpc>
+                          <a:spcPct val="100000"/>
+                        </a:lnSpc>
+                      </a:pPr>
+                      <a:r>
+                        <a:rPr lang="en-US" sz="1100" b="0" u="sng" strike="noStrike">
+                          <a:solidFill>
+                            <a:srgbClr val="0563C1"/>
+                          </a:solidFill>
+                          <a:effectLst/>
+                          <a:uFillTx/>
+                          <a:latin typeface="Nunito Sans"/>
+                          <a:ea typeface="Arial"/>
+                          <a:hlinkClick r:id="rId12"/>
+                        </a:rPr>
+                        <a:t>LogQueue.hpp</a:t>
                       </a:r>
                       <a:endParaRPr lang="en-US" sz="1100" b="0" u="none" strike="noStrike">
                         <a:solidFill>
@@ -14924,6 +16012,64 @@
                           <a:ea typeface="Arial"/>
                         </a:rPr>
                         <a:t>Неправильний напрямок = некоректна робота з осями</a:t>
+                      </a:r>
+                      <a:endParaRPr lang="en-US" sz="1100" b="0" u="none" strike="noStrike">
+                        <a:solidFill>
+                          <a:srgbClr val="000000"/>
+                        </a:solidFill>
+                        <a:effectLst/>
+                        <a:uFillTx/>
+                        <a:latin typeface="Arial"/>
+                      </a:endParaRPr>
+                    </a:p>
+                  </a:txBody>
+                  <a:tcPr anchor="ctr" marL="0" marR="91440" marT="0" marB="0">
+                    <a:lnL w="12240">
+                      <a:noFill/>
+                      <a:prstDash val="solid"/>
+                    </a:lnL>
+                    <a:lnR w="12240">
+                      <a:noFill/>
+                      <a:prstDash val="solid"/>
+                    </a:lnR>
+                    <a:lnT w="12240">
+                      <a:noFill/>
+                      <a:prstDash val="solid"/>
+                    </a:lnT>
+                    <a:lnB w="6480">
+                      <a:solidFill>
+                        <a:srgbClr val="D9D9D9"/>
+                      </a:solidFill>
+                      <a:prstDash val="solid"/>
+                    </a:lnB>
+                    <a:solidFill>
+                      <a:srgbClr val="FFFFFF"/>
+                    </a:solidFill>
+                  </a:tcPr>
+                </a:tc>
+                <a:tc>
+                  <a:txBody>
+                    <a:bodyPr lIns="0" tIns="0" bIns="0" anchor="ctr">
+                      <a:noAutofit/>
+                    </a:bodyPr>
+                    <a:p>
+                      <a:pPr>
+                        <a:lnSpc>
+                          <a:spcPct val="100000"/>
+                        </a:lnSpc>
+                      </a:pPr>
+                      <a:r>
+                        <a:rPr lang="en-US" sz="1100" b="0" u="sng" strike="noStrike">
+                          <a:solidFill>
+                            <a:srgbClr val="0563C1"/>
+                          </a:solidFill>
+                          <a:effectLst/>
+                          <a:uFillTx/>
+                          <a:latin typeface="Nunito Sans"/>
+                          <a:ea typeface="Arial"/>
+                          <a:hlinkClick r:id="rId13"/>
+                        </a:rPr>
+                        <a:t>ZoneTour.hpp</a:t>
                       </a:r>
                       <a:endParaRPr lang="en-US" sz="1100" b="0" u="none" strike="noStrike">
                         <a:solidFill>
@@ -15144,6 +16290,64 @@
                     </a:solidFill>
                   </a:tcPr>
                 </a:tc>
+                <a:tc>
+                  <a:txBody>
+                    <a:bodyPr lIns="0" tIns="0" bIns="0" anchor="ctr">
+                      <a:noAutofit/>
+                    </a:bodyPr>
+                    <a:p>
+                      <a:pPr>
+                        <a:lnSpc>
+                          <a:spcPct val="100000"/>
+                        </a:lnSpc>
+                      </a:pPr>
+                      <a:r>
+                        <a:rPr lang="en-US" sz="1100" b="0" u="sng" strike="noStrike">
+                          <a:solidFill>
+                            <a:srgbClr val="0563C1"/>
+                          </a:solidFill>
+                          <a:effectLst/>
+                          <a:uFillTx/>
+                          <a:latin typeface="Nunito Sans"/>
+                          <a:ea typeface="Arial"/>
+                          <a:hlinkClick r:id="rId14"/>
+                        </a:rPr>
+                        <a:t>Protocol.hpp</a:t>
+                      </a:r>
+                      <a:endParaRPr lang="en-US" sz="1100" b="0" u="none" strike="noStrike">
+                        <a:solidFill>
+                          <a:srgbClr val="000000"/>
+                        </a:solidFill>
+                        <a:effectLst/>
+                        <a:uFillTx/>
+                        <a:latin typeface="Arial"/>
+                      </a:endParaRPr>
+                    </a:p>
+                  </a:txBody>
+                  <a:tcPr anchor="ctr" marL="0" marR="91440" marT="0" marB="0">
+                    <a:lnL w="12240">
+                      <a:noFill/>
+                      <a:prstDash val="solid"/>
+                    </a:lnL>
+                    <a:lnR w="12240">
+                      <a:noFill/>
+                      <a:prstDash val="solid"/>
+                    </a:lnR>
+                    <a:lnT w="12240">
+                      <a:noFill/>
+                      <a:prstDash val="solid"/>
+                    </a:lnT>
+                    <a:lnB w="6480">
+                      <a:solidFill>
+                        <a:srgbClr val="D9D9D9"/>
+                      </a:solidFill>
+                      <a:prstDash val="solid"/>
+                    </a:lnB>
+                    <a:solidFill>
+                      <a:srgbClr val="ECE7E2"/>
+                    </a:solidFill>
+                  </a:tcPr>
+                </a:tc>
               </a:tr>
               <a:tr h="0">
                 <a:tc>
@@ -15329,6 +16533,64 @@
                     </a:solidFill>
                   </a:tcPr>
                 </a:tc>
+                <a:tc>
+                  <a:txBody>
+                    <a:bodyPr lIns="0" tIns="0" bIns="0" anchor="ctr">
+                      <a:noAutofit/>
+                    </a:bodyPr>
+                    <a:p>
+                      <a:pPr>
+                        <a:lnSpc>
+                          <a:spcPct val="100000"/>
+                        </a:lnSpc>
+                      </a:pPr>
+                      <a:r>
+                        <a:rPr lang="en-US" sz="1100" b="0" u="sng" strike="noStrike">
+                          <a:solidFill>
+                            <a:srgbClr val="0563C1"/>
+                          </a:solidFill>
+                          <a:effectLst/>
+                          <a:uFillTx/>
+                          <a:latin typeface="Nunito Sans"/>
+                          <a:ea typeface="Arial"/>
+                          <a:hlinkClick r:id="rId15"/>
+                        </a:rPr>
+                        <a:t>LinkUart.hpp</a:t>
+                      </a:r>
+                      <a:endParaRPr lang="en-US" sz="1100" b="0" u="none" strike="noStrike">
+                        <a:solidFill>
+                          <a:srgbClr val="000000"/>
+                        </a:solidFill>
+                        <a:effectLst/>
+                        <a:uFillTx/>
+                        <a:latin typeface="Arial"/>
+                      </a:endParaRPr>
+                    </a:p>
+                  </a:txBody>
+                  <a:tcPr anchor="ctr" marL="0" marR="91440" marT="0" marB="0">
+                    <a:lnL w="12240">
+                      <a:noFill/>
+                      <a:prstDash val="solid"/>
+                    </a:lnL>
+                    <a:lnR w="12240">
+                      <a:noFill/>
+                      <a:prstDash val="solid"/>
+                    </a:lnR>
+                    <a:lnT w="12240">
+                      <a:noFill/>
+                      <a:prstDash val="solid"/>
+                    </a:lnT>
+                    <a:lnB w="6480">
+                      <a:solidFill>
+                        <a:srgbClr val="D9D9D9"/>
+                      </a:solidFill>
+                      <a:prstDash val="solid"/>
+                    </a:lnB>
+                    <a:solidFill>
+                      <a:srgbClr val="ECE7E2"/>
+                    </a:solidFill>
+                  </a:tcPr>
+                </a:tc>
               </a:tr>
               <a:tr h="398520">
                 <a:tc>
@@ -15467,6 +16729,64 @@
                           <a:ea typeface="Arial"/>
                         </a:rPr>
                         <a:t>Рідко змінюється, критична помилка</a:t>
+                      </a:r>
+                      <a:endParaRPr lang="en-US" sz="1100" b="0" u="none" strike="noStrike">
+                        <a:solidFill>
+                          <a:srgbClr val="000000"/>
+                        </a:solidFill>
+                        <a:effectLst/>
+                        <a:uFillTx/>
+                        <a:latin typeface="Arial"/>
+                      </a:endParaRPr>
+                    </a:p>
+                  </a:txBody>
+                  <a:tcPr anchor="ctr" marL="0" marR="91440" marT="0" marB="0">
+                    <a:lnL w="12240">
+                      <a:noFill/>
+                      <a:prstDash val="solid"/>
+                    </a:lnL>
+                    <a:lnR w="12240">
+                      <a:noFill/>
+                      <a:prstDash val="solid"/>
+                    </a:lnR>
+                    <a:lnT w="12240">
+                      <a:noFill/>
+                      <a:prstDash val="solid"/>
+                    </a:lnT>
+                    <a:lnB w="6480">
+                      <a:solidFill>
+                        <a:srgbClr val="D9D9D9"/>
+                      </a:solidFill>
+                      <a:prstDash val="solid"/>
+                    </a:lnB>
+                    <a:solidFill>
+                      <a:srgbClr val="ECE7E2"/>
+                    </a:solidFill>
+                  </a:tcPr>
+                </a:tc>
+                <a:tc>
+                  <a:txBody>
+                    <a:bodyPr lIns="0" tIns="0" bIns="0" anchor="ctr">
+                      <a:noAutofit/>
+                    </a:bodyPr>
+                    <a:p>
+                      <a:pPr>
+                        <a:lnSpc>
+                          <a:spcPct val="100000"/>
+                        </a:lnSpc>
+                      </a:pPr>
+                      <a:r>
+                        <a:rPr lang="en-US" sz="1100" b="0" u="sng" strike="noStrike">
+                          <a:solidFill>
+                            <a:srgbClr val="0563C1"/>
+                          </a:solidFill>
+                          <a:effectLst/>
+                          <a:uFillTx/>
+                          <a:latin typeface="Nunito Sans"/>
+                          <a:ea typeface="Arial"/>
+                          <a:hlinkClick r:id="rId16"/>
+                        </a:rPr>
+                        <a:t>Crc8.hpp</a:t>
                       </a:r>
                       <a:endParaRPr lang="en-US" sz="1100" b="0" u="none" strike="noStrike">
                         <a:solidFill>
@@ -18453,7 +19773,7 @@
                 <a:latin typeface="Nunito Sans"/>
                 <a:ea typeface="Nunito Sans"/>
               </a:rPr>
-              <a:t>Проблеми, з якими зіткнулися</a:t>
+              <a:t>Проблеми, з якими зіткнувся</a:t>
             </a:r>
             <a:endParaRPr lang="en-US" sz="2400" b="0" u="none" strike="noStrike">
               <a:solidFill>
@@ -18481,10 +19801,11 @@
             <a:tbl>
               <a:tblPr/>
               <a:tblGrid>
-                <a:gridCol w="3199680"/>
-                <a:gridCol w="3399840"/>
-                <a:gridCol w="2399760"/>
+                <a:gridCol w="2849680"/>
+                <a:gridCol w="2999840"/>
+                <a:gridCol w="2049760"/>
                 <a:gridCol w="1566360"/>
+                <a:gridCol w="1100000"/>
               </a:tblGrid>
               <a:tr h="259920">
                 <a:tc>
@@ -18680,6 +20001,63 @@
                           <a:ea typeface="Arial"/>
                         </a:rPr>
                         <a:t>Статус</a:t>
+                      </a:r>
+                      <a:endParaRPr lang="en-US" sz="1050" b="0" u="none" strike="noStrike">
+                        <a:solidFill>
+                          <a:srgbClr val="000000"/>
+                        </a:solidFill>
+                        <a:effectLst/>
+                        <a:uFillTx/>
+                        <a:latin typeface="Arial"/>
+                      </a:endParaRPr>
+                    </a:p>
+                  </a:txBody>
+                  <a:tcPr anchor="ctr" marL="0" marR="91440" marT="45720" marB="45720">
+                    <a:lnL w="12240">
+                      <a:noFill/>
+                      <a:prstDash val="solid"/>
+                    </a:lnL>
+                    <a:lnR w="12240">
+                      <a:noFill/>
+                      <a:prstDash val="solid"/>
+                    </a:lnR>
+                    <a:lnT w="12240">
+                      <a:noFill/>
+                      <a:prstDash val="solid"/>
+                    </a:lnT>
+                    <a:lnB w="6480">
+                      <a:solidFill>
+                        <a:srgbClr val="D9D9D9"/>
+                      </a:solidFill>
+                      <a:prstDash val="solid"/>
+                    </a:lnB>
+                    <a:solidFill>
+                      <a:srgbClr val="C5D6E9"/>
+                    </a:solidFill>
+                  </a:tcPr>
+                </a:tc>
+                <a:tc>
+                  <a:txBody>
+                    <a:bodyPr lIns="0" anchor="ctr">
+                      <a:noAutofit/>
+                    </a:bodyPr>
+                    <a:p>
+                      <a:pPr>
+                        <a:lnSpc>
+                          <a:spcPct val="100000"/>
+                        </a:lnSpc>
+                      </a:pPr>
+                      <a:r>
+                        <a:rPr lang="en-US" sz="1050" b="1" u="none" strike="noStrike">
+                          <a:solidFill>
+                            <a:srgbClr val="232323"/>
+                          </a:solidFill>
+                          <a:effectLst/>
+                          <a:uFillTx/>
+                          <a:latin typeface="Nunito Sans"/>
+                          <a:ea typeface="Arial"/>
+                        </a:rPr>
+                        <a:t>Код</a:t>
                       </a:r>
                       <a:endParaRPr lang="en-US" sz="1050" b="0" u="none" strike="noStrike">
                         <a:solidFill>
@@ -18999,6 +20377,120 @@
                     </a:solidFill>
                   </a:tcPr>
                 </a:tc>
+                <a:tc>
+                  <a:txBody>
+                    <a:bodyPr lIns="0" anchor="ctr">
+                      <a:noAutofit/>
+                    </a:bodyPr>
+                    <a:p>
+                      <a:pPr>
+                        <a:lnSpc>
+                          <a:spcPct val="100000"/>
+                        </a:lnSpc>
+                      </a:pPr>
+                      <a:r>
+                        <a:rPr lang="en-US" sz="950" b="0" u="sng" strike="noStrike">
+                          <a:solidFill>
+                            <a:srgbClr val="0563C1"/>
+                          </a:solidFill>
+                          <a:effectLst/>
+                          <a:uFillTx/>
+                          <a:latin typeface="Nunito Sans"/>
+                          <a:ea typeface="Arial"/>
+                          <a:hlinkClick r:id="rId7"/>
+                        </a:rPr>
+                        <a:t>dots.py</a:t>
+                      </a:r>
+                      <a:endParaRPr lang="en-US" sz="1000" b="0" u="none" strike="noStrike">
+                        <a:solidFill>
+                          <a:srgbClr val="000000"/>
+                        </a:solidFill>
+                        <a:effectLst/>
+                        <a:uFillTx/>
+                        <a:latin typeface="Arial"/>
+                      </a:endParaRPr>
+                    </a:p>
+                    <a:p>
+                      <a:pPr>
+                        <a:lnSpc>
+                          <a:spcPct val="100000"/>
+                        </a:lnSpc>
+                      </a:pPr>
+                      <a:r>
+                        <a:rPr lang="en-US" sz="950" b="0" u="sng" strike="noStrike">
+                          <a:solidFill>
+                            <a:srgbClr val="0563C1"/>
+                          </a:solidFill>
+                          <a:effectLst/>
+                          <a:uFillTx/>
+                          <a:latin typeface="Nunito Sans"/>
+                          <a:ea typeface="Arial"/>
+                          <a:hlinkClick r:id="rId8"/>
+                        </a:rPr>
+                        <a:t>Protocol.hpp</a:t>
+                      </a:r>
+                      <a:endParaRPr lang="en-US" sz="1000" b="0" u="none" strike="noStrike">
+                        <a:solidFill>
+                          <a:srgbClr val="000000"/>
+                        </a:solidFill>
+                        <a:effectLst/>
+                        <a:uFillTx/>
+                        <a:latin typeface="Arial"/>
+                      </a:endParaRPr>
+                    </a:p>
+                    <a:p>
+                      <a:pPr>
+                        <a:lnSpc>
+                          <a:spcPct val="100000"/>
+                        </a:lnSpc>
+                      </a:pPr>
+                      <a:r>
+                        <a:rPr lang="en-US" sz="950" b="0" u="sng" strike="noStrike">
+                          <a:solidFill>
+                            <a:srgbClr val="0563C1"/>
+                          </a:solidFill>
+                          <a:effectLst/>
+                          <a:uFillTx/>
+                          <a:latin typeface="Nunito Sans"/>
+                          <a:ea typeface="Arial"/>
+                          <a:hlinkClick r:id="rId9"/>
+                        </a:rPr>
+                        <a:t>Config.hpp</a:t>
+                      </a:r>
+                      <a:endParaRPr lang="en-US" sz="1000" b="0" u="none" strike="noStrike">
+                        <a:solidFill>
+                          <a:srgbClr val="000000"/>
+                        </a:solidFill>
+                        <a:effectLst/>
+                        <a:uFillTx/>
+                        <a:latin typeface="Arial"/>
+                      </a:endParaRPr>
+                    </a:p>
+                  </a:txBody>
+                  <a:tcPr anchor="ctr" marL="0" marR="91440" marT="45720" marB="45720">
+                    <a:lnL w="12240">
+                      <a:noFill/>
+                      <a:prstDash val="solid"/>
+                    </a:lnL>
+                    <a:lnR w="12240">
+                      <a:noFill/>
+                      <a:prstDash val="solid"/>
+                    </a:lnR>
+                    <a:lnT w="12240">
+                      <a:noFill/>
+                      <a:prstDash val="solid"/>
+                    </a:lnT>
+                    <a:lnB w="6480">
+                      <a:solidFill>
+                        <a:srgbClr val="D9D9D9"/>
+                      </a:solidFill>
+                      <a:prstDash val="solid"/>
+                    </a:lnB>
+                    <a:solidFill>
+                      <a:srgbClr val="FFFFFF"/>
+                    </a:solidFill>
+                  </a:tcPr>
+                </a:tc>
               </a:tr>
               <a:tr h="525600">
                 <a:tc>
@@ -19244,6 +20736,64 @@
                     </a:solidFill>
                   </a:tcPr>
                 </a:tc>
+                <a:tc>
+                  <a:txBody>
+                    <a:bodyPr lIns="0" anchor="ctr">
+                      <a:noAutofit/>
+                    </a:bodyPr>
+                    <a:p>
+                      <a:pPr>
+                        <a:lnSpc>
+                          <a:spcPct val="100000"/>
+                        </a:lnSpc>
+                      </a:pPr>
+                      <a:r>
+                        <a:rPr lang="en-US" sz="950" b="0" u="sng" strike="noStrike">
+                          <a:solidFill>
+                            <a:srgbClr val="0563C1"/>
+                          </a:solidFill>
+                          <a:effectLst/>
+                          <a:uFillTx/>
+                          <a:latin typeface="Nunito Sans"/>
+                          <a:ea typeface="Arial"/>
+                          <a:hlinkClick r:id="rId10"/>
+                        </a:rPr>
+                        <a:t>ZoneTour.hpp</a:t>
+                      </a:r>
+                      <a:endParaRPr lang="en-US" sz="1000" b="0" u="none" strike="noStrike">
+                        <a:solidFill>
+                          <a:srgbClr val="000000"/>
+                        </a:solidFill>
+                        <a:effectLst/>
+                        <a:uFillTx/>
+                        <a:latin typeface="Arial"/>
+                      </a:endParaRPr>
+                    </a:p>
+                  </a:txBody>
+                  <a:tcPr anchor="ctr" marL="0" marR="91440" marT="45720" marB="45720">
+                    <a:lnL w="12240">
+                      <a:noFill/>
+                      <a:prstDash val="solid"/>
+                    </a:lnL>
+                    <a:lnR w="12240">
+                      <a:noFill/>
+                      <a:prstDash val="solid"/>
+                    </a:lnR>
+                    <a:lnT w="12240">
+                      <a:noFill/>
+                      <a:prstDash val="solid"/>
+                    </a:lnT>
+                    <a:lnB w="6480">
+                      <a:solidFill>
+                        <a:srgbClr val="D9D9D9"/>
+                      </a:solidFill>
+                      <a:prstDash val="solid"/>
+                    </a:lnB>
+                    <a:solidFill>
+                      <a:srgbClr val="ECE7E2"/>
+                    </a:solidFill>
+                  </a:tcPr>
+                </a:tc>
               </a:tr>
               <a:tr h="380880">
                 <a:tc>
@@ -19439,6 +20989,64 @@
                           <a:ea typeface="Arial"/>
                         </a:rPr>
                         <a:t>Частково</a:t>
+                      </a:r>
+                      <a:endParaRPr lang="en-US" sz="1000" b="0" u="none" strike="noStrike">
+                        <a:solidFill>
+                          <a:srgbClr val="000000"/>
+                        </a:solidFill>
+                        <a:effectLst/>
+                        <a:uFillTx/>
+                        <a:latin typeface="Arial"/>
+                      </a:endParaRPr>
+                    </a:p>
+                  </a:txBody>
+                  <a:tcPr anchor="ctr" marL="0" marR="91440" marT="45720" marB="45720">
+                    <a:lnL w="12240">
+                      <a:noFill/>
+                      <a:prstDash val="solid"/>
+                    </a:lnL>
+                    <a:lnR w="12240">
+                      <a:noFill/>
+                      <a:prstDash val="solid"/>
+                    </a:lnR>
+                    <a:lnT w="12240">
+                      <a:noFill/>
+                      <a:prstDash val="solid"/>
+                    </a:lnT>
+                    <a:lnB w="6480">
+                      <a:solidFill>
+                        <a:srgbClr val="D9D9D9"/>
+                      </a:solidFill>
+                      <a:prstDash val="solid"/>
+                    </a:lnB>
+                    <a:solidFill>
+                      <a:srgbClr val="FFFFFF"/>
+                    </a:solidFill>
+                  </a:tcPr>
+                </a:tc>
+                <a:tc>
+                  <a:txBody>
+                    <a:bodyPr lIns="0" anchor="ctr">
+                      <a:noAutofit/>
+                    </a:bodyPr>
+                    <a:p>
+                      <a:pPr>
+                        <a:lnSpc>
+                          <a:spcPct val="100000"/>
+                        </a:lnSpc>
+                      </a:pPr>
+                      <a:r>
+                        <a:rPr lang="en-US" sz="950" b="0" u="sng" strike="noStrike">
+                          <a:solidFill>
+                            <a:srgbClr val="0563C1"/>
+                          </a:solidFill>
+                          <a:effectLst/>
+                          <a:uFillTx/>
+                          <a:latin typeface="Nunito Sans"/>
+                          <a:ea typeface="Arial"/>
+                          <a:hlinkClick r:id="rId11"/>
+                        </a:rPr>
+                        <a:t>serial_link.py</a:t>
                       </a:r>
                       <a:endParaRPr lang="en-US" sz="1000" b="0" u="none" strike="noStrike">
                         <a:solidFill>
@@ -19669,6 +21277,63 @@
                           <a:ea typeface="Arial"/>
                         </a:rPr>
                         <a:t>Відкрито</a:t>
+                      </a:r>
+                      <a:endParaRPr lang="en-US" sz="1000" b="0" u="none" strike="noStrike">
+                        <a:solidFill>
+                          <a:srgbClr val="000000"/>
+                        </a:solidFill>
+                        <a:effectLst/>
+                        <a:uFillTx/>
+                        <a:latin typeface="Arial"/>
+                      </a:endParaRPr>
+                    </a:p>
+                  </a:txBody>
+                  <a:tcPr anchor="ctr" marL="0" marR="91440" marT="45720" marB="45720">
+                    <a:lnL w="12240">
+                      <a:noFill/>
+                      <a:prstDash val="solid"/>
+                    </a:lnL>
+                    <a:lnR w="12240">
+                      <a:noFill/>
+                      <a:prstDash val="solid"/>
+                    </a:lnR>
+                    <a:lnT w="12240">
+                      <a:noFill/>
+                      <a:prstDash val="solid"/>
+                    </a:lnT>
+                    <a:lnB w="6480">
+                      <a:solidFill>
+                        <a:srgbClr val="D9D9D9"/>
+                      </a:solidFill>
+                      <a:prstDash val="solid"/>
+                    </a:lnB>
+                    <a:solidFill>
+                      <a:srgbClr val="ECE7E2"/>
+                    </a:solidFill>
+                  </a:tcPr>
+                </a:tc>
+                <a:tc>
+                  <a:txBody>
+                    <a:bodyPr lIns="0" anchor="ctr">
+                      <a:noAutofit/>
+                    </a:bodyPr>
+                    <a:p>
+                      <a:pPr>
+                        <a:lnSpc>
+                          <a:spcPct val="100000"/>
+                        </a:lnSpc>
+                      </a:pPr>
+                      <a:r>
+                        <a:rPr lang="en-US" sz="950" b="0" u="none" strike="noStrike">
+                          <a:solidFill>
+                            <a:srgbClr val="9AA0A6"/>
+                          </a:solidFill>
+                          <a:effectLst/>
+                          <a:uFillTx/>
+                          <a:latin typeface="Nunito Sans"/>
+                          <a:ea typeface="Arial"/>
+                        </a:rPr>
+                        <a:t>—</a:t>
                       </a:r>
                       <a:endParaRPr lang="en-US" sz="1000" b="0" u="none" strike="noStrike">
                         <a:solidFill>
@@ -19868,7 +21533,7 @@
                           <a:latin typeface="Nunito Sans"/>
                           <a:ea typeface="Arial"/>
                         </a:rPr>
-                        <a:t>Не зробимо ніяких згладжувань чи фільтрів.</a:t>
+                        <a:t>Не зроблю жодних згладжувань чи фільтрів.</a:t>
                       </a:r>
                       <a:endParaRPr lang="en-US" sz="950" b="0" u="none" strike="noStrike">
                         <a:solidFill>
@@ -19926,6 +21591,92 @@
                           <a:ea typeface="Arial"/>
                         </a:rPr>
                         <a:t>Частково</a:t>
+                      </a:r>
+                      <a:endParaRPr lang="en-US" sz="1000" b="0" u="none" strike="noStrike">
+                        <a:solidFill>
+                          <a:srgbClr val="000000"/>
+                        </a:solidFill>
+                        <a:effectLst/>
+                        <a:uFillTx/>
+                        <a:latin typeface="Arial"/>
+                      </a:endParaRPr>
+                    </a:p>
+                  </a:txBody>
+                  <a:tcPr anchor="ctr" marL="0" marR="91440" marT="45720" marB="45720">
+                    <a:lnL w="12240">
+                      <a:noFill/>
+                      <a:prstDash val="solid"/>
+                    </a:lnL>
+                    <a:lnR w="12240">
+                      <a:noFill/>
+                      <a:prstDash val="solid"/>
+                    </a:lnR>
+                    <a:lnT w="12240">
+                      <a:noFill/>
+                      <a:prstDash val="solid"/>
+                    </a:lnT>
+                    <a:lnB w="6480">
+                      <a:solidFill>
+                        <a:srgbClr val="D9D9D9"/>
+                      </a:solidFill>
+                      <a:prstDash val="solid"/>
+                    </a:lnB>
+                    <a:solidFill>
+                      <a:srgbClr val="FFFFFF"/>
+                    </a:solidFill>
+                  </a:tcPr>
+                </a:tc>
+                <a:tc>
+                  <a:txBody>
+                    <a:bodyPr lIns="0" anchor="ctr">
+                      <a:noAutofit/>
+                    </a:bodyPr>
+                    <a:p>
+                      <a:pPr>
+                        <a:lnSpc>
+                          <a:spcPct val="100000"/>
+                        </a:lnSpc>
+                      </a:pPr>
+                      <a:r>
+                        <a:rPr lang="en-US" sz="950" b="0" u="sng" strike="noStrike">
+                          <a:solidFill>
+                            <a:srgbClr val="0563C1"/>
+                          </a:solidFill>
+                          <a:effectLst/>
+                          <a:uFillTx/>
+                          <a:latin typeface="Nunito Sans"/>
+                          <a:ea typeface="Arial"/>
+                          <a:hlinkClick r:id="rId12"/>
+                        </a:rPr>
+                        <a:t>tuning.py</a:t>
+                      </a:r>
+                      <a:endParaRPr lang="en-US" sz="1000" b="0" u="none" strike="noStrike">
+                        <a:solidFill>
+                          <a:srgbClr val="000000"/>
+                        </a:solidFill>
+                        <a:effectLst/>
+                        <a:uFillTx/>
+                        <a:latin typeface="Arial"/>
+                      </a:endParaRPr>
+                    </a:p>
+                    <a:p>
+                      <a:pPr>
+                        <a:lnSpc>
+                          <a:spcPct val="100000"/>
+                        </a:lnSpc>
+                      </a:pPr>
+                      <a:r>
+                        <a:rPr lang="en-US" sz="950" b="0" u="sng" strike="noStrike">
+                          <a:solidFill>
+                            <a:srgbClr val="0563C1"/>
+                          </a:solidFill>
+                          <a:effectLst/>
+                          <a:uFillTx/>
+                          <a:latin typeface="Nunito Sans"/>
+                          <a:ea typeface="Arial"/>
+                          <a:hlinkClick r:id="rId13"/>
+                        </a:rPr>
+                        <a:t>dots.py</a:t>
                       </a:r>
                       <a:endParaRPr lang="en-US" sz="1000" b="0" u="none" strike="noStrike">
                         <a:solidFill>
@@ -20156,6 +21907,63 @@
                           <a:ea typeface="Arial"/>
                         </a:rPr>
                         <a:t>Відкрито</a:t>
+                      </a:r>
+                      <a:endParaRPr lang="en-US" sz="1000" b="0" u="none" strike="noStrike">
+                        <a:solidFill>
+                          <a:srgbClr val="000000"/>
+                        </a:solidFill>
+                        <a:effectLst/>
+                        <a:uFillTx/>
+                        <a:latin typeface="Arial"/>
+                      </a:endParaRPr>
+                    </a:p>
+                  </a:txBody>
+                  <a:tcPr anchor="ctr" marL="0" marR="91440" marT="45720" marB="45720">
+                    <a:lnL w="12240">
+                      <a:noFill/>
+                      <a:prstDash val="solid"/>
+                    </a:lnL>
+                    <a:lnR w="12240">
+                      <a:noFill/>
+                      <a:prstDash val="solid"/>
+                    </a:lnR>
+                    <a:lnT w="12240">
+                      <a:noFill/>
+                      <a:prstDash val="solid"/>
+                    </a:lnT>
+                    <a:lnB w="6480">
+                      <a:solidFill>
+                        <a:srgbClr val="D9D9D9"/>
+                      </a:solidFill>
+                      <a:prstDash val="solid"/>
+                    </a:lnB>
+                    <a:solidFill>
+                      <a:srgbClr val="ECE7E2"/>
+                    </a:solidFill>
+                  </a:tcPr>
+                </a:tc>
+                <a:tc>
+                  <a:txBody>
+                    <a:bodyPr lIns="0" anchor="ctr">
+                      <a:noAutofit/>
+                    </a:bodyPr>
+                    <a:p>
+                      <a:pPr>
+                        <a:lnSpc>
+                          <a:spcPct val="100000"/>
+                        </a:lnSpc>
+                      </a:pPr>
+                      <a:r>
+                        <a:rPr lang="en-US" sz="950" b="0" u="none" strike="noStrike">
+                          <a:solidFill>
+                            <a:srgbClr val="9AA0A6"/>
+                          </a:solidFill>
+                          <a:effectLst/>
+                          <a:uFillTx/>
+                          <a:latin typeface="Nunito Sans"/>
+                          <a:ea typeface="Arial"/>
+                        </a:rPr>
+                        <a:t>—</a:t>
                       </a:r>
                       <a:endParaRPr lang="en-US" sz="1000" b="0" u="none" strike="noStrike">
                         <a:solidFill>

--- a/workshop-7-final_project/docs/assestment/presentation/Laser Gimbal with Camera Tracking on ESP32-S3.pptx
+++ b/workshop-7-final_project/docs/assestment/presentation/Laser Gimbal with Camera Tracking on ESP32-S3.pptx
@@ -3271,7 +3271,7 @@
         <p:spPr>
           <a:xfrm>
             <a:off x="812880" y="1203840"/>
-            <a:ext cx="9155880" cy="519120"/>
+            <a:ext cx="6603120" cy="519120"/>
           </a:xfrm>
           <a:prstGeom prst="rect">
             <a:avLst/>
@@ -3289,7 +3289,7 @@
         </p:style>
         <p:txBody>
           <a:bodyPr lIns="0" tIns="0" rIns="0" bIns="0" anchor="t">
-            <a:normAutofit fontScale="92500" lnSpcReduction="9999"/>
+            <a:normAutofit/>
           </a:bodyPr>
           <a:p>
             <a:pPr>
@@ -3301,7 +3301,7 @@
               </a:tabLst>
             </a:pPr>
             <a:r>
-              <a:rPr lang="en-US" sz="3600" b="1" u="none" strike="noStrike">
+              <a:rPr lang="en-US" sz="3000" b="1" u="none" strike="noStrike">
                 <a:solidFill>
                   <a:srgbClr val="232323"/>
                 </a:solidFill>
@@ -3313,7 +3313,7 @@
               <a:t>ПК-</a:t>
             </a:r>
             <a:r>
-              <a:rPr lang="en-US" sz="3600" b="1" u="none" strike="noStrike">
+              <a:rPr lang="en-US" sz="3000" b="1" u="none" strike="noStrike">
                 <a:solidFill>
                   <a:srgbClr val="232323"/>
                 </a:solidFill>
@@ -3325,7 +3325,7 @@
               <a:t>керований </a:t>
             </a:r>
             <a:r>
-              <a:rPr lang="en-US" sz="3600" b="1" u="none" strike="noStrike">
+              <a:rPr lang="en-US" sz="3000" b="1" u="none" strike="noStrike">
                 <a:solidFill>
                   <a:srgbClr val="232323"/>
                 </a:solidFill>
@@ -3337,7 +3337,7 @@
               <a:t>лазерний </a:t>
             </a:r>
             <a:r>
-              <a:rPr lang="en-US" sz="3600" b="1" u="none" strike="noStrike">
+              <a:rPr lang="en-US" sz="3000" b="1" u="none" strike="noStrike">
                 <a:solidFill>
                   <a:srgbClr val="232323"/>
                 </a:solidFill>
@@ -3348,7 +3348,7 @@
               </a:rPr>
               <a:t>гімбал</a:t>
             </a:r>
-            <a:endParaRPr lang="en-US" sz="3600" b="0" u="none" strike="noStrike">
+            <a:endParaRPr lang="en-US" sz="3000" b="0" u="none" strike="noStrike">
               <a:solidFill>
                 <a:srgbClr val="000000"/>
               </a:solidFill>
@@ -4067,6 +4067,266 @@
               <a:t>README.md</a:t>
             </a:r>
             <a:endParaRPr lang="en-US" sz="1200" b="0" u="none" strike="noStrike">
+              <a:solidFill>
+                <a:srgbClr val="000000"/>
+              </a:solidFill>
+              <a:effectLst/>
+              <a:uFillTx/>
+              <a:latin typeface="Arial"/>
+            </a:endParaRPr>
+          </a:p>
+        </p:txBody>
+      </p:sp>
+      <p:sp>
+        <p:nvSpPr>
+          <p:cNvPr id="30" name="Гімбал з лазером (AIM)" descr="Фото гімбала AIM з лазерним модулем"/>
+          <p:cNvSpPr/>
+          <p:nvPr/>
+        </p:nvSpPr>
+        <p:spPr>
+          <a:xfrm>
+            <a:off x="7828442" y="812880"/>
+            <a:ext cx="3438236" cy="2737120"/>
+          </a:xfrm>
+          <a:prstGeom prst="roundRect">
+            <a:avLst>
+              <a:gd name="adj" fmla="val 5000"/>
+            </a:avLst>
+          </a:prstGeom>
+          <a:blipFill rotWithShape="0">
+            <a:blip r:embed="rId4"/>
+            <a:srcRect/>
+            <a:stretch/>
+          </a:blipFill>
+          <a:ln w="12700">
+            <a:solidFill>
+              <a:srgbClr val="FFFFFF"/>
+            </a:solidFill>
+            <a:round/>
+          </a:ln>
+          <a:effectLst>
+            <a:outerShdw blurRad="90000" dir="5400000" dist="29880" rotWithShape="0">
+              <a:srgbClr val="232323">
+                <a:alpha val="28000"/>
+              </a:srgbClr>
+            </a:outerShdw>
+          </a:effectLst>
+        </p:spPr>
+        <p:style>
+          <a:lnRef idx="0"/>
+          <a:fillRef idx="0"/>
+          <a:effectRef idx="0"/>
+          <a:fontRef idx="minor"/>
+        </p:style>
+        <p:txBody>
+          <a:bodyPr lIns="90000" tIns="45000" rIns="90000" bIns="45000" anchor="t">
+            <a:noAutofit/>
+          </a:bodyPr>
+          <a:p>
+            <a:pPr/>
+            <a:endParaRPr lang="en-US" sz="1800" b="0" u="none" strike="noStrike">
+              <a:solidFill>
+                <a:srgbClr val="FFFFFF"/>
+              </a:solidFill>
+              <a:effectLst/>
+              <a:uFillTx/>
+              <a:latin typeface="Arial"/>
+            </a:endParaRPr>
+          </a:p>
+        </p:txBody>
+      </p:sp>
+      <p:sp>
+        <p:nvSpPr>
+          <p:cNvPr id="31" name="Вікно eye-app" descr="Знімок екрана застосунку eye-app"/>
+          <p:cNvSpPr/>
+          <p:nvPr/>
+        </p:nvSpPr>
+        <p:spPr>
+          <a:xfrm>
+            <a:off x="7862310" y="3700000"/>
+            <a:ext cx="2190500" cy="1300000"/>
+          </a:xfrm>
+          <a:prstGeom prst="roundRect">
+            <a:avLst>
+              <a:gd name="adj" fmla="val 5000"/>
+            </a:avLst>
+          </a:prstGeom>
+          <a:blipFill rotWithShape="0">
+            <a:blip r:embed="rId5"/>
+            <a:srcRect/>
+            <a:stretch/>
+          </a:blipFill>
+          <a:ln w="12700">
+            <a:solidFill>
+              <a:srgbClr val="FFFFFF"/>
+            </a:solidFill>
+            <a:round/>
+          </a:ln>
+          <a:effectLst>
+            <a:outerShdw blurRad="90000" dir="5400000" dist="29880" rotWithShape="0">
+              <a:srgbClr val="232323">
+                <a:alpha val="28000"/>
+              </a:srgbClr>
+            </a:outerShdw>
+          </a:effectLst>
+        </p:spPr>
+        <p:style>
+          <a:lnRef idx="0"/>
+          <a:fillRef idx="0"/>
+          <a:effectRef idx="0"/>
+          <a:fontRef idx="minor"/>
+        </p:style>
+        <p:txBody>
+          <a:bodyPr lIns="90000" tIns="45000" rIns="90000" bIns="45000" anchor="t">
+            <a:noAutofit/>
+          </a:bodyPr>
+          <a:p>
+            <a:pPr/>
+            <a:endParaRPr lang="en-US" sz="1800" b="0" u="none" strike="noStrike">
+              <a:solidFill>
+                <a:srgbClr val="FFFFFF"/>
+              </a:solidFill>
+              <a:effectLst/>
+              <a:uFillTx/>
+              <a:latin typeface="Arial"/>
+            </a:endParaRPr>
+          </a:p>
+        </p:txBody>
+      </p:sp>
+      <p:pic>
+        <p:nvPicPr>
+          <p:cNvPr id="32" name="QR відео-демо" descr="QR-код на відео-демонстрацію">
+            <a:hlinkClick r:id="rId7"/>
+          </p:cNvPr>
+          <p:cNvPicPr>
+            <a:picLocks noChangeAspect="1"/>
+          </p:cNvPicPr>
+          <p:nvPr/>
+        </p:nvPicPr>
+        <p:blipFill>
+          <a:blip r:embed="rId6"/>
+          <a:stretch>
+            <a:fillRect/>
+          </a:stretch>
+        </p:blipFill>
+        <p:spPr>
+          <a:xfrm>
+            <a:off x="10202810" y="3700000"/>
+            <a:ext cx="1030000" cy="1030000"/>
+          </a:xfrm>
+          <a:prstGeom prst="rect">
+            <a:avLst/>
+          </a:prstGeom>
+          <a:ln w="6350">
+            <a:solidFill>
+              <a:srgbClr val="D9D9D9"/>
+            </a:solidFill>
+          </a:ln>
+        </p:spPr>
+      </p:pic>
+      <p:sp>
+        <p:nvSpPr>
+          <p:cNvPr id="33" name="Підпис QR"/>
+          <p:cNvSpPr/>
+          <p:nvPr/>
+        </p:nvSpPr>
+        <p:spPr>
+          <a:xfrm>
+            <a:off x="10202810" y="4770000"/>
+            <a:ext cx="1030000" cy="230000"/>
+          </a:xfrm>
+          <a:prstGeom prst="rect">
+            <a:avLst/>
+          </a:prstGeom>
+          <a:noFill/>
+          <a:ln w="0">
+            <a:noFill/>
+          </a:ln>
+        </p:spPr>
+        <p:style>
+          <a:lnRef idx="0"/>
+          <a:fillRef idx="0"/>
+          <a:effectRef idx="0"/>
+          <a:fontRef idx="minor"/>
+        </p:style>
+        <p:txBody>
+          <a:bodyPr lIns="0" tIns="0" rIns="0" bIns="0" anchor="t">
+            <a:noAutofit/>
+          </a:bodyPr>
+          <a:p>
+            <a:pPr algn="ctr"/>
+            <a:r>
+              <a:rPr lang="en-US" sz="900" b="1" u="none" strike="noStrike">
+                <a:solidFill>
+                  <a:srgbClr val="FF0000"/>
+                </a:solidFill>
+                <a:effectLst/>
+                <a:uFillTx/>
+                <a:latin typeface="Nunito Sans"/>
+                <a:ea typeface="Nunito Sans"/>
+                <a:hlinkClick r:id="rId7"/>
+              </a:rPr>
+              <a:t>Video Demo</a:t>
+            </a:r>
+            <a:endParaRPr lang="en-US" sz="900" b="0" u="none" strike="noStrike">
+              <a:solidFill>
+                <a:srgbClr val="000000"/>
+              </a:solidFill>
+              <a:effectLst/>
+              <a:uFillTx/>
+              <a:latin typeface="Arial"/>
+            </a:endParaRPr>
+          </a:p>
+        </p:txBody>
+      </p:sp>
+      <p:sp>
+        <p:nvSpPr>
+          <p:cNvPr id="34" name="Підпис колажу"/>
+          <p:cNvSpPr/>
+          <p:nvPr/>
+        </p:nvSpPr>
+        <p:spPr>
+          <a:xfrm>
+            <a:off x="7716000" y="5050080"/>
+            <a:ext cx="3663120" cy="219240"/>
+          </a:xfrm>
+          <a:prstGeom prst="rect">
+            <a:avLst/>
+          </a:prstGeom>
+          <a:noFill/>
+          <a:ln w="0">
+            <a:noFill/>
+          </a:ln>
+        </p:spPr>
+        <p:style>
+          <a:lnRef idx="0"/>
+          <a:fillRef idx="0"/>
+          <a:effectRef idx="0"/>
+          <a:fontRef idx="minor"/>
+        </p:style>
+        <p:txBody>
+          <a:bodyPr wrap="square" lIns="0" tIns="0" rIns="0" bIns="0" anchor="t">
+            <a:noAutofit/>
+          </a:bodyPr>
+          <a:p>
+            <a:pPr>
+              <a:lnSpc>
+                <a:spcPct val="120000"/>
+              </a:lnSpc>
+            </a:pPr>
+            <a:r>
+              <a:rPr lang="en-US" sz="900" b="0" i="1" u="none" strike="noStrike">
+                <a:solidFill>
+                  <a:srgbClr val="6B6F76"/>
+                </a:solidFill>
+                <a:effectLst/>
+                <a:uFillTx/>
+                <a:latin typeface="Nunito Sans"/>
+                <a:ea typeface="Arial"/>
+              </a:rPr>
+              <a:t>гімбал AIM з лазером і вікно eye-app</a:t>
+            </a:r>
+            <a:endParaRPr lang="en-US" sz="900" b="0" u="none" strike="noStrike">
               <a:solidFill>
                 <a:srgbClr val="000000"/>
               </a:solidFill>

--- a/workshop-7-final_project/docs/assestment/presentation/Laser Gimbal with Camera Tracking on ESP32-S3.pptx
+++ b/workshop-7-final_project/docs/assestment/presentation/Laser Gimbal with Camera Tracking on ESP32-S3.pptx
@@ -9401,6 +9401,56 @@
                 <a:latin typeface="Nunito Sans"/>
                 <a:ea typeface="Arial"/>
               </a:rPr>
+              <a:t> · </a:t>
+            </a:r>
+            <a:r>
+              <a:rPr lang="en-US" sz="800" b="0" i="1" u="sng" strike="noStrike">
+                <a:solidFill>
+                  <a:srgbClr val="0563C1"/>
+                </a:solidFill>
+                <a:effectLst/>
+                <a:uFillTx/>
+                <a:latin typeface="Nunito Sans"/>
+                <a:ea typeface="Arial"/>
+                <a:hlinkClick r:id="rId8"/>
+              </a:rPr>
+              <a:t>esp.log</a:t>
+            </a:r>
+            <a:r>
+              <a:rPr lang="en-US" sz="800" b="0" i="1" u="none" strike="noStrike">
+                <a:solidFill>
+                  <a:srgbClr val="6B6F76"/>
+                </a:solidFill>
+                <a:effectLst/>
+                <a:uFillTx/>
+                <a:latin typeface="Nunito Sans"/>
+                <a:ea typeface="Arial"/>
+              </a:rPr>
+              <a:t> · </a:t>
+            </a:r>
+            <a:r>
+              <a:rPr lang="en-US" sz="800" b="0" i="1" u="sng" strike="noStrike">
+                <a:solidFill>
+                  <a:srgbClr val="0563C1"/>
+                </a:solidFill>
+                <a:effectLst/>
+                <a:uFillTx/>
+                <a:latin typeface="Nunito Sans"/>
+                <a:ea typeface="Arial"/>
+                <a:hlinkClick r:id="rId9"/>
+              </a:rPr>
+              <a:t>tracker.log</a:t>
+            </a:r>
+            <a:r>
+              <a:rPr lang="en-US" sz="800" b="0" i="1" u="none" strike="noStrike">
+                <a:solidFill>
+                  <a:srgbClr val="6B6F76"/>
+                </a:solidFill>
+                <a:effectLst/>
+                <a:uFillTx/>
+                <a:latin typeface="Nunito Sans"/>
+                <a:ea typeface="Arial"/>
+              </a:rPr>
               <a:t> · стенд AIM (ESP32-S3) та eye-app під час наведення на ціль</a:t>
             </a:r>
             <a:endParaRPr lang="en-US" sz="800" b="0" u="none" strike="noStrike">

--- a/workshop-7-final_project/docs/assestment/presentation/Laser Gimbal with Camera Tracking on ESP32-S3.pptx
+++ b/workshop-7-final_project/docs/assestment/presentation/Laser Gimbal with Camera Tracking on ESP32-S3.pptx
@@ -14068,6 +14068,150 @@
           </a:p>
         </p:txBody>
       </p:sp>
+      <p:sp>
+        <p:nvSpPr>
+          <p:cNvPr id="69" name="Google Shape;107;p6"/>
+          <p:cNvSpPr/>
+          <p:nvPr/>
+        </p:nvSpPr>
+        <p:spPr>
+          <a:xfrm>
+            <a:off x="7112280" y="5647680"/>
+            <a:ext cx="4266840" cy="363600"/>
+          </a:xfrm>
+          <a:prstGeom prst="roundRect">
+            <a:avLst>
+              <a:gd name="adj" fmla="val 24394"/>
+            </a:avLst>
+          </a:prstGeom>
+          <a:solidFill>
+            <a:srgbClr val="FCF2B5"/>
+          </a:solidFill>
+          <a:ln w="0">
+            <a:noFill/>
+          </a:ln>
+        </p:spPr>
+        <p:style>
+          <a:lnRef idx="0"/>
+          <a:fillRef idx="0"/>
+          <a:effectRef idx="0"/>
+          <a:fontRef idx="minor"/>
+        </p:style>
+        <p:txBody>
+          <a:bodyPr lIns="90000" tIns="91440" rIns="90000" bIns="91440" anchor="ctr">
+            <a:noAutofit/>
+          </a:bodyPr>
+          <a:p>
+            <a:pPr/>
+            <a:endParaRPr lang="en-US" sz="1400" b="0" u="none" strike="noStrike">
+              <a:solidFill>
+                <a:srgbClr val="000000"/>
+              </a:solidFill>
+              <a:effectLst/>
+              <a:uFillTx/>
+              <a:latin typeface="Arial"/>
+            </a:endParaRPr>
+          </a:p>
+        </p:txBody>
+      </p:sp>
+      <p:sp>
+        <p:nvSpPr>
+          <p:cNvPr id="70" name="Google Shape;108;p6"/>
+          <p:cNvSpPr/>
+          <p:nvPr/>
+        </p:nvSpPr>
+        <p:spPr>
+          <a:xfrm>
+            <a:off x="7264560" y="5736600"/>
+            <a:ext cx="3916560" cy="211320"/>
+          </a:xfrm>
+          <a:prstGeom prst="rect">
+            <a:avLst/>
+          </a:prstGeom>
+          <a:noFill/>
+          <a:ln w="0">
+            <a:noFill/>
+          </a:ln>
+        </p:spPr>
+        <p:style>
+          <a:lnRef idx="0"/>
+          <a:fillRef idx="0"/>
+          <a:effectRef idx="0"/>
+          <a:fontRef idx="minor"/>
+        </p:style>
+        <p:txBody>
+          <a:bodyPr lIns="0" tIns="0" rIns="0" bIns="0" anchor="t">
+            <a:normAutofit lnSpcReduction="9999"/>
+          </a:bodyPr>
+          <a:p>
+            <a:pPr>
+              <a:lnSpc>
+                <a:spcPct val="140000"/>
+              </a:lnSpc>
+              <a:tabLst>
+                <a:tab pos="0" algn="l"/>
+              </a:tabLst>
+            </a:pPr>
+            <a:r>
+              <a:rPr lang="en-US" sz="1050" b="0" u="none" strike="noStrike">
+                <a:solidFill>
+                  <a:srgbClr val="232323"/>
+                </a:solidFill>
+                <a:effectLst/>
+                <a:uFillTx/>
+                <a:latin typeface="Nunito Sans"/>
+                <a:ea typeface="Nunito Sans"/>
+              </a:rPr>
+              <a:t>Watchdog: ~1с → </a:t>
+            </a:r>
+            <a:r>
+              <a:rPr lang="en-US" sz="1050" b="1" u="none" strike="noStrike">
+                <a:solidFill>
+                  <a:srgbClr val="232323"/>
+                </a:solidFill>
+                <a:effectLst/>
+                <a:uFillTx/>
+                <a:latin typeface="Nunito Sans"/>
+                <a:ea typeface="Nunito Sans"/>
+              </a:rPr>
+              <a:t>panic-reset</a:t>
+            </a:r>
+            <a:r>
+              <a:rPr lang="en-US" sz="1050" b="0" u="none" strike="noStrike">
+                <a:solidFill>
+                  <a:srgbClr val="232323"/>
+                </a:solidFill>
+                <a:effectLst/>
+                <a:uFillTx/>
+                <a:latin typeface="Nunito Sans"/>
+                <a:ea typeface="Nunito Sans"/>
+              </a:rPr>
+              <a:t>, канал → NONE. </a:t>
+            </a:r>
+            <a:r>
+              <a:rPr lang="en-US" sz="800" b="0" i="1" u="sng" strike="noStrike">
+                <a:solidFill>
+                  <a:srgbClr val="0563C1"/>
+                </a:solidFill>
+                <a:effectLst/>
+                <a:uFillTx/>
+                <a:latin typeface="Nunito Sans"/>
+                <a:ea typeface="Arial"/>
+                <a:hlinkClick r:id="rId6"/>
+              </a:rPr>
+              <a:t>main.cpp:161</a:t>
+            </a:r>
+            <a:endParaRPr lang="en-US" sz="1050" b="0" u="none" strike="noStrike">
+              <a:solidFill>
+                <a:srgbClr val="000000"/>
+              </a:solidFill>
+              <a:effectLst/>
+              <a:uFillTx/>
+              <a:latin typeface="Arial"/>
+            </a:endParaRPr>
+          </a:p>
+        </p:txBody>
+      </p:sp>
     </p:spTree>
   </p:cSld>
   <mc:AlternateContent>

--- a/workshop-7-final_project/docs/assestment/presentation/Laser Gimbal with Camera Tracking on ESP32-S3.pptx
+++ b/workshop-7-final_project/docs/assestment/presentation/Laser Gimbal with Camera Tracking on ESP32-S3.pptx
@@ -17277,6 +17277,237 @@
                   </a:tcPr>
                 </a:tc>
               </a:tr>
+              <a:tr h="398520">
+                <a:tc>
+                  <a:txBody>
+                    <a:bodyPr lIns="126720" tIns="0" bIns="0" anchor="ctr">
+                      <a:noAutofit/>
+                    </a:bodyPr>
+                    <a:p>
+                      <a:pPr>
+                        <a:lnSpc>
+                          <a:spcPct val="100000"/>
+                        </a:lnSpc>
+                      </a:pPr>
+                      <a:r>
+                        <a:rPr lang="en-US" sz="1100" b="0" u="none" strike="noStrike">
+                          <a:solidFill>
+                            <a:srgbClr val="8998A9"/>
+                          </a:solidFill>
+                          <a:effectLst/>
+                          <a:uFillTx/>
+                          <a:latin typeface="Nunito Sans"/>
+                          <a:ea typeface="Arial"/>
+                        </a:rPr>
+                        <a:t>9</a:t>
+                      </a:r>
+                      <a:endParaRPr lang="en-US" sz="1100" b="0" u="none" strike="noStrike">
+                        <a:solidFill>
+                          <a:srgbClr val="000000"/>
+                        </a:solidFill>
+                        <a:effectLst/>
+                        <a:uFillTx/>
+                        <a:latin typeface="Arial"/>
+                      </a:endParaRPr>
+                    </a:p>
+                  </a:txBody>
+                  <a:tcPr anchor="ctr" marL="126720" marR="91440" marT="0" marB="0">
+                    <a:lnL w="12240">
+                      <a:noFill/>
+                      <a:prstDash val="solid"/>
+                    </a:lnL>
+                    <a:lnR w="12240">
+                      <a:noFill/>
+                      <a:prstDash val="solid"/>
+                    </a:lnR>
+                    <a:lnT w="12240">
+                      <a:noFill/>
+                      <a:prstDash val="solid"/>
+                    </a:lnT>
+                    <a:lnB w="6480">
+                      <a:solidFill>
+                        <a:srgbClr val="D9D9D9"/>
+                      </a:solidFill>
+                      <a:prstDash val="solid"/>
+                    </a:lnB>
+                    <a:solidFill>
+                      <a:srgbClr val="FFFFFF"/>
+                    </a:solidFill>
+                  </a:tcPr>
+                </a:tc>
+                <a:tc>
+                  <a:txBody>
+                    <a:bodyPr lIns="0" tIns="0" bIns="0" anchor="ctr">
+                      <a:noAutofit/>
+                    </a:bodyPr>
+                    <a:p>
+                      <a:pPr>
+                        <a:lnSpc>
+                          <a:spcPct val="100000"/>
+                        </a:lnSpc>
+                      </a:pPr>
+                      <a:r>
+                        <a:rPr lang="en-US" sz="1100" b="0" u="none" strike="noStrike">
+                          <a:solidFill>
+                            <a:srgbClr val="232323"/>
+                          </a:solidFill>
+                          <a:effectLst/>
+                          <a:uFillTx/>
+                          <a:latin typeface="Nunito Sans"/>
+                          <a:ea typeface="Arial"/>
+                        </a:rPr>
+                        <a:t>Анти-windup: умовне інтегрування + обмеження інтегральної складової</a:t>
+                      </a:r>
+                      <a:endParaRPr lang="en-US" sz="1100" b="0" u="none" strike="noStrike">
+                        <a:solidFill>
+                          <a:srgbClr val="000000"/>
+                        </a:solidFill>
+                        <a:effectLst/>
+                        <a:uFillTx/>
+                        <a:latin typeface="Arial"/>
+                      </a:endParaRPr>
+                    </a:p>
+                  </a:txBody>
+                  <a:tcPr anchor="ctr" marL="0" marR="91440" marT="0" marB="0">
+                    <a:lnL w="12240">
+                      <a:noFill/>
+                      <a:prstDash val="solid"/>
+                    </a:lnL>
+                    <a:lnR w="12240">
+                      <a:noFill/>
+                      <a:prstDash val="solid"/>
+                    </a:lnR>
+                    <a:lnT w="12240">
+                      <a:noFill/>
+                      <a:prstDash val="solid"/>
+                    </a:lnT>
+                    <a:lnB w="6480">
+                      <a:solidFill>
+                        <a:srgbClr val="D9D9D9"/>
+                      </a:solidFill>
+                      <a:prstDash val="solid"/>
+                    </a:lnB>
+                    <a:solidFill>
+                      <a:srgbClr val="FFFFFF"/>
+                    </a:solidFill>
+                  </a:tcPr>
+                </a:tc>
+                <a:tc>
+                  <a:txBody>
+                    <a:bodyPr lIns="0" tIns="0" bIns="0" anchor="ctr">
+                      <a:noAutofit/>
+                    </a:bodyPr>
+                    <a:p>
+                      <a:pPr>
+                        <a:lnSpc>
+                          <a:spcPct val="100000"/>
+                        </a:lnSpc>
+                      </a:pPr>
+                      <a:r>
+                        <a:rPr lang="en-US" sz="1100" b="0" u="none" strike="noStrike">
+                          <a:solidFill>
+                            <a:srgbClr val="414C58"/>
+                          </a:solidFill>
+                          <a:effectLst/>
+                          <a:uFillTx/>
+                          <a:latin typeface="Nunito Sans"/>
+                          <a:ea typeface="Arial"/>
+                        </a:rPr>
+                        <a:t>Інтеграл накопичується лише коли це не заглиблює вже насичений вихід далі в упор</a:t>
+                      </a:r>
+                      <a:endParaRPr lang="en-US" sz="1100" b="0" u="none" strike="noStrike">
+                        <a:solidFill>
+                          <a:srgbClr val="000000"/>
+                        </a:solidFill>
+                        <a:effectLst/>
+                        <a:uFillTx/>
+                        <a:latin typeface="Arial"/>
+                      </a:endParaRPr>
+                    </a:p>
+                  </a:txBody>
+                  <a:tcPr anchor="ctr" marL="0" marR="91440" marT="0" marB="0">
+                    <a:lnL w="12240">
+                      <a:noFill/>
+                      <a:prstDash val="solid"/>
+                    </a:lnL>
+                    <a:lnR w="12240">
+                      <a:noFill/>
+                      <a:prstDash val="solid"/>
+                    </a:lnR>
+                    <a:lnT w="12240">
+                      <a:noFill/>
+                      <a:prstDash val="solid"/>
+                    </a:lnT>
+                    <a:lnB w="6480">
+                      <a:solidFill>
+                        <a:srgbClr val="D9D9D9"/>
+                      </a:solidFill>
+                      <a:prstDash val="solid"/>
+                    </a:lnB>
+                    <a:solidFill>
+                      <a:srgbClr val="FFFFFF"/>
+                    </a:solidFill>
+                  </a:tcPr>
+                </a:tc>
+                <a:tc>
+                  <a:txBody>
+                    <a:bodyPr lIns="0" tIns="0" bIns="0" anchor="ctr">
+                      <a:noAutofit/>
+                    </a:bodyPr>
+                    <a:p>
+                      <a:pPr>
+                        <a:lnSpc>
+                          <a:spcPct val="100000"/>
+                        </a:lnSpc>
+                      </a:pPr>
+                      <a:r>
+                        <a:rPr lang="en-US" sz="1100" b="0" u="sng" strike="noStrike">
+                          <a:solidFill>
+                            <a:srgbClr val="0563C1"/>
+                          </a:solidFill>
+                          <a:effectLst/>
+                          <a:uFillTx/>
+                          <a:latin typeface="Nunito Sans"/>
+                          <a:ea typeface="Arial"/>
+                          <a:hlinkClick r:id="rId17"/>
+                        </a:rPr>
+                        <a:t>PositionalPid.hpp</a:t>
+                      </a:r>
+                      <a:endParaRPr lang="en-US" sz="1100" b="0" u="none" strike="noStrike">
+                        <a:solidFill>
+                          <a:srgbClr val="000000"/>
+                        </a:solidFill>
+                        <a:effectLst/>
+                        <a:uFillTx/>
+                        <a:latin typeface="Arial"/>
+                      </a:endParaRPr>
+                    </a:p>
+                  </a:txBody>
+                  <a:tcPr anchor="ctr" marL="0" marR="91440" marT="0" marB="0">
+                    <a:lnL w="12240">
+                      <a:noFill/>
+                      <a:prstDash val="solid"/>
+                    </a:lnL>
+                    <a:lnR w="12240">
+                      <a:noFill/>
+                      <a:prstDash val="solid"/>
+                    </a:lnR>
+                    <a:lnT w="12240">
+                      <a:noFill/>
+                      <a:prstDash val="solid"/>
+                    </a:lnT>
+                    <a:lnB w="6480">
+                      <a:solidFill>
+                        <a:srgbClr val="D9D9D9"/>
+                      </a:solidFill>
+                      <a:prstDash val="solid"/>
+                    </a:lnB>
+                    <a:solidFill>
+                      <a:srgbClr val="FFFFFF"/>
+                    </a:solidFill>
+                  </a:tcPr>
+                </a:tc>
+              </a:tr>
             </a:tbl>
           </a:graphicData>
         </a:graphic>
